--- a/Presentation/presentation.pptx
+++ b/Presentation/presentation.pptx
@@ -1,26 +1,570 @@
 
 <file path=ppt/presentation.xml><?xml version="1.0" encoding="utf-8"?>
-<p:presentation xmlns:a="http://schemas.openxmlformats.org/drawingml/2006/main" xmlns:p="http://schemas.openxmlformats.org/presentationml/2006/main" xmlns:r="http://schemas.openxmlformats.org/officeDocument/2006/relationships" xmlns:p14="http://schemas.microsoft.com/office/powerpoint/2010/main" xmlns:p15="http://schemas.microsoft.com/office/powerpoint/2012/main" xmlns:mc="http://schemas.openxmlformats.org/markup-compatibility/2006">
+<p:presentation xmlns:a="http://schemas.openxmlformats.org/drawingml/2006/main" xmlns:r="http://schemas.openxmlformats.org/officeDocument/2006/relationships" xmlns:p="http://schemas.openxmlformats.org/presentationml/2006/main">
   <p:sldMasterIdLst>
-    <p:sldMasterId id="2147483648" r:id="rId2"/>
+    <p:sldMasterId id="2147483648" r:id="rId4"/>
   </p:sldMasterIdLst>
   <p:notesMasterIdLst>
-    <p:notesMasterId r:id="rId3"/>
+    <p:notesMasterId r:id="rId13"/>
   </p:notesMasterIdLst>
   <p:sldIdLst>
-    <p:sldId id="256" r:id="rId4"/>
-    <p:sldId id="257" r:id="rId5"/>
-    <p:sldId id="258" r:id="rId6"/>
-    <p:sldId id="259" r:id="rId7"/>
-    <p:sldId id="260" r:id="rId8"/>
+    <p:sldId id="256" r:id="rId5"/>
+    <p:sldId id="257" r:id="rId6"/>
+    <p:sldId id="258" r:id="rId7"/>
+    <p:sldId id="259" r:id="rId8"/>
+    <p:sldId id="261" r:id="rId9"/>
+    <p:sldId id="262" r:id="rId10"/>
+    <p:sldId id="263" r:id="rId11"/>
+    <p:sldId id="260" r:id="rId12"/>
   </p:sldIdLst>
-  <p:sldSz cx="9144000" cy="5143500"/>
+  <p:sldSz cx="9144000" cy="5143500" type="screen16x9"/>
   <p:notesSz cx="5143500" cy="9144000"/>
+  <p:defaultTextStyle>
+    <a:defPPr>
+      <a:defRPr lang="de-DE"/>
+    </a:defPPr>
+    <a:lvl1pPr marL="0" algn="l" defTabSz="914400" rtl="0" eaLnBrk="1" latinLnBrk="0" hangingPunct="1">
+      <a:defRPr sz="1800" kern="1200">
+        <a:solidFill>
+          <a:schemeClr val="tx1"/>
+        </a:solidFill>
+        <a:latin typeface="+mn-lt"/>
+        <a:ea typeface="+mn-ea"/>
+        <a:cs typeface="+mn-cs"/>
+      </a:defRPr>
+    </a:lvl1pPr>
+    <a:lvl2pPr marL="457200" algn="l" defTabSz="914400" rtl="0" eaLnBrk="1" latinLnBrk="0" hangingPunct="1">
+      <a:defRPr sz="1800" kern="1200">
+        <a:solidFill>
+          <a:schemeClr val="tx1"/>
+        </a:solidFill>
+        <a:latin typeface="+mn-lt"/>
+        <a:ea typeface="+mn-ea"/>
+        <a:cs typeface="+mn-cs"/>
+      </a:defRPr>
+    </a:lvl2pPr>
+    <a:lvl3pPr marL="914400" algn="l" defTabSz="914400" rtl="0" eaLnBrk="1" latinLnBrk="0" hangingPunct="1">
+      <a:defRPr sz="1800" kern="1200">
+        <a:solidFill>
+          <a:schemeClr val="tx1"/>
+        </a:solidFill>
+        <a:latin typeface="+mn-lt"/>
+        <a:ea typeface="+mn-ea"/>
+        <a:cs typeface="+mn-cs"/>
+      </a:defRPr>
+    </a:lvl3pPr>
+    <a:lvl4pPr marL="1371600" algn="l" defTabSz="914400" rtl="0" eaLnBrk="1" latinLnBrk="0" hangingPunct="1">
+      <a:defRPr sz="1800" kern="1200">
+        <a:solidFill>
+          <a:schemeClr val="tx1"/>
+        </a:solidFill>
+        <a:latin typeface="+mn-lt"/>
+        <a:ea typeface="+mn-ea"/>
+        <a:cs typeface="+mn-cs"/>
+      </a:defRPr>
+    </a:lvl4pPr>
+    <a:lvl5pPr marL="1828800" algn="l" defTabSz="914400" rtl="0" eaLnBrk="1" latinLnBrk="0" hangingPunct="1">
+      <a:defRPr sz="1800" kern="1200">
+        <a:solidFill>
+          <a:schemeClr val="tx1"/>
+        </a:solidFill>
+        <a:latin typeface="+mn-lt"/>
+        <a:ea typeface="+mn-ea"/>
+        <a:cs typeface="+mn-cs"/>
+      </a:defRPr>
+    </a:lvl5pPr>
+    <a:lvl6pPr marL="2286000" algn="l" defTabSz="914400" rtl="0" eaLnBrk="1" latinLnBrk="0" hangingPunct="1">
+      <a:defRPr sz="1800" kern="1200">
+        <a:solidFill>
+          <a:schemeClr val="tx1"/>
+        </a:solidFill>
+        <a:latin typeface="+mn-lt"/>
+        <a:ea typeface="+mn-ea"/>
+        <a:cs typeface="+mn-cs"/>
+      </a:defRPr>
+    </a:lvl6pPr>
+    <a:lvl7pPr marL="2743200" algn="l" defTabSz="914400" rtl="0" eaLnBrk="1" latinLnBrk="0" hangingPunct="1">
+      <a:defRPr sz="1800" kern="1200">
+        <a:solidFill>
+          <a:schemeClr val="tx1"/>
+        </a:solidFill>
+        <a:latin typeface="+mn-lt"/>
+        <a:ea typeface="+mn-ea"/>
+        <a:cs typeface="+mn-cs"/>
+      </a:defRPr>
+    </a:lvl7pPr>
+    <a:lvl8pPr marL="3200400" algn="l" defTabSz="914400" rtl="0" eaLnBrk="1" latinLnBrk="0" hangingPunct="1">
+      <a:defRPr sz="1800" kern="1200">
+        <a:solidFill>
+          <a:schemeClr val="tx1"/>
+        </a:solidFill>
+        <a:latin typeface="+mn-lt"/>
+        <a:ea typeface="+mn-ea"/>
+        <a:cs typeface="+mn-cs"/>
+      </a:defRPr>
+    </a:lvl8pPr>
+    <a:lvl9pPr marL="3657600" algn="l" defTabSz="914400" rtl="0" eaLnBrk="1" latinLnBrk="0" hangingPunct="1">
+      <a:defRPr sz="1800" kern="1200">
+        <a:solidFill>
+          <a:schemeClr val="tx1"/>
+        </a:solidFill>
+        <a:latin typeface="+mn-lt"/>
+        <a:ea typeface="+mn-ea"/>
+        <a:cs typeface="+mn-cs"/>
+      </a:defRPr>
+    </a:lvl9pPr>
+  </p:defaultTextStyle>
 </p:presentation>
 </file>
 
+<file path=ppt/revisionInfo.xml><?xml version="1.0" encoding="utf-8"?>
+<p1510:revInfo xmlns:a="http://schemas.openxmlformats.org/drawingml/2006/main" xmlns:r="http://schemas.openxmlformats.org/officeDocument/2006/relationships" xmlns:p1510="http://schemas.microsoft.com/office/powerpoint/2015/10/main">
+  <p1510:revLst>
+    <p1510:client id="{CAC2E89F-893E-4422-3D80-EC24371BBDEE}" v="715" dt="2026-04-01T21:00:46.362"/>
+    <p1510:client id="{F1A4819E-55D9-4223-A6F2-1D6D816F0F24}" v="374" dt="2026-04-01T20:26:36.696"/>
+  </p1510:revLst>
+</p1510:revInfo>
+</file>
+
 <file path=ppt/notesMasters/notesMaster1.xml><?xml version="1.0" encoding="utf-8"?>
-<p:notesMaster xmlns:a="http://schemas.openxmlformats.org/drawingml/2006/main" xmlns:p="http://schemas.openxmlformats.org/presentationml/2006/main" xmlns:r="http://schemas.openxmlformats.org/officeDocument/2006/relationships" xmlns:p14="http://schemas.microsoft.com/office/powerpoint/2010/main" xmlns:p15="http://schemas.microsoft.com/office/powerpoint/2012/main" xmlns:mc="http://schemas.openxmlformats.org/markup-compatibility/2006">
+<p:notesMaster xmlns:a="http://schemas.openxmlformats.org/drawingml/2006/main" xmlns:r="http://schemas.openxmlformats.org/officeDocument/2006/relationships" xmlns:p="http://schemas.openxmlformats.org/presentationml/2006/main">
+  <p:cSld>
+    <p:bg>
+      <p:bgRef idx="1001">
+        <a:schemeClr val="bg1"/>
+      </p:bgRef>
+    </p:bg>
+    <p:spTree>
+      <p:nvGrpSpPr>
+        <p:cNvPr id="1" name=""/>
+        <p:cNvGrpSpPr/>
+        <p:nvPr/>
+      </p:nvGrpSpPr>
+      <p:grpSpPr>
+        <a:xfrm>
+          <a:off x="0" y="0"/>
+          <a:ext cx="0" cy="0"/>
+          <a:chOff x="0" y="0"/>
+          <a:chExt cx="0" cy="0"/>
+        </a:xfrm>
+      </p:grpSpPr>
+      <p:sp>
+        <p:nvSpPr>
+          <p:cNvPr id="2" name="PlaceHolder 1"/>
+          <p:cNvSpPr>
+            <a:spLocks noGrp="1" noRot="1" noChangeAspect="1"/>
+          </p:cNvSpPr>
+          <p:nvPr>
+            <p:ph type="sldImg"/>
+          </p:nvPr>
+        </p:nvSpPr>
+        <p:spPr>
+          <a:xfrm>
+            <a:off x="216000" y="812520"/>
+            <a:ext cx="7127280" cy="4008960"/>
+          </a:xfrm>
+          <a:prstGeom prst="rect">
+            <a:avLst/>
+          </a:prstGeom>
+          <a:noFill/>
+          <a:ln w="0">
+            <a:noFill/>
+          </a:ln>
+        </p:spPr>
+        <p:txBody>
+          <a:bodyPr lIns="0" tIns="0" rIns="0" bIns="0" anchor="ctr">
+            <a:noAutofit/>
+          </a:bodyPr>
+          <a:lstStyle/>
+          <a:p>
+            <a:r>
+              <a:rPr lang="en-GB" sz="1800" b="0" u="none" strike="noStrike">
+                <a:solidFill>
+                  <a:schemeClr val="dk1"/>
+                </a:solidFill>
+                <a:effectLst/>
+                <a:uFillTx/>
+                <a:latin typeface="Calibri"/>
+              </a:rPr>
+              <a:t>Click to move the slide</a:t>
+            </a:r>
+          </a:p>
+        </p:txBody>
+      </p:sp>
+      <p:sp>
+        <p:nvSpPr>
+          <p:cNvPr id="3" name="PlaceHolder 2"/>
+          <p:cNvSpPr>
+            <a:spLocks noGrp="1"/>
+          </p:cNvSpPr>
+          <p:nvPr>
+            <p:ph type="body"/>
+          </p:nvPr>
+        </p:nvSpPr>
+        <p:spPr>
+          <a:xfrm>
+            <a:off x="756000" y="5078520"/>
+            <a:ext cx="6047640" cy="4811040"/>
+          </a:xfrm>
+          <a:prstGeom prst="rect">
+            <a:avLst/>
+          </a:prstGeom>
+          <a:noFill/>
+          <a:ln w="0">
+            <a:noFill/>
+          </a:ln>
+        </p:spPr>
+        <p:txBody>
+          <a:bodyPr lIns="0" tIns="0" rIns="0" bIns="0" anchor="t">
+            <a:noAutofit/>
+          </a:bodyPr>
+          <a:lstStyle/>
+          <a:p>
+            <a:pPr indent="0">
+              <a:buNone/>
+            </a:pPr>
+            <a:r>
+              <a:rPr lang="en-GB" sz="2000" b="0" u="none" strike="noStrike">
+                <a:solidFill>
+                  <a:srgbClr val="000000"/>
+                </a:solidFill>
+                <a:effectLst/>
+                <a:uFillTx/>
+                <a:latin typeface="Arial"/>
+              </a:rPr>
+              <a:t>Click to edit the notes format</a:t>
+            </a:r>
+          </a:p>
+        </p:txBody>
+      </p:sp>
+      <p:sp>
+        <p:nvSpPr>
+          <p:cNvPr id="4" name="PlaceHolder 3"/>
+          <p:cNvSpPr>
+            <a:spLocks noGrp="1"/>
+          </p:cNvSpPr>
+          <p:nvPr>
+            <p:ph type="hdr"/>
+          </p:nvPr>
+        </p:nvSpPr>
+        <p:spPr>
+          <a:xfrm>
+            <a:off x="0" y="0"/>
+            <a:ext cx="3280680" cy="534240"/>
+          </a:xfrm>
+          <a:prstGeom prst="rect">
+            <a:avLst/>
+          </a:prstGeom>
+          <a:noFill/>
+          <a:ln w="0">
+            <a:noFill/>
+          </a:ln>
+        </p:spPr>
+        <p:txBody>
+          <a:bodyPr lIns="0" tIns="0" rIns="0" bIns="0" anchor="t">
+            <a:noAutofit/>
+          </a:bodyPr>
+          <a:lstStyle/>
+          <a:p>
+            <a:pPr indent="0">
+              <a:buNone/>
+            </a:pPr>
+            <a:r>
+              <a:rPr lang="en-GB" sz="1400" b="0" u="none" strike="noStrike">
+                <a:solidFill>
+                  <a:srgbClr val="000000"/>
+                </a:solidFill>
+                <a:effectLst/>
+                <a:uFillTx/>
+                <a:latin typeface="Times New Roman"/>
+              </a:rPr>
+              <a:t>&lt;header&gt;</a:t>
+            </a:r>
+          </a:p>
+        </p:txBody>
+      </p:sp>
+      <p:sp>
+        <p:nvSpPr>
+          <p:cNvPr id="5" name="PlaceHolder 4"/>
+          <p:cNvSpPr>
+            <a:spLocks noGrp="1"/>
+          </p:cNvSpPr>
+          <p:nvPr>
+            <p:ph type="dt" idx="1"/>
+          </p:nvPr>
+        </p:nvSpPr>
+        <p:spPr>
+          <a:xfrm>
+            <a:off x="4278960" y="0"/>
+            <a:ext cx="3280680" cy="534240"/>
+          </a:xfrm>
+          <a:prstGeom prst="rect">
+            <a:avLst/>
+          </a:prstGeom>
+          <a:noFill/>
+          <a:ln w="0">
+            <a:noFill/>
+          </a:ln>
+        </p:spPr>
+        <p:txBody>
+          <a:bodyPr lIns="0" tIns="0" rIns="0" bIns="0" anchor="t">
+            <a:noAutofit/>
+          </a:bodyPr>
+          <a:lstStyle>
+            <a:lvl1pPr indent="0" algn="r">
+              <a:buNone/>
+              <a:defRPr lang="en-GB" sz="1400" b="0" u="none" strike="noStrike">
+                <a:solidFill>
+                  <a:srgbClr val="000000"/>
+                </a:solidFill>
+                <a:effectLst/>
+                <a:uFillTx/>
+                <a:latin typeface="Times New Roman"/>
+              </a:defRPr>
+            </a:lvl1pPr>
+          </a:lstStyle>
+          <a:p>
+            <a:pPr indent="0" algn="r">
+              <a:buNone/>
+            </a:pPr>
+            <a:r>
+              <a:rPr lang="en-GB" sz="1400" b="0" u="none" strike="noStrike">
+                <a:solidFill>
+                  <a:srgbClr val="000000"/>
+                </a:solidFill>
+                <a:effectLst/>
+                <a:uFillTx/>
+                <a:latin typeface="Times New Roman"/>
+              </a:rPr>
+              <a:t>&lt;date/time&gt;</a:t>
+            </a:r>
+          </a:p>
+        </p:txBody>
+      </p:sp>
+      <p:sp>
+        <p:nvSpPr>
+          <p:cNvPr id="6" name="PlaceHolder 5"/>
+          <p:cNvSpPr>
+            <a:spLocks noGrp="1"/>
+          </p:cNvSpPr>
+          <p:nvPr>
+            <p:ph type="ftr" idx="2"/>
+          </p:nvPr>
+        </p:nvSpPr>
+        <p:spPr>
+          <a:xfrm>
+            <a:off x="0" y="10157400"/>
+            <a:ext cx="3280680" cy="534240"/>
+          </a:xfrm>
+          <a:prstGeom prst="rect">
+            <a:avLst/>
+          </a:prstGeom>
+          <a:noFill/>
+          <a:ln w="0">
+            <a:noFill/>
+          </a:ln>
+        </p:spPr>
+        <p:txBody>
+          <a:bodyPr lIns="0" tIns="0" rIns="0" bIns="0" anchor="b">
+            <a:noAutofit/>
+          </a:bodyPr>
+          <a:lstStyle>
+            <a:lvl1pPr indent="0">
+              <a:buNone/>
+              <a:defRPr lang="en-GB" sz="1400" b="0" u="none" strike="noStrike">
+                <a:solidFill>
+                  <a:srgbClr val="000000"/>
+                </a:solidFill>
+                <a:effectLst/>
+                <a:uFillTx/>
+                <a:latin typeface="Times New Roman"/>
+              </a:defRPr>
+            </a:lvl1pPr>
+          </a:lstStyle>
+          <a:p>
+            <a:pPr indent="0">
+              <a:buNone/>
+            </a:pPr>
+            <a:r>
+              <a:rPr lang="en-GB" sz="1400" b="0" u="none" strike="noStrike">
+                <a:solidFill>
+                  <a:srgbClr val="000000"/>
+                </a:solidFill>
+                <a:effectLst/>
+                <a:uFillTx/>
+                <a:latin typeface="Times New Roman"/>
+              </a:rPr>
+              <a:t>&lt;footer&gt;</a:t>
+            </a:r>
+          </a:p>
+        </p:txBody>
+      </p:sp>
+      <p:sp>
+        <p:nvSpPr>
+          <p:cNvPr id="7" name="PlaceHolder 6"/>
+          <p:cNvSpPr>
+            <a:spLocks noGrp="1"/>
+          </p:cNvSpPr>
+          <p:nvPr>
+            <p:ph type="sldNum" idx="3"/>
+          </p:nvPr>
+        </p:nvSpPr>
+        <p:spPr>
+          <a:xfrm>
+            <a:off x="4278960" y="10157400"/>
+            <a:ext cx="3280680" cy="534240"/>
+          </a:xfrm>
+          <a:prstGeom prst="rect">
+            <a:avLst/>
+          </a:prstGeom>
+          <a:noFill/>
+          <a:ln w="0">
+            <a:noFill/>
+          </a:ln>
+        </p:spPr>
+        <p:txBody>
+          <a:bodyPr lIns="0" tIns="0" rIns="0" bIns="0" anchor="b">
+            <a:noAutofit/>
+          </a:bodyPr>
+          <a:lstStyle>
+            <a:lvl1pPr indent="0" algn="r">
+              <a:buNone/>
+              <a:defRPr lang="en-GB" sz="1400" b="0" u="none" strike="noStrike">
+                <a:solidFill>
+                  <a:srgbClr val="000000"/>
+                </a:solidFill>
+                <a:effectLst/>
+                <a:uFillTx/>
+                <a:latin typeface="Times New Roman"/>
+              </a:defRPr>
+            </a:lvl1pPr>
+          </a:lstStyle>
+          <a:p>
+            <a:pPr indent="0" algn="r">
+              <a:buNone/>
+            </a:pPr>
+            <a:fld id="{8EDACC62-D2D7-47E4-B36C-A484761FD6E2}" type="slidenum">
+              <a:rPr lang="en-GB" sz="1400" b="0" u="none" strike="noStrike">
+                <a:solidFill>
+                  <a:srgbClr val="000000"/>
+                </a:solidFill>
+                <a:effectLst/>
+                <a:uFillTx/>
+                <a:latin typeface="Times New Roman"/>
+              </a:rPr>
+              <a:t>‹#›</a:t>
+            </a:fld>
+            <a:endParaRPr lang="en-GB" sz="1400" b="0" u="none" strike="noStrike">
+              <a:solidFill>
+                <a:srgbClr val="000000"/>
+              </a:solidFill>
+              <a:effectLst/>
+              <a:uFillTx/>
+              <a:latin typeface="Times New Roman"/>
+            </a:endParaRPr>
+          </a:p>
+        </p:txBody>
+      </p:sp>
+    </p:spTree>
+  </p:cSld>
+  <p:clrMap bg1="lt1" tx1="dk1" bg2="lt2" tx2="dk2" accent1="accent1" accent2="accent2" accent3="accent3" accent4="accent4" accent5="accent5" accent6="accent6" hlink="hlink" folHlink="folHlink"/>
+  <p:notesStyle>
+    <a:lvl1pPr marL="0" algn="l" defTabSz="914400" rtl="0" eaLnBrk="1" latinLnBrk="0" hangingPunct="1">
+      <a:defRPr sz="1200" kern="1200">
+        <a:solidFill>
+          <a:schemeClr val="tx1"/>
+        </a:solidFill>
+        <a:latin typeface="+mn-lt"/>
+        <a:ea typeface="+mn-ea"/>
+        <a:cs typeface="+mn-cs"/>
+      </a:defRPr>
+    </a:lvl1pPr>
+    <a:lvl2pPr marL="457200" algn="l" defTabSz="914400" rtl="0" eaLnBrk="1" latinLnBrk="0" hangingPunct="1">
+      <a:defRPr sz="1200" kern="1200">
+        <a:solidFill>
+          <a:schemeClr val="tx1"/>
+        </a:solidFill>
+        <a:latin typeface="+mn-lt"/>
+        <a:ea typeface="+mn-ea"/>
+        <a:cs typeface="+mn-cs"/>
+      </a:defRPr>
+    </a:lvl2pPr>
+    <a:lvl3pPr marL="914400" algn="l" defTabSz="914400" rtl="0" eaLnBrk="1" latinLnBrk="0" hangingPunct="1">
+      <a:defRPr sz="1200" kern="1200">
+        <a:solidFill>
+          <a:schemeClr val="tx1"/>
+        </a:solidFill>
+        <a:latin typeface="+mn-lt"/>
+        <a:ea typeface="+mn-ea"/>
+        <a:cs typeface="+mn-cs"/>
+      </a:defRPr>
+    </a:lvl3pPr>
+    <a:lvl4pPr marL="1371600" algn="l" defTabSz="914400" rtl="0" eaLnBrk="1" latinLnBrk="0" hangingPunct="1">
+      <a:defRPr sz="1200" kern="1200">
+        <a:solidFill>
+          <a:schemeClr val="tx1"/>
+        </a:solidFill>
+        <a:latin typeface="+mn-lt"/>
+        <a:ea typeface="+mn-ea"/>
+        <a:cs typeface="+mn-cs"/>
+      </a:defRPr>
+    </a:lvl4pPr>
+    <a:lvl5pPr marL="1828800" algn="l" defTabSz="914400" rtl="0" eaLnBrk="1" latinLnBrk="0" hangingPunct="1">
+      <a:defRPr sz="1200" kern="1200">
+        <a:solidFill>
+          <a:schemeClr val="tx1"/>
+        </a:solidFill>
+        <a:latin typeface="+mn-lt"/>
+        <a:ea typeface="+mn-ea"/>
+        <a:cs typeface="+mn-cs"/>
+      </a:defRPr>
+    </a:lvl5pPr>
+    <a:lvl6pPr marL="2286000" algn="l" defTabSz="914400" rtl="0" eaLnBrk="1" latinLnBrk="0" hangingPunct="1">
+      <a:defRPr sz="1200" kern="1200">
+        <a:solidFill>
+          <a:schemeClr val="tx1"/>
+        </a:solidFill>
+        <a:latin typeface="+mn-lt"/>
+        <a:ea typeface="+mn-ea"/>
+        <a:cs typeface="+mn-cs"/>
+      </a:defRPr>
+    </a:lvl6pPr>
+    <a:lvl7pPr marL="2743200" algn="l" defTabSz="914400" rtl="0" eaLnBrk="1" latinLnBrk="0" hangingPunct="1">
+      <a:defRPr sz="1200" kern="1200">
+        <a:solidFill>
+          <a:schemeClr val="tx1"/>
+        </a:solidFill>
+        <a:latin typeface="+mn-lt"/>
+        <a:ea typeface="+mn-ea"/>
+        <a:cs typeface="+mn-cs"/>
+      </a:defRPr>
+    </a:lvl7pPr>
+    <a:lvl8pPr marL="3200400" algn="l" defTabSz="914400" rtl="0" eaLnBrk="1" latinLnBrk="0" hangingPunct="1">
+      <a:defRPr sz="1200" kern="1200">
+        <a:solidFill>
+          <a:schemeClr val="tx1"/>
+        </a:solidFill>
+        <a:latin typeface="+mn-lt"/>
+        <a:ea typeface="+mn-ea"/>
+        <a:cs typeface="+mn-cs"/>
+      </a:defRPr>
+    </a:lvl8pPr>
+    <a:lvl9pPr marL="3657600" algn="l" defTabSz="914400" rtl="0" eaLnBrk="1" latinLnBrk="0" hangingPunct="1">
+      <a:defRPr sz="1200" kern="1200">
+        <a:solidFill>
+          <a:schemeClr val="tx1"/>
+        </a:solidFill>
+        <a:latin typeface="+mn-lt"/>
+        <a:ea typeface="+mn-ea"/>
+        <a:cs typeface="+mn-cs"/>
+      </a:defRPr>
+    </a:lvl9pPr>
+  </p:notesStyle>
+</p:notesMaster>
+</file>
+
+<file path=ppt/notesSlides/notesSlide1.xml><?xml version="1.0" encoding="utf-8"?>
+<p:notes xmlns:a="http://schemas.openxmlformats.org/drawingml/2006/main" xmlns:r="http://schemas.openxmlformats.org/officeDocument/2006/relationships" xmlns:p="http://schemas.openxmlformats.org/presentationml/2006/main">
   <p:cSld>
     <p:spTree>
       <p:nvGrpSpPr>
@@ -38,9 +582,9 @@
       </p:grpSpPr>
       <p:sp>
         <p:nvSpPr>
-          <p:cNvPr id="2" name="PlaceHolder 1"/>
+          <p:cNvPr id="38" name="PlaceHolder 1"/>
           <p:cNvSpPr>
-            <a:spLocks noGrp="1"/>
+            <a:spLocks noGrp="1" noRot="1" noChangeAspect="1"/>
           </p:cNvSpPr>
           <p:nvPr>
             <p:ph type="sldImg"/>
@@ -48,47 +592,20 @@
         </p:nvSpPr>
         <p:spPr>
           <a:xfrm>
-            <a:off x="216000" y="812520"/>
-            <a:ext cx="7127280" cy="4008960"/>
-          </a:xfrm>
-          <a:prstGeom prst="rect">
-            <a:avLst/>
-          </a:prstGeom>
-          <a:noFill/>
+            <a:off x="685800" y="1143000"/>
+            <a:ext cx="5486400" cy="3086100"/>
+          </a:xfrm>
+          <a:prstGeom prst="rect">
+            <a:avLst/>
+          </a:prstGeom>
           <a:ln w="0">
             <a:noFill/>
           </a:ln>
         </p:spPr>
-        <p:txBody>
-          <a:bodyPr lIns="0" rIns="0" tIns="0" bIns="0" anchor="ctr">
-            <a:noAutofit/>
-          </a:bodyPr>
-          <a:p>
-            <a:r>
-              <a:rPr b="0" lang="en-GB" sz="1800" strike="noStrike" u="none">
-                <a:solidFill>
-                  <a:schemeClr val="dk1"/>
-                </a:solidFill>
-                <a:effectLst/>
-                <a:uFillTx/>
-                <a:latin typeface="Calibri"/>
-              </a:rPr>
-              <a:t>Click to move the slide</a:t>
-            </a:r>
-            <a:endParaRPr b="0" lang="en-GB" sz="1800" strike="noStrike" u="none">
-              <a:solidFill>
-                <a:schemeClr val="dk1"/>
-              </a:solidFill>
-              <a:effectLst/>
-              <a:uFillTx/>
-              <a:latin typeface="Calibri"/>
-            </a:endParaRPr>
-          </a:p>
-        </p:txBody>
-      </p:sp>
-      <p:sp>
-        <p:nvSpPr>
-          <p:cNvPr id="3" name="PlaceHolder 2"/>
+      </p:sp>
+      <p:sp>
+        <p:nvSpPr>
+          <p:cNvPr id="39" name="PlaceHolder 2"/>
           <p:cNvSpPr>
             <a:spLocks noGrp="1"/>
           </p:cNvSpPr>
@@ -98,8 +615,8 @@
         </p:nvSpPr>
         <p:spPr>
           <a:xfrm>
-            <a:off x="756000" y="5078520"/>
-            <a:ext cx="6047640" cy="4811040"/>
+            <a:off x="685800" y="4400640"/>
+            <a:ext cx="5486040" cy="3600000"/>
           </a:xfrm>
           <a:prstGeom prst="rect">
             <a:avLst/>
@@ -110,25 +627,15 @@
           </a:ln>
         </p:spPr>
         <p:txBody>
-          <a:bodyPr lIns="0" rIns="0" tIns="0" bIns="0" anchor="t">
+          <a:bodyPr lIns="91440" tIns="45720" rIns="91440" bIns="45720" anchor="t">
             <a:noAutofit/>
           </a:bodyPr>
+          <a:lstStyle/>
           <a:p>
             <a:pPr indent="0">
               <a:buNone/>
             </a:pPr>
-            <a:r>
-              <a:rPr b="0" lang="en-GB" sz="2000" strike="noStrike" u="none">
-                <a:solidFill>
-                  <a:srgbClr val="000000"/>
-                </a:solidFill>
-                <a:effectLst/>
-                <a:uFillTx/>
-                <a:latin typeface="Arial"/>
-              </a:rPr>
-              <a:t>Click to edit the notes format</a:t>
-            </a:r>
-            <a:endParaRPr b="0" lang="en-GB" sz="2000" strike="noStrike" u="none">
+            <a:endParaRPr lang="en-GB" sz="1800" b="0" u="none" strike="noStrike">
               <a:solidFill>
                 <a:srgbClr val="000000"/>
               </a:solidFill>
@@ -141,18 +648,18 @@
       </p:sp>
       <p:sp>
         <p:nvSpPr>
-          <p:cNvPr id="4" name="PlaceHolder 3"/>
+          <p:cNvPr id="40" name="PlaceHolder 3"/>
           <p:cNvSpPr>
             <a:spLocks noGrp="1"/>
           </p:cNvSpPr>
           <p:nvPr>
-            <p:ph type="hdr"/>
+            <p:ph type="sldNum" idx="4"/>
           </p:nvPr>
         </p:nvSpPr>
         <p:spPr>
           <a:xfrm>
-            <a:off x="0" y="0"/>
-            <a:ext cx="3280680" cy="534240"/>
+            <a:off x="3884760" y="8685360"/>
+            <a:ext cx="2971440" cy="458280"/>
           </a:xfrm>
           <a:prstGeom prst="rect">
             <a:avLst/>
@@ -163,25 +670,46 @@
           </a:ln>
         </p:spPr>
         <p:txBody>
-          <a:bodyPr lIns="0" rIns="0" tIns="0" bIns="0" anchor="t">
+          <a:bodyPr lIns="91440" tIns="45720" rIns="91440" bIns="45720" anchor="b">
             <a:noAutofit/>
           </a:bodyPr>
-          <a:p>
-            <a:pPr indent="0">
+          <a:lstStyle>
+            <a:lvl1pPr indent="0" algn="r" defTabSz="914400">
+              <a:lnSpc>
+                <a:spcPct val="100000"/>
+              </a:lnSpc>
               <a:buNone/>
-            </a:pPr>
-            <a:r>
-              <a:rPr b="0" lang="en-GB" sz="1400" strike="noStrike" u="none">
-                <a:solidFill>
-                  <a:srgbClr val="000000"/>
+              <a:defRPr lang="en-US" sz="1200" b="0" u="none" strike="noStrike">
+                <a:solidFill>
+                  <a:schemeClr val="dk1"/>
                 </a:solidFill>
                 <a:effectLst/>
                 <a:uFillTx/>
-                <a:latin typeface="Times New Roman"/>
-              </a:rPr>
-              <a:t>&lt;header&gt;</a:t>
-            </a:r>
-            <a:endParaRPr b="0" lang="en-GB" sz="1400" strike="noStrike" u="none">
+                <a:latin typeface="+mn-lt"/>
+                <a:ea typeface="+mn-ea"/>
+              </a:defRPr>
+            </a:lvl1pPr>
+          </a:lstStyle>
+          <a:p>
+            <a:pPr indent="0" algn="r" defTabSz="914400">
+              <a:lnSpc>
+                <a:spcPct val="100000"/>
+              </a:lnSpc>
+              <a:buNone/>
+            </a:pPr>
+            <a:fld id="{AA5800FE-A1A8-41A4-B783-50D3016FACF2}" type="slidenum">
+              <a:rPr lang="en-US" sz="1200" b="0" u="none" strike="noStrike">
+                <a:solidFill>
+                  <a:schemeClr val="dk1"/>
+                </a:solidFill>
+                <a:effectLst/>
+                <a:uFillTx/>
+                <a:latin typeface="+mn-lt"/>
+                <a:ea typeface="+mn-ea"/>
+              </a:rPr>
+              <a:t>1</a:t>
+            </a:fld>
+            <a:endParaRPr lang="en-GB" sz="1200" b="0" u="none" strike="noStrike">
               <a:solidFill>
                 <a:srgbClr val="000000"/>
               </a:solidFill>
@@ -192,212 +720,16 @@
           </a:p>
         </p:txBody>
       </p:sp>
-      <p:sp>
-        <p:nvSpPr>
-          <p:cNvPr id="5" name="PlaceHolder 4"/>
-          <p:cNvSpPr>
-            <a:spLocks noGrp="1"/>
-          </p:cNvSpPr>
-          <p:nvPr>
-            <p:ph type="dt" idx="1"/>
-          </p:nvPr>
-        </p:nvSpPr>
-        <p:spPr>
-          <a:xfrm>
-            <a:off x="4278960" y="0"/>
-            <a:ext cx="3280680" cy="534240"/>
-          </a:xfrm>
-          <a:prstGeom prst="rect">
-            <a:avLst/>
-          </a:prstGeom>
-          <a:noFill/>
-          <a:ln w="0">
-            <a:noFill/>
-          </a:ln>
-        </p:spPr>
-        <p:txBody>
-          <a:bodyPr lIns="0" rIns="0" tIns="0" bIns="0" anchor="t">
-            <a:noAutofit/>
-          </a:bodyPr>
-          <a:lstStyle>
-            <a:lvl1pPr indent="0" algn="r">
-              <a:buNone/>
-              <a:defRPr b="0" lang="en-GB" sz="1400" strike="noStrike" u="none">
-                <a:solidFill>
-                  <a:srgbClr val="000000"/>
-                </a:solidFill>
-                <a:effectLst/>
-                <a:uFillTx/>
-                <a:latin typeface="Times New Roman"/>
-              </a:defRPr>
-            </a:lvl1pPr>
-          </a:lstStyle>
-          <a:p>
-            <a:pPr indent="0" algn="r">
-              <a:buNone/>
-            </a:pPr>
-            <a:r>
-              <a:rPr b="0" lang="en-GB" sz="1400" strike="noStrike" u="none">
-                <a:solidFill>
-                  <a:srgbClr val="000000"/>
-                </a:solidFill>
-                <a:effectLst/>
-                <a:uFillTx/>
-                <a:latin typeface="Times New Roman"/>
-              </a:rPr>
-              <a:t>&lt;date/time&gt;</a:t>
-            </a:r>
-            <a:endParaRPr b="0" lang="en-GB" sz="1400" strike="noStrike" u="none">
-              <a:solidFill>
-                <a:srgbClr val="000000"/>
-              </a:solidFill>
-              <a:effectLst/>
-              <a:uFillTx/>
-              <a:latin typeface="Times New Roman"/>
-            </a:endParaRPr>
-          </a:p>
-        </p:txBody>
-      </p:sp>
-      <p:sp>
-        <p:nvSpPr>
-          <p:cNvPr id="6" name="PlaceHolder 5"/>
-          <p:cNvSpPr>
-            <a:spLocks noGrp="1"/>
-          </p:cNvSpPr>
-          <p:nvPr>
-            <p:ph type="ftr" idx="2"/>
-          </p:nvPr>
-        </p:nvSpPr>
-        <p:spPr>
-          <a:xfrm>
-            <a:off x="0" y="10157400"/>
-            <a:ext cx="3280680" cy="534240"/>
-          </a:xfrm>
-          <a:prstGeom prst="rect">
-            <a:avLst/>
-          </a:prstGeom>
-          <a:noFill/>
-          <a:ln w="0">
-            <a:noFill/>
-          </a:ln>
-        </p:spPr>
-        <p:txBody>
-          <a:bodyPr lIns="0" rIns="0" tIns="0" bIns="0" anchor="b">
-            <a:noAutofit/>
-          </a:bodyPr>
-          <a:lstStyle>
-            <a:lvl1pPr indent="0">
-              <a:buNone/>
-              <a:defRPr b="0" lang="en-GB" sz="1400" strike="noStrike" u="none">
-                <a:solidFill>
-                  <a:srgbClr val="000000"/>
-                </a:solidFill>
-                <a:effectLst/>
-                <a:uFillTx/>
-                <a:latin typeface="Times New Roman"/>
-              </a:defRPr>
-            </a:lvl1pPr>
-          </a:lstStyle>
-          <a:p>
-            <a:pPr indent="0">
-              <a:buNone/>
-            </a:pPr>
-            <a:r>
-              <a:rPr b="0" lang="en-GB" sz="1400" strike="noStrike" u="none">
-                <a:solidFill>
-                  <a:srgbClr val="000000"/>
-                </a:solidFill>
-                <a:effectLst/>
-                <a:uFillTx/>
-                <a:latin typeface="Times New Roman"/>
-              </a:rPr>
-              <a:t>&lt;footer&gt;</a:t>
-            </a:r>
-            <a:endParaRPr b="0" lang="en-GB" sz="1400" strike="noStrike" u="none">
-              <a:solidFill>
-                <a:srgbClr val="000000"/>
-              </a:solidFill>
-              <a:effectLst/>
-              <a:uFillTx/>
-              <a:latin typeface="Times New Roman"/>
-            </a:endParaRPr>
-          </a:p>
-        </p:txBody>
-      </p:sp>
-      <p:sp>
-        <p:nvSpPr>
-          <p:cNvPr id="7" name="PlaceHolder 6"/>
-          <p:cNvSpPr>
-            <a:spLocks noGrp="1"/>
-          </p:cNvSpPr>
-          <p:nvPr>
-            <p:ph type="sldNum" idx="3"/>
-          </p:nvPr>
-        </p:nvSpPr>
-        <p:spPr>
-          <a:xfrm>
-            <a:off x="4278960" y="10157400"/>
-            <a:ext cx="3280680" cy="534240"/>
-          </a:xfrm>
-          <a:prstGeom prst="rect">
-            <a:avLst/>
-          </a:prstGeom>
-          <a:noFill/>
-          <a:ln w="0">
-            <a:noFill/>
-          </a:ln>
-        </p:spPr>
-        <p:txBody>
-          <a:bodyPr lIns="0" rIns="0" tIns="0" bIns="0" anchor="b">
-            <a:noAutofit/>
-          </a:bodyPr>
-          <a:lstStyle>
-            <a:lvl1pPr indent="0" algn="r">
-              <a:buNone/>
-              <a:defRPr b="0" lang="en-GB" sz="1400" strike="noStrike" u="none">
-                <a:solidFill>
-                  <a:srgbClr val="000000"/>
-                </a:solidFill>
-                <a:effectLst/>
-                <a:uFillTx/>
-                <a:latin typeface="Times New Roman"/>
-              </a:defRPr>
-            </a:lvl1pPr>
-          </a:lstStyle>
-          <a:p>
-            <a:pPr indent="0" algn="r">
-              <a:buNone/>
-            </a:pPr>
-            <a:fld id="{8EDACC62-D2D7-47E4-B36C-A484761FD6E2}" type="slidenum">
-              <a:rPr b="0" lang="en-GB" sz="1400" strike="noStrike" u="none">
-                <a:solidFill>
-                  <a:srgbClr val="000000"/>
-                </a:solidFill>
-                <a:effectLst/>
-                <a:uFillTx/>
-                <a:latin typeface="Times New Roman"/>
-              </a:rPr>
-              <a:t>&lt;number&gt;</a:t>
-            </a:fld>
-            <a:endParaRPr b="0" lang="en-GB" sz="1400" strike="noStrike" u="none">
-              <a:solidFill>
-                <a:srgbClr val="000000"/>
-              </a:solidFill>
-              <a:effectLst/>
-              <a:uFillTx/>
-              <a:latin typeface="Times New Roman"/>
-            </a:endParaRPr>
-          </a:p>
-        </p:txBody>
-      </p:sp>
     </p:spTree>
   </p:cSld>
-  <p:clrMap bg1="lt1" bg2="lt2" tx1="dk1" tx2="dk2" accent1="accent1" accent2="accent2" accent3="accent3" accent4="accent4" accent5="accent5" accent6="accent6" hlink="hlink" folHlink="folHlink"/>
-</p:notesMaster>
+  <p:clrMapOvr>
+    <a:masterClrMapping/>
+  </p:clrMapOvr>
+</p:notes>
 </file>
 
-<file path=ppt/notesSlides/notesSlide1.xml><?xml version="1.0" encoding="utf-8"?>
-<p:notes xmlns:a="http://schemas.openxmlformats.org/drawingml/2006/main" xmlns:p="http://schemas.openxmlformats.org/presentationml/2006/main" xmlns:r="http://schemas.openxmlformats.org/officeDocument/2006/relationships" xmlns:p14="http://schemas.microsoft.com/office/powerpoint/2010/main" xmlns:p15="http://schemas.microsoft.com/office/powerpoint/2012/main" xmlns:mc="http://schemas.openxmlformats.org/markup-compatibility/2006">
+<file path=ppt/notesSlides/notesSlide2.xml><?xml version="1.0" encoding="utf-8"?>
+<p:notes xmlns:a="http://schemas.openxmlformats.org/drawingml/2006/main" xmlns:r="http://schemas.openxmlformats.org/officeDocument/2006/relationships" xmlns:p="http://schemas.openxmlformats.org/presentationml/2006/main">
   <p:cSld>
     <p:spTree>
       <p:nvGrpSpPr>
@@ -415,9 +747,9 @@
       </p:grpSpPr>
       <p:sp>
         <p:nvSpPr>
-          <p:cNvPr id="38" name="PlaceHolder 1"/>
+          <p:cNvPr id="41" name="PlaceHolder 1"/>
           <p:cNvSpPr>
-            <a:spLocks noGrp="1"/>
+            <a:spLocks noGrp="1" noRot="1" noChangeAspect="1"/>
           </p:cNvSpPr>
           <p:nvPr>
             <p:ph type="sldImg"/>
@@ -426,7 +758,7 @@
         <p:spPr>
           <a:xfrm>
             <a:off x="685800" y="1143000"/>
-            <a:ext cx="5486040" cy="3085920"/>
+            <a:ext cx="5486400" cy="3086100"/>
           </a:xfrm>
           <a:prstGeom prst="rect">
             <a:avLst/>
@@ -438,7 +770,7 @@
       </p:sp>
       <p:sp>
         <p:nvSpPr>
-          <p:cNvPr id="39" name="PlaceHolder 2"/>
+          <p:cNvPr id="42" name="PlaceHolder 2"/>
           <p:cNvSpPr>
             <a:spLocks noGrp="1"/>
           </p:cNvSpPr>
@@ -460,14 +792,15 @@
           </a:ln>
         </p:spPr>
         <p:txBody>
-          <a:bodyPr lIns="91440" rIns="91440" tIns="45720" bIns="45720" anchor="t">
+          <a:bodyPr lIns="91440" tIns="45720" rIns="91440" bIns="45720" anchor="t">
             <a:noAutofit/>
           </a:bodyPr>
+          <a:lstStyle/>
           <a:p>
             <a:pPr indent="0">
               <a:buNone/>
             </a:pPr>
-            <a:endParaRPr b="0" lang="en-GB" sz="1800" strike="noStrike" u="none">
+            <a:endParaRPr lang="en-GB" sz="1800" b="0" u="none" strike="noStrike">
               <a:solidFill>
                 <a:srgbClr val="000000"/>
               </a:solidFill>
@@ -480,12 +813,12 @@
       </p:sp>
       <p:sp>
         <p:nvSpPr>
-          <p:cNvPr id="40" name="PlaceHolder 3"/>
+          <p:cNvPr id="43" name="PlaceHolder 3"/>
           <p:cNvSpPr>
             <a:spLocks noGrp="1"/>
           </p:cNvSpPr>
           <p:nvPr>
-            <p:ph type="sldNum" idx="4"/>
+            <p:ph type="sldNum" idx="5"/>
           </p:nvPr>
         </p:nvSpPr>
         <p:spPr>
@@ -502,7 +835,7 @@
           </a:ln>
         </p:spPr>
         <p:txBody>
-          <a:bodyPr lIns="91440" rIns="91440" tIns="45720" bIns="45720" anchor="b">
+          <a:bodyPr lIns="91440" tIns="45720" rIns="91440" bIns="45720" anchor="b">
             <a:noAutofit/>
           </a:bodyPr>
           <a:lstStyle>
@@ -511,7 +844,7 @@
                 <a:spcPct val="100000"/>
               </a:lnSpc>
               <a:buNone/>
-              <a:defRPr b="0" lang="en-US" sz="1200" strike="noStrike" u="none">
+              <a:defRPr lang="en-US" sz="1200" b="0" u="none" strike="noStrike">
                 <a:solidFill>
                   <a:schemeClr val="dk1"/>
                 </a:solidFill>
@@ -529,8 +862,8 @@
               </a:lnSpc>
               <a:buNone/>
             </a:pPr>
-            <a:fld id="{AA5800FE-A1A8-41A4-B783-50D3016FACF2}" type="slidenum">
-              <a:rPr b="0" lang="en-US" sz="1200" strike="noStrike" u="none">
+            <a:fld id="{85701472-C6CA-4D38-A865-96B6542059BF}" type="slidenum">
+              <a:rPr lang="en-US" sz="1200" b="0" u="none" strike="noStrike">
                 <a:solidFill>
                   <a:schemeClr val="dk1"/>
                 </a:solidFill>
@@ -539,9 +872,9 @@
                 <a:latin typeface="+mn-lt"/>
                 <a:ea typeface="+mn-ea"/>
               </a:rPr>
-              <a:t>&lt;number&gt;</a:t>
+              <a:t>2</a:t>
             </a:fld>
-            <a:endParaRPr b="0" lang="en-GB" sz="1200" strike="noStrike" u="none">
+            <a:endParaRPr lang="en-GB" sz="1200" b="0" u="none" strike="noStrike">
               <a:solidFill>
                 <a:srgbClr val="000000"/>
               </a:solidFill>
@@ -554,11 +887,14 @@
       </p:sp>
     </p:spTree>
   </p:cSld>
+  <p:clrMapOvr>
+    <a:masterClrMapping/>
+  </p:clrMapOvr>
 </p:notes>
 </file>
 
-<file path=ppt/notesSlides/notesSlide2.xml><?xml version="1.0" encoding="utf-8"?>
-<p:notes xmlns:a="http://schemas.openxmlformats.org/drawingml/2006/main" xmlns:p="http://schemas.openxmlformats.org/presentationml/2006/main" xmlns:r="http://schemas.openxmlformats.org/officeDocument/2006/relationships" xmlns:p14="http://schemas.microsoft.com/office/powerpoint/2010/main" xmlns:p15="http://schemas.microsoft.com/office/powerpoint/2012/main" xmlns:mc="http://schemas.openxmlformats.org/markup-compatibility/2006">
+<file path=ppt/notesSlides/notesSlide3.xml><?xml version="1.0" encoding="utf-8"?>
+<p:notes xmlns:a="http://schemas.openxmlformats.org/drawingml/2006/main" xmlns:r="http://schemas.openxmlformats.org/officeDocument/2006/relationships" xmlns:p="http://schemas.openxmlformats.org/presentationml/2006/main">
   <p:cSld>
     <p:spTree>
       <p:nvGrpSpPr>
@@ -576,9 +912,9 @@
       </p:grpSpPr>
       <p:sp>
         <p:nvSpPr>
-          <p:cNvPr id="41" name="PlaceHolder 1"/>
+          <p:cNvPr id="44" name="PlaceHolder 1"/>
           <p:cNvSpPr>
-            <a:spLocks noGrp="1"/>
+            <a:spLocks noGrp="1" noRot="1" noChangeAspect="1"/>
           </p:cNvSpPr>
           <p:nvPr>
             <p:ph type="sldImg"/>
@@ -587,7 +923,7 @@
         <p:spPr>
           <a:xfrm>
             <a:off x="685800" y="1143000"/>
-            <a:ext cx="5486040" cy="3085920"/>
+            <a:ext cx="5486400" cy="3086100"/>
           </a:xfrm>
           <a:prstGeom prst="rect">
             <a:avLst/>
@@ -599,7 +935,7 @@
       </p:sp>
       <p:sp>
         <p:nvSpPr>
-          <p:cNvPr id="42" name="PlaceHolder 2"/>
+          <p:cNvPr id="45" name="PlaceHolder 2"/>
           <p:cNvSpPr>
             <a:spLocks noGrp="1"/>
           </p:cNvSpPr>
@@ -621,14 +957,15 @@
           </a:ln>
         </p:spPr>
         <p:txBody>
-          <a:bodyPr lIns="91440" rIns="91440" tIns="45720" bIns="45720" anchor="t">
+          <a:bodyPr lIns="91440" tIns="45720" rIns="91440" bIns="45720" anchor="t">
             <a:noAutofit/>
           </a:bodyPr>
+          <a:lstStyle/>
           <a:p>
             <a:pPr indent="0">
               <a:buNone/>
             </a:pPr>
-            <a:endParaRPr b="0" lang="en-GB" sz="1800" strike="noStrike" u="none">
+            <a:endParaRPr lang="en-GB" sz="1800" b="0" u="none" strike="noStrike">
               <a:solidFill>
                 <a:srgbClr val="000000"/>
               </a:solidFill>
@@ -641,12 +978,12 @@
       </p:sp>
       <p:sp>
         <p:nvSpPr>
-          <p:cNvPr id="43" name="PlaceHolder 3"/>
+          <p:cNvPr id="46" name="PlaceHolder 3"/>
           <p:cNvSpPr>
             <a:spLocks noGrp="1"/>
           </p:cNvSpPr>
           <p:nvPr>
-            <p:ph type="sldNum" idx="5"/>
+            <p:ph type="sldNum" idx="6"/>
           </p:nvPr>
         </p:nvSpPr>
         <p:spPr>
@@ -663,7 +1000,7 @@
           </a:ln>
         </p:spPr>
         <p:txBody>
-          <a:bodyPr lIns="91440" rIns="91440" tIns="45720" bIns="45720" anchor="b">
+          <a:bodyPr lIns="91440" tIns="45720" rIns="91440" bIns="45720" anchor="b">
             <a:noAutofit/>
           </a:bodyPr>
           <a:lstStyle>
@@ -672,7 +1009,7 @@
                 <a:spcPct val="100000"/>
               </a:lnSpc>
               <a:buNone/>
-              <a:defRPr b="0" lang="en-US" sz="1200" strike="noStrike" u="none">
+              <a:defRPr lang="en-US" sz="1200" b="0" u="none" strike="noStrike">
                 <a:solidFill>
                   <a:schemeClr val="dk1"/>
                 </a:solidFill>
@@ -690,8 +1027,8 @@
               </a:lnSpc>
               <a:buNone/>
             </a:pPr>
-            <a:fld id="{85701472-C6CA-4D38-A865-96B6542059BF}" type="slidenum">
-              <a:rPr b="0" lang="en-US" sz="1200" strike="noStrike" u="none">
+            <a:fld id="{1678D63A-056D-4603-A223-155E5B5A20BB}" type="slidenum">
+              <a:rPr lang="en-US" sz="1200" b="0" u="none" strike="noStrike">
                 <a:solidFill>
                   <a:schemeClr val="dk1"/>
                 </a:solidFill>
@@ -700,9 +1037,9 @@
                 <a:latin typeface="+mn-lt"/>
                 <a:ea typeface="+mn-ea"/>
               </a:rPr>
-              <a:t>&lt;number&gt;</a:t>
+              <a:t>3</a:t>
             </a:fld>
-            <a:endParaRPr b="0" lang="en-GB" sz="1200" strike="noStrike" u="none">
+            <a:endParaRPr lang="en-GB" sz="1200" b="0" u="none" strike="noStrike">
               <a:solidFill>
                 <a:srgbClr val="000000"/>
               </a:solidFill>
@@ -715,11 +1052,14 @@
       </p:sp>
     </p:spTree>
   </p:cSld>
+  <p:clrMapOvr>
+    <a:masterClrMapping/>
+  </p:clrMapOvr>
 </p:notes>
 </file>
 
-<file path=ppt/notesSlides/notesSlide3.xml><?xml version="1.0" encoding="utf-8"?>
-<p:notes xmlns:a="http://schemas.openxmlformats.org/drawingml/2006/main" xmlns:p="http://schemas.openxmlformats.org/presentationml/2006/main" xmlns:r="http://schemas.openxmlformats.org/officeDocument/2006/relationships" xmlns:p14="http://schemas.microsoft.com/office/powerpoint/2010/main" xmlns:p15="http://schemas.microsoft.com/office/powerpoint/2012/main" xmlns:mc="http://schemas.openxmlformats.org/markup-compatibility/2006">
+<file path=ppt/notesSlides/notesSlide4.xml><?xml version="1.0" encoding="utf-8"?>
+<p:notes xmlns:a="http://schemas.openxmlformats.org/drawingml/2006/main" xmlns:r="http://schemas.openxmlformats.org/officeDocument/2006/relationships" xmlns:p="http://schemas.openxmlformats.org/presentationml/2006/main">
   <p:cSld>
     <p:spTree>
       <p:nvGrpSpPr>
@@ -737,9 +1077,9 @@
       </p:grpSpPr>
       <p:sp>
         <p:nvSpPr>
-          <p:cNvPr id="44" name="PlaceHolder 1"/>
+          <p:cNvPr id="47" name="PlaceHolder 1"/>
           <p:cNvSpPr>
-            <a:spLocks noGrp="1"/>
+            <a:spLocks noGrp="1" noRot="1" noChangeAspect="1"/>
           </p:cNvSpPr>
           <p:nvPr>
             <p:ph type="sldImg"/>
@@ -748,7 +1088,7 @@
         <p:spPr>
           <a:xfrm>
             <a:off x="685800" y="1143000"/>
-            <a:ext cx="5486040" cy="3085920"/>
+            <a:ext cx="5486400" cy="3086100"/>
           </a:xfrm>
           <a:prstGeom prst="rect">
             <a:avLst/>
@@ -760,7 +1100,7 @@
       </p:sp>
       <p:sp>
         <p:nvSpPr>
-          <p:cNvPr id="45" name="PlaceHolder 2"/>
+          <p:cNvPr id="48" name="PlaceHolder 2"/>
           <p:cNvSpPr>
             <a:spLocks noGrp="1"/>
           </p:cNvSpPr>
@@ -782,14 +1122,15 @@
           </a:ln>
         </p:spPr>
         <p:txBody>
-          <a:bodyPr lIns="91440" rIns="91440" tIns="45720" bIns="45720" anchor="t">
+          <a:bodyPr lIns="91440" tIns="45720" rIns="91440" bIns="45720" anchor="t">
             <a:noAutofit/>
           </a:bodyPr>
+          <a:lstStyle/>
           <a:p>
             <a:pPr indent="0">
               <a:buNone/>
             </a:pPr>
-            <a:endParaRPr b="0" lang="en-GB" sz="1800" strike="noStrike" u="none">
+            <a:endParaRPr lang="en-GB" sz="1800" b="0" u="none" strike="noStrike">
               <a:solidFill>
                 <a:srgbClr val="000000"/>
               </a:solidFill>
@@ -802,12 +1143,12 @@
       </p:sp>
       <p:sp>
         <p:nvSpPr>
-          <p:cNvPr id="46" name="PlaceHolder 3"/>
+          <p:cNvPr id="49" name="PlaceHolder 3"/>
           <p:cNvSpPr>
             <a:spLocks noGrp="1"/>
           </p:cNvSpPr>
           <p:nvPr>
-            <p:ph type="sldNum" idx="6"/>
+            <p:ph type="sldNum" idx="7"/>
           </p:nvPr>
         </p:nvSpPr>
         <p:spPr>
@@ -824,7 +1165,7 @@
           </a:ln>
         </p:spPr>
         <p:txBody>
-          <a:bodyPr lIns="91440" rIns="91440" tIns="45720" bIns="45720" anchor="b">
+          <a:bodyPr lIns="91440" tIns="45720" rIns="91440" bIns="45720" anchor="b">
             <a:noAutofit/>
           </a:bodyPr>
           <a:lstStyle>
@@ -833,7 +1174,7 @@
                 <a:spcPct val="100000"/>
               </a:lnSpc>
               <a:buNone/>
-              <a:defRPr b="0" lang="en-US" sz="1200" strike="noStrike" u="none">
+              <a:defRPr lang="en-US" sz="1200" b="0" u="none" strike="noStrike">
                 <a:solidFill>
                   <a:schemeClr val="dk1"/>
                 </a:solidFill>
@@ -851,8 +1192,8 @@
               </a:lnSpc>
               <a:buNone/>
             </a:pPr>
-            <a:fld id="{1678D63A-056D-4603-A223-155E5B5A20BB}" type="slidenum">
-              <a:rPr b="0" lang="en-US" sz="1200" strike="noStrike" u="none">
+            <a:fld id="{28D0F303-DBF3-46D2-9F7D-1C4CC5CDB2CF}" type="slidenum">
+              <a:rPr lang="en-US" sz="1200" b="0" u="none" strike="noStrike">
                 <a:solidFill>
                   <a:schemeClr val="dk1"/>
                 </a:solidFill>
@@ -861,9 +1202,9 @@
                 <a:latin typeface="+mn-lt"/>
                 <a:ea typeface="+mn-ea"/>
               </a:rPr>
-              <a:t>&lt;number&gt;</a:t>
+              <a:t>4</a:t>
             </a:fld>
-            <a:endParaRPr b="0" lang="en-GB" sz="1200" strike="noStrike" u="none">
+            <a:endParaRPr lang="en-GB" sz="1200" b="0" u="none" strike="noStrike">
               <a:solidFill>
                 <a:srgbClr val="000000"/>
               </a:solidFill>
@@ -876,11 +1217,596 @@
       </p:sp>
     </p:spTree>
   </p:cSld>
+  <p:clrMapOvr>
+    <a:masterClrMapping/>
+  </p:clrMapOvr>
 </p:notes>
 </file>
 
-<file path=ppt/notesSlides/notesSlide4.xml><?xml version="1.0" encoding="utf-8"?>
-<p:notes xmlns:a="http://schemas.openxmlformats.org/drawingml/2006/main" xmlns:p="http://schemas.openxmlformats.org/presentationml/2006/main" xmlns:r="http://schemas.openxmlformats.org/officeDocument/2006/relationships" xmlns:p14="http://schemas.microsoft.com/office/powerpoint/2010/main" xmlns:p15="http://schemas.microsoft.com/office/powerpoint/2012/main" xmlns:mc="http://schemas.openxmlformats.org/markup-compatibility/2006">
+<file path=ppt/notesSlides/notesSlide5.xml><?xml version="1.0" encoding="utf-8"?>
+<p:notes xmlns:a="http://schemas.openxmlformats.org/drawingml/2006/main" xmlns:r="http://schemas.openxmlformats.org/officeDocument/2006/relationships" xmlns:p="http://schemas.openxmlformats.org/presentationml/2006/main">
+  <p:cSld>
+    <p:spTree>
+      <p:nvGrpSpPr>
+        <p:cNvPr id="1" name="">
+          <a:extLst>
+            <a:ext uri="{FF2B5EF4-FFF2-40B4-BE49-F238E27FC236}">
+              <a16:creationId xmlns:a16="http://schemas.microsoft.com/office/drawing/2014/main" id="{01301B85-2D75-B6C4-1513-AB9641901958}"/>
+            </a:ext>
+          </a:extLst>
+        </p:cNvPr>
+        <p:cNvGrpSpPr/>
+        <p:nvPr/>
+      </p:nvGrpSpPr>
+      <p:grpSpPr>
+        <a:xfrm>
+          <a:off x="0" y="0"/>
+          <a:ext cx="0" cy="0"/>
+          <a:chOff x="0" y="0"/>
+          <a:chExt cx="0" cy="0"/>
+        </a:xfrm>
+      </p:grpSpPr>
+      <p:sp>
+        <p:nvSpPr>
+          <p:cNvPr id="47" name="PlaceHolder 1">
+            <a:extLst>
+              <a:ext uri="{FF2B5EF4-FFF2-40B4-BE49-F238E27FC236}">
+                <a16:creationId xmlns:a16="http://schemas.microsoft.com/office/drawing/2014/main" id="{09B15FB4-3374-7E62-BD78-EC180704538E}"/>
+              </a:ext>
+            </a:extLst>
+          </p:cNvPr>
+          <p:cNvSpPr>
+            <a:spLocks noGrp="1" noRot="1" noChangeAspect="1"/>
+          </p:cNvSpPr>
+          <p:nvPr>
+            <p:ph type="sldImg"/>
+          </p:nvPr>
+        </p:nvSpPr>
+        <p:spPr>
+          <a:xfrm>
+            <a:off x="685800" y="1143000"/>
+            <a:ext cx="5486400" cy="3086100"/>
+          </a:xfrm>
+          <a:prstGeom prst="rect">
+            <a:avLst/>
+          </a:prstGeom>
+          <a:ln w="0">
+            <a:noFill/>
+          </a:ln>
+        </p:spPr>
+      </p:sp>
+      <p:sp>
+        <p:nvSpPr>
+          <p:cNvPr id="48" name="PlaceHolder 2">
+            <a:extLst>
+              <a:ext uri="{FF2B5EF4-FFF2-40B4-BE49-F238E27FC236}">
+                <a16:creationId xmlns:a16="http://schemas.microsoft.com/office/drawing/2014/main" id="{D041900C-27F7-BFE7-D9E5-69BBD5F9EC51}"/>
+              </a:ext>
+            </a:extLst>
+          </p:cNvPr>
+          <p:cNvSpPr>
+            <a:spLocks noGrp="1"/>
+          </p:cNvSpPr>
+          <p:nvPr>
+            <p:ph type="body"/>
+          </p:nvPr>
+        </p:nvSpPr>
+        <p:spPr>
+          <a:xfrm>
+            <a:off x="685800" y="4400640"/>
+            <a:ext cx="5486040" cy="3600000"/>
+          </a:xfrm>
+          <a:prstGeom prst="rect">
+            <a:avLst/>
+          </a:prstGeom>
+          <a:noFill/>
+          <a:ln w="0">
+            <a:noFill/>
+          </a:ln>
+        </p:spPr>
+        <p:txBody>
+          <a:bodyPr lIns="91440" tIns="45720" rIns="91440" bIns="45720" anchor="t">
+            <a:noAutofit/>
+          </a:bodyPr>
+          <a:lstStyle/>
+          <a:p>
+            <a:pPr indent="0">
+              <a:buNone/>
+            </a:pPr>
+            <a:endParaRPr lang="en-GB" sz="1800" b="0" u="none" strike="noStrike">
+              <a:solidFill>
+                <a:srgbClr val="000000"/>
+              </a:solidFill>
+              <a:effectLst/>
+              <a:uFillTx/>
+              <a:latin typeface="Arial"/>
+            </a:endParaRPr>
+          </a:p>
+        </p:txBody>
+      </p:sp>
+      <p:sp>
+        <p:nvSpPr>
+          <p:cNvPr id="49" name="PlaceHolder 3">
+            <a:extLst>
+              <a:ext uri="{FF2B5EF4-FFF2-40B4-BE49-F238E27FC236}">
+                <a16:creationId xmlns:a16="http://schemas.microsoft.com/office/drawing/2014/main" id="{8F0A0457-8549-FD91-E518-DC0FC1A1DC70}"/>
+              </a:ext>
+            </a:extLst>
+          </p:cNvPr>
+          <p:cNvSpPr>
+            <a:spLocks noGrp="1"/>
+          </p:cNvSpPr>
+          <p:nvPr>
+            <p:ph type="sldNum" idx="7"/>
+          </p:nvPr>
+        </p:nvSpPr>
+        <p:spPr>
+          <a:xfrm>
+            <a:off x="3884760" y="8685360"/>
+            <a:ext cx="2971440" cy="458280"/>
+          </a:xfrm>
+          <a:prstGeom prst="rect">
+            <a:avLst/>
+          </a:prstGeom>
+          <a:noFill/>
+          <a:ln w="0">
+            <a:noFill/>
+          </a:ln>
+        </p:spPr>
+        <p:txBody>
+          <a:bodyPr lIns="91440" tIns="45720" rIns="91440" bIns="45720" anchor="b">
+            <a:noAutofit/>
+          </a:bodyPr>
+          <a:lstStyle>
+            <a:lvl1pPr indent="0" algn="r" defTabSz="914400">
+              <a:lnSpc>
+                <a:spcPct val="100000"/>
+              </a:lnSpc>
+              <a:buNone/>
+              <a:defRPr lang="en-US" sz="1200" b="0" u="none" strike="noStrike">
+                <a:solidFill>
+                  <a:schemeClr val="dk1"/>
+                </a:solidFill>
+                <a:effectLst/>
+                <a:uFillTx/>
+                <a:latin typeface="+mn-lt"/>
+                <a:ea typeface="+mn-ea"/>
+              </a:defRPr>
+            </a:lvl1pPr>
+          </a:lstStyle>
+          <a:p>
+            <a:pPr indent="0" algn="r" defTabSz="914400">
+              <a:lnSpc>
+                <a:spcPct val="100000"/>
+              </a:lnSpc>
+              <a:buNone/>
+            </a:pPr>
+            <a:fld id="{28D0F303-DBF3-46D2-9F7D-1C4CC5CDB2CF}" type="slidenum">
+              <a:rPr lang="en-US" sz="1200" b="0" u="none" strike="noStrike">
+                <a:solidFill>
+                  <a:schemeClr val="dk1"/>
+                </a:solidFill>
+                <a:effectLst/>
+                <a:uFillTx/>
+                <a:latin typeface="+mn-lt"/>
+                <a:ea typeface="+mn-ea"/>
+              </a:rPr>
+              <a:t>5</a:t>
+            </a:fld>
+            <a:endParaRPr lang="en-GB" sz="1200" b="0" u="none" strike="noStrike">
+              <a:solidFill>
+                <a:srgbClr val="000000"/>
+              </a:solidFill>
+              <a:effectLst/>
+              <a:uFillTx/>
+              <a:latin typeface="Times New Roman"/>
+            </a:endParaRPr>
+          </a:p>
+        </p:txBody>
+      </p:sp>
+    </p:spTree>
+    <p:extLst>
+      <p:ext uri="{BB962C8B-B14F-4D97-AF65-F5344CB8AC3E}">
+        <p14:creationId xmlns:p14="http://schemas.microsoft.com/office/powerpoint/2010/main" val="1308333038"/>
+      </p:ext>
+    </p:extLst>
+  </p:cSld>
+  <p:clrMapOvr>
+    <a:masterClrMapping/>
+  </p:clrMapOvr>
+</p:notes>
+</file>
+
+<file path=ppt/notesSlides/notesSlide6.xml><?xml version="1.0" encoding="utf-8"?>
+<p:notes xmlns:a="http://schemas.openxmlformats.org/drawingml/2006/main" xmlns:r="http://schemas.openxmlformats.org/officeDocument/2006/relationships" xmlns:p="http://schemas.openxmlformats.org/presentationml/2006/main">
+  <p:cSld>
+    <p:spTree>
+      <p:nvGrpSpPr>
+        <p:cNvPr id="1" name="">
+          <a:extLst>
+            <a:ext uri="{FF2B5EF4-FFF2-40B4-BE49-F238E27FC236}">
+              <a16:creationId xmlns:a16="http://schemas.microsoft.com/office/drawing/2014/main" id="{851C8CE6-C0B7-E060-657F-BBF43AC91ECF}"/>
+            </a:ext>
+          </a:extLst>
+        </p:cNvPr>
+        <p:cNvGrpSpPr/>
+        <p:nvPr/>
+      </p:nvGrpSpPr>
+      <p:grpSpPr>
+        <a:xfrm>
+          <a:off x="0" y="0"/>
+          <a:ext cx="0" cy="0"/>
+          <a:chOff x="0" y="0"/>
+          <a:chExt cx="0" cy="0"/>
+        </a:xfrm>
+      </p:grpSpPr>
+      <p:sp>
+        <p:nvSpPr>
+          <p:cNvPr id="47" name="PlaceHolder 1">
+            <a:extLst>
+              <a:ext uri="{FF2B5EF4-FFF2-40B4-BE49-F238E27FC236}">
+                <a16:creationId xmlns:a16="http://schemas.microsoft.com/office/drawing/2014/main" id="{18512910-0E41-61B6-50E9-CCECFF844270}"/>
+              </a:ext>
+            </a:extLst>
+          </p:cNvPr>
+          <p:cNvSpPr>
+            <a:spLocks noGrp="1" noRot="1" noChangeAspect="1"/>
+          </p:cNvSpPr>
+          <p:nvPr>
+            <p:ph type="sldImg"/>
+          </p:nvPr>
+        </p:nvSpPr>
+        <p:spPr>
+          <a:xfrm>
+            <a:off x="685800" y="1143000"/>
+            <a:ext cx="5486400" cy="3086100"/>
+          </a:xfrm>
+          <a:prstGeom prst="rect">
+            <a:avLst/>
+          </a:prstGeom>
+          <a:ln w="0">
+            <a:noFill/>
+          </a:ln>
+        </p:spPr>
+      </p:sp>
+      <p:sp>
+        <p:nvSpPr>
+          <p:cNvPr id="48" name="PlaceHolder 2">
+            <a:extLst>
+              <a:ext uri="{FF2B5EF4-FFF2-40B4-BE49-F238E27FC236}">
+                <a16:creationId xmlns:a16="http://schemas.microsoft.com/office/drawing/2014/main" id="{C672276B-CAA8-2F65-EBAF-1F7C594084DE}"/>
+              </a:ext>
+            </a:extLst>
+          </p:cNvPr>
+          <p:cNvSpPr>
+            <a:spLocks noGrp="1"/>
+          </p:cNvSpPr>
+          <p:nvPr>
+            <p:ph type="body"/>
+          </p:nvPr>
+        </p:nvSpPr>
+        <p:spPr>
+          <a:xfrm>
+            <a:off x="685800" y="4400640"/>
+            <a:ext cx="5486040" cy="3600000"/>
+          </a:xfrm>
+          <a:prstGeom prst="rect">
+            <a:avLst/>
+          </a:prstGeom>
+          <a:noFill/>
+          <a:ln w="0">
+            <a:noFill/>
+          </a:ln>
+        </p:spPr>
+        <p:txBody>
+          <a:bodyPr lIns="91440" tIns="45720" rIns="91440" bIns="45720" anchor="t">
+            <a:noAutofit/>
+          </a:bodyPr>
+          <a:lstStyle/>
+          <a:p>
+            <a:pPr indent="0">
+              <a:buNone/>
+            </a:pPr>
+            <a:endParaRPr lang="en-GB" sz="1800" b="0" u="none" strike="noStrike">
+              <a:solidFill>
+                <a:srgbClr val="000000"/>
+              </a:solidFill>
+              <a:effectLst/>
+              <a:uFillTx/>
+              <a:latin typeface="Arial"/>
+            </a:endParaRPr>
+          </a:p>
+        </p:txBody>
+      </p:sp>
+      <p:sp>
+        <p:nvSpPr>
+          <p:cNvPr id="49" name="PlaceHolder 3">
+            <a:extLst>
+              <a:ext uri="{FF2B5EF4-FFF2-40B4-BE49-F238E27FC236}">
+                <a16:creationId xmlns:a16="http://schemas.microsoft.com/office/drawing/2014/main" id="{F2BA5712-D01B-110D-D49A-7D1E796A2BD9}"/>
+              </a:ext>
+            </a:extLst>
+          </p:cNvPr>
+          <p:cNvSpPr>
+            <a:spLocks noGrp="1"/>
+          </p:cNvSpPr>
+          <p:nvPr>
+            <p:ph type="sldNum" idx="7"/>
+          </p:nvPr>
+        </p:nvSpPr>
+        <p:spPr>
+          <a:xfrm>
+            <a:off x="3884760" y="8685360"/>
+            <a:ext cx="2971440" cy="458280"/>
+          </a:xfrm>
+          <a:prstGeom prst="rect">
+            <a:avLst/>
+          </a:prstGeom>
+          <a:noFill/>
+          <a:ln w="0">
+            <a:noFill/>
+          </a:ln>
+        </p:spPr>
+        <p:txBody>
+          <a:bodyPr lIns="91440" tIns="45720" rIns="91440" bIns="45720" anchor="b">
+            <a:noAutofit/>
+          </a:bodyPr>
+          <a:lstStyle>
+            <a:lvl1pPr indent="0" algn="r" defTabSz="914400">
+              <a:lnSpc>
+                <a:spcPct val="100000"/>
+              </a:lnSpc>
+              <a:buNone/>
+              <a:defRPr lang="en-US" sz="1200" b="0" u="none" strike="noStrike">
+                <a:solidFill>
+                  <a:schemeClr val="dk1"/>
+                </a:solidFill>
+                <a:effectLst/>
+                <a:uFillTx/>
+                <a:latin typeface="+mn-lt"/>
+                <a:ea typeface="+mn-ea"/>
+              </a:defRPr>
+            </a:lvl1pPr>
+          </a:lstStyle>
+          <a:p>
+            <a:pPr indent="0" algn="r" defTabSz="914400">
+              <a:lnSpc>
+                <a:spcPct val="100000"/>
+              </a:lnSpc>
+              <a:buNone/>
+            </a:pPr>
+            <a:fld id="{28D0F303-DBF3-46D2-9F7D-1C4CC5CDB2CF}" type="slidenum">
+              <a:rPr lang="en-US" sz="1200" b="0" u="none" strike="noStrike">
+                <a:solidFill>
+                  <a:schemeClr val="dk1"/>
+                </a:solidFill>
+                <a:effectLst/>
+                <a:uFillTx/>
+                <a:latin typeface="+mn-lt"/>
+                <a:ea typeface="+mn-ea"/>
+              </a:rPr>
+              <a:t>6</a:t>
+            </a:fld>
+            <a:endParaRPr lang="en-GB" sz="1200" b="0" u="none" strike="noStrike">
+              <a:solidFill>
+                <a:srgbClr val="000000"/>
+              </a:solidFill>
+              <a:effectLst/>
+              <a:uFillTx/>
+              <a:latin typeface="Times New Roman"/>
+            </a:endParaRPr>
+          </a:p>
+        </p:txBody>
+      </p:sp>
+    </p:spTree>
+    <p:extLst>
+      <p:ext uri="{BB962C8B-B14F-4D97-AF65-F5344CB8AC3E}">
+        <p14:creationId xmlns:p14="http://schemas.microsoft.com/office/powerpoint/2010/main" val="788554306"/>
+      </p:ext>
+    </p:extLst>
+  </p:cSld>
+  <p:clrMapOvr>
+    <a:masterClrMapping/>
+  </p:clrMapOvr>
+</p:notes>
+</file>
+
+<file path=ppt/notesSlides/notesSlide7.xml><?xml version="1.0" encoding="utf-8"?>
+<p:notes xmlns:a="http://schemas.openxmlformats.org/drawingml/2006/main" xmlns:r="http://schemas.openxmlformats.org/officeDocument/2006/relationships" xmlns:p="http://schemas.openxmlformats.org/presentationml/2006/main">
+  <p:cSld>
+    <p:spTree>
+      <p:nvGrpSpPr>
+        <p:cNvPr id="1" name="">
+          <a:extLst>
+            <a:ext uri="{FF2B5EF4-FFF2-40B4-BE49-F238E27FC236}">
+              <a16:creationId xmlns:a16="http://schemas.microsoft.com/office/drawing/2014/main" id="{E491A88A-41F3-6D10-4178-BF82EDC5F482}"/>
+            </a:ext>
+          </a:extLst>
+        </p:cNvPr>
+        <p:cNvGrpSpPr/>
+        <p:nvPr/>
+      </p:nvGrpSpPr>
+      <p:grpSpPr>
+        <a:xfrm>
+          <a:off x="0" y="0"/>
+          <a:ext cx="0" cy="0"/>
+          <a:chOff x="0" y="0"/>
+          <a:chExt cx="0" cy="0"/>
+        </a:xfrm>
+      </p:grpSpPr>
+      <p:sp>
+        <p:nvSpPr>
+          <p:cNvPr id="47" name="PlaceHolder 1">
+            <a:extLst>
+              <a:ext uri="{FF2B5EF4-FFF2-40B4-BE49-F238E27FC236}">
+                <a16:creationId xmlns:a16="http://schemas.microsoft.com/office/drawing/2014/main" id="{00EFB5BE-9528-AA2F-94DE-8873A21E1ECB}"/>
+              </a:ext>
+            </a:extLst>
+          </p:cNvPr>
+          <p:cNvSpPr>
+            <a:spLocks noGrp="1" noRot="1" noChangeAspect="1"/>
+          </p:cNvSpPr>
+          <p:nvPr>
+            <p:ph type="sldImg"/>
+          </p:nvPr>
+        </p:nvSpPr>
+        <p:spPr>
+          <a:xfrm>
+            <a:off x="685800" y="1143000"/>
+            <a:ext cx="5486400" cy="3086100"/>
+          </a:xfrm>
+          <a:prstGeom prst="rect">
+            <a:avLst/>
+          </a:prstGeom>
+          <a:ln w="0">
+            <a:noFill/>
+          </a:ln>
+        </p:spPr>
+      </p:sp>
+      <p:sp>
+        <p:nvSpPr>
+          <p:cNvPr id="48" name="PlaceHolder 2">
+            <a:extLst>
+              <a:ext uri="{FF2B5EF4-FFF2-40B4-BE49-F238E27FC236}">
+                <a16:creationId xmlns:a16="http://schemas.microsoft.com/office/drawing/2014/main" id="{882F6AA0-7E9C-930F-03EA-C24FDC7C2F84}"/>
+              </a:ext>
+            </a:extLst>
+          </p:cNvPr>
+          <p:cNvSpPr>
+            <a:spLocks noGrp="1"/>
+          </p:cNvSpPr>
+          <p:nvPr>
+            <p:ph type="body"/>
+          </p:nvPr>
+        </p:nvSpPr>
+        <p:spPr>
+          <a:xfrm>
+            <a:off x="685800" y="4400640"/>
+            <a:ext cx="5486040" cy="3600000"/>
+          </a:xfrm>
+          <a:prstGeom prst="rect">
+            <a:avLst/>
+          </a:prstGeom>
+          <a:noFill/>
+          <a:ln w="0">
+            <a:noFill/>
+          </a:ln>
+        </p:spPr>
+        <p:txBody>
+          <a:bodyPr lIns="91440" tIns="45720" rIns="91440" bIns="45720" anchor="t">
+            <a:noAutofit/>
+          </a:bodyPr>
+          <a:lstStyle/>
+          <a:p>
+            <a:pPr indent="0">
+              <a:buNone/>
+            </a:pPr>
+            <a:endParaRPr lang="en-GB" sz="1800" b="0" u="none" strike="noStrike">
+              <a:solidFill>
+                <a:srgbClr val="000000"/>
+              </a:solidFill>
+              <a:effectLst/>
+              <a:uFillTx/>
+              <a:latin typeface="Arial"/>
+            </a:endParaRPr>
+          </a:p>
+        </p:txBody>
+      </p:sp>
+      <p:sp>
+        <p:nvSpPr>
+          <p:cNvPr id="49" name="PlaceHolder 3">
+            <a:extLst>
+              <a:ext uri="{FF2B5EF4-FFF2-40B4-BE49-F238E27FC236}">
+                <a16:creationId xmlns:a16="http://schemas.microsoft.com/office/drawing/2014/main" id="{2E119531-952A-9FB9-4B31-1759DFF92B8D}"/>
+              </a:ext>
+            </a:extLst>
+          </p:cNvPr>
+          <p:cNvSpPr>
+            <a:spLocks noGrp="1"/>
+          </p:cNvSpPr>
+          <p:nvPr>
+            <p:ph type="sldNum" idx="7"/>
+          </p:nvPr>
+        </p:nvSpPr>
+        <p:spPr>
+          <a:xfrm>
+            <a:off x="3884760" y="8685360"/>
+            <a:ext cx="2971440" cy="458280"/>
+          </a:xfrm>
+          <a:prstGeom prst="rect">
+            <a:avLst/>
+          </a:prstGeom>
+          <a:noFill/>
+          <a:ln w="0">
+            <a:noFill/>
+          </a:ln>
+        </p:spPr>
+        <p:txBody>
+          <a:bodyPr lIns="91440" tIns="45720" rIns="91440" bIns="45720" anchor="b">
+            <a:noAutofit/>
+          </a:bodyPr>
+          <a:lstStyle>
+            <a:lvl1pPr indent="0" algn="r" defTabSz="914400">
+              <a:lnSpc>
+                <a:spcPct val="100000"/>
+              </a:lnSpc>
+              <a:buNone/>
+              <a:defRPr lang="en-US" sz="1200" b="0" u="none" strike="noStrike">
+                <a:solidFill>
+                  <a:schemeClr val="dk1"/>
+                </a:solidFill>
+                <a:effectLst/>
+                <a:uFillTx/>
+                <a:latin typeface="+mn-lt"/>
+                <a:ea typeface="+mn-ea"/>
+              </a:defRPr>
+            </a:lvl1pPr>
+          </a:lstStyle>
+          <a:p>
+            <a:pPr indent="0" algn="r" defTabSz="914400">
+              <a:lnSpc>
+                <a:spcPct val="100000"/>
+              </a:lnSpc>
+              <a:buNone/>
+            </a:pPr>
+            <a:fld id="{28D0F303-DBF3-46D2-9F7D-1C4CC5CDB2CF}" type="slidenum">
+              <a:rPr lang="en-US" sz="1200" b="0" u="none" strike="noStrike">
+                <a:solidFill>
+                  <a:schemeClr val="dk1"/>
+                </a:solidFill>
+                <a:effectLst/>
+                <a:uFillTx/>
+                <a:latin typeface="+mn-lt"/>
+                <a:ea typeface="+mn-ea"/>
+              </a:rPr>
+              <a:t>7</a:t>
+            </a:fld>
+            <a:endParaRPr lang="en-GB" sz="1200" b="0" u="none" strike="noStrike">
+              <a:solidFill>
+                <a:srgbClr val="000000"/>
+              </a:solidFill>
+              <a:effectLst/>
+              <a:uFillTx/>
+              <a:latin typeface="Times New Roman"/>
+            </a:endParaRPr>
+          </a:p>
+        </p:txBody>
+      </p:sp>
+    </p:spTree>
+    <p:extLst>
+      <p:ext uri="{BB962C8B-B14F-4D97-AF65-F5344CB8AC3E}">
+        <p14:creationId xmlns:p14="http://schemas.microsoft.com/office/powerpoint/2010/main" val="2490925917"/>
+      </p:ext>
+    </p:extLst>
+  </p:cSld>
+  <p:clrMapOvr>
+    <a:masterClrMapping/>
+  </p:clrMapOvr>
+</p:notes>
+</file>
+
+<file path=ppt/notesSlides/notesSlide8.xml><?xml version="1.0" encoding="utf-8"?>
+<p:notes xmlns:a="http://schemas.openxmlformats.org/drawingml/2006/main" xmlns:r="http://schemas.openxmlformats.org/officeDocument/2006/relationships" xmlns:p="http://schemas.openxmlformats.org/presentationml/2006/main">
   <p:cSld>
     <p:spTree>
       <p:nvGrpSpPr>
@@ -898,9 +1824,9 @@
       </p:grpSpPr>
       <p:sp>
         <p:nvSpPr>
-          <p:cNvPr id="47" name="PlaceHolder 1"/>
+          <p:cNvPr id="50" name="PlaceHolder 1"/>
           <p:cNvSpPr>
-            <a:spLocks noGrp="1"/>
+            <a:spLocks noGrp="1" noRot="1" noChangeAspect="1"/>
           </p:cNvSpPr>
           <p:nvPr>
             <p:ph type="sldImg"/>
@@ -909,7 +1835,7 @@
         <p:spPr>
           <a:xfrm>
             <a:off x="685800" y="1143000"/>
-            <a:ext cx="5486040" cy="3085920"/>
+            <a:ext cx="5486400" cy="3086100"/>
           </a:xfrm>
           <a:prstGeom prst="rect">
             <a:avLst/>
@@ -921,7 +1847,7 @@
       </p:sp>
       <p:sp>
         <p:nvSpPr>
-          <p:cNvPr id="48" name="PlaceHolder 2"/>
+          <p:cNvPr id="51" name="PlaceHolder 2"/>
           <p:cNvSpPr>
             <a:spLocks noGrp="1"/>
           </p:cNvSpPr>
@@ -943,14 +1869,15 @@
           </a:ln>
         </p:spPr>
         <p:txBody>
-          <a:bodyPr lIns="91440" rIns="91440" tIns="45720" bIns="45720" anchor="t">
+          <a:bodyPr lIns="91440" tIns="45720" rIns="91440" bIns="45720" anchor="t">
             <a:noAutofit/>
           </a:bodyPr>
+          <a:lstStyle/>
           <a:p>
             <a:pPr indent="0">
               <a:buNone/>
             </a:pPr>
-            <a:endParaRPr b="0" lang="en-GB" sz="1800" strike="noStrike" u="none">
+            <a:endParaRPr lang="en-GB" sz="1800" b="0" u="none" strike="noStrike">
               <a:solidFill>
                 <a:srgbClr val="000000"/>
               </a:solidFill>
@@ -963,12 +1890,12 @@
       </p:sp>
       <p:sp>
         <p:nvSpPr>
-          <p:cNvPr id="49" name="PlaceHolder 3"/>
+          <p:cNvPr id="52" name="PlaceHolder 3"/>
           <p:cNvSpPr>
             <a:spLocks noGrp="1"/>
           </p:cNvSpPr>
           <p:nvPr>
-            <p:ph type="sldNum" idx="7"/>
+            <p:ph type="sldNum" idx="8"/>
           </p:nvPr>
         </p:nvSpPr>
         <p:spPr>
@@ -985,7 +1912,7 @@
           </a:ln>
         </p:spPr>
         <p:txBody>
-          <a:bodyPr lIns="91440" rIns="91440" tIns="45720" bIns="45720" anchor="b">
+          <a:bodyPr lIns="91440" tIns="45720" rIns="91440" bIns="45720" anchor="b">
             <a:noAutofit/>
           </a:bodyPr>
           <a:lstStyle>
@@ -994,7 +1921,7 @@
                 <a:spcPct val="100000"/>
               </a:lnSpc>
               <a:buNone/>
-              <a:defRPr b="0" lang="en-US" sz="1200" strike="noStrike" u="none">
+              <a:defRPr lang="en-US" sz="1200" b="0" u="none" strike="noStrike">
                 <a:solidFill>
                   <a:schemeClr val="dk1"/>
                 </a:solidFill>
@@ -1012,8 +1939,8 @@
               </a:lnSpc>
               <a:buNone/>
             </a:pPr>
-            <a:fld id="{28D0F303-DBF3-46D2-9F7D-1C4CC5CDB2CF}" type="slidenum">
-              <a:rPr b="0" lang="en-US" sz="1200" strike="noStrike" u="none">
+            <a:fld id="{1A5C25F5-003D-4B3C-9571-C8DFCAC02A87}" type="slidenum">
+              <a:rPr lang="en-US" sz="1200" b="0" u="none" strike="noStrike">
                 <a:solidFill>
                   <a:schemeClr val="dk1"/>
                 </a:solidFill>
@@ -1022,9 +1949,9 @@
                 <a:latin typeface="+mn-lt"/>
                 <a:ea typeface="+mn-ea"/>
               </a:rPr>
-              <a:t>&lt;number&gt;</a:t>
+              <a:t>5</a:t>
             </a:fld>
-            <a:endParaRPr b="0" lang="en-GB" sz="1200" strike="noStrike" u="none">
+            <a:endParaRPr lang="en-GB" sz="1200" b="0" u="none" strike="noStrike">
               <a:solidFill>
                 <a:srgbClr val="000000"/>
               </a:solidFill>
@@ -1037,172 +1964,14 @@
       </p:sp>
     </p:spTree>
   </p:cSld>
-</p:notes>
-</file>
-
-<file path=ppt/notesSlides/notesSlide5.xml><?xml version="1.0" encoding="utf-8"?>
-<p:notes xmlns:a="http://schemas.openxmlformats.org/drawingml/2006/main" xmlns:p="http://schemas.openxmlformats.org/presentationml/2006/main" xmlns:r="http://schemas.openxmlformats.org/officeDocument/2006/relationships" xmlns:p14="http://schemas.microsoft.com/office/powerpoint/2010/main" xmlns:p15="http://schemas.microsoft.com/office/powerpoint/2012/main" xmlns:mc="http://schemas.openxmlformats.org/markup-compatibility/2006">
-  <p:cSld>
-    <p:spTree>
-      <p:nvGrpSpPr>
-        <p:cNvPr id="1" name=""/>
-        <p:cNvGrpSpPr/>
-        <p:nvPr/>
-      </p:nvGrpSpPr>
-      <p:grpSpPr>
-        <a:xfrm>
-          <a:off x="0" y="0"/>
-          <a:ext cx="0" cy="0"/>
-          <a:chOff x="0" y="0"/>
-          <a:chExt cx="0" cy="0"/>
-        </a:xfrm>
-      </p:grpSpPr>
-      <p:sp>
-        <p:nvSpPr>
-          <p:cNvPr id="50" name="PlaceHolder 1"/>
-          <p:cNvSpPr>
-            <a:spLocks noGrp="1"/>
-          </p:cNvSpPr>
-          <p:nvPr>
-            <p:ph type="sldImg"/>
-          </p:nvPr>
-        </p:nvSpPr>
-        <p:spPr>
-          <a:xfrm>
-            <a:off x="685800" y="1143000"/>
-            <a:ext cx="5486040" cy="3085920"/>
-          </a:xfrm>
-          <a:prstGeom prst="rect">
-            <a:avLst/>
-          </a:prstGeom>
-          <a:ln w="0">
-            <a:noFill/>
-          </a:ln>
-        </p:spPr>
-      </p:sp>
-      <p:sp>
-        <p:nvSpPr>
-          <p:cNvPr id="51" name="PlaceHolder 2"/>
-          <p:cNvSpPr>
-            <a:spLocks noGrp="1"/>
-          </p:cNvSpPr>
-          <p:nvPr>
-            <p:ph type="body"/>
-          </p:nvPr>
-        </p:nvSpPr>
-        <p:spPr>
-          <a:xfrm>
-            <a:off x="685800" y="4400640"/>
-            <a:ext cx="5486040" cy="3600000"/>
-          </a:xfrm>
-          <a:prstGeom prst="rect">
-            <a:avLst/>
-          </a:prstGeom>
-          <a:noFill/>
-          <a:ln w="0">
-            <a:noFill/>
-          </a:ln>
-        </p:spPr>
-        <p:txBody>
-          <a:bodyPr lIns="91440" rIns="91440" tIns="45720" bIns="45720" anchor="t">
-            <a:noAutofit/>
-          </a:bodyPr>
-          <a:p>
-            <a:pPr indent="0">
-              <a:buNone/>
-            </a:pPr>
-            <a:endParaRPr b="0" lang="en-GB" sz="1800" strike="noStrike" u="none">
-              <a:solidFill>
-                <a:srgbClr val="000000"/>
-              </a:solidFill>
-              <a:effectLst/>
-              <a:uFillTx/>
-              <a:latin typeface="Arial"/>
-            </a:endParaRPr>
-          </a:p>
-        </p:txBody>
-      </p:sp>
-      <p:sp>
-        <p:nvSpPr>
-          <p:cNvPr id="52" name="PlaceHolder 3"/>
-          <p:cNvSpPr>
-            <a:spLocks noGrp="1"/>
-          </p:cNvSpPr>
-          <p:nvPr>
-            <p:ph type="sldNum" idx="8"/>
-          </p:nvPr>
-        </p:nvSpPr>
-        <p:spPr>
-          <a:xfrm>
-            <a:off x="3884760" y="8685360"/>
-            <a:ext cx="2971440" cy="458280"/>
-          </a:xfrm>
-          <a:prstGeom prst="rect">
-            <a:avLst/>
-          </a:prstGeom>
-          <a:noFill/>
-          <a:ln w="0">
-            <a:noFill/>
-          </a:ln>
-        </p:spPr>
-        <p:txBody>
-          <a:bodyPr lIns="91440" rIns="91440" tIns="45720" bIns="45720" anchor="b">
-            <a:noAutofit/>
-          </a:bodyPr>
-          <a:lstStyle>
-            <a:lvl1pPr indent="0" algn="r" defTabSz="914400">
-              <a:lnSpc>
-                <a:spcPct val="100000"/>
-              </a:lnSpc>
-              <a:buNone/>
-              <a:defRPr b="0" lang="en-US" sz="1200" strike="noStrike" u="none">
-                <a:solidFill>
-                  <a:schemeClr val="dk1"/>
-                </a:solidFill>
-                <a:effectLst/>
-                <a:uFillTx/>
-                <a:latin typeface="+mn-lt"/>
-                <a:ea typeface="+mn-ea"/>
-              </a:defRPr>
-            </a:lvl1pPr>
-          </a:lstStyle>
-          <a:p>
-            <a:pPr indent="0" algn="r" defTabSz="914400">
-              <a:lnSpc>
-                <a:spcPct val="100000"/>
-              </a:lnSpc>
-              <a:buNone/>
-            </a:pPr>
-            <a:fld id="{1A5C25F5-003D-4B3C-9571-C8DFCAC02A87}" type="slidenum">
-              <a:rPr b="0" lang="en-US" sz="1200" strike="noStrike" u="none">
-                <a:solidFill>
-                  <a:schemeClr val="dk1"/>
-                </a:solidFill>
-                <a:effectLst/>
-                <a:uFillTx/>
-                <a:latin typeface="+mn-lt"/>
-                <a:ea typeface="+mn-ea"/>
-              </a:rPr>
-              <a:t>&lt;number&gt;</a:t>
-            </a:fld>
-            <a:endParaRPr b="0" lang="en-GB" sz="1200" strike="noStrike" u="none">
-              <a:solidFill>
-                <a:srgbClr val="000000"/>
-              </a:solidFill>
-              <a:effectLst/>
-              <a:uFillTx/>
-              <a:latin typeface="Times New Roman"/>
-            </a:endParaRPr>
-          </a:p>
-        </p:txBody>
-      </p:sp>
-    </p:spTree>
-  </p:cSld>
+  <p:clrMapOvr>
+    <a:masterClrMapping/>
+  </p:clrMapOvr>
 </p:notes>
 </file>
 
 <file path=ppt/slideLayouts/slideLayout1.xml><?xml version="1.0" encoding="utf-8"?>
-<p:sldLayout xmlns:a="http://schemas.openxmlformats.org/drawingml/2006/main" xmlns:p="http://schemas.openxmlformats.org/presentationml/2006/main" xmlns:r="http://schemas.openxmlformats.org/officeDocument/2006/relationships" xmlns:p14="http://schemas.microsoft.com/office/powerpoint/2010/main" xmlns:p15="http://schemas.microsoft.com/office/powerpoint/2012/main" xmlns:mc="http://schemas.openxmlformats.org/markup-compatibility/2006" type="blank" preserve="1">
+<p:sldLayout xmlns:a="http://schemas.openxmlformats.org/drawingml/2006/main" xmlns:r="http://schemas.openxmlformats.org/officeDocument/2006/relationships" xmlns:p="http://schemas.openxmlformats.org/presentationml/2006/main" type="blank" preserve="1">
   <p:cSld name="DEFAULT">
     <p:spTree>
       <p:nvGrpSpPr>
@@ -1220,17 +1989,21 @@
       </p:grpSpPr>
     </p:spTree>
   </p:cSld>
+  <p:clrMapOvr>
+    <a:masterClrMapping/>
+  </p:clrMapOvr>
 </p:sldLayout>
 </file>
 
 <file path=ppt/slideMasters/slideMaster1.xml><?xml version="1.0" encoding="utf-8"?>
-<p:sldMaster xmlns:a="http://schemas.openxmlformats.org/drawingml/2006/main" xmlns:p="http://schemas.openxmlformats.org/presentationml/2006/main" xmlns:r="http://schemas.openxmlformats.org/officeDocument/2006/relationships" xmlns:p14="http://schemas.microsoft.com/office/powerpoint/2010/main" xmlns:p15="http://schemas.microsoft.com/office/powerpoint/2012/main" xmlns:mc="http://schemas.openxmlformats.org/markup-compatibility/2006">
+<p:sldMaster xmlns:a="http://schemas.openxmlformats.org/drawingml/2006/main" xmlns:r="http://schemas.openxmlformats.org/officeDocument/2006/relationships" xmlns:p="http://schemas.openxmlformats.org/presentationml/2006/main">
   <p:cSld>
     <p:bg>
       <p:bgPr>
         <a:solidFill>
-          <a:srgbClr val="ffffff"/>
+          <a:srgbClr val="FFFFFF"/>
         </a:solidFill>
+        <a:effectLst/>
       </p:bgPr>
     </p:bg>
     <p:spTree>
@@ -1249,7 +2022,7 @@
       </p:grpSpPr>
       <p:sp>
         <p:nvSpPr>
-          <p:cNvPr id="0" name="PlaceHolder 1"/>
+          <p:cNvPr id="2" name="PlaceHolder 1"/>
           <p:cNvSpPr>
             <a:spLocks noGrp="1"/>
           </p:cNvSpPr>
@@ -1271,15 +2044,16 @@
           </a:ln>
         </p:spPr>
         <p:txBody>
-          <a:bodyPr lIns="0" rIns="0" tIns="0" bIns="0" anchor="ctr">
+          <a:bodyPr lIns="0" tIns="0" rIns="0" bIns="0" anchor="ctr">
             <a:noAutofit/>
           </a:bodyPr>
+          <a:lstStyle/>
           <a:p>
             <a:pPr indent="0">
               <a:buNone/>
             </a:pPr>
             <a:r>
-              <a:rPr b="0" lang="en-GB" sz="1800" strike="noStrike" u="none">
+              <a:rPr lang="en-GB" sz="1800" b="0" u="none" strike="noStrike">
                 <a:solidFill>
                   <a:schemeClr val="dk1"/>
                 </a:solidFill>
@@ -1289,20 +2063,12 @@
               </a:rPr>
               <a:t>Click to edit the title text format</a:t>
             </a:r>
-            <a:endParaRPr b="0" lang="en-GB" sz="1800" strike="noStrike" u="none">
-              <a:solidFill>
-                <a:schemeClr val="dk1"/>
-              </a:solidFill>
-              <a:effectLst/>
-              <a:uFillTx/>
-              <a:latin typeface="Calibri"/>
-            </a:endParaRPr>
           </a:p>
         </p:txBody>
       </p:sp>
       <p:sp>
         <p:nvSpPr>
-          <p:cNvPr id="1" name="PlaceHolder 2"/>
+          <p:cNvPr id="3" name="PlaceHolder 2"/>
           <p:cNvSpPr>
             <a:spLocks noGrp="1"/>
           </p:cNvSpPr>
@@ -1324,9 +2090,10 @@
           </a:ln>
         </p:spPr>
         <p:txBody>
-          <a:bodyPr lIns="0" rIns="0" tIns="0" bIns="0" anchor="t">
+          <a:bodyPr lIns="0" tIns="0" rIns="0" bIns="0" anchor="t">
             <a:normAutofit/>
           </a:bodyPr>
+          <a:lstStyle/>
           <a:p>
             <a:pPr marL="432000" indent="-324000">
               <a:spcBef>
@@ -1340,7 +2107,7 @@
               <a:buChar char=""/>
             </a:pPr>
             <a:r>
-              <a:rPr b="0" lang="en-GB" sz="3200" strike="noStrike" u="none">
+              <a:rPr lang="en-GB" sz="3200" b="0" u="none" strike="noStrike">
                 <a:solidFill>
                   <a:schemeClr val="dk1"/>
                 </a:solidFill>
@@ -1350,17 +2117,9 @@
               </a:rPr>
               <a:t>Click to edit the outline text format</a:t>
             </a:r>
-            <a:endParaRPr b="0" lang="en-GB" sz="3200" strike="noStrike" u="none">
-              <a:solidFill>
-                <a:schemeClr val="dk1"/>
-              </a:solidFill>
-              <a:effectLst/>
-              <a:uFillTx/>
-              <a:latin typeface="Calibri"/>
-            </a:endParaRPr>
-          </a:p>
-          <a:p>
-            <a:pPr lvl="1" marL="864000" indent="-324000">
+          </a:p>
+          <a:p>
+            <a:pPr marL="864000" lvl="1" indent="-324000">
               <a:spcBef>
                 <a:spcPts val="1134"/>
               </a:spcBef>
@@ -1372,7 +2131,7 @@
               <a:buChar char=""/>
             </a:pPr>
             <a:r>
-              <a:rPr b="0" lang="en-GB" sz="2400" strike="noStrike" u="none">
+              <a:rPr lang="en-GB" sz="2400" b="0" u="none" strike="noStrike">
                 <a:solidFill>
                   <a:schemeClr val="dk1"/>
                 </a:solidFill>
@@ -1382,17 +2141,9 @@
               </a:rPr>
               <a:t>Second Outline Level</a:t>
             </a:r>
-            <a:endParaRPr b="0" lang="en-GB" sz="2400" strike="noStrike" u="none">
-              <a:solidFill>
-                <a:schemeClr val="dk1"/>
-              </a:solidFill>
-              <a:effectLst/>
-              <a:uFillTx/>
-              <a:latin typeface="Calibri"/>
-            </a:endParaRPr>
-          </a:p>
-          <a:p>
-            <a:pPr lvl="2" marL="1296000" indent="-288000">
+          </a:p>
+          <a:p>
+            <a:pPr marL="1296000" lvl="2" indent="-288000">
               <a:spcBef>
                 <a:spcPts val="850"/>
               </a:spcBef>
@@ -1404,7 +2155,7 @@
               <a:buChar char=""/>
             </a:pPr>
             <a:r>
-              <a:rPr b="0" lang="en-GB" sz="2000" strike="noStrike" u="none">
+              <a:rPr lang="en-GB" sz="2000" b="0" u="none" strike="noStrike">
                 <a:solidFill>
                   <a:schemeClr val="dk1"/>
                 </a:solidFill>
@@ -1414,17 +2165,9 @@
               </a:rPr>
               <a:t>Third Outline Level</a:t>
             </a:r>
-            <a:endParaRPr b="0" lang="en-GB" sz="2000" strike="noStrike" u="none">
-              <a:solidFill>
-                <a:schemeClr val="dk1"/>
-              </a:solidFill>
-              <a:effectLst/>
-              <a:uFillTx/>
-              <a:latin typeface="Calibri"/>
-            </a:endParaRPr>
-          </a:p>
-          <a:p>
-            <a:pPr lvl="3" marL="1728000" indent="-216000">
+          </a:p>
+          <a:p>
+            <a:pPr marL="1728000" lvl="3" indent="-216000">
               <a:spcBef>
                 <a:spcPts val="567"/>
               </a:spcBef>
@@ -1436,7 +2179,7 @@
               <a:buChar char=""/>
             </a:pPr>
             <a:r>
-              <a:rPr b="0" lang="en-GB" sz="2000" strike="noStrike" u="none">
+              <a:rPr lang="en-GB" sz="2000" b="0" u="none" strike="noStrike">
                 <a:solidFill>
                   <a:schemeClr val="dk1"/>
                 </a:solidFill>
@@ -1446,17 +2189,9 @@
               </a:rPr>
               <a:t>Fourth Outline Level</a:t>
             </a:r>
-            <a:endParaRPr b="0" lang="en-GB" sz="2000" strike="noStrike" u="none">
-              <a:solidFill>
-                <a:schemeClr val="dk1"/>
-              </a:solidFill>
-              <a:effectLst/>
-              <a:uFillTx/>
-              <a:latin typeface="Calibri"/>
-            </a:endParaRPr>
-          </a:p>
-          <a:p>
-            <a:pPr lvl="4" marL="2160000" indent="-216000">
+          </a:p>
+          <a:p>
+            <a:pPr marL="2160000" lvl="4" indent="-216000">
               <a:spcBef>
                 <a:spcPts val="283"/>
               </a:spcBef>
@@ -1468,7 +2203,7 @@
               <a:buChar char=""/>
             </a:pPr>
             <a:r>
-              <a:rPr b="0" lang="en-GB" sz="2000" strike="noStrike" u="none">
+              <a:rPr lang="en-GB" sz="2000" b="0" u="none" strike="noStrike">
                 <a:solidFill>
                   <a:schemeClr val="dk1"/>
                 </a:solidFill>
@@ -1478,17 +2213,9 @@
               </a:rPr>
               <a:t>Fifth Outline Level</a:t>
             </a:r>
-            <a:endParaRPr b="0" lang="en-GB" sz="2000" strike="noStrike" u="none">
-              <a:solidFill>
-                <a:schemeClr val="dk1"/>
-              </a:solidFill>
-              <a:effectLst/>
-              <a:uFillTx/>
-              <a:latin typeface="Calibri"/>
-            </a:endParaRPr>
-          </a:p>
-          <a:p>
-            <a:pPr lvl="5" marL="2592000" indent="-216000">
+          </a:p>
+          <a:p>
+            <a:pPr marL="2592000" lvl="5" indent="-216000">
               <a:spcBef>
                 <a:spcPts val="283"/>
               </a:spcBef>
@@ -1500,7 +2227,7 @@
               <a:buChar char=""/>
             </a:pPr>
             <a:r>
-              <a:rPr b="0" lang="en-GB" sz="2000" strike="noStrike" u="none">
+              <a:rPr lang="en-GB" sz="2000" b="0" u="none" strike="noStrike">
                 <a:solidFill>
                   <a:schemeClr val="dk1"/>
                 </a:solidFill>
@@ -1510,17 +2237,9 @@
               </a:rPr>
               <a:t>Sixth Outline Level</a:t>
             </a:r>
-            <a:endParaRPr b="0" lang="en-GB" sz="2000" strike="noStrike" u="none">
-              <a:solidFill>
-                <a:schemeClr val="dk1"/>
-              </a:solidFill>
-              <a:effectLst/>
-              <a:uFillTx/>
-              <a:latin typeface="Calibri"/>
-            </a:endParaRPr>
-          </a:p>
-          <a:p>
-            <a:pPr lvl="6" marL="3024000" indent="-216000">
+          </a:p>
+          <a:p>
+            <a:pPr marL="3024000" lvl="6" indent="-216000">
               <a:spcBef>
                 <a:spcPts val="283"/>
               </a:spcBef>
@@ -1532,7 +2251,7 @@
               <a:buChar char=""/>
             </a:pPr>
             <a:r>
-              <a:rPr b="0" lang="en-GB" sz="2000" strike="noStrike" u="none">
+              <a:rPr lang="en-GB" sz="2000" b="0" u="none" strike="noStrike">
                 <a:solidFill>
                   <a:schemeClr val="dk1"/>
                 </a:solidFill>
@@ -1542,14 +2261,6 @@
               </a:rPr>
               <a:t>Seventh Outline Level</a:t>
             </a:r>
-            <a:endParaRPr b="0" lang="en-GB" sz="2000" strike="noStrike" u="none">
-              <a:solidFill>
-                <a:schemeClr val="dk1"/>
-              </a:solidFill>
-              <a:effectLst/>
-              <a:uFillTx/>
-              <a:latin typeface="Calibri"/>
-            </a:endParaRPr>
           </a:p>
         </p:txBody>
       </p:sp>
@@ -1557,19 +2268,300 @@
   </p:cSld>
   <p:clrMap bg1="lt1" tx1="dk1" bg2="lt2" tx2="dk2" accent1="accent1" accent2="accent2" accent3="accent3" accent4="accent4" accent5="accent5" accent6="accent6" hlink="hlink" folHlink="folHlink"/>
   <p:sldLayoutIdLst>
-    <p:sldLayoutId id="2147483649" r:id="rId2"/>
+    <p:sldLayoutId id="2147483649" r:id="rId1"/>
   </p:sldLayoutIdLst>
+  <p:txStyles>
+    <p:titleStyle>
+      <a:lvl1pPr algn="l" defTabSz="914400" rtl="0" eaLnBrk="1" latinLnBrk="0" hangingPunct="1">
+        <a:lnSpc>
+          <a:spcPct val="90000"/>
+        </a:lnSpc>
+        <a:spcBef>
+          <a:spcPct val="0"/>
+        </a:spcBef>
+        <a:buNone/>
+        <a:defRPr sz="4400" kern="1200">
+          <a:solidFill>
+            <a:schemeClr val="tx1"/>
+          </a:solidFill>
+          <a:latin typeface="+mj-lt"/>
+          <a:ea typeface="+mj-ea"/>
+          <a:cs typeface="+mj-cs"/>
+        </a:defRPr>
+      </a:lvl1pPr>
+    </p:titleStyle>
+    <p:bodyStyle>
+      <a:lvl1pPr marL="228600" indent="-228600" algn="l" defTabSz="914400" rtl="0" eaLnBrk="1" latinLnBrk="0" hangingPunct="1">
+        <a:lnSpc>
+          <a:spcPct val="90000"/>
+        </a:lnSpc>
+        <a:spcBef>
+          <a:spcPts val="1000"/>
+        </a:spcBef>
+        <a:buFont typeface="Arial" panose="020B0604020202020204" pitchFamily="34" charset="0"/>
+        <a:buChar char="•"/>
+        <a:defRPr sz="2800" kern="1200">
+          <a:solidFill>
+            <a:schemeClr val="tx1"/>
+          </a:solidFill>
+          <a:latin typeface="+mn-lt"/>
+          <a:ea typeface="+mn-ea"/>
+          <a:cs typeface="+mn-cs"/>
+        </a:defRPr>
+      </a:lvl1pPr>
+      <a:lvl2pPr marL="685800" indent="-228600" algn="l" defTabSz="914400" rtl="0" eaLnBrk="1" latinLnBrk="0" hangingPunct="1">
+        <a:lnSpc>
+          <a:spcPct val="90000"/>
+        </a:lnSpc>
+        <a:spcBef>
+          <a:spcPts val="500"/>
+        </a:spcBef>
+        <a:buFont typeface="Arial" panose="020B0604020202020204" pitchFamily="34" charset="0"/>
+        <a:buChar char="•"/>
+        <a:defRPr sz="2400" kern="1200">
+          <a:solidFill>
+            <a:schemeClr val="tx1"/>
+          </a:solidFill>
+          <a:latin typeface="+mn-lt"/>
+          <a:ea typeface="+mn-ea"/>
+          <a:cs typeface="+mn-cs"/>
+        </a:defRPr>
+      </a:lvl2pPr>
+      <a:lvl3pPr marL="1143000" indent="-228600" algn="l" defTabSz="914400" rtl="0" eaLnBrk="1" latinLnBrk="0" hangingPunct="1">
+        <a:lnSpc>
+          <a:spcPct val="90000"/>
+        </a:lnSpc>
+        <a:spcBef>
+          <a:spcPts val="500"/>
+        </a:spcBef>
+        <a:buFont typeface="Arial" panose="020B0604020202020204" pitchFamily="34" charset="0"/>
+        <a:buChar char="•"/>
+        <a:defRPr sz="2000" kern="1200">
+          <a:solidFill>
+            <a:schemeClr val="tx1"/>
+          </a:solidFill>
+          <a:latin typeface="+mn-lt"/>
+          <a:ea typeface="+mn-ea"/>
+          <a:cs typeface="+mn-cs"/>
+        </a:defRPr>
+      </a:lvl3pPr>
+      <a:lvl4pPr marL="1600200" indent="-228600" algn="l" defTabSz="914400" rtl="0" eaLnBrk="1" latinLnBrk="0" hangingPunct="1">
+        <a:lnSpc>
+          <a:spcPct val="90000"/>
+        </a:lnSpc>
+        <a:spcBef>
+          <a:spcPts val="500"/>
+        </a:spcBef>
+        <a:buFont typeface="Arial" panose="020B0604020202020204" pitchFamily="34" charset="0"/>
+        <a:buChar char="•"/>
+        <a:defRPr sz="1800" kern="1200">
+          <a:solidFill>
+            <a:schemeClr val="tx1"/>
+          </a:solidFill>
+          <a:latin typeface="+mn-lt"/>
+          <a:ea typeface="+mn-ea"/>
+          <a:cs typeface="+mn-cs"/>
+        </a:defRPr>
+      </a:lvl4pPr>
+      <a:lvl5pPr marL="2057400" indent="-228600" algn="l" defTabSz="914400" rtl="0" eaLnBrk="1" latinLnBrk="0" hangingPunct="1">
+        <a:lnSpc>
+          <a:spcPct val="90000"/>
+        </a:lnSpc>
+        <a:spcBef>
+          <a:spcPts val="500"/>
+        </a:spcBef>
+        <a:buFont typeface="Arial" panose="020B0604020202020204" pitchFamily="34" charset="0"/>
+        <a:buChar char="•"/>
+        <a:defRPr sz="1800" kern="1200">
+          <a:solidFill>
+            <a:schemeClr val="tx1"/>
+          </a:solidFill>
+          <a:latin typeface="+mn-lt"/>
+          <a:ea typeface="+mn-ea"/>
+          <a:cs typeface="+mn-cs"/>
+        </a:defRPr>
+      </a:lvl5pPr>
+      <a:lvl6pPr marL="2514600" indent="-228600" algn="l" defTabSz="914400" rtl="0" eaLnBrk="1" latinLnBrk="0" hangingPunct="1">
+        <a:lnSpc>
+          <a:spcPct val="90000"/>
+        </a:lnSpc>
+        <a:spcBef>
+          <a:spcPts val="500"/>
+        </a:spcBef>
+        <a:buFont typeface="Arial" panose="020B0604020202020204" pitchFamily="34" charset="0"/>
+        <a:buChar char="•"/>
+        <a:defRPr sz="1800" kern="1200">
+          <a:solidFill>
+            <a:schemeClr val="tx1"/>
+          </a:solidFill>
+          <a:latin typeface="+mn-lt"/>
+          <a:ea typeface="+mn-ea"/>
+          <a:cs typeface="+mn-cs"/>
+        </a:defRPr>
+      </a:lvl6pPr>
+      <a:lvl7pPr marL="2971800" indent="-228600" algn="l" defTabSz="914400" rtl="0" eaLnBrk="1" latinLnBrk="0" hangingPunct="1">
+        <a:lnSpc>
+          <a:spcPct val="90000"/>
+        </a:lnSpc>
+        <a:spcBef>
+          <a:spcPts val="500"/>
+        </a:spcBef>
+        <a:buFont typeface="Arial" panose="020B0604020202020204" pitchFamily="34" charset="0"/>
+        <a:buChar char="•"/>
+        <a:defRPr sz="1800" kern="1200">
+          <a:solidFill>
+            <a:schemeClr val="tx1"/>
+          </a:solidFill>
+          <a:latin typeface="+mn-lt"/>
+          <a:ea typeface="+mn-ea"/>
+          <a:cs typeface="+mn-cs"/>
+        </a:defRPr>
+      </a:lvl7pPr>
+      <a:lvl8pPr marL="3429000" indent="-228600" algn="l" defTabSz="914400" rtl="0" eaLnBrk="1" latinLnBrk="0" hangingPunct="1">
+        <a:lnSpc>
+          <a:spcPct val="90000"/>
+        </a:lnSpc>
+        <a:spcBef>
+          <a:spcPts val="500"/>
+        </a:spcBef>
+        <a:buFont typeface="Arial" panose="020B0604020202020204" pitchFamily="34" charset="0"/>
+        <a:buChar char="•"/>
+        <a:defRPr sz="1800" kern="1200">
+          <a:solidFill>
+            <a:schemeClr val="tx1"/>
+          </a:solidFill>
+          <a:latin typeface="+mn-lt"/>
+          <a:ea typeface="+mn-ea"/>
+          <a:cs typeface="+mn-cs"/>
+        </a:defRPr>
+      </a:lvl8pPr>
+      <a:lvl9pPr marL="3886200" indent="-228600" algn="l" defTabSz="914400" rtl="0" eaLnBrk="1" latinLnBrk="0" hangingPunct="1">
+        <a:lnSpc>
+          <a:spcPct val="90000"/>
+        </a:lnSpc>
+        <a:spcBef>
+          <a:spcPts val="500"/>
+        </a:spcBef>
+        <a:buFont typeface="Arial" panose="020B0604020202020204" pitchFamily="34" charset="0"/>
+        <a:buChar char="•"/>
+        <a:defRPr sz="1800" kern="1200">
+          <a:solidFill>
+            <a:schemeClr val="tx1"/>
+          </a:solidFill>
+          <a:latin typeface="+mn-lt"/>
+          <a:ea typeface="+mn-ea"/>
+          <a:cs typeface="+mn-cs"/>
+        </a:defRPr>
+      </a:lvl9pPr>
+    </p:bodyStyle>
+    <p:otherStyle>
+      <a:defPPr>
+        <a:defRPr lang="de-DE"/>
+      </a:defPPr>
+      <a:lvl1pPr marL="0" algn="l" defTabSz="914400" rtl="0" eaLnBrk="1" latinLnBrk="0" hangingPunct="1">
+        <a:defRPr sz="1800" kern="1200">
+          <a:solidFill>
+            <a:schemeClr val="tx1"/>
+          </a:solidFill>
+          <a:latin typeface="+mn-lt"/>
+          <a:ea typeface="+mn-ea"/>
+          <a:cs typeface="+mn-cs"/>
+        </a:defRPr>
+      </a:lvl1pPr>
+      <a:lvl2pPr marL="457200" algn="l" defTabSz="914400" rtl="0" eaLnBrk="1" latinLnBrk="0" hangingPunct="1">
+        <a:defRPr sz="1800" kern="1200">
+          <a:solidFill>
+            <a:schemeClr val="tx1"/>
+          </a:solidFill>
+          <a:latin typeface="+mn-lt"/>
+          <a:ea typeface="+mn-ea"/>
+          <a:cs typeface="+mn-cs"/>
+        </a:defRPr>
+      </a:lvl2pPr>
+      <a:lvl3pPr marL="914400" algn="l" defTabSz="914400" rtl="0" eaLnBrk="1" latinLnBrk="0" hangingPunct="1">
+        <a:defRPr sz="1800" kern="1200">
+          <a:solidFill>
+            <a:schemeClr val="tx1"/>
+          </a:solidFill>
+          <a:latin typeface="+mn-lt"/>
+          <a:ea typeface="+mn-ea"/>
+          <a:cs typeface="+mn-cs"/>
+        </a:defRPr>
+      </a:lvl3pPr>
+      <a:lvl4pPr marL="1371600" algn="l" defTabSz="914400" rtl="0" eaLnBrk="1" latinLnBrk="0" hangingPunct="1">
+        <a:defRPr sz="1800" kern="1200">
+          <a:solidFill>
+            <a:schemeClr val="tx1"/>
+          </a:solidFill>
+          <a:latin typeface="+mn-lt"/>
+          <a:ea typeface="+mn-ea"/>
+          <a:cs typeface="+mn-cs"/>
+        </a:defRPr>
+      </a:lvl4pPr>
+      <a:lvl5pPr marL="1828800" algn="l" defTabSz="914400" rtl="0" eaLnBrk="1" latinLnBrk="0" hangingPunct="1">
+        <a:defRPr sz="1800" kern="1200">
+          <a:solidFill>
+            <a:schemeClr val="tx1"/>
+          </a:solidFill>
+          <a:latin typeface="+mn-lt"/>
+          <a:ea typeface="+mn-ea"/>
+          <a:cs typeface="+mn-cs"/>
+        </a:defRPr>
+      </a:lvl5pPr>
+      <a:lvl6pPr marL="2286000" algn="l" defTabSz="914400" rtl="0" eaLnBrk="1" latinLnBrk="0" hangingPunct="1">
+        <a:defRPr sz="1800" kern="1200">
+          <a:solidFill>
+            <a:schemeClr val="tx1"/>
+          </a:solidFill>
+          <a:latin typeface="+mn-lt"/>
+          <a:ea typeface="+mn-ea"/>
+          <a:cs typeface="+mn-cs"/>
+        </a:defRPr>
+      </a:lvl6pPr>
+      <a:lvl7pPr marL="2743200" algn="l" defTabSz="914400" rtl="0" eaLnBrk="1" latinLnBrk="0" hangingPunct="1">
+        <a:defRPr sz="1800" kern="1200">
+          <a:solidFill>
+            <a:schemeClr val="tx1"/>
+          </a:solidFill>
+          <a:latin typeface="+mn-lt"/>
+          <a:ea typeface="+mn-ea"/>
+          <a:cs typeface="+mn-cs"/>
+        </a:defRPr>
+      </a:lvl7pPr>
+      <a:lvl8pPr marL="3200400" algn="l" defTabSz="914400" rtl="0" eaLnBrk="1" latinLnBrk="0" hangingPunct="1">
+        <a:defRPr sz="1800" kern="1200">
+          <a:solidFill>
+            <a:schemeClr val="tx1"/>
+          </a:solidFill>
+          <a:latin typeface="+mn-lt"/>
+          <a:ea typeface="+mn-ea"/>
+          <a:cs typeface="+mn-cs"/>
+        </a:defRPr>
+      </a:lvl8pPr>
+      <a:lvl9pPr marL="3657600" algn="l" defTabSz="914400" rtl="0" eaLnBrk="1" latinLnBrk="0" hangingPunct="1">
+        <a:defRPr sz="1800" kern="1200">
+          <a:solidFill>
+            <a:schemeClr val="tx1"/>
+          </a:solidFill>
+          <a:latin typeface="+mn-lt"/>
+          <a:ea typeface="+mn-ea"/>
+          <a:cs typeface="+mn-cs"/>
+        </a:defRPr>
+      </a:lvl9pPr>
+    </p:otherStyle>
+  </p:txStyles>
 </p:sldMaster>
 </file>
 
 <file path=ppt/slides/slide1.xml><?xml version="1.0" encoding="utf-8"?>
-<p:sld xmlns:a="http://schemas.openxmlformats.org/drawingml/2006/main" xmlns:p="http://schemas.openxmlformats.org/presentationml/2006/main" xmlns:r="http://schemas.openxmlformats.org/officeDocument/2006/relationships" xmlns:p14="http://schemas.microsoft.com/office/powerpoint/2010/main" xmlns:p15="http://schemas.microsoft.com/office/powerpoint/2012/main" xmlns:mc="http://schemas.openxmlformats.org/markup-compatibility/2006">
+<p:sld xmlns:a="http://schemas.openxmlformats.org/drawingml/2006/main" xmlns:r="http://schemas.openxmlformats.org/officeDocument/2006/relationships" xmlns:p="http://schemas.openxmlformats.org/presentationml/2006/main">
   <p:cSld>
     <p:bg>
       <p:bgPr>
         <a:solidFill>
-          <a:srgbClr val="005b96"/>
+          <a:srgbClr val="005B96"/>
         </a:solidFill>
+        <a:effectLst/>
       </p:bgPr>
     </p:bg>
     <p:spTree>
@@ -1601,32 +2593,39 @@
             <a:avLst/>
           </a:prstGeom>
           <a:solidFill>
-            <a:srgbClr val="ffffff"/>
+            <a:srgbClr val="FFFFFF"/>
           </a:solidFill>
           <a:ln w="0">
             <a:noFill/>
           </a:ln>
         </p:spPr>
         <p:style>
-          <a:lnRef idx="0"/>
-          <a:fillRef idx="0"/>
-          <a:effectRef idx="0"/>
+          <a:lnRef idx="0">
+            <a:scrgbClr r="0" g="0" b="0"/>
+          </a:lnRef>
+          <a:fillRef idx="0">
+            <a:scrgbClr r="0" g="0" b="0"/>
+          </a:fillRef>
+          <a:effectRef idx="0">
+            <a:scrgbClr r="0" g="0" b="0"/>
+          </a:effectRef>
           <a:fontRef idx="minor"/>
         </p:style>
         <p:txBody>
-          <a:bodyPr wrap="none" lIns="0" rIns="0" tIns="0" bIns="0" anchor="ctr">
+          <a:bodyPr wrap="none" lIns="0" tIns="0" rIns="0" bIns="0" anchor="ctr">
             <a:normAutofit fontScale="25000" lnSpcReduction="19999"/>
           </a:bodyPr>
+          <a:lstStyle/>
           <a:p>
             <a:pPr defTabSz="914400">
               <a:lnSpc>
                 <a:spcPct val="100000"/>
               </a:lnSpc>
               <a:tabLst>
-                <a:tab algn="l" pos="0"/>
+                <a:tab pos="0" algn="l"/>
               </a:tabLst>
             </a:pPr>
-            <a:endParaRPr b="0" lang="en-US" sz="1800" strike="noStrike" u="none">
+            <a:endParaRPr lang="en-US" sz="1800" b="0" u="none" strike="noStrike">
               <a:solidFill>
                 <a:schemeClr val="dk1"/>
               </a:solidFill>
@@ -1657,28 +2656,35 @@
           </a:ln>
         </p:spPr>
         <p:style>
-          <a:lnRef idx="0"/>
-          <a:fillRef idx="0"/>
-          <a:effectRef idx="0"/>
+          <a:lnRef idx="0">
+            <a:scrgbClr r="0" g="0" b="0"/>
+          </a:lnRef>
+          <a:fillRef idx="0">
+            <a:scrgbClr r="0" g="0" b="0"/>
+          </a:fillRef>
+          <a:effectRef idx="0">
+            <a:scrgbClr r="0" g="0" b="0"/>
+          </a:effectRef>
           <a:fontRef idx="minor"/>
         </p:style>
         <p:txBody>
-          <a:bodyPr lIns="0" rIns="0" tIns="0" bIns="0" anchor="t">
+          <a:bodyPr lIns="0" tIns="0" rIns="0" bIns="0" anchor="t">
             <a:noAutofit/>
           </a:bodyPr>
+          <a:lstStyle/>
           <a:p>
             <a:pPr algn="r" defTabSz="914400">
               <a:lnSpc>
                 <a:spcPts val="4915"/>
               </a:lnSpc>
               <a:tabLst>
-                <a:tab algn="l" pos="0"/>
+                <a:tab pos="0" algn="l"/>
               </a:tabLst>
             </a:pPr>
             <a:r>
-              <a:rPr b="1" lang="en-US" sz="5850" strike="noStrike" u="none">
-                <a:solidFill>
-                  <a:srgbClr val="ffffff"/>
+              <a:rPr lang="en-US" sz="5850" b="1" u="none" strike="noStrike">
+                <a:solidFill>
+                  <a:srgbClr val="FFFFFF"/>
                 </a:solidFill>
                 <a:effectLst/>
                 <a:uFillTx/>
@@ -1687,9 +2693,9 @@
               </a:rPr>
               <a:t>zh</a:t>
             </a:r>
-            <a:endParaRPr b="0" lang="en-GB" sz="5850" strike="noStrike" u="none">
-              <a:solidFill>
-                <a:srgbClr val="ffffff"/>
+            <a:endParaRPr lang="en-GB" sz="5850" b="0" u="none" strike="noStrike">
+              <a:solidFill>
+                <a:srgbClr val="FFFFFF"/>
               </a:solidFill>
               <a:effectLst/>
               <a:uFillTx/>
@@ -1702,13 +2708,13 @@
                 <a:spcPts val="4915"/>
               </a:lnSpc>
               <a:tabLst>
-                <a:tab algn="l" pos="0"/>
+                <a:tab pos="0" algn="l"/>
               </a:tabLst>
             </a:pPr>
             <a:r>
-              <a:rPr b="1" lang="en-US" sz="5850" strike="noStrike" u="none">
-                <a:solidFill>
-                  <a:srgbClr val="ffffff"/>
+              <a:rPr lang="en-US" sz="5850" b="1" u="none" strike="noStrike">
+                <a:solidFill>
+                  <a:srgbClr val="FFFFFF"/>
                 </a:solidFill>
                 <a:effectLst/>
                 <a:uFillTx/>
@@ -1717,9 +2723,9 @@
               </a:rPr>
               <a:t>aw</a:t>
             </a:r>
-            <a:endParaRPr b="0" lang="en-GB" sz="5850" strike="noStrike" u="none">
-              <a:solidFill>
-                <a:srgbClr val="ffffff"/>
+            <a:endParaRPr lang="en-GB" sz="5850" b="0" u="none" strike="noStrike">
+              <a:solidFill>
+                <a:srgbClr val="FFFFFF"/>
               </a:solidFill>
               <a:effectLst/>
               <a:uFillTx/>
@@ -1748,17 +2754,24 @@
           </a:ln>
         </p:spPr>
         <p:style>
-          <a:lnRef idx="0"/>
-          <a:fillRef idx="0"/>
-          <a:effectRef idx="0"/>
+          <a:lnRef idx="0">
+            <a:scrgbClr r="0" g="0" b="0"/>
+          </a:lnRef>
+          <a:fillRef idx="0">
+            <a:scrgbClr r="0" g="0" b="0"/>
+          </a:fillRef>
+          <a:effectRef idx="0">
+            <a:scrgbClr r="0" g="0" b="0"/>
+          </a:effectRef>
           <a:fontRef idx="minor"/>
         </p:style>
         <p:txBody>
-          <a:bodyPr lIns="0" rIns="0" tIns="0" bIns="0" anchor="t">
+          <a:bodyPr lIns="0" tIns="0" rIns="0" bIns="0" anchor="t">
             <a:noAutofit/>
           </a:bodyPr>
-          <a:p>
-            <a:pPr defTabSz="914400">
+          <a:lstStyle/>
+          <a:p>
+            <a:pPr>
               <a:lnSpc>
                 <a:spcPts val="3149"/>
               </a:lnSpc>
@@ -1769,24 +2782,46 @@
                 <a:spcPts val="992"/>
               </a:spcAft>
               <a:tabLst>
-                <a:tab algn="l" pos="0"/>
+                <a:tab pos="0" algn="l"/>
               </a:tabLst>
             </a:pPr>
             <a:r>
-              <a:rPr b="0" lang="en-US" sz="2100" strike="noStrike" u="none">
-                <a:solidFill>
-                  <a:srgbClr val="ffffff"/>
+              <a:rPr lang="en-US" sz="2100" b="0" u="none" strike="noStrike" dirty="0">
+                <a:solidFill>
+                  <a:srgbClr val="FFFFFF"/>
                 </a:solidFill>
                 <a:effectLst/>
                 <a:uFillTx/>
                 <a:latin typeface="Arial"/>
                 <a:ea typeface="Arial"/>
               </a:rPr>
-              <a:t>Optimizing distribution of drinking water in remote areas in Nepal</a:t>
-            </a:r>
-            <a:endParaRPr b="0" lang="en-GB" sz="2100" strike="noStrike" u="none">
-              <a:solidFill>
-                <a:srgbClr val="ffffff"/>
+              <a:t>Optimizing distribution of drinking water in remote </a:t>
+            </a:r>
+            <a:r>
+              <a:rPr lang="en-US" sz="2100" b="0" u="none" strike="noStrike">
+                <a:solidFill>
+                  <a:srgbClr val="FFFFFF"/>
+                </a:solidFill>
+                <a:effectLst/>
+                <a:uFillTx/>
+                <a:latin typeface="Arial"/>
+                <a:ea typeface="Arial"/>
+              </a:rPr>
+              <a:t>areas </a:t>
+            </a:r>
+            <a:r>
+              <a:rPr lang="en-US" sz="2100">
+                <a:solidFill>
+                  <a:srgbClr val="FFFFFF"/>
+                </a:solidFill>
+                <a:latin typeface="Arial"/>
+                <a:ea typeface="Arial"/>
+              </a:rPr>
+              <a:t>of Nepal</a:t>
+            </a:r>
+            <a:endParaRPr lang="en-GB" sz="2100" b="0" u="none" strike="noStrike">
+              <a:solidFill>
+                <a:srgbClr val="FFFFFF"/>
               </a:solidFill>
               <a:effectLst/>
               <a:uFillTx/>
@@ -1815,78 +2850,24 @@
           </a:ln>
         </p:spPr>
         <p:style>
-          <a:lnRef idx="0"/>
-          <a:fillRef idx="0"/>
-          <a:effectRef idx="0"/>
+          <a:lnRef idx="0">
+            <a:scrgbClr r="0" g="0" b="0"/>
+          </a:lnRef>
+          <a:fillRef idx="0">
+            <a:scrgbClr r="0" g="0" b="0"/>
+          </a:fillRef>
+          <a:effectRef idx="0">
+            <a:scrgbClr r="0" g="0" b="0"/>
+          </a:effectRef>
           <a:fontRef idx="minor"/>
         </p:style>
         <p:txBody>
-          <a:bodyPr lIns="0" rIns="0" tIns="0" bIns="0" anchor="t">
+          <a:bodyPr lIns="0" tIns="0" rIns="0" bIns="0" anchor="t">
             <a:noAutofit/>
           </a:bodyPr>
-          <a:p>
-            <a:pPr defTabSz="914400">
-              <a:lnSpc>
-                <a:spcPts val="2701"/>
-              </a:lnSpc>
-              <a:tabLst>
-                <a:tab algn="l" pos="0"/>
-              </a:tabLst>
-            </a:pPr>
-            <a:r>
-              <a:rPr b="0" lang="en-US" sz="1400" strike="noStrike" u="none">
-                <a:solidFill>
-                  <a:srgbClr val="ffffff"/>
-                </a:solidFill>
-                <a:effectLst/>
-                <a:uFillTx/>
-                <a:latin typeface="Arial"/>
-                <a:ea typeface="Arial"/>
-              </a:rPr>
-              <a:t>CO3: Optimisation and Bio-Inspired Algorithms</a:t>
-            </a:r>
-            <a:endParaRPr b="0" lang="en-GB" sz="1400" strike="noStrike" u="none">
-              <a:solidFill>
-                <a:srgbClr val="ffffff"/>
-              </a:solidFill>
-              <a:effectLst/>
-              <a:uFillTx/>
-              <a:latin typeface="Arial"/>
-            </a:endParaRPr>
-          </a:p>
-        </p:txBody>
-      </p:sp>
-      <p:sp>
-        <p:nvSpPr>
-          <p:cNvPr id="12" name="Text 4"/>
-          <p:cNvSpPr/>
-          <p:nvPr/>
-        </p:nvSpPr>
-        <p:spPr>
-          <a:xfrm>
-            <a:off x="685800" y="4332600"/>
-            <a:ext cx="6874200" cy="383400"/>
-          </a:xfrm>
-          <a:prstGeom prst="rect">
-            <a:avLst/>
-          </a:prstGeom>
-          <a:noFill/>
-          <a:ln w="0">
-            <a:noFill/>
-          </a:ln>
-        </p:spPr>
-        <p:style>
-          <a:lnRef idx="0"/>
-          <a:fillRef idx="0"/>
-          <a:effectRef idx="0"/>
-          <a:fontRef idx="minor"/>
-        </p:style>
-        <p:txBody>
-          <a:bodyPr lIns="0" rIns="0" tIns="0" bIns="0" anchor="t">
-            <a:noAutofit/>
-          </a:bodyPr>
-          <a:p>
-            <a:pPr defTabSz="914400">
+          <a:lstStyle/>
+          <a:p>
+            <a:pPr>
               <a:lnSpc>
                 <a:spcPts val="2137"/>
               </a:lnSpc>
@@ -1897,43 +2878,106 @@
                 <a:spcPts val="992"/>
               </a:spcAft>
               <a:tabLst>
-                <a:tab algn="l" pos="0"/>
+                <a:tab pos="0" algn="l"/>
               </a:tabLst>
             </a:pPr>
             <a:r>
-              <a:rPr b="0" lang="en-US" sz="1430" strike="noStrike" u="none">
-                <a:solidFill>
-                  <a:srgbClr val="ffffff"/>
-                </a:solidFill>
-                <a:effectLst/>
-                <a:uFillTx/>
+              <a:rPr lang="en-US" sz="1400" dirty="0">
+                <a:solidFill>
+                  <a:srgbClr val="FFFFFF"/>
+                </a:solidFill>
                 <a:latin typeface="Arial"/>
-                <a:ea typeface="Arial"/>
-              </a:rPr>
-              <a:t>Biner Nicolas, Giacomelli Robin, Giora Triantafyllia, Margomenos Spyridon</a:t>
-            </a:r>
-            <a:endParaRPr b="1" lang="en-GB" sz="1430" strike="noStrike" u="none">
-              <a:solidFill>
-                <a:srgbClr val="ffffff"/>
-              </a:solidFill>
-              <a:effectLst/>
-              <a:uFillTx/>
-              <a:latin typeface="Arial"/>
-            </a:endParaRPr>
-          </a:p>
+              </a:rPr>
+              <a:t>Biner Nicolas, Giacomelli Robin, Giora </a:t>
+            </a:r>
+            <a:r>
+              <a:rPr lang="en-US" sz="1400" dirty="0" err="1">
+                <a:solidFill>
+                  <a:srgbClr val="FFFFFF"/>
+                </a:solidFill>
+                <a:latin typeface="Arial"/>
+              </a:rPr>
+              <a:t>Triantafyllia</a:t>
+            </a:r>
+            <a:r>
+              <a:rPr lang="en-US" sz="1400" dirty="0">
+                <a:solidFill>
+                  <a:srgbClr val="FFFFFF"/>
+                </a:solidFill>
+                <a:latin typeface="Arial"/>
+              </a:rPr>
+              <a:t>, </a:t>
+            </a:r>
+            <a:r>
+              <a:rPr lang="en-US" sz="1400" dirty="0" err="1">
+                <a:solidFill>
+                  <a:srgbClr val="FFFFFF"/>
+                </a:solidFill>
+                <a:latin typeface="Arial"/>
+              </a:rPr>
+              <a:t>Margomenos</a:t>
+            </a:r>
+            <a:r>
+              <a:rPr lang="en-US" sz="1400" dirty="0">
+                <a:solidFill>
+                  <a:srgbClr val="FFFFFF"/>
+                </a:solidFill>
+                <a:latin typeface="Arial"/>
+              </a:rPr>
+              <a:t> Spyridon</a:t>
+            </a:r>
+          </a:p>
+        </p:txBody>
+      </p:sp>
+      <p:sp>
+        <p:nvSpPr>
+          <p:cNvPr id="12" name="Text 4"/>
+          <p:cNvSpPr/>
+          <p:nvPr/>
+        </p:nvSpPr>
+        <p:spPr>
+          <a:xfrm>
+            <a:off x="685800" y="4672265"/>
+            <a:ext cx="6874200" cy="383400"/>
+          </a:xfrm>
+          <a:prstGeom prst="rect">
+            <a:avLst/>
+          </a:prstGeom>
+          <a:noFill/>
+          <a:ln w="0">
+            <a:noFill/>
+          </a:ln>
+        </p:spPr>
+        <p:style>
+          <a:lnRef idx="0">
+            <a:scrgbClr r="0" g="0" b="0"/>
+          </a:lnRef>
+          <a:fillRef idx="0">
+            <a:scrgbClr r="0" g="0" b="0"/>
+          </a:fillRef>
+          <a:effectRef idx="0">
+            <a:scrgbClr r="0" g="0" b="0"/>
+          </a:effectRef>
+          <a:fontRef idx="minor"/>
+        </p:style>
+        <p:txBody>
+          <a:bodyPr lIns="0" tIns="0" rIns="0" bIns="0" anchor="t">
+            <a:noAutofit/>
+          </a:bodyPr>
+          <a:lstStyle/>
           <a:p>
             <a:pPr defTabSz="914400">
               <a:lnSpc>
                 <a:spcPts val="2137"/>
               </a:lnSpc>
               <a:tabLst>
-                <a:tab algn="l" pos="0"/>
+                <a:tab pos="0" algn="l"/>
               </a:tabLst>
             </a:pPr>
             <a:r>
-              <a:rPr b="0" lang="en-US" sz="1430" strike="noStrike" u="none">
-                <a:solidFill>
-                  <a:srgbClr val="ffffff"/>
+              <a:rPr lang="en-US" sz="1400" b="0" u="none" strike="noStrike">
+                <a:solidFill>
+                  <a:srgbClr val="FFFFFF"/>
                 </a:solidFill>
                 <a:effectLst/>
                 <a:uFillTx/>
@@ -1942,9 +2986,9 @@
               </a:rPr>
               <a:t>April 2, 2026</a:t>
             </a:r>
-            <a:endParaRPr b="0" lang="en-GB" sz="1430" strike="noStrike" u="none">
-              <a:solidFill>
-                <a:srgbClr val="ffffff"/>
+            <a:endParaRPr lang="en-GB" sz="1400" b="0" u="none" strike="noStrike">
+              <a:solidFill>
+                <a:srgbClr val="FFFFFF"/>
               </a:solidFill>
               <a:effectLst/>
               <a:uFillTx/>
@@ -1955,25 +2999,21 @@
       </p:sp>
     </p:spTree>
   </p:cSld>
-  <mc:AlternateContent>
-    <mc:Choice Requires="p14">
-      <p:transition spd="slow" p14:dur="2000"/>
-    </mc:Choice>
-    <mc:Fallback>
-      <p:transition spd="slow"/>
-    </mc:Fallback>
-  </mc:AlternateContent>
+  <p:clrMapOvr>
+    <a:masterClrMapping/>
+  </p:clrMapOvr>
 </p:sld>
 </file>
 
 <file path=ppt/slides/slide2.xml><?xml version="1.0" encoding="utf-8"?>
-<p:sld xmlns:a="http://schemas.openxmlformats.org/drawingml/2006/main" xmlns:p="http://schemas.openxmlformats.org/presentationml/2006/main" xmlns:r="http://schemas.openxmlformats.org/officeDocument/2006/relationships" xmlns:p14="http://schemas.microsoft.com/office/powerpoint/2010/main" xmlns:p15="http://schemas.microsoft.com/office/powerpoint/2012/main" xmlns:mc="http://schemas.openxmlformats.org/markup-compatibility/2006">
+<p:sld xmlns:a="http://schemas.openxmlformats.org/drawingml/2006/main" xmlns:r="http://schemas.openxmlformats.org/officeDocument/2006/relationships" xmlns:p="http://schemas.openxmlformats.org/presentationml/2006/main">
   <p:cSld>
     <p:bg>
       <p:bgPr>
         <a:solidFill>
-          <a:srgbClr val="005b96"/>
+          <a:srgbClr val="005B96"/>
         </a:solidFill>
+        <a:effectLst/>
       </p:bgPr>
     </p:bg>
     <p:spTree>
@@ -2005,32 +3045,39 @@
             <a:avLst/>
           </a:prstGeom>
           <a:solidFill>
-            <a:srgbClr val="ffffff"/>
+            <a:srgbClr val="FFFFFF"/>
           </a:solidFill>
           <a:ln w="0">
             <a:noFill/>
           </a:ln>
         </p:spPr>
         <p:style>
-          <a:lnRef idx="0"/>
-          <a:fillRef idx="0"/>
-          <a:effectRef idx="0"/>
+          <a:lnRef idx="0">
+            <a:scrgbClr r="0" g="0" b="0"/>
+          </a:lnRef>
+          <a:fillRef idx="0">
+            <a:scrgbClr r="0" g="0" b="0"/>
+          </a:fillRef>
+          <a:effectRef idx="0">
+            <a:scrgbClr r="0" g="0" b="0"/>
+          </a:effectRef>
           <a:fontRef idx="minor"/>
         </p:style>
         <p:txBody>
-          <a:bodyPr wrap="none" lIns="0" rIns="0" tIns="0" bIns="0" anchor="ctr">
+          <a:bodyPr wrap="none" lIns="0" tIns="0" rIns="0" bIns="0" anchor="ctr">
             <a:normAutofit fontScale="25000" lnSpcReduction="19999"/>
           </a:bodyPr>
+          <a:lstStyle/>
           <a:p>
             <a:pPr defTabSz="914400">
               <a:lnSpc>
                 <a:spcPct val="100000"/>
               </a:lnSpc>
               <a:tabLst>
-                <a:tab algn="l" pos="0"/>
+                <a:tab pos="0" algn="l"/>
               </a:tabLst>
             </a:pPr>
-            <a:endParaRPr b="0" lang="en-US" sz="1800" strike="noStrike" u="none">
+            <a:endParaRPr lang="en-US" sz="1800" b="0" u="none" strike="noStrike">
               <a:solidFill>
                 <a:schemeClr val="dk1"/>
               </a:solidFill>
@@ -2061,28 +3108,35 @@
           </a:ln>
         </p:spPr>
         <p:style>
-          <a:lnRef idx="0"/>
-          <a:fillRef idx="0"/>
-          <a:effectRef idx="0"/>
+          <a:lnRef idx="0">
+            <a:scrgbClr r="0" g="0" b="0"/>
+          </a:lnRef>
+          <a:fillRef idx="0">
+            <a:scrgbClr r="0" g="0" b="0"/>
+          </a:fillRef>
+          <a:effectRef idx="0">
+            <a:scrgbClr r="0" g="0" b="0"/>
+          </a:effectRef>
           <a:fontRef idx="minor"/>
         </p:style>
         <p:txBody>
-          <a:bodyPr lIns="0" rIns="0" tIns="0" bIns="0" anchor="t">
+          <a:bodyPr lIns="0" tIns="0" rIns="0" bIns="0" anchor="t">
             <a:noAutofit/>
           </a:bodyPr>
+          <a:lstStyle/>
           <a:p>
             <a:pPr algn="r" defTabSz="914400">
               <a:lnSpc>
                 <a:spcPts val="4915"/>
               </a:lnSpc>
               <a:tabLst>
-                <a:tab algn="l" pos="0"/>
+                <a:tab pos="0" algn="l"/>
               </a:tabLst>
             </a:pPr>
             <a:r>
-              <a:rPr b="1" lang="en-US" sz="5850" strike="noStrike" u="none">
-                <a:solidFill>
-                  <a:srgbClr val="ffffff"/>
+              <a:rPr lang="en-US" sz="5850" b="1" u="none" strike="noStrike">
+                <a:solidFill>
+                  <a:srgbClr val="FFFFFF"/>
                 </a:solidFill>
                 <a:effectLst/>
                 <a:uFillTx/>
@@ -2091,9 +3145,9 @@
               </a:rPr>
               <a:t>zh</a:t>
             </a:r>
-            <a:endParaRPr b="0" lang="en-GB" sz="5850" strike="noStrike" u="none">
-              <a:solidFill>
-                <a:srgbClr val="ffffff"/>
+            <a:endParaRPr lang="en-GB" sz="5850" b="0" u="none" strike="noStrike">
+              <a:solidFill>
+                <a:srgbClr val="FFFFFF"/>
               </a:solidFill>
               <a:effectLst/>
               <a:uFillTx/>
@@ -2106,13 +3160,13 @@
                 <a:spcPts val="4915"/>
               </a:lnSpc>
               <a:tabLst>
-                <a:tab algn="l" pos="0"/>
+                <a:tab pos="0" algn="l"/>
               </a:tabLst>
             </a:pPr>
             <a:r>
-              <a:rPr b="1" lang="en-US" sz="5850" strike="noStrike" u="none">
-                <a:solidFill>
-                  <a:srgbClr val="ffffff"/>
+              <a:rPr lang="en-US" sz="5850" b="1" u="none" strike="noStrike">
+                <a:solidFill>
+                  <a:srgbClr val="FFFFFF"/>
                 </a:solidFill>
                 <a:effectLst/>
                 <a:uFillTx/>
@@ -2121,9 +3175,9 @@
               </a:rPr>
               <a:t>aw</a:t>
             </a:r>
-            <a:endParaRPr b="0" lang="en-GB" sz="5850" strike="noStrike" u="none">
-              <a:solidFill>
-                <a:srgbClr val="ffffff"/>
+            <a:endParaRPr lang="en-GB" sz="5850" b="0" u="none" strike="noStrike">
+              <a:solidFill>
+                <a:srgbClr val="FFFFFF"/>
               </a:solidFill>
               <a:effectLst/>
               <a:uFillTx/>
@@ -2141,7 +3195,7 @@
         <p:spPr>
           <a:xfrm>
             <a:off x="685800" y="857160"/>
-            <a:ext cx="1628640" cy="399600"/>
+            <a:ext cx="2620677" cy="415774"/>
           </a:xfrm>
           <a:prstGeom prst="rect">
             <a:avLst/>
@@ -2152,44 +3206,91 @@
           </a:ln>
         </p:spPr>
         <p:style>
-          <a:lnRef idx="0"/>
-          <a:fillRef idx="0"/>
-          <a:effectRef idx="0"/>
+          <a:lnRef idx="0">
+            <a:scrgbClr r="0" g="0" b="0"/>
+          </a:lnRef>
+          <a:fillRef idx="0">
+            <a:scrgbClr r="0" g="0" b="0"/>
+          </a:fillRef>
+          <a:effectRef idx="0">
+            <a:scrgbClr r="0" g="0" b="0"/>
+          </a:effectRef>
           <a:fontRef idx="minor"/>
         </p:style>
         <p:txBody>
-          <a:bodyPr lIns="0" rIns="0" tIns="0" bIns="0" anchor="t">
+          <a:bodyPr lIns="0" tIns="0" rIns="0" bIns="0" anchor="t">
             <a:noAutofit/>
           </a:bodyPr>
-          <a:p>
-            <a:pPr defTabSz="914400">
+          <a:lstStyle/>
+          <a:p>
+            <a:pPr>
               <a:lnSpc>
                 <a:spcPts val="3149"/>
               </a:lnSpc>
               <a:tabLst>
-                <a:tab algn="l" pos="0"/>
+                <a:tab pos="0" algn="l"/>
               </a:tabLst>
             </a:pPr>
             <a:r>
-              <a:rPr b="0" lang="en-US" sz="2100" strike="noStrike" u="none">
-                <a:solidFill>
-                  <a:srgbClr val="ffffff"/>
-                </a:solidFill>
-                <a:effectLst/>
-                <a:uFillTx/>
-                <a:latin typeface="Arial"/>
-                <a:ea typeface="Arial"/>
-              </a:rPr>
-              <a:t>Section title</a:t>
-            </a:r>
-            <a:endParaRPr b="0" lang="en-GB" sz="2100" strike="noStrike" u="none">
-              <a:solidFill>
-                <a:srgbClr val="ffffff"/>
-              </a:solidFill>
-              <a:effectLst/>
-              <a:uFillTx/>
-              <a:latin typeface="Arial"/>
-            </a:endParaRPr>
+              <a:rPr lang="en-US" sz="2100">
+                <a:solidFill>
+                  <a:srgbClr val="FFFFFF"/>
+                </a:solidFill>
+                <a:ea typeface="+mn-lt"/>
+                <a:cs typeface="+mn-lt"/>
+              </a:rPr>
+              <a:t>Table of Contents</a:t>
+            </a:r>
+            <a:endParaRPr lang="en-US"/>
+          </a:p>
+        </p:txBody>
+      </p:sp>
+      <p:sp>
+        <p:nvSpPr>
+          <p:cNvPr id="2" name="Rectangle 1">
+            <a:extLst>
+              <a:ext uri="{FF2B5EF4-FFF2-40B4-BE49-F238E27FC236}">
+                <a16:creationId xmlns:a16="http://schemas.microsoft.com/office/drawing/2014/main" id="{1D358DBB-CE38-0EFB-9437-1D75DFA18FF5}"/>
+              </a:ext>
+            </a:extLst>
+          </p:cNvPr>
+          <p:cNvSpPr/>
+          <p:nvPr/>
+        </p:nvSpPr>
+        <p:spPr>
+          <a:xfrm>
+            <a:off x="-1" y="1719891"/>
+            <a:ext cx="9146699" cy="3434393"/>
+          </a:xfrm>
+          <a:prstGeom prst="rect">
+            <a:avLst/>
+          </a:prstGeom>
+          <a:solidFill>
+            <a:schemeClr val="bg1"/>
+          </a:solidFill>
+        </p:spPr>
+        <p:style>
+          <a:lnRef idx="2">
+            <a:schemeClr val="accent1">
+              <a:shade val="15000"/>
+            </a:schemeClr>
+          </a:lnRef>
+          <a:fillRef idx="1">
+            <a:schemeClr val="accent1"/>
+          </a:fillRef>
+          <a:effectRef idx="0">
+            <a:schemeClr val="accent1"/>
+          </a:effectRef>
+          <a:fontRef idx="minor">
+            <a:schemeClr val="lt1"/>
+          </a:fontRef>
+        </p:style>
+        <p:txBody>
+          <a:bodyPr rtlCol="0" anchor="ctr"/>
+          <a:lstStyle/>
+          <a:p>
+            <a:pPr algn="ctr"/>
+            <a:endParaRPr lang="en-US"/>
           </a:p>
         </p:txBody>
       </p:sp>
@@ -2201,8 +3302,8 @@
         </p:nvSpPr>
         <p:spPr>
           <a:xfrm>
-            <a:off x="685800" y="1666800"/>
-            <a:ext cx="9334080" cy="1215720"/>
+            <a:off x="685800" y="2157427"/>
+            <a:ext cx="6266312" cy="1215720"/>
           </a:xfrm>
           <a:prstGeom prst="rect">
             <a:avLst/>
@@ -2213,134 +3314,211 @@
           </a:ln>
         </p:spPr>
         <p:style>
-          <a:lnRef idx="0"/>
-          <a:fillRef idx="0"/>
-          <a:effectRef idx="0"/>
+          <a:lnRef idx="0">
+            <a:scrgbClr r="0" g="0" b="0"/>
+          </a:lnRef>
+          <a:fillRef idx="0">
+            <a:scrgbClr r="0" g="0" b="0"/>
+          </a:fillRef>
+          <a:effectRef idx="0">
+            <a:scrgbClr r="0" g="0" b="0"/>
+          </a:effectRef>
           <a:fontRef idx="minor"/>
         </p:style>
         <p:txBody>
-          <a:bodyPr lIns="0" rIns="0" tIns="0" bIns="0" anchor="t">
+          <a:bodyPr lIns="0" tIns="0" rIns="0" bIns="0" anchor="t">
             <a:noAutofit/>
           </a:bodyPr>
-          <a:p>
-            <a:pPr marL="343080" indent="-343080" defTabSz="914400">
+          <a:lstStyle/>
+          <a:p>
+            <a:pPr marL="285750" indent="-285750">
+              <a:buFont typeface="Arial"/>
+              <a:buChar char="•"/>
+            </a:pPr>
+            <a:r>
+              <a:rPr lang="en-US" sz="1650">
+                <a:solidFill>
+                  <a:schemeClr val="accent1"/>
+                </a:solidFill>
+                <a:ea typeface="+mn-lt"/>
+                <a:cs typeface="+mn-lt"/>
+              </a:rPr>
+              <a:t>Problem Formulation</a:t>
+            </a:r>
+            <a:endParaRPr lang="en-US">
+              <a:solidFill>
+                <a:schemeClr val="accent1"/>
+              </a:solidFill>
+              <a:ea typeface="Calibri" panose="020F0502020204030204"/>
+              <a:cs typeface="Calibri" panose="020F0502020204030204"/>
+            </a:endParaRPr>
+          </a:p>
+          <a:p>
+            <a:pPr marL="285750" indent="-285750">
+              <a:buFont typeface="Arial"/>
+              <a:buChar char="•"/>
+            </a:pPr>
+            <a:endParaRPr lang="en-US">
+              <a:solidFill>
+                <a:schemeClr val="accent1"/>
+              </a:solidFill>
+              <a:ea typeface="Calibri" panose="020F0502020204030204"/>
+              <a:cs typeface="Calibri" panose="020F0502020204030204"/>
+            </a:endParaRPr>
+          </a:p>
+          <a:p>
+            <a:pPr marL="285750" indent="-285750">
+              <a:buFont typeface="Arial"/>
+              <a:buChar char="•"/>
+            </a:pPr>
+            <a:r>
+              <a:rPr lang="en-US" sz="1650">
+                <a:solidFill>
+                  <a:schemeClr val="accent1"/>
+                </a:solidFill>
+                <a:ea typeface="+mn-lt"/>
+                <a:cs typeface="+mn-lt"/>
+              </a:rPr>
+              <a:t>The Lagrange Approach</a:t>
+            </a:r>
+            <a:endParaRPr lang="en-US">
+              <a:solidFill>
+                <a:schemeClr val="accent1"/>
+              </a:solidFill>
+              <a:ea typeface="Calibri" panose="020F0502020204030204"/>
+              <a:cs typeface="Calibri" panose="020F0502020204030204"/>
+            </a:endParaRPr>
+          </a:p>
+          <a:p>
+            <a:pPr marL="285750" indent="-285750">
+              <a:buFont typeface="Arial"/>
+              <a:buChar char="•"/>
+            </a:pPr>
+            <a:endParaRPr lang="en-US">
+              <a:solidFill>
+                <a:schemeClr val="accent1"/>
+              </a:solidFill>
+              <a:ea typeface="Calibri" panose="020F0502020204030204"/>
+              <a:cs typeface="Calibri" panose="020F0502020204030204"/>
+            </a:endParaRPr>
+          </a:p>
+          <a:p>
+            <a:pPr marL="285750" indent="-285750">
+              <a:buFont typeface="Arial"/>
+              <a:buChar char="•"/>
+            </a:pPr>
+            <a:r>
+              <a:rPr lang="en-US" sz="1650">
+                <a:solidFill>
+                  <a:schemeClr val="accent1"/>
+                </a:solidFill>
+                <a:ea typeface="+mn-lt"/>
+                <a:cs typeface="+mn-lt"/>
+              </a:rPr>
+              <a:t>Simulated Annealing</a:t>
+            </a:r>
+            <a:endParaRPr lang="en-US">
+              <a:solidFill>
+                <a:schemeClr val="accent1"/>
+              </a:solidFill>
+              <a:ea typeface="Calibri" panose="020F0502020204030204"/>
+              <a:cs typeface="Calibri" panose="020F0502020204030204"/>
+            </a:endParaRPr>
+          </a:p>
+          <a:p>
+            <a:pPr marL="285750" indent="-285750">
+              <a:buFont typeface="Arial"/>
+              <a:buChar char="•"/>
+            </a:pPr>
+            <a:endParaRPr lang="en-US">
+              <a:solidFill>
+                <a:schemeClr val="accent1"/>
+              </a:solidFill>
+              <a:ea typeface="Calibri" panose="020F0502020204030204"/>
+              <a:cs typeface="Calibri" panose="020F0502020204030204"/>
+            </a:endParaRPr>
+          </a:p>
+          <a:p>
+            <a:pPr marL="285750" indent="-285750">
+              <a:buFont typeface="Arial"/>
+              <a:buChar char="•"/>
+            </a:pPr>
+            <a:r>
+              <a:rPr lang="en-US" sz="1650">
+                <a:solidFill>
+                  <a:schemeClr val="accent1"/>
+                </a:solidFill>
+                <a:ea typeface="+mn-lt"/>
+                <a:cs typeface="+mn-lt"/>
+              </a:rPr>
+              <a:t>Method Comparison</a:t>
+            </a:r>
+            <a:endParaRPr lang="en-US">
+              <a:solidFill>
+                <a:schemeClr val="accent1"/>
+              </a:solidFill>
+              <a:ea typeface="Calibri" panose="020F0502020204030204"/>
+              <a:cs typeface="Calibri" panose="020F0502020204030204"/>
+            </a:endParaRPr>
+          </a:p>
+          <a:p>
+            <a:pPr marL="285750" indent="-285750">
+              <a:buFont typeface="Arial"/>
+              <a:buChar char="•"/>
+            </a:pPr>
+            <a:endParaRPr lang="en-US">
+              <a:solidFill>
+                <a:schemeClr val="accent1"/>
+              </a:solidFill>
+              <a:ea typeface="Calibri" panose="020F0502020204030204"/>
+              <a:cs typeface="Calibri" panose="020F0502020204030204"/>
+            </a:endParaRPr>
+          </a:p>
+          <a:p>
+            <a:pPr marL="285750" indent="-285750" defTabSz="914400">
               <a:lnSpc>
                 <a:spcPts val="2392"/>
               </a:lnSpc>
-              <a:buClr>
-                <a:srgbClr val="ffffff"/>
-              </a:buClr>
-              <a:buFont typeface="Symbol" charset="2"/>
-              <a:buChar char=""/>
-            </a:pPr>
-            <a:r>
-              <a:rPr b="0" lang="en-US" sz="1650" strike="noStrike" u="none">
-                <a:solidFill>
-                  <a:srgbClr val="ffffff"/>
-                </a:solidFill>
-                <a:effectLst/>
-                <a:uFillTx/>
-                <a:latin typeface="Arial"/>
-                <a:ea typeface="Arial"/>
-              </a:rPr>
-              <a:t>First bullet point</a:t>
-            </a:r>
-            <a:endParaRPr b="0" lang="en-GB" sz="1650" strike="noStrike" u="none">
-              <a:solidFill>
-                <a:srgbClr val="ffffff"/>
-              </a:solidFill>
-              <a:effectLst/>
-              <a:uFillTx/>
-              <a:latin typeface="Arial"/>
-            </a:endParaRPr>
-          </a:p>
-          <a:p>
-            <a:pPr marL="343080" indent="-343080" defTabSz="914400">
-              <a:lnSpc>
-                <a:spcPts val="2392"/>
-              </a:lnSpc>
-              <a:buClr>
-                <a:srgbClr val="ffffff"/>
-              </a:buClr>
-              <a:buFont typeface="Symbol" charset="2"/>
-              <a:buChar char=""/>
-            </a:pPr>
-            <a:r>
-              <a:rPr b="0" lang="en-US" sz="1650" strike="noStrike" u="none">
-                <a:solidFill>
-                  <a:srgbClr val="ffffff"/>
-                </a:solidFill>
-                <a:effectLst/>
-                <a:uFillTx/>
-                <a:latin typeface="Arial"/>
-                <a:ea typeface="Arial"/>
-              </a:rPr>
-              <a:t>Second bullet point</a:t>
-            </a:r>
-            <a:endParaRPr b="0" lang="en-GB" sz="1650" strike="noStrike" u="none">
-              <a:solidFill>
-                <a:srgbClr val="ffffff"/>
-              </a:solidFill>
-              <a:effectLst/>
-              <a:uFillTx/>
-              <a:latin typeface="Arial"/>
-            </a:endParaRPr>
-          </a:p>
-          <a:p>
-            <a:pPr marL="343080" indent="-343080" defTabSz="914400">
-              <a:lnSpc>
-                <a:spcPts val="2392"/>
-              </a:lnSpc>
-              <a:buClr>
-                <a:srgbClr val="ffffff"/>
-              </a:buClr>
-              <a:buFont typeface="Symbol" charset="2"/>
-              <a:buChar char=""/>
-            </a:pPr>
-            <a:r>
-              <a:rPr b="0" lang="en-US" sz="1650" strike="noStrike" u="none">
-                <a:solidFill>
-                  <a:srgbClr val="ffffff"/>
-                </a:solidFill>
-                <a:effectLst/>
-                <a:uFillTx/>
-                <a:latin typeface="Arial"/>
-                <a:ea typeface="Arial"/>
-              </a:rPr>
-              <a:t>Third bullet point</a:t>
-            </a:r>
-            <a:endParaRPr b="0" lang="en-GB" sz="1650" strike="noStrike" u="none">
-              <a:solidFill>
-                <a:srgbClr val="ffffff"/>
-              </a:solidFill>
-              <a:effectLst/>
-              <a:uFillTx/>
-              <a:latin typeface="Arial"/>
+              <a:buFont typeface="Arial"/>
+              <a:buChar char="•"/>
+            </a:pPr>
+            <a:r>
+              <a:rPr lang="en-US" sz="1650">
+                <a:solidFill>
+                  <a:schemeClr val="accent1"/>
+                </a:solidFill>
+                <a:ea typeface="+mn-lt"/>
+                <a:cs typeface="+mn-lt"/>
+              </a:rPr>
+              <a:t>Q&amp;A</a:t>
+            </a:r>
+            <a:endParaRPr lang="en-US">
+              <a:solidFill>
+                <a:schemeClr val="accent1"/>
+              </a:solidFill>
+              <a:ea typeface="Calibri" panose="020F0502020204030204"/>
+              <a:cs typeface="Calibri" panose="020F0502020204030204"/>
             </a:endParaRPr>
           </a:p>
         </p:txBody>
       </p:sp>
     </p:spTree>
   </p:cSld>
-  <mc:AlternateContent>
-    <mc:Choice Requires="p14">
-      <p:transition spd="slow" p14:dur="2000"/>
-    </mc:Choice>
-    <mc:Fallback>
-      <p:transition spd="slow"/>
-    </mc:Fallback>
-  </mc:AlternateContent>
+  <p:clrMapOvr>
+    <a:masterClrMapping/>
+  </p:clrMapOvr>
 </p:sld>
 </file>
 
 <file path=ppt/slides/slide3.xml><?xml version="1.0" encoding="utf-8"?>
-<p:sld xmlns:a="http://schemas.openxmlformats.org/drawingml/2006/main" xmlns:p="http://schemas.openxmlformats.org/presentationml/2006/main" xmlns:r="http://schemas.openxmlformats.org/officeDocument/2006/relationships" xmlns:p14="http://schemas.microsoft.com/office/powerpoint/2010/main" xmlns:p15="http://schemas.microsoft.com/office/powerpoint/2012/main" xmlns:mc="http://schemas.openxmlformats.org/markup-compatibility/2006">
+<p:sld xmlns:a="http://schemas.openxmlformats.org/drawingml/2006/main" xmlns:r="http://schemas.openxmlformats.org/officeDocument/2006/relationships" xmlns:p="http://schemas.openxmlformats.org/presentationml/2006/main">
   <p:cSld>
     <p:bg>
       <p:bgPr>
         <a:solidFill>
-          <a:srgbClr val="005b96"/>
+          <a:srgbClr val="005B96"/>
         </a:solidFill>
+        <a:effectLst/>
       </p:bgPr>
     </p:bg>
     <p:spTree>
@@ -2359,6 +3537,55 @@
       </p:grpSpPr>
       <p:sp>
         <p:nvSpPr>
+          <p:cNvPr id="3" name="Rectangle 2">
+            <a:extLst>
+              <a:ext uri="{FF2B5EF4-FFF2-40B4-BE49-F238E27FC236}">
+                <a16:creationId xmlns:a16="http://schemas.microsoft.com/office/drawing/2014/main" id="{6C0C21FE-AC15-8042-C3D8-1778AB87BF4C}"/>
+              </a:ext>
+            </a:extLst>
+          </p:cNvPr>
+          <p:cNvSpPr/>
+          <p:nvPr/>
+        </p:nvSpPr>
+        <p:spPr>
+          <a:xfrm>
+            <a:off x="-1" y="1719891"/>
+            <a:ext cx="9146699" cy="3434393"/>
+          </a:xfrm>
+          <a:prstGeom prst="rect">
+            <a:avLst/>
+          </a:prstGeom>
+          <a:solidFill>
+            <a:schemeClr val="bg1"/>
+          </a:solidFill>
+        </p:spPr>
+        <p:style>
+          <a:lnRef idx="2">
+            <a:schemeClr val="accent1">
+              <a:shade val="15000"/>
+            </a:schemeClr>
+          </a:lnRef>
+          <a:fillRef idx="1">
+            <a:schemeClr val="accent1"/>
+          </a:fillRef>
+          <a:effectRef idx="0">
+            <a:schemeClr val="accent1"/>
+          </a:effectRef>
+          <a:fontRef idx="minor">
+            <a:schemeClr val="lt1"/>
+          </a:fontRef>
+        </p:style>
+        <p:txBody>
+          <a:bodyPr rtlCol="0" anchor="ctr"/>
+          <a:lstStyle/>
+          <a:p>
+            <a:pPr algn="ctr"/>
+            <a:endParaRPr lang="en-US"/>
+          </a:p>
+        </p:txBody>
+      </p:sp>
+      <p:sp>
+        <p:nvSpPr>
           <p:cNvPr id="17" name="Text 0"/>
           <p:cNvSpPr/>
           <p:nvPr/>
@@ -2372,32 +3599,39 @@
             <a:avLst/>
           </a:prstGeom>
           <a:solidFill>
-            <a:srgbClr val="ffffff"/>
+            <a:srgbClr val="FFFFFF"/>
           </a:solidFill>
           <a:ln w="0">
             <a:noFill/>
           </a:ln>
         </p:spPr>
         <p:style>
-          <a:lnRef idx="0"/>
-          <a:fillRef idx="0"/>
-          <a:effectRef idx="0"/>
+          <a:lnRef idx="0">
+            <a:scrgbClr r="0" g="0" b="0"/>
+          </a:lnRef>
+          <a:fillRef idx="0">
+            <a:scrgbClr r="0" g="0" b="0"/>
+          </a:fillRef>
+          <a:effectRef idx="0">
+            <a:scrgbClr r="0" g="0" b="0"/>
+          </a:effectRef>
           <a:fontRef idx="minor"/>
         </p:style>
         <p:txBody>
-          <a:bodyPr wrap="none" lIns="0" rIns="0" tIns="0" bIns="0" anchor="ctr">
+          <a:bodyPr wrap="none" lIns="0" tIns="0" rIns="0" bIns="0" anchor="ctr">
             <a:normAutofit fontScale="25000" lnSpcReduction="19999"/>
           </a:bodyPr>
+          <a:lstStyle/>
           <a:p>
             <a:pPr defTabSz="914400">
               <a:lnSpc>
                 <a:spcPct val="100000"/>
               </a:lnSpc>
               <a:tabLst>
-                <a:tab algn="l" pos="0"/>
+                <a:tab pos="0" algn="l"/>
               </a:tabLst>
             </a:pPr>
-            <a:endParaRPr b="0" lang="en-US" sz="1800" strike="noStrike" u="none">
+            <a:endParaRPr lang="en-US" sz="1800" b="0" u="none" strike="noStrike">
               <a:solidFill>
                 <a:schemeClr val="dk1"/>
               </a:solidFill>
@@ -2417,7 +3651,7 @@
         <p:spPr>
           <a:xfrm>
             <a:off x="685800" y="1809720"/>
-            <a:ext cx="4952520" cy="2476080"/>
+            <a:ext cx="6419010" cy="2955924"/>
           </a:xfrm>
           <a:prstGeom prst="rect">
             <a:avLst/>
@@ -2425,113 +3659,299 @@
           <a:noFill/>
           <a:ln w="19050">
             <a:solidFill>
-              <a:srgbClr val="ffffff"/>
+              <a:srgbClr val="FFFFFF"/>
             </a:solidFill>
             <a:round/>
           </a:ln>
         </p:spPr>
         <p:style>
-          <a:lnRef idx="0"/>
-          <a:fillRef idx="0"/>
-          <a:effectRef idx="0"/>
+          <a:lnRef idx="0">
+            <a:scrgbClr r="0" g="0" b="0"/>
+          </a:lnRef>
+          <a:fillRef idx="0">
+            <a:scrgbClr r="0" g="0" b="0"/>
+          </a:fillRef>
+          <a:effectRef idx="0">
+            <a:scrgbClr r="0" g="0" b="0"/>
+          </a:effectRef>
           <a:fontRef idx="minor"/>
         </p:style>
         <p:txBody>
-          <a:bodyPr lIns="228600" rIns="228600" tIns="228600" bIns="228600" anchor="t">
+          <a:bodyPr lIns="228600" tIns="228600" rIns="228600" bIns="228600" anchor="t">
             <a:normAutofit/>
           </a:bodyPr>
-          <a:p>
-            <a:pPr defTabSz="914400">
-              <a:lnSpc>
-                <a:spcPct val="100000"/>
-              </a:lnSpc>
+          <a:lstStyle/>
+          <a:p>
+            <a:pPr>
               <a:tabLst>
-                <a:tab algn="l" pos="0"/>
+                <a:tab pos="0" algn="l"/>
               </a:tabLst>
             </a:pPr>
             <a:r>
-              <a:rPr b="0" lang="en-US" sz="1500" strike="noStrike" u="none">
-                <a:solidFill>
-                  <a:srgbClr val="ffffff"/>
-                </a:solidFill>
-                <a:effectLst/>
-                <a:uFillTx/>
+              <a:rPr lang="en-US" sz="1500" dirty="0">
+                <a:solidFill>
+                  <a:schemeClr val="accent1"/>
+                </a:solidFill>
                 <a:latin typeface="Arial"/>
-                <a:ea typeface="Arial"/>
-              </a:rPr>
-              <a:t>Left content box</a:t>
-            </a:r>
-            <a:endParaRPr b="0" lang="en-GB" sz="1500" strike="noStrike" u="none">
-              <a:solidFill>
-                <a:srgbClr val="ffffff"/>
-              </a:solidFill>
-              <a:effectLst/>
-              <a:uFillTx/>
+                <a:cs typeface="Arial"/>
+              </a:rPr>
+              <a:t>Goal: Distribute </a:t>
+            </a:r>
+            <a:r>
+              <a:rPr lang="en-US" sz="1500">
+                <a:solidFill>
+                  <a:schemeClr val="accent1"/>
+                </a:solidFill>
+                <a:latin typeface="Arial"/>
+                <a:cs typeface="Arial"/>
+              </a:rPr>
+              <a:t>drinking</a:t>
+            </a:r>
+            <a:r>
+              <a:rPr lang="en-US" sz="1500" dirty="0">
+                <a:solidFill>
+                  <a:schemeClr val="accent1"/>
+                </a:solidFill>
+                <a:latin typeface="Arial"/>
+                <a:cs typeface="Arial"/>
+              </a:rPr>
+              <a:t> water supply in remote areas of Nepal</a:t>
+            </a:r>
+          </a:p>
+          <a:p>
+            <a:pPr>
+              <a:tabLst>
+                <a:tab pos="0" algn="l"/>
+              </a:tabLst>
+            </a:pPr>
+            <a:endParaRPr lang="en-US" sz="1500" dirty="0">
+              <a:solidFill>
+                <a:schemeClr val="accent1"/>
+              </a:solidFill>
               <a:latin typeface="Arial"/>
-            </a:endParaRPr>
-          </a:p>
-        </p:txBody>
-      </p:sp>
-      <p:sp>
-        <p:nvSpPr>
-          <p:cNvPr id="19" name="Text 2"/>
-          <p:cNvSpPr/>
-          <p:nvPr/>
-        </p:nvSpPr>
-        <p:spPr>
-          <a:xfrm>
-            <a:off x="6019920" y="1809720"/>
-            <a:ext cx="4952520" cy="2476080"/>
-          </a:xfrm>
-          <a:prstGeom prst="rect">
-            <a:avLst/>
-          </a:prstGeom>
-          <a:noFill/>
-          <a:ln w="19050">
-            <a:solidFill>
-              <a:srgbClr val="ffffff"/>
-            </a:solidFill>
-            <a:round/>
-          </a:ln>
-        </p:spPr>
-        <p:style>
-          <a:lnRef idx="0"/>
-          <a:fillRef idx="0"/>
-          <a:effectRef idx="0"/>
-          <a:fontRef idx="minor"/>
-        </p:style>
-        <p:txBody>
-          <a:bodyPr lIns="228600" rIns="228600" tIns="228600" bIns="228600" anchor="t">
-            <a:normAutofit/>
-          </a:bodyPr>
-          <a:p>
-            <a:pPr defTabSz="914400">
-              <a:lnSpc>
-                <a:spcPct val="100000"/>
-              </a:lnSpc>
+              <a:cs typeface="Arial"/>
+            </a:endParaRPr>
+          </a:p>
+          <a:p>
+            <a:pPr>
               <a:tabLst>
-                <a:tab algn="l" pos="0"/>
+                <a:tab pos="0" algn="l"/>
               </a:tabLst>
             </a:pPr>
             <a:r>
-              <a:rPr b="0" lang="en-US" sz="1500" strike="noStrike" u="none">
-                <a:solidFill>
-                  <a:srgbClr val="ffffff"/>
-                </a:solidFill>
-                <a:effectLst/>
-                <a:uFillTx/>
+              <a:rPr lang="en-US" sz="1500" dirty="0">
+                <a:solidFill>
+                  <a:schemeClr val="accent1"/>
+                </a:solidFill>
                 <a:latin typeface="Arial"/>
-                <a:ea typeface="Arial"/>
-              </a:rPr>
-              <a:t>Right content box</a:t>
-            </a:r>
-            <a:endParaRPr b="0" lang="en-GB" sz="1500" strike="noStrike" u="none">
-              <a:solidFill>
-                <a:srgbClr val="ffffff"/>
-              </a:solidFill>
-              <a:effectLst/>
-              <a:uFillTx/>
+                <a:cs typeface="Arial"/>
+              </a:rPr>
+              <a:t>Restrictions: </a:t>
+            </a:r>
+          </a:p>
+          <a:p>
+            <a:pPr marL="1200150" lvl="2" indent="-285750">
+              <a:buFont typeface="Wingdings"/>
+              <a:buChar char="§"/>
+              <a:tabLst>
+                <a:tab pos="0" algn="l"/>
+              </a:tabLst>
+            </a:pPr>
+            <a:r>
+              <a:rPr lang="en-US" sz="1500">
+                <a:solidFill>
+                  <a:schemeClr val="accent1"/>
+                </a:solidFill>
+                <a:latin typeface="Arial"/>
+                <a:cs typeface="Arial"/>
+              </a:rPr>
+              <a:t>All houses must have some minimum access to water</a:t>
+            </a:r>
+          </a:p>
+          <a:p>
+            <a:pPr marL="1200150" lvl="2" indent="-285750">
+              <a:buFont typeface="Wingdings"/>
+              <a:buChar char="§"/>
+              <a:tabLst>
+                <a:tab pos="0" algn="l"/>
+              </a:tabLst>
+            </a:pPr>
+            <a:r>
+              <a:rPr lang="en-US" sz="1500">
+                <a:solidFill>
+                  <a:schemeClr val="accent1"/>
+                </a:solidFill>
+                <a:latin typeface="Arial"/>
+                <a:cs typeface="Arial"/>
+              </a:rPr>
+              <a:t>Water amount must be proportional to their needs</a:t>
+            </a:r>
+            <a:endParaRPr lang="en-US" sz="1500" dirty="0">
+              <a:solidFill>
+                <a:schemeClr val="accent1"/>
+              </a:solidFill>
               <a:latin typeface="Arial"/>
+              <a:cs typeface="Arial"/>
+            </a:endParaRPr>
+          </a:p>
+          <a:p>
+            <a:pPr marL="1200150" lvl="2" indent="-285750">
+              <a:buFont typeface="Wingdings"/>
+              <a:buChar char="§"/>
+              <a:tabLst>
+                <a:tab pos="0" algn="l"/>
+              </a:tabLst>
+            </a:pPr>
+            <a:r>
+              <a:rPr lang="en-US" sz="1500">
+                <a:solidFill>
+                  <a:schemeClr val="accent1"/>
+                </a:solidFill>
+                <a:latin typeface="Arial"/>
+                <a:cs typeface="Arial"/>
+              </a:rPr>
+              <a:t>There are losses due to the terrain/pipe quality</a:t>
+            </a:r>
+          </a:p>
+          <a:p>
+            <a:pPr marL="1200150" lvl="2" indent="-285750">
+              <a:buFont typeface="Wingdings"/>
+              <a:buChar char="§"/>
+              <a:tabLst>
+                <a:tab pos="0" algn="l"/>
+              </a:tabLst>
+            </a:pPr>
+            <a:endParaRPr lang="en-US" sz="1500" dirty="0">
+              <a:solidFill>
+                <a:schemeClr val="accent1"/>
+              </a:solidFill>
+              <a:latin typeface="Arial"/>
+              <a:cs typeface="Arial"/>
+            </a:endParaRPr>
+          </a:p>
+          <a:p>
+            <a:pPr>
+              <a:tabLst>
+                <a:tab pos="0" algn="l"/>
+              </a:tabLst>
+            </a:pPr>
+            <a:r>
+              <a:rPr lang="en-US" sz="1500">
+                <a:solidFill>
+                  <a:schemeClr val="accent1"/>
+                </a:solidFill>
+                <a:latin typeface="Arial"/>
+                <a:cs typeface="Arial"/>
+              </a:rPr>
+              <a:t>Methods used:</a:t>
+            </a:r>
+            <a:endParaRPr lang="en-US" sz="1500" dirty="0">
+              <a:solidFill>
+                <a:schemeClr val="accent1"/>
+              </a:solidFill>
+              <a:latin typeface="Arial"/>
+              <a:cs typeface="Arial"/>
+            </a:endParaRPr>
+          </a:p>
+          <a:p>
+            <a:pPr marL="1200150" lvl="2" indent="-285750">
+              <a:buFont typeface="Wingdings"/>
+              <a:buChar char="§"/>
+              <a:tabLst>
+                <a:tab pos="0" algn="l"/>
+              </a:tabLst>
+            </a:pPr>
+            <a:r>
+              <a:rPr lang="en-US" sz="1500">
+                <a:solidFill>
+                  <a:schemeClr val="accent1"/>
+                </a:solidFill>
+                <a:latin typeface="Arial"/>
+                <a:cs typeface="Arial"/>
+              </a:rPr>
+              <a:t>Lagrange</a:t>
+            </a:r>
+            <a:r>
+              <a:rPr lang="en-US" sz="1500" dirty="0">
+                <a:solidFill>
+                  <a:schemeClr val="accent1"/>
+                </a:solidFill>
+                <a:latin typeface="Arial"/>
+                <a:cs typeface="Arial"/>
+              </a:rPr>
+              <a:t> Method</a:t>
+            </a:r>
+          </a:p>
+          <a:p>
+            <a:pPr marL="1200150" lvl="2" indent="-285750">
+              <a:buFont typeface="Wingdings"/>
+              <a:buChar char="§"/>
+              <a:tabLst>
+                <a:tab pos="0" algn="l"/>
+              </a:tabLst>
+            </a:pPr>
+            <a:r>
+              <a:rPr lang="en-US" sz="1500">
+                <a:solidFill>
+                  <a:schemeClr val="accent1"/>
+                </a:solidFill>
+                <a:latin typeface="Arial"/>
+                <a:cs typeface="Arial"/>
+              </a:rPr>
+              <a:t>Simulated Annealing</a:t>
+            </a:r>
+            <a:endParaRPr lang="en-US" sz="1500" dirty="0">
+              <a:solidFill>
+                <a:schemeClr val="accent1"/>
+              </a:solidFill>
+              <a:latin typeface="Arial"/>
+              <a:cs typeface="Arial"/>
+            </a:endParaRPr>
+          </a:p>
+          <a:p>
+            <a:pPr marL="1200150" lvl="2" indent="-285750">
+              <a:buFont typeface="Wingdings"/>
+              <a:buChar char="§"/>
+              <a:tabLst>
+                <a:tab pos="0" algn="l"/>
+              </a:tabLst>
+            </a:pPr>
+            <a:endParaRPr lang="en-US" sz="1500" dirty="0">
+              <a:solidFill>
+                <a:schemeClr val="accent1"/>
+              </a:solidFill>
+              <a:latin typeface="Arial"/>
+              <a:cs typeface="Arial"/>
+            </a:endParaRPr>
+          </a:p>
+          <a:p>
+            <a:pPr>
+              <a:tabLst>
+                <a:tab pos="0" algn="l"/>
+              </a:tabLst>
+            </a:pPr>
+            <a:endParaRPr lang="en-US" sz="1500" dirty="0">
+              <a:solidFill>
+                <a:schemeClr val="accent1"/>
+              </a:solidFill>
+              <a:latin typeface="Arial"/>
+              <a:cs typeface="Arial"/>
+            </a:endParaRPr>
+          </a:p>
+          <a:p>
+            <a:pPr marL="285750" indent="-285750">
+              <a:buFont typeface="Arial"/>
+              <a:buChar char="•"/>
+              <a:tabLst>
+                <a:tab pos="0" algn="l"/>
+              </a:tabLst>
+            </a:pPr>
+            <a:endParaRPr lang="en-US" sz="1500" dirty="0">
+              <a:solidFill>
+                <a:schemeClr val="accent1"/>
+              </a:solidFill>
+              <a:latin typeface="Arial"/>
+              <a:cs typeface="Arial"/>
             </a:endParaRPr>
           </a:p>
         </p:txBody>
@@ -2556,28 +3976,35 @@
           </a:ln>
         </p:spPr>
         <p:style>
-          <a:lnRef idx="0"/>
-          <a:fillRef idx="0"/>
-          <a:effectRef idx="0"/>
+          <a:lnRef idx="0">
+            <a:scrgbClr r="0" g="0" b="0"/>
+          </a:lnRef>
+          <a:fillRef idx="0">
+            <a:scrgbClr r="0" g="0" b="0"/>
+          </a:fillRef>
+          <a:effectRef idx="0">
+            <a:scrgbClr r="0" g="0" b="0"/>
+          </a:effectRef>
           <a:fontRef idx="minor"/>
         </p:style>
         <p:txBody>
-          <a:bodyPr lIns="0" rIns="0" tIns="0" bIns="0" anchor="t">
+          <a:bodyPr lIns="0" tIns="0" rIns="0" bIns="0" anchor="t">
             <a:noAutofit/>
           </a:bodyPr>
+          <a:lstStyle/>
           <a:p>
             <a:pPr algn="r" defTabSz="914400">
               <a:lnSpc>
                 <a:spcPts val="4915"/>
               </a:lnSpc>
               <a:tabLst>
-                <a:tab algn="l" pos="0"/>
+                <a:tab pos="0" algn="l"/>
               </a:tabLst>
             </a:pPr>
             <a:r>
-              <a:rPr b="1" lang="en-US" sz="5850" strike="noStrike" u="none">
-                <a:solidFill>
-                  <a:srgbClr val="ffffff"/>
+              <a:rPr lang="en-US" sz="5850" b="1" u="none" strike="noStrike">
+                <a:solidFill>
+                  <a:srgbClr val="FFFFFF"/>
                 </a:solidFill>
                 <a:effectLst/>
                 <a:uFillTx/>
@@ -2586,9 +4013,9 @@
               </a:rPr>
               <a:t>zh</a:t>
             </a:r>
-            <a:endParaRPr b="0" lang="en-GB" sz="5850" strike="noStrike" u="none">
-              <a:solidFill>
-                <a:srgbClr val="ffffff"/>
+            <a:endParaRPr lang="en-GB" sz="5850" b="0" u="none" strike="noStrike">
+              <a:solidFill>
+                <a:srgbClr val="FFFFFF"/>
               </a:solidFill>
               <a:effectLst/>
               <a:uFillTx/>
@@ -2601,13 +4028,13 @@
                 <a:spcPts val="4915"/>
               </a:lnSpc>
               <a:tabLst>
-                <a:tab algn="l" pos="0"/>
+                <a:tab pos="0" algn="l"/>
               </a:tabLst>
             </a:pPr>
             <a:r>
-              <a:rPr b="1" lang="en-US" sz="5850" strike="noStrike" u="none">
-                <a:solidFill>
-                  <a:srgbClr val="ffffff"/>
+              <a:rPr lang="en-US" sz="5850" b="1" u="none" strike="noStrike">
+                <a:solidFill>
+                  <a:srgbClr val="FFFFFF"/>
                 </a:solidFill>
                 <a:effectLst/>
                 <a:uFillTx/>
@@ -2616,9 +4043,9 @@
               </a:rPr>
               <a:t>aw</a:t>
             </a:r>
-            <a:endParaRPr b="0" lang="en-GB" sz="5850" strike="noStrike" u="none">
-              <a:solidFill>
-                <a:srgbClr val="ffffff"/>
+            <a:endParaRPr lang="en-GB" sz="5850" b="0" u="none" strike="noStrike">
+              <a:solidFill>
+                <a:srgbClr val="FFFFFF"/>
               </a:solidFill>
               <a:effectLst/>
               <a:uFillTx/>
@@ -2636,7 +4063,7 @@
         <p:spPr>
           <a:xfrm>
             <a:off x="685800" y="857160"/>
-            <a:ext cx="1699920" cy="399600"/>
+            <a:ext cx="3166410" cy="415774"/>
           </a:xfrm>
           <a:prstGeom prst="rect">
             <a:avLst/>
@@ -2647,68 +4074,61 @@
           </a:ln>
         </p:spPr>
         <p:style>
-          <a:lnRef idx="0"/>
-          <a:fillRef idx="0"/>
-          <a:effectRef idx="0"/>
+          <a:lnRef idx="0">
+            <a:scrgbClr r="0" g="0" b="0"/>
+          </a:lnRef>
+          <a:fillRef idx="0">
+            <a:scrgbClr r="0" g="0" b="0"/>
+          </a:fillRef>
+          <a:effectRef idx="0">
+            <a:scrgbClr r="0" g="0" b="0"/>
+          </a:effectRef>
           <a:fontRef idx="minor"/>
         </p:style>
         <p:txBody>
-          <a:bodyPr lIns="0" rIns="0" tIns="0" bIns="0" anchor="t">
+          <a:bodyPr lIns="0" tIns="0" rIns="0" bIns="0" anchor="t">
             <a:noAutofit/>
           </a:bodyPr>
-          <a:p>
-            <a:pPr defTabSz="914400">
+          <a:lstStyle/>
+          <a:p>
+            <a:pPr>
               <a:lnSpc>
                 <a:spcPts val="3149"/>
               </a:lnSpc>
               <a:tabLst>
-                <a:tab algn="l" pos="0"/>
+                <a:tab pos="0" algn="l"/>
               </a:tabLst>
             </a:pPr>
             <a:r>
-              <a:rPr b="0" lang="en-US" sz="2100" strike="noStrike" u="none">
-                <a:solidFill>
-                  <a:srgbClr val="ffffff"/>
-                </a:solidFill>
-                <a:effectLst/>
-                <a:uFillTx/>
+              <a:rPr lang="en-US" sz="2100">
+                <a:solidFill>
+                  <a:srgbClr val="FFFFFF"/>
+                </a:solidFill>
                 <a:latin typeface="Arial"/>
-                <a:ea typeface="Arial"/>
-              </a:rPr>
-              <a:t>Content title</a:t>
-            </a:r>
-            <a:endParaRPr b="0" lang="en-GB" sz="2100" strike="noStrike" u="none">
-              <a:solidFill>
-                <a:srgbClr val="ffffff"/>
-              </a:solidFill>
-              <a:effectLst/>
-              <a:uFillTx/>
-              <a:latin typeface="Arial"/>
-            </a:endParaRPr>
+              </a:rPr>
+              <a:t>Problem Formulation</a:t>
+            </a:r>
+            <a:endParaRPr lang="en-US"/>
           </a:p>
         </p:txBody>
       </p:sp>
     </p:spTree>
   </p:cSld>
-  <mc:AlternateContent>
-    <mc:Choice Requires="p14">
-      <p:transition spd="slow" p14:dur="2000"/>
-    </mc:Choice>
-    <mc:Fallback>
-      <p:transition spd="slow"/>
-    </mc:Fallback>
-  </mc:AlternateContent>
+  <p:clrMapOvr>
+    <a:masterClrMapping/>
+  </p:clrMapOvr>
 </p:sld>
 </file>
 
 <file path=ppt/slides/slide4.xml><?xml version="1.0" encoding="utf-8"?>
-<p:sld xmlns:a="http://schemas.openxmlformats.org/drawingml/2006/main" xmlns:p="http://schemas.openxmlformats.org/presentationml/2006/main" xmlns:r="http://schemas.openxmlformats.org/officeDocument/2006/relationships" xmlns:p14="http://schemas.microsoft.com/office/powerpoint/2010/main" xmlns:p15="http://schemas.microsoft.com/office/powerpoint/2012/main" xmlns:mc="http://schemas.openxmlformats.org/markup-compatibility/2006">
+<p:sld xmlns:a="http://schemas.openxmlformats.org/drawingml/2006/main" xmlns:r="http://schemas.openxmlformats.org/officeDocument/2006/relationships" xmlns:p="http://schemas.openxmlformats.org/presentationml/2006/main">
   <p:cSld>
     <p:bg>
       <p:bgPr>
         <a:solidFill>
-          <a:srgbClr val="005b96"/>
+          <a:srgbClr val="005B96"/>
         </a:solidFill>
+        <a:effectLst/>
       </p:bgPr>
     </p:bg>
     <p:spTree>
@@ -2727,6 +4147,55 @@
       </p:grpSpPr>
       <p:sp>
         <p:nvSpPr>
+          <p:cNvPr id="3" name="Rectangle 2">
+            <a:extLst>
+              <a:ext uri="{FF2B5EF4-FFF2-40B4-BE49-F238E27FC236}">
+                <a16:creationId xmlns:a16="http://schemas.microsoft.com/office/drawing/2014/main" id="{900D2061-A89B-486F-A4BC-B38974C6212A}"/>
+              </a:ext>
+            </a:extLst>
+          </p:cNvPr>
+          <p:cNvSpPr/>
+          <p:nvPr/>
+        </p:nvSpPr>
+        <p:spPr>
+          <a:xfrm>
+            <a:off x="-1" y="1719891"/>
+            <a:ext cx="9146699" cy="3434393"/>
+          </a:xfrm>
+          <a:prstGeom prst="rect">
+            <a:avLst/>
+          </a:prstGeom>
+          <a:solidFill>
+            <a:schemeClr val="bg1"/>
+          </a:solidFill>
+        </p:spPr>
+        <p:style>
+          <a:lnRef idx="2">
+            <a:schemeClr val="accent1">
+              <a:shade val="15000"/>
+            </a:schemeClr>
+          </a:lnRef>
+          <a:fillRef idx="1">
+            <a:schemeClr val="accent1"/>
+          </a:fillRef>
+          <a:effectRef idx="0">
+            <a:schemeClr val="accent1"/>
+          </a:effectRef>
+          <a:fontRef idx="minor">
+            <a:schemeClr val="lt1"/>
+          </a:fontRef>
+        </p:style>
+        <p:txBody>
+          <a:bodyPr rtlCol="0" anchor="ctr"/>
+          <a:lstStyle/>
+          <a:p>
+            <a:pPr algn="ctr"/>
+            <a:endParaRPr lang="en-US"/>
+          </a:p>
+        </p:txBody>
+      </p:sp>
+      <p:sp>
+        <p:nvSpPr>
           <p:cNvPr id="22" name="Text 0"/>
           <p:cNvSpPr/>
           <p:nvPr/>
@@ -2740,32 +4209,39 @@
             <a:avLst/>
           </a:prstGeom>
           <a:solidFill>
-            <a:srgbClr val="ffffff"/>
+            <a:srgbClr val="FFFFFF"/>
           </a:solidFill>
           <a:ln w="0">
             <a:noFill/>
           </a:ln>
         </p:spPr>
         <p:style>
-          <a:lnRef idx="0"/>
-          <a:fillRef idx="0"/>
-          <a:effectRef idx="0"/>
+          <a:lnRef idx="0">
+            <a:scrgbClr r="0" g="0" b="0"/>
+          </a:lnRef>
+          <a:fillRef idx="0">
+            <a:scrgbClr r="0" g="0" b="0"/>
+          </a:fillRef>
+          <a:effectRef idx="0">
+            <a:scrgbClr r="0" g="0" b="0"/>
+          </a:effectRef>
           <a:fontRef idx="minor"/>
         </p:style>
         <p:txBody>
-          <a:bodyPr wrap="none" lIns="0" rIns="0" tIns="0" bIns="0" anchor="ctr">
+          <a:bodyPr wrap="none" lIns="0" tIns="0" rIns="0" bIns="0" anchor="ctr">
             <a:normAutofit fontScale="25000" lnSpcReduction="19999"/>
           </a:bodyPr>
+          <a:lstStyle/>
           <a:p>
             <a:pPr defTabSz="914400">
               <a:lnSpc>
                 <a:spcPct val="100000"/>
               </a:lnSpc>
               <a:tabLst>
-                <a:tab algn="l" pos="0"/>
+                <a:tab pos="0" algn="l"/>
               </a:tabLst>
             </a:pPr>
-            <a:endParaRPr b="0" lang="en-US" sz="1800" strike="noStrike" u="none">
+            <a:endParaRPr lang="en-US" sz="1800" b="0" u="none" strike="noStrike">
               <a:solidFill>
                 <a:schemeClr val="dk1"/>
               </a:solidFill>
@@ -2778,46 +4254,754 @@
       </p:sp>
       <p:sp>
         <p:nvSpPr>
-          <p:cNvPr id="23" name="Text 1"/>
+          <p:cNvPr id="26" name="Text 4"/>
           <p:cNvSpPr/>
           <p:nvPr/>
         </p:nvSpPr>
         <p:spPr>
           <a:xfrm>
-            <a:off x="685800" y="2000160"/>
-            <a:ext cx="3250800" cy="2095200"/>
+            <a:off x="7493040" y="361800"/>
+            <a:ext cx="1098360" cy="1247760"/>
           </a:xfrm>
           <a:prstGeom prst="rect">
             <a:avLst/>
           </a:prstGeom>
           <a:noFill/>
-          <a:ln w="19050">
-            <a:solidFill>
-              <a:srgbClr val="ffffff"/>
-            </a:solidFill>
-            <a:round/>
+          <a:ln w="0">
+            <a:noFill/>
           </a:ln>
         </p:spPr>
         <p:style>
-          <a:lnRef idx="0"/>
-          <a:fillRef idx="0"/>
-          <a:effectRef idx="0"/>
+          <a:lnRef idx="0">
+            <a:scrgbClr r="0" g="0" b="0"/>
+          </a:lnRef>
+          <a:fillRef idx="0">
+            <a:scrgbClr r="0" g="0" b="0"/>
+          </a:fillRef>
+          <a:effectRef idx="0">
+            <a:scrgbClr r="0" g="0" b="0"/>
+          </a:effectRef>
           <a:fontRef idx="minor"/>
         </p:style>
         <p:txBody>
-          <a:bodyPr wrap="none" lIns="0" rIns="0" tIns="0" bIns="0" anchor="ctr">
-            <a:normAutofit/>
+          <a:bodyPr lIns="0" tIns="0" rIns="0" bIns="0" anchor="t">
+            <a:noAutofit/>
           </a:bodyPr>
+          <a:lstStyle/>
+          <a:p>
+            <a:pPr algn="r" defTabSz="914400">
+              <a:lnSpc>
+                <a:spcPts val="4915"/>
+              </a:lnSpc>
+              <a:tabLst>
+                <a:tab pos="0" algn="l"/>
+              </a:tabLst>
+            </a:pPr>
+            <a:r>
+              <a:rPr lang="en-US" sz="5850" b="1" u="none" strike="noStrike">
+                <a:solidFill>
+                  <a:srgbClr val="FFFFFF"/>
+                </a:solidFill>
+                <a:effectLst/>
+                <a:uFillTx/>
+                <a:latin typeface="Arial"/>
+                <a:ea typeface="Arial"/>
+              </a:rPr>
+              <a:t>zh</a:t>
+            </a:r>
+            <a:endParaRPr lang="en-GB" sz="5850" b="0" u="none" strike="noStrike">
+              <a:solidFill>
+                <a:srgbClr val="FFFFFF"/>
+              </a:solidFill>
+              <a:effectLst/>
+              <a:uFillTx/>
+              <a:latin typeface="Arial"/>
+            </a:endParaRPr>
+          </a:p>
+          <a:p>
+            <a:pPr algn="r" defTabSz="914400">
+              <a:lnSpc>
+                <a:spcPts val="4915"/>
+              </a:lnSpc>
+              <a:tabLst>
+                <a:tab pos="0" algn="l"/>
+              </a:tabLst>
+            </a:pPr>
+            <a:r>
+              <a:rPr lang="en-US" sz="5850" b="1" u="none" strike="noStrike">
+                <a:solidFill>
+                  <a:srgbClr val="FFFFFF"/>
+                </a:solidFill>
+                <a:effectLst/>
+                <a:uFillTx/>
+                <a:latin typeface="Arial"/>
+                <a:ea typeface="Arial"/>
+              </a:rPr>
+              <a:t>aw</a:t>
+            </a:r>
+            <a:endParaRPr lang="en-GB" sz="5850" b="0" u="none" strike="noStrike">
+              <a:solidFill>
+                <a:srgbClr val="FFFFFF"/>
+              </a:solidFill>
+              <a:effectLst/>
+              <a:uFillTx/>
+              <a:latin typeface="Arial"/>
+            </a:endParaRPr>
+          </a:p>
+        </p:txBody>
+      </p:sp>
+      <p:sp>
+        <p:nvSpPr>
+          <p:cNvPr id="27" name="Text 5"/>
+          <p:cNvSpPr/>
+          <p:nvPr/>
+        </p:nvSpPr>
+        <p:spPr>
+          <a:xfrm>
+            <a:off x="685800" y="857160"/>
+            <a:ext cx="2094643" cy="425285"/>
+          </a:xfrm>
+          <a:prstGeom prst="rect">
+            <a:avLst/>
+          </a:prstGeom>
+          <a:noFill/>
+          <a:ln w="0">
+            <a:noFill/>
+          </a:ln>
+        </p:spPr>
+        <p:style>
+          <a:lnRef idx="0">
+            <a:scrgbClr r="0" g="0" b="0"/>
+          </a:lnRef>
+          <a:fillRef idx="0">
+            <a:scrgbClr r="0" g="0" b="0"/>
+          </a:fillRef>
+          <a:effectRef idx="0">
+            <a:scrgbClr r="0" g="0" b="0"/>
+          </a:effectRef>
+          <a:fontRef idx="minor"/>
+        </p:style>
+        <p:txBody>
+          <a:bodyPr lIns="0" tIns="0" rIns="0" bIns="0" anchor="t">
+            <a:noAutofit/>
+          </a:bodyPr>
+          <a:lstStyle/>
+          <a:p>
+            <a:pPr>
+              <a:lnSpc>
+                <a:spcPts val="3149"/>
+              </a:lnSpc>
+              <a:tabLst>
+                <a:tab pos="0" algn="l"/>
+              </a:tabLst>
+            </a:pPr>
+            <a:r>
+              <a:rPr lang="en-US" sz="2100">
+                <a:solidFill>
+                  <a:srgbClr val="FFFFFF"/>
+                </a:solidFill>
+                <a:latin typeface="Arial"/>
+              </a:rPr>
+              <a:t>Lagrange Method</a:t>
+            </a:r>
+            <a:endParaRPr lang="en-GB" sz="2100" b="0" u="none" strike="noStrike">
+              <a:solidFill>
+                <a:srgbClr val="FFFFFF"/>
+              </a:solidFill>
+              <a:effectLst/>
+              <a:uFillTx/>
+              <a:latin typeface="Arial"/>
+            </a:endParaRPr>
+          </a:p>
+        </p:txBody>
+      </p:sp>
+      <p:sp>
+        <p:nvSpPr>
+          <p:cNvPr id="5" name="Text 3">
+            <a:extLst>
+              <a:ext uri="{FF2B5EF4-FFF2-40B4-BE49-F238E27FC236}">
+                <a16:creationId xmlns:a16="http://schemas.microsoft.com/office/drawing/2014/main" id="{FB073619-DD9F-B682-7EA6-0A588B48114B}"/>
+              </a:ext>
+            </a:extLst>
+          </p:cNvPr>
+          <p:cNvSpPr/>
+          <p:nvPr/>
+        </p:nvSpPr>
+        <p:spPr>
+          <a:xfrm>
+            <a:off x="685800" y="2157427"/>
+            <a:ext cx="6266312" cy="2897869"/>
+          </a:xfrm>
+          <a:prstGeom prst="rect">
+            <a:avLst/>
+          </a:prstGeom>
+          <a:noFill/>
+          <a:ln w="0">
+            <a:noFill/>
+          </a:ln>
+        </p:spPr>
+        <p:style>
+          <a:lnRef idx="0">
+            <a:scrgbClr r="0" g="0" b="0"/>
+          </a:lnRef>
+          <a:fillRef idx="0">
+            <a:scrgbClr r="0" g="0" b="0"/>
+          </a:fillRef>
+          <a:effectRef idx="0">
+            <a:scrgbClr r="0" g="0" b="0"/>
+          </a:effectRef>
+          <a:fontRef idx="minor"/>
+        </p:style>
+        <p:txBody>
+          <a:bodyPr lIns="0" tIns="0" rIns="0" bIns="0" anchor="t">
+            <a:noAutofit/>
+          </a:bodyPr>
+          <a:lstStyle/>
+          <a:p>
+            <a:r>
+              <a:rPr lang="en-US" sz="1650" b="1" i="1" dirty="0">
+                <a:solidFill>
+                  <a:schemeClr val="accent1"/>
+                </a:solidFill>
+                <a:ea typeface="Calibri" panose="020F0502020204030204"/>
+                <a:cs typeface="Calibri" panose="020F0502020204030204"/>
+              </a:rPr>
+              <a:t>a</a:t>
+            </a:r>
+            <a:r>
+              <a:rPr lang="en-US" sz="1650" i="1" dirty="0">
+                <a:solidFill>
+                  <a:schemeClr val="accent1"/>
+                </a:solidFill>
+                <a:ea typeface="Calibri" panose="020F0502020204030204"/>
+                <a:cs typeface="Calibri" panose="020F0502020204030204"/>
+              </a:rPr>
+              <a:t>  </a:t>
+            </a:r>
+            <a:r>
+              <a:rPr lang="en-US" sz="1650">
+                <a:solidFill>
+                  <a:schemeClr val="accent1"/>
+                </a:solidFill>
+                <a:ea typeface="Calibri" panose="020F0502020204030204"/>
+                <a:cs typeface="Calibri" panose="020F0502020204030204"/>
+              </a:rPr>
+              <a:t>: delivery-loss factor</a:t>
+            </a:r>
+            <a:endParaRPr lang="en-US" sz="1650" dirty="0">
+              <a:solidFill>
+                <a:schemeClr val="accent1"/>
+              </a:solidFill>
+              <a:ea typeface="Calibri" panose="020F0502020204030204"/>
+              <a:cs typeface="Calibri" panose="020F0502020204030204"/>
+            </a:endParaRPr>
+          </a:p>
+          <a:p>
+            <a:r>
+              <a:rPr lang="en-US" sz="1650" b="1" i="1">
+                <a:solidFill>
+                  <a:schemeClr val="accent1"/>
+                </a:solidFill>
+                <a:ea typeface="Calibri" panose="020F0502020204030204"/>
+                <a:cs typeface="Calibri" panose="020F0502020204030204"/>
+              </a:rPr>
+              <a:t>b</a:t>
+            </a:r>
+            <a:r>
+              <a:rPr lang="en-US" sz="1650">
+                <a:solidFill>
+                  <a:schemeClr val="accent1"/>
+                </a:solidFill>
+                <a:ea typeface="Calibri" panose="020F0502020204030204"/>
+                <a:cs typeface="Calibri" panose="020F0502020204030204"/>
+              </a:rPr>
+              <a:t>  : the smallest required amount of water per household</a:t>
+            </a:r>
+            <a:endParaRPr lang="en-US">
+              <a:solidFill>
+                <a:schemeClr val="accent1"/>
+              </a:solidFill>
+              <a:ea typeface="Calibri" panose="020F0502020204030204"/>
+              <a:cs typeface="Calibri" panose="020F0502020204030204"/>
+            </a:endParaRPr>
+          </a:p>
+          <a:p>
+            <a:r>
+              <a:rPr lang="en-US" sz="1650" b="1" i="1">
+                <a:solidFill>
+                  <a:schemeClr val="accent1"/>
+                </a:solidFill>
+                <a:ea typeface="Calibri" panose="020F0502020204030204"/>
+                <a:cs typeface="Calibri" panose="020F0502020204030204"/>
+              </a:rPr>
+              <a:t>d</a:t>
+            </a:r>
+            <a:r>
+              <a:rPr lang="en-US" sz="1650">
+                <a:solidFill>
+                  <a:schemeClr val="accent1"/>
+                </a:solidFill>
+                <a:ea typeface="Calibri" panose="020F0502020204030204"/>
+                <a:cs typeface="Calibri" panose="020F0502020204030204"/>
+              </a:rPr>
+              <a:t>  : demand per household</a:t>
+            </a:r>
+          </a:p>
+          <a:p>
+            <a:r>
+              <a:rPr lang="en-US" sz="1650" b="1" i="1">
+                <a:solidFill>
+                  <a:schemeClr val="accent1"/>
+                </a:solidFill>
+                <a:ea typeface="Calibri" panose="020F0502020204030204"/>
+                <a:cs typeface="Calibri" panose="020F0502020204030204"/>
+              </a:rPr>
+              <a:t>w</a:t>
+            </a:r>
+            <a:r>
+              <a:rPr lang="en-US" sz="1650">
+                <a:solidFill>
+                  <a:schemeClr val="accent1"/>
+                </a:solidFill>
+                <a:ea typeface="Calibri" panose="020F0502020204030204"/>
+                <a:cs typeface="Calibri" panose="020F0502020204030204"/>
+              </a:rPr>
+              <a:t> : house priority/vulnerability factor</a:t>
+            </a:r>
+            <a:endParaRPr lang="en-US" sz="1650" dirty="0">
+              <a:solidFill>
+                <a:schemeClr val="accent1"/>
+              </a:solidFill>
+              <a:ea typeface="Calibri" panose="020F0502020204030204"/>
+              <a:cs typeface="Calibri" panose="020F0502020204030204"/>
+            </a:endParaRPr>
+          </a:p>
+          <a:p>
+            <a:r>
+              <a:rPr lang="en-US" sz="1650" b="1" i="1">
+                <a:solidFill>
+                  <a:schemeClr val="accent1"/>
+                </a:solidFill>
+                <a:ea typeface="Calibri" panose="020F0502020204030204"/>
+                <a:cs typeface="Calibri" panose="020F0502020204030204"/>
+              </a:rPr>
+              <a:t>S</a:t>
+            </a:r>
+            <a:r>
+              <a:rPr lang="en-US" sz="1650">
+                <a:solidFill>
+                  <a:schemeClr val="accent1"/>
+                </a:solidFill>
+                <a:ea typeface="Calibri" panose="020F0502020204030204"/>
+                <a:cs typeface="Calibri" panose="020F0502020204030204"/>
+              </a:rPr>
+              <a:t>  : total available water supply</a:t>
+            </a:r>
+            <a:endParaRPr lang="en-US" sz="1650" dirty="0">
+              <a:solidFill>
+                <a:schemeClr val="accent1"/>
+              </a:solidFill>
+              <a:ea typeface="Calibri" panose="020F0502020204030204"/>
+              <a:cs typeface="Calibri" panose="020F0502020204030204"/>
+            </a:endParaRPr>
+          </a:p>
+          <a:p>
+            <a:pPr marL="285750" indent="-285750">
+              <a:buFont typeface="Arial"/>
+              <a:buChar char="•"/>
+            </a:pPr>
+            <a:endParaRPr lang="en-US" sz="1650" dirty="0">
+              <a:solidFill>
+                <a:schemeClr val="accent1"/>
+              </a:solidFill>
+              <a:ea typeface="Calibri" panose="020F0502020204030204"/>
+              <a:cs typeface="Calibri" panose="020F0502020204030204"/>
+            </a:endParaRPr>
+          </a:p>
+          <a:p>
+            <a:r>
+              <a:rPr lang="en-US" sz="1650" dirty="0">
+                <a:solidFill>
+                  <a:schemeClr val="accent1"/>
+                </a:solidFill>
+                <a:ea typeface="Calibri" panose="020F0502020204030204"/>
+                <a:cs typeface="Calibri" panose="020F0502020204030204"/>
+              </a:rPr>
+              <a:t>Objective function:</a:t>
+            </a:r>
+            <a:endParaRPr lang="en-US" sz="1650" baseline="30000" dirty="0">
+              <a:solidFill>
+                <a:schemeClr val="accent1"/>
+              </a:solidFill>
+              <a:ea typeface="Calibri" panose="020F0502020204030204"/>
+              <a:cs typeface="Calibri" panose="020F0502020204030204"/>
+            </a:endParaRPr>
+          </a:p>
+          <a:p>
+            <a:r>
+              <a:rPr lang="en-US" sz="1650">
+                <a:solidFill>
+                  <a:schemeClr val="accent1"/>
+                </a:solidFill>
+                <a:ea typeface="Calibri" panose="020F0502020204030204"/>
+                <a:cs typeface="Calibri" panose="020F0502020204030204"/>
+              </a:rPr>
+              <a:t>Restrictions:    </a:t>
+            </a:r>
+          </a:p>
+          <a:p>
+            <a:endParaRPr lang="en-US" sz="1650" dirty="0">
+              <a:solidFill>
+                <a:schemeClr val="accent1"/>
+              </a:solidFill>
+              <a:ea typeface="Calibri" panose="020F0502020204030204"/>
+              <a:cs typeface="Calibri" panose="020F0502020204030204"/>
+            </a:endParaRPr>
+          </a:p>
+          <a:p>
+            <a:endParaRPr lang="en-US" sz="1650" dirty="0">
+              <a:solidFill>
+                <a:schemeClr val="accent1"/>
+              </a:solidFill>
+              <a:ea typeface="Calibri" panose="020F0502020204030204"/>
+              <a:cs typeface="Calibri" panose="020F0502020204030204"/>
+            </a:endParaRPr>
+          </a:p>
+        </p:txBody>
+      </p:sp>
+      <p:pic>
+        <p:nvPicPr>
+          <p:cNvPr id="4" name="Picture 3">
+            <a:extLst>
+              <a:ext uri="{FF2B5EF4-FFF2-40B4-BE49-F238E27FC236}">
+                <a16:creationId xmlns:a16="http://schemas.microsoft.com/office/drawing/2014/main" id="{A6740574-6A66-5193-A369-96DC719CD2F4}"/>
+              </a:ext>
+            </a:extLst>
+          </p:cNvPr>
+          <p:cNvPicPr>
+            <a:picLocks noChangeAspect="1"/>
+          </p:cNvPicPr>
+          <p:nvPr/>
+        </p:nvPicPr>
+        <p:blipFill>
+          <a:blip r:embed="rId3"/>
+          <a:stretch>
+            <a:fillRect/>
+          </a:stretch>
+        </p:blipFill>
+        <p:spPr>
+          <a:xfrm>
+            <a:off x="2385383" y="3675302"/>
+            <a:ext cx="1504950" cy="219075"/>
+          </a:xfrm>
+          <a:prstGeom prst="rect">
+            <a:avLst/>
+          </a:prstGeom>
+        </p:spPr>
+      </p:pic>
+      <p:pic>
+        <p:nvPicPr>
+          <p:cNvPr id="7" name="Picture 6">
+            <a:extLst>
+              <a:ext uri="{FF2B5EF4-FFF2-40B4-BE49-F238E27FC236}">
+                <a16:creationId xmlns:a16="http://schemas.microsoft.com/office/drawing/2014/main" id="{D3846FEB-415C-AC74-9F12-4743E327520D}"/>
+              </a:ext>
+            </a:extLst>
+          </p:cNvPr>
+          <p:cNvPicPr>
+            <a:picLocks noChangeAspect="1"/>
+          </p:cNvPicPr>
+          <p:nvPr/>
+        </p:nvPicPr>
+        <p:blipFill>
+          <a:blip r:embed="rId4"/>
+          <a:stretch>
+            <a:fillRect/>
+          </a:stretch>
+        </p:blipFill>
+        <p:spPr>
+          <a:xfrm>
+            <a:off x="3162121" y="3969320"/>
+            <a:ext cx="285750" cy="180975"/>
+          </a:xfrm>
+          <a:prstGeom prst="rect">
+            <a:avLst/>
+          </a:prstGeom>
+        </p:spPr>
+      </p:pic>
+      <p:pic>
+        <p:nvPicPr>
+          <p:cNvPr id="8" name="Picture 7">
+            <a:extLst>
+              <a:ext uri="{FF2B5EF4-FFF2-40B4-BE49-F238E27FC236}">
+                <a16:creationId xmlns:a16="http://schemas.microsoft.com/office/drawing/2014/main" id="{AA9DE424-2D24-FC14-C80E-E0CC9B05A275}"/>
+              </a:ext>
+            </a:extLst>
+          </p:cNvPr>
+          <p:cNvPicPr>
+            <a:picLocks noChangeAspect="1"/>
+          </p:cNvPicPr>
+          <p:nvPr/>
+        </p:nvPicPr>
+        <p:blipFill>
+          <a:blip r:embed="rId5"/>
+          <a:stretch>
+            <a:fillRect/>
+          </a:stretch>
+        </p:blipFill>
+        <p:spPr>
+          <a:xfrm>
+            <a:off x="2385832" y="3969320"/>
+            <a:ext cx="695325" cy="180975"/>
+          </a:xfrm>
+          <a:prstGeom prst="rect">
+            <a:avLst/>
+          </a:prstGeom>
+        </p:spPr>
+      </p:pic>
+      <p:pic>
+        <p:nvPicPr>
+          <p:cNvPr id="9" name="Picture 8">
+            <a:extLst>
+              <a:ext uri="{FF2B5EF4-FFF2-40B4-BE49-F238E27FC236}">
+                <a16:creationId xmlns:a16="http://schemas.microsoft.com/office/drawing/2014/main" id="{D1F55A27-09FF-AE1C-F847-5C9F5F7528D2}"/>
+              </a:ext>
+            </a:extLst>
+          </p:cNvPr>
+          <p:cNvPicPr>
+            <a:picLocks noChangeAspect="1"/>
+          </p:cNvPicPr>
+          <p:nvPr/>
+        </p:nvPicPr>
+        <p:blipFill>
+          <a:blip r:embed="rId6"/>
+          <a:stretch>
+            <a:fillRect/>
+          </a:stretch>
+        </p:blipFill>
+        <p:spPr>
+          <a:xfrm>
+            <a:off x="3533326" y="3969319"/>
+            <a:ext cx="314325" cy="180975"/>
+          </a:xfrm>
+          <a:prstGeom prst="rect">
+            <a:avLst/>
+          </a:prstGeom>
+        </p:spPr>
+      </p:pic>
+      <p:pic>
+        <p:nvPicPr>
+          <p:cNvPr id="10" name="Picture 9">
+            <a:extLst>
+              <a:ext uri="{FF2B5EF4-FFF2-40B4-BE49-F238E27FC236}">
+                <a16:creationId xmlns:a16="http://schemas.microsoft.com/office/drawing/2014/main" id="{977D6457-FDF9-602B-8A13-AA8A3F1AE7AD}"/>
+              </a:ext>
+            </a:extLst>
+          </p:cNvPr>
+          <p:cNvPicPr>
+            <a:picLocks noChangeAspect="1"/>
+          </p:cNvPicPr>
+          <p:nvPr/>
+        </p:nvPicPr>
+        <p:blipFill>
+          <a:blip r:embed="rId7"/>
+          <a:stretch>
+            <a:fillRect/>
+          </a:stretch>
+        </p:blipFill>
+        <p:spPr>
+          <a:xfrm>
+            <a:off x="3927714" y="3969320"/>
+            <a:ext cx="285750" cy="180975"/>
+          </a:xfrm>
+          <a:prstGeom prst="rect">
+            <a:avLst/>
+          </a:prstGeom>
+        </p:spPr>
+      </p:pic>
+      <p:pic>
+        <p:nvPicPr>
+          <p:cNvPr id="11" name="Picture 10">
+            <a:extLst>
+              <a:ext uri="{FF2B5EF4-FFF2-40B4-BE49-F238E27FC236}">
+                <a16:creationId xmlns:a16="http://schemas.microsoft.com/office/drawing/2014/main" id="{92748FFA-81B5-E93F-8FAB-2BAD17DFE228}"/>
+              </a:ext>
+            </a:extLst>
+          </p:cNvPr>
+          <p:cNvPicPr>
+            <a:picLocks noChangeAspect="1"/>
+          </p:cNvPicPr>
+          <p:nvPr/>
+        </p:nvPicPr>
+        <p:blipFill>
+          <a:blip r:embed="rId8"/>
+          <a:stretch>
+            <a:fillRect/>
+          </a:stretch>
+        </p:blipFill>
+        <p:spPr>
+          <a:xfrm>
+            <a:off x="3081696" y="3969320"/>
+            <a:ext cx="47625" cy="180975"/>
+          </a:xfrm>
+          <a:prstGeom prst="rect">
+            <a:avLst/>
+          </a:prstGeom>
+        </p:spPr>
+      </p:pic>
+      <p:pic>
+        <p:nvPicPr>
+          <p:cNvPr id="12" name="Picture 11">
+            <a:extLst>
+              <a:ext uri="{FF2B5EF4-FFF2-40B4-BE49-F238E27FC236}">
+                <a16:creationId xmlns:a16="http://schemas.microsoft.com/office/drawing/2014/main" id="{B2AABF8C-D88D-C081-964B-2440E4E5BDB0}"/>
+              </a:ext>
+            </a:extLst>
+          </p:cNvPr>
+          <p:cNvPicPr>
+            <a:picLocks noChangeAspect="1"/>
+          </p:cNvPicPr>
+          <p:nvPr/>
+        </p:nvPicPr>
+        <p:blipFill>
+          <a:blip r:embed="rId8"/>
+          <a:stretch>
+            <a:fillRect/>
+          </a:stretch>
+        </p:blipFill>
+        <p:spPr>
+          <a:xfrm>
+            <a:off x="3448319" y="3969320"/>
+            <a:ext cx="47625" cy="180975"/>
+          </a:xfrm>
+          <a:prstGeom prst="rect">
+            <a:avLst/>
+          </a:prstGeom>
+        </p:spPr>
+      </p:pic>
+      <p:pic>
+        <p:nvPicPr>
+          <p:cNvPr id="13" name="Picture 12">
+            <a:extLst>
+              <a:ext uri="{FF2B5EF4-FFF2-40B4-BE49-F238E27FC236}">
+                <a16:creationId xmlns:a16="http://schemas.microsoft.com/office/drawing/2014/main" id="{049BF23F-3C0F-5706-4DCA-AF0F7D25D232}"/>
+              </a:ext>
+            </a:extLst>
+          </p:cNvPr>
+          <p:cNvPicPr>
+            <a:picLocks noChangeAspect="1"/>
+          </p:cNvPicPr>
+          <p:nvPr/>
+        </p:nvPicPr>
+        <p:blipFill>
+          <a:blip r:embed="rId8"/>
+          <a:stretch>
+            <a:fillRect/>
+          </a:stretch>
+        </p:blipFill>
+        <p:spPr>
+          <a:xfrm>
+            <a:off x="3847290" y="3969320"/>
+            <a:ext cx="47625" cy="180975"/>
+          </a:xfrm>
+          <a:prstGeom prst="rect">
+            <a:avLst/>
+          </a:prstGeom>
+        </p:spPr>
+      </p:pic>
+    </p:spTree>
+  </p:cSld>
+  <p:clrMapOvr>
+    <a:masterClrMapping/>
+  </p:clrMapOvr>
+</p:sld>
+</file>
+
+<file path=ppt/slides/slide5.xml><?xml version="1.0" encoding="utf-8"?>
+<p:sld xmlns:a="http://schemas.openxmlformats.org/drawingml/2006/main" xmlns:r="http://schemas.openxmlformats.org/officeDocument/2006/relationships" xmlns:p="http://schemas.openxmlformats.org/presentationml/2006/main">
+  <p:cSld>
+    <p:bg>
+      <p:bgPr>
+        <a:solidFill>
+          <a:srgbClr val="005B96"/>
+        </a:solidFill>
+        <a:effectLst/>
+      </p:bgPr>
+    </p:bg>
+    <p:spTree>
+      <p:nvGrpSpPr>
+        <p:cNvPr id="1" name="">
+          <a:extLst>
+            <a:ext uri="{FF2B5EF4-FFF2-40B4-BE49-F238E27FC236}">
+              <a16:creationId xmlns:a16="http://schemas.microsoft.com/office/drawing/2014/main" id="{3F30EEAE-BADB-096E-4CC5-A379C3E9A11A}"/>
+            </a:ext>
+          </a:extLst>
+        </p:cNvPr>
+        <p:cNvGrpSpPr/>
+        <p:nvPr/>
+      </p:nvGrpSpPr>
+      <p:grpSpPr>
+        <a:xfrm>
+          <a:off x="0" y="0"/>
+          <a:ext cx="0" cy="0"/>
+          <a:chOff x="0" y="0"/>
+          <a:chExt cx="0" cy="0"/>
+        </a:xfrm>
+      </p:grpSpPr>
+      <p:sp>
+        <p:nvSpPr>
+          <p:cNvPr id="22" name="Text 0">
+            <a:extLst>
+              <a:ext uri="{FF2B5EF4-FFF2-40B4-BE49-F238E27FC236}">
+                <a16:creationId xmlns:a16="http://schemas.microsoft.com/office/drawing/2014/main" id="{FD96C2F0-8368-CE83-C0A3-7EAD2369C69A}"/>
+              </a:ext>
+            </a:extLst>
+          </p:cNvPr>
+          <p:cNvSpPr/>
+          <p:nvPr/>
+        </p:nvSpPr>
+        <p:spPr>
+          <a:xfrm>
+            <a:off x="685800" y="1333440"/>
+            <a:ext cx="6190920" cy="37800"/>
+          </a:xfrm>
+          <a:prstGeom prst="rect">
+            <a:avLst/>
+          </a:prstGeom>
+          <a:solidFill>
+            <a:srgbClr val="FFFFFF"/>
+          </a:solidFill>
+          <a:ln w="0">
+            <a:noFill/>
+          </a:ln>
+        </p:spPr>
+        <p:style>
+          <a:lnRef idx="0">
+            <a:scrgbClr r="0" g="0" b="0"/>
+          </a:lnRef>
+          <a:fillRef idx="0">
+            <a:scrgbClr r="0" g="0" b="0"/>
+          </a:fillRef>
+          <a:effectRef idx="0">
+            <a:scrgbClr r="0" g="0" b="0"/>
+          </a:effectRef>
+          <a:fontRef idx="minor"/>
+        </p:style>
+        <p:txBody>
+          <a:bodyPr wrap="none" lIns="0" tIns="0" rIns="0" bIns="0" anchor="ctr">
+            <a:normAutofit fontScale="25000" lnSpcReduction="19999"/>
+          </a:bodyPr>
+          <a:lstStyle/>
           <a:p>
             <a:pPr defTabSz="914400">
               <a:lnSpc>
                 <a:spcPct val="100000"/>
               </a:lnSpc>
               <a:tabLst>
-                <a:tab algn="l" pos="0"/>
+                <a:tab pos="0" algn="l"/>
               </a:tabLst>
             </a:pPr>
-            <a:endParaRPr b="0" lang="en-US" sz="1800" strike="noStrike" u="none">
+            <a:endParaRPr lang="en-US" sz="1800" b="0" u="none" strike="noStrike">
               <a:solidFill>
                 <a:schemeClr val="dk1"/>
               </a:solidFill>
@@ -2830,46 +5014,601 @@
       </p:sp>
       <p:sp>
         <p:nvSpPr>
-          <p:cNvPr id="24" name="Text 2"/>
+          <p:cNvPr id="26" name="Text 4">
+            <a:extLst>
+              <a:ext uri="{FF2B5EF4-FFF2-40B4-BE49-F238E27FC236}">
+                <a16:creationId xmlns:a16="http://schemas.microsoft.com/office/drawing/2014/main" id="{51179520-55AF-358C-56C4-2B28E73363D2}"/>
+              </a:ext>
+            </a:extLst>
+          </p:cNvPr>
           <p:cNvSpPr/>
           <p:nvPr/>
         </p:nvSpPr>
         <p:spPr>
           <a:xfrm>
-            <a:off x="4203720" y="2000160"/>
-            <a:ext cx="3250800" cy="2095200"/>
+            <a:off x="7493040" y="361800"/>
+            <a:ext cx="1098360" cy="1247760"/>
           </a:xfrm>
           <a:prstGeom prst="rect">
             <a:avLst/>
           </a:prstGeom>
           <a:noFill/>
-          <a:ln w="19050">
-            <a:solidFill>
-              <a:srgbClr val="ffffff"/>
-            </a:solidFill>
-            <a:round/>
+          <a:ln w="0">
+            <a:noFill/>
           </a:ln>
         </p:spPr>
         <p:style>
-          <a:lnRef idx="0"/>
-          <a:fillRef idx="0"/>
-          <a:effectRef idx="0"/>
+          <a:lnRef idx="0">
+            <a:scrgbClr r="0" g="0" b="0"/>
+          </a:lnRef>
+          <a:fillRef idx="0">
+            <a:scrgbClr r="0" g="0" b="0"/>
+          </a:fillRef>
+          <a:effectRef idx="0">
+            <a:scrgbClr r="0" g="0" b="0"/>
+          </a:effectRef>
           <a:fontRef idx="minor"/>
         </p:style>
         <p:txBody>
-          <a:bodyPr wrap="none" lIns="0" rIns="0" tIns="0" bIns="0" anchor="ctr">
-            <a:normAutofit/>
+          <a:bodyPr lIns="0" tIns="0" rIns="0" bIns="0" anchor="t">
+            <a:noAutofit/>
           </a:bodyPr>
+          <a:lstStyle/>
+          <a:p>
+            <a:pPr algn="r" defTabSz="914400">
+              <a:lnSpc>
+                <a:spcPts val="4915"/>
+              </a:lnSpc>
+              <a:tabLst>
+                <a:tab pos="0" algn="l"/>
+              </a:tabLst>
+            </a:pPr>
+            <a:r>
+              <a:rPr lang="en-US" sz="5850" b="1" u="none" strike="noStrike">
+                <a:solidFill>
+                  <a:srgbClr val="FFFFFF"/>
+                </a:solidFill>
+                <a:effectLst/>
+                <a:uFillTx/>
+                <a:latin typeface="Arial"/>
+                <a:ea typeface="Arial"/>
+              </a:rPr>
+              <a:t>zh</a:t>
+            </a:r>
+            <a:endParaRPr lang="en-GB" sz="5850" b="0" u="none" strike="noStrike">
+              <a:solidFill>
+                <a:srgbClr val="FFFFFF"/>
+              </a:solidFill>
+              <a:effectLst/>
+              <a:uFillTx/>
+              <a:latin typeface="Arial"/>
+            </a:endParaRPr>
+          </a:p>
+          <a:p>
+            <a:pPr algn="r" defTabSz="914400">
+              <a:lnSpc>
+                <a:spcPts val="4915"/>
+              </a:lnSpc>
+              <a:tabLst>
+                <a:tab pos="0" algn="l"/>
+              </a:tabLst>
+            </a:pPr>
+            <a:r>
+              <a:rPr lang="en-US" sz="5850" b="1" u="none" strike="noStrike">
+                <a:solidFill>
+                  <a:srgbClr val="FFFFFF"/>
+                </a:solidFill>
+                <a:effectLst/>
+                <a:uFillTx/>
+                <a:latin typeface="Arial"/>
+                <a:ea typeface="Arial"/>
+              </a:rPr>
+              <a:t>aw</a:t>
+            </a:r>
+            <a:endParaRPr lang="en-GB" sz="5850" b="0" u="none" strike="noStrike">
+              <a:solidFill>
+                <a:srgbClr val="FFFFFF"/>
+              </a:solidFill>
+              <a:effectLst/>
+              <a:uFillTx/>
+              <a:latin typeface="Arial"/>
+            </a:endParaRPr>
+          </a:p>
+        </p:txBody>
+      </p:sp>
+      <p:sp>
+        <p:nvSpPr>
+          <p:cNvPr id="27" name="Text 5">
+            <a:extLst>
+              <a:ext uri="{FF2B5EF4-FFF2-40B4-BE49-F238E27FC236}">
+                <a16:creationId xmlns:a16="http://schemas.microsoft.com/office/drawing/2014/main" id="{CBC8AFD6-334D-8EBF-50E6-6C97AD786544}"/>
+              </a:ext>
+            </a:extLst>
+          </p:cNvPr>
+          <p:cNvSpPr/>
+          <p:nvPr/>
+        </p:nvSpPr>
+        <p:spPr>
+          <a:xfrm>
+            <a:off x="685800" y="857160"/>
+            <a:ext cx="2775305" cy="425285"/>
+          </a:xfrm>
+          <a:prstGeom prst="rect">
+            <a:avLst/>
+          </a:prstGeom>
+          <a:noFill/>
+          <a:ln w="0">
+            <a:noFill/>
+          </a:ln>
+        </p:spPr>
+        <p:style>
+          <a:lnRef idx="0">
+            <a:scrgbClr r="0" g="0" b="0"/>
+          </a:lnRef>
+          <a:fillRef idx="0">
+            <a:scrgbClr r="0" g="0" b="0"/>
+          </a:fillRef>
+          <a:effectRef idx="0">
+            <a:scrgbClr r="0" g="0" b="0"/>
+          </a:effectRef>
+          <a:fontRef idx="minor"/>
+        </p:style>
+        <p:txBody>
+          <a:bodyPr lIns="0" tIns="0" rIns="0" bIns="0" anchor="t">
+            <a:noAutofit/>
+          </a:bodyPr>
+          <a:lstStyle/>
+          <a:p>
+            <a:pPr>
+              <a:lnSpc>
+                <a:spcPts val="3149"/>
+              </a:lnSpc>
+              <a:tabLst>
+                <a:tab pos="0" algn="l"/>
+              </a:tabLst>
+            </a:pPr>
+            <a:r>
+              <a:rPr lang="en-US" sz="2100">
+                <a:solidFill>
+                  <a:srgbClr val="FFFFFF"/>
+                </a:solidFill>
+                <a:latin typeface="Arial"/>
+              </a:rPr>
+              <a:t>Simulated Annealing</a:t>
+            </a:r>
+            <a:endParaRPr lang="de-DE"/>
+          </a:p>
+        </p:txBody>
+      </p:sp>
+      <p:sp>
+        <p:nvSpPr>
+          <p:cNvPr id="3" name="Rectangle 2">
+            <a:extLst>
+              <a:ext uri="{FF2B5EF4-FFF2-40B4-BE49-F238E27FC236}">
+                <a16:creationId xmlns:a16="http://schemas.microsoft.com/office/drawing/2014/main" id="{3579BF79-293B-5877-BCD8-4F92A5E49894}"/>
+              </a:ext>
+            </a:extLst>
+          </p:cNvPr>
+          <p:cNvSpPr/>
+          <p:nvPr/>
+        </p:nvSpPr>
+        <p:spPr>
+          <a:xfrm>
+            <a:off x="-1" y="1719891"/>
+            <a:ext cx="9146699" cy="3434393"/>
+          </a:xfrm>
+          <a:prstGeom prst="rect">
+            <a:avLst/>
+          </a:prstGeom>
+          <a:solidFill>
+            <a:schemeClr val="bg1"/>
+          </a:solidFill>
+        </p:spPr>
+        <p:style>
+          <a:lnRef idx="2">
+            <a:schemeClr val="accent1">
+              <a:shade val="15000"/>
+            </a:schemeClr>
+          </a:lnRef>
+          <a:fillRef idx="1">
+            <a:schemeClr val="accent1"/>
+          </a:fillRef>
+          <a:effectRef idx="0">
+            <a:schemeClr val="accent1"/>
+          </a:effectRef>
+          <a:fontRef idx="minor">
+            <a:schemeClr val="lt1"/>
+          </a:fontRef>
+        </p:style>
+        <p:txBody>
+          <a:bodyPr rtlCol="0" anchor="ctr"/>
+          <a:lstStyle/>
+          <a:p>
+            <a:pPr algn="ctr"/>
+            <a:endParaRPr lang="en-US"/>
+          </a:p>
+        </p:txBody>
+      </p:sp>
+      <p:sp>
+        <p:nvSpPr>
+          <p:cNvPr id="9" name="Text 3">
+            <a:extLst>
+              <a:ext uri="{FF2B5EF4-FFF2-40B4-BE49-F238E27FC236}">
+                <a16:creationId xmlns:a16="http://schemas.microsoft.com/office/drawing/2014/main" id="{9893A168-C920-C510-5438-CB82C0A97D8D}"/>
+              </a:ext>
+            </a:extLst>
+          </p:cNvPr>
+          <p:cNvSpPr/>
+          <p:nvPr/>
+        </p:nvSpPr>
+        <p:spPr>
+          <a:xfrm>
+            <a:off x="685800" y="2157427"/>
+            <a:ext cx="6266312" cy="1215720"/>
+          </a:xfrm>
+          <a:prstGeom prst="rect">
+            <a:avLst/>
+          </a:prstGeom>
+          <a:noFill/>
+          <a:ln w="0">
+            <a:noFill/>
+          </a:ln>
+        </p:spPr>
+        <p:style>
+          <a:lnRef idx="0">
+            <a:scrgbClr r="0" g="0" b="0"/>
+          </a:lnRef>
+          <a:fillRef idx="0">
+            <a:scrgbClr r="0" g="0" b="0"/>
+          </a:fillRef>
+          <a:effectRef idx="0">
+            <a:scrgbClr r="0" g="0" b="0"/>
+          </a:effectRef>
+          <a:fontRef idx="minor"/>
+        </p:style>
+        <p:txBody>
+          <a:bodyPr lIns="0" tIns="0" rIns="0" bIns="0" anchor="t">
+            <a:noAutofit/>
+          </a:bodyPr>
+          <a:lstStyle/>
+          <a:p>
+            <a:pPr marL="285750" indent="-285750">
+              <a:buFont typeface="Arial"/>
+              <a:buChar char="•"/>
+            </a:pPr>
+            <a:r>
+              <a:rPr lang="en-US" sz="1650">
+                <a:solidFill>
+                  <a:schemeClr val="accent1"/>
+                </a:solidFill>
+                <a:ea typeface="+mn-lt"/>
+                <a:cs typeface="+mn-lt"/>
+              </a:rPr>
+              <a:t>"Mimics the physical process of annealing metal"</a:t>
+            </a:r>
+            <a:endParaRPr lang="en-US" sz="1650">
+              <a:solidFill>
+                <a:schemeClr val="accent1"/>
+              </a:solidFill>
+              <a:ea typeface="Calibri" panose="020F0502020204030204"/>
+              <a:cs typeface="Calibri" panose="020F0502020204030204"/>
+            </a:endParaRPr>
+          </a:p>
+          <a:p>
+            <a:pPr marL="285750" indent="-285750">
+              <a:buFont typeface="Arial"/>
+              <a:buChar char="•"/>
+            </a:pPr>
+            <a:endParaRPr lang="en-US" sz="1650">
+              <a:solidFill>
+                <a:schemeClr val="accent1"/>
+              </a:solidFill>
+              <a:ea typeface="Calibri" panose="020F0502020204030204"/>
+              <a:cs typeface="Calibri" panose="020F0502020204030204"/>
+            </a:endParaRPr>
+          </a:p>
+          <a:p>
+            <a:pPr marL="285750" indent="-285750">
+              <a:buFont typeface="Arial"/>
+              <a:buChar char="•"/>
+            </a:pPr>
+            <a:r>
+              <a:rPr lang="en-US" sz="1650">
+                <a:solidFill>
+                  <a:schemeClr val="accent1"/>
+                </a:solidFill>
+                <a:ea typeface="Calibri" panose="020F0502020204030204"/>
+                <a:cs typeface="Calibri" panose="020F0502020204030204"/>
+              </a:rPr>
+              <a:t>Tk = T0 * (1 – k /k max) (with 50'000 Iterations or 20 L per day)</a:t>
+            </a:r>
+          </a:p>
+          <a:p>
+            <a:pPr marL="742950" lvl="1" indent="-285750">
+              <a:buFont typeface="Courier New,monospace"/>
+              <a:buChar char="o"/>
+            </a:pPr>
+            <a:r>
+              <a:rPr lang="en-US" sz="1700">
+                <a:solidFill>
+                  <a:schemeClr val="accent1"/>
+                </a:solidFill>
+                <a:ea typeface="Calibri" panose="020F0502020204030204"/>
+                <a:cs typeface="Calibri" panose="020F0502020204030204"/>
+              </a:rPr>
+              <a:t>Different Distributions</a:t>
+            </a:r>
+            <a:endParaRPr lang="en-US" sz="1700">
+              <a:solidFill>
+                <a:srgbClr val="000000"/>
+              </a:solidFill>
+              <a:ea typeface="Calibri" panose="020F0502020204030204"/>
+              <a:cs typeface="Calibri" panose="020F0502020204030204"/>
+            </a:endParaRPr>
+          </a:p>
+          <a:p>
+            <a:pPr marL="742950" lvl="1" indent="-285750">
+              <a:buFont typeface="Courier New,monospace"/>
+              <a:buChar char="o"/>
+            </a:pPr>
+            <a:r>
+              <a:rPr lang="en-US" sz="1700">
+                <a:solidFill>
+                  <a:schemeClr val="accent1"/>
+                </a:solidFill>
+                <a:ea typeface="Calibri" panose="020F0502020204030204"/>
+                <a:cs typeface="Calibri" panose="020F0502020204030204"/>
+              </a:rPr>
+              <a:t>Prioritizing higher vulnerability</a:t>
+            </a:r>
+            <a:endParaRPr lang="en-US"/>
+          </a:p>
+          <a:p>
+            <a:pPr marL="742950" lvl="1" indent="-285750">
+              <a:buFont typeface="Courier New,monospace"/>
+              <a:buChar char="o"/>
+            </a:pPr>
+            <a:endParaRPr lang="en-US" sz="1700">
+              <a:solidFill>
+                <a:schemeClr val="accent1"/>
+              </a:solidFill>
+              <a:ea typeface="Calibri" panose="020F0502020204030204"/>
+              <a:cs typeface="Calibri" panose="020F0502020204030204"/>
+            </a:endParaRPr>
+          </a:p>
+          <a:p>
+            <a:pPr marL="285750" indent="-285750">
+              <a:buFont typeface="Arial"/>
+              <a:buChar char="•"/>
+            </a:pPr>
+            <a:r>
+              <a:rPr lang="en-US" sz="1650" dirty="0" err="1">
+                <a:solidFill>
+                  <a:schemeClr val="accent1"/>
+                </a:solidFill>
+                <a:ea typeface="Calibri" panose="020F0502020204030204"/>
+                <a:cs typeface="Calibri" panose="020F0502020204030204"/>
+              </a:rPr>
+              <a:t>ai_xi</a:t>
+            </a:r>
+            <a:r>
+              <a:rPr lang="en-US" sz="1650" dirty="0">
+                <a:solidFill>
+                  <a:schemeClr val="accent1"/>
+                </a:solidFill>
+                <a:ea typeface="Calibri" panose="020F0502020204030204"/>
+                <a:cs typeface="Calibri" panose="020F0502020204030204"/>
+              </a:rPr>
+              <a:t> = S -&gt; remaining satisfied</a:t>
+            </a:r>
+          </a:p>
+          <a:p>
+            <a:pPr marL="285750" indent="-285750">
+              <a:buFont typeface="Arial"/>
+              <a:buChar char="•"/>
+            </a:pPr>
+            <a:endParaRPr lang="en-US" sz="1650">
+              <a:solidFill>
+                <a:schemeClr val="accent1"/>
+              </a:solidFill>
+              <a:ea typeface="Calibri" panose="020F0502020204030204"/>
+              <a:cs typeface="Calibri" panose="020F0502020204030204"/>
+            </a:endParaRPr>
+          </a:p>
+          <a:p>
+            <a:pPr marL="285750" indent="-285750">
+              <a:buFont typeface="Arial"/>
+              <a:buChar char="•"/>
+            </a:pPr>
+            <a:r>
+              <a:rPr lang="en-US" sz="1650">
+                <a:solidFill>
+                  <a:schemeClr val="accent1"/>
+                </a:solidFill>
+                <a:ea typeface="Calibri" panose="020F0502020204030204"/>
+                <a:cs typeface="Calibri" panose="020F0502020204030204"/>
+              </a:rPr>
+              <a:t>Exploration High T / low T</a:t>
+            </a:r>
+          </a:p>
+          <a:p>
+            <a:pPr marL="285750" indent="-285750">
+              <a:buFont typeface="Arial"/>
+              <a:buChar char="•"/>
+            </a:pPr>
+            <a:endParaRPr lang="en-US" sz="1650">
+              <a:solidFill>
+                <a:schemeClr val="accent1"/>
+              </a:solidFill>
+              <a:ea typeface="Calibri" panose="020F0502020204030204"/>
+              <a:cs typeface="Calibri" panose="020F0502020204030204"/>
+            </a:endParaRPr>
+          </a:p>
+          <a:p>
+            <a:pPr marL="285750" indent="-285750">
+              <a:lnSpc>
+                <a:spcPts val="2392"/>
+              </a:lnSpc>
+              <a:buFont typeface="Arial"/>
+              <a:buChar char="•"/>
+            </a:pPr>
+            <a:endParaRPr lang="en-US" sz="1650">
+              <a:solidFill>
+                <a:schemeClr val="accent1"/>
+              </a:solidFill>
+              <a:ea typeface="Calibri" panose="020F0502020204030204"/>
+              <a:cs typeface="Calibri" panose="020F0502020204030204"/>
+            </a:endParaRPr>
+          </a:p>
+        </p:txBody>
+      </p:sp>
+    </p:spTree>
+    <p:extLst>
+      <p:ext uri="{BB962C8B-B14F-4D97-AF65-F5344CB8AC3E}">
+        <p14:creationId xmlns:p14="http://schemas.microsoft.com/office/powerpoint/2010/main" val="2218687651"/>
+      </p:ext>
+    </p:extLst>
+  </p:cSld>
+  <p:clrMapOvr>
+    <a:masterClrMapping/>
+  </p:clrMapOvr>
+</p:sld>
+</file>
+
+<file path=ppt/slides/slide6.xml><?xml version="1.0" encoding="utf-8"?>
+<p:sld xmlns:a="http://schemas.openxmlformats.org/drawingml/2006/main" xmlns:r="http://schemas.openxmlformats.org/officeDocument/2006/relationships" xmlns:p="http://schemas.openxmlformats.org/presentationml/2006/main">
+  <p:cSld>
+    <p:bg>
+      <p:bgPr>
+        <a:solidFill>
+          <a:srgbClr val="005B96"/>
+        </a:solidFill>
+        <a:effectLst/>
+      </p:bgPr>
+    </p:bg>
+    <p:spTree>
+      <p:nvGrpSpPr>
+        <p:cNvPr id="1" name="">
+          <a:extLst>
+            <a:ext uri="{FF2B5EF4-FFF2-40B4-BE49-F238E27FC236}">
+              <a16:creationId xmlns:a16="http://schemas.microsoft.com/office/drawing/2014/main" id="{43D4D777-9D47-A383-2D2F-3DA8B6CCC1E6}"/>
+            </a:ext>
+          </a:extLst>
+        </p:cNvPr>
+        <p:cNvGrpSpPr/>
+        <p:nvPr/>
+      </p:nvGrpSpPr>
+      <p:grpSpPr>
+        <a:xfrm>
+          <a:off x="0" y="0"/>
+          <a:ext cx="0" cy="0"/>
+          <a:chOff x="0" y="0"/>
+          <a:chExt cx="0" cy="0"/>
+        </a:xfrm>
+      </p:grpSpPr>
+      <p:sp>
+        <p:nvSpPr>
+          <p:cNvPr id="4" name="Rectangle 3">
+            <a:extLst>
+              <a:ext uri="{FF2B5EF4-FFF2-40B4-BE49-F238E27FC236}">
+                <a16:creationId xmlns:a16="http://schemas.microsoft.com/office/drawing/2014/main" id="{FBCBAC12-89E7-F9F7-F263-E64D40EAECEF}"/>
+              </a:ext>
+            </a:extLst>
+          </p:cNvPr>
+          <p:cNvSpPr/>
+          <p:nvPr/>
+        </p:nvSpPr>
+        <p:spPr>
+          <a:xfrm>
+            <a:off x="-1" y="1719891"/>
+            <a:ext cx="9146699" cy="3434393"/>
+          </a:xfrm>
+          <a:prstGeom prst="rect">
+            <a:avLst/>
+          </a:prstGeom>
+          <a:solidFill>
+            <a:schemeClr val="bg1"/>
+          </a:solidFill>
+        </p:spPr>
+        <p:style>
+          <a:lnRef idx="2">
+            <a:schemeClr val="accent1">
+              <a:shade val="15000"/>
+            </a:schemeClr>
+          </a:lnRef>
+          <a:fillRef idx="1">
+            <a:schemeClr val="accent1"/>
+          </a:fillRef>
+          <a:effectRef idx="0">
+            <a:schemeClr val="accent1"/>
+          </a:effectRef>
+          <a:fontRef idx="minor">
+            <a:schemeClr val="lt1"/>
+          </a:fontRef>
+        </p:style>
+        <p:txBody>
+          <a:bodyPr rtlCol="0" anchor="ctr"/>
+          <a:lstStyle/>
+          <a:p>
+            <a:pPr algn="ctr"/>
+            <a:endParaRPr lang="en-US"/>
+          </a:p>
+        </p:txBody>
+      </p:sp>
+      <p:sp>
+        <p:nvSpPr>
+          <p:cNvPr id="22" name="Text 0">
+            <a:extLst>
+              <a:ext uri="{FF2B5EF4-FFF2-40B4-BE49-F238E27FC236}">
+                <a16:creationId xmlns:a16="http://schemas.microsoft.com/office/drawing/2014/main" id="{44F5B726-D956-1C20-2BE0-322B702D86A8}"/>
+              </a:ext>
+            </a:extLst>
+          </p:cNvPr>
+          <p:cNvSpPr/>
+          <p:nvPr/>
+        </p:nvSpPr>
+        <p:spPr>
+          <a:xfrm>
+            <a:off x="685800" y="1333440"/>
+            <a:ext cx="6190920" cy="37800"/>
+          </a:xfrm>
+          <a:prstGeom prst="rect">
+            <a:avLst/>
+          </a:prstGeom>
+          <a:solidFill>
+            <a:srgbClr val="FFFFFF"/>
+          </a:solidFill>
+          <a:ln w="0">
+            <a:noFill/>
+          </a:ln>
+        </p:spPr>
+        <p:style>
+          <a:lnRef idx="0">
+            <a:scrgbClr r="0" g="0" b="0"/>
+          </a:lnRef>
+          <a:fillRef idx="0">
+            <a:scrgbClr r="0" g="0" b="0"/>
+          </a:fillRef>
+          <a:effectRef idx="0">
+            <a:scrgbClr r="0" g="0" b="0"/>
+          </a:effectRef>
+          <a:fontRef idx="minor"/>
+        </p:style>
+        <p:txBody>
+          <a:bodyPr wrap="none" lIns="0" tIns="0" rIns="0" bIns="0" anchor="ctr">
+            <a:normAutofit fontScale="25000" lnSpcReduction="19999"/>
+          </a:bodyPr>
+          <a:lstStyle/>
           <a:p>
             <a:pPr defTabSz="914400">
               <a:lnSpc>
                 <a:spcPct val="100000"/>
               </a:lnSpc>
               <a:tabLst>
-                <a:tab algn="l" pos="0"/>
+                <a:tab pos="0" algn="l"/>
               </a:tabLst>
             </a:pPr>
-            <a:endParaRPr b="0" lang="en-US" sz="1800" strike="noStrike" u="none">
+            <a:endParaRPr lang="en-US" sz="1800" b="0" u="none" strike="noStrike">
               <a:solidFill>
                 <a:schemeClr val="dk1"/>
               </a:solidFill>
@@ -2882,13 +5621,19 @@
       </p:sp>
       <p:sp>
         <p:nvSpPr>
-          <p:cNvPr id="25" name="Text 3"/>
+          <p:cNvPr id="23" name="Text 1">
+            <a:extLst>
+              <a:ext uri="{FF2B5EF4-FFF2-40B4-BE49-F238E27FC236}">
+                <a16:creationId xmlns:a16="http://schemas.microsoft.com/office/drawing/2014/main" id="{5B73F405-1E7E-16A1-2229-17634203CAA0}"/>
+              </a:ext>
+            </a:extLst>
+          </p:cNvPr>
           <p:cNvSpPr/>
           <p:nvPr/>
         </p:nvSpPr>
         <p:spPr>
           <a:xfrm>
-            <a:off x="7721640" y="2000160"/>
+            <a:off x="685800" y="2000160"/>
             <a:ext cx="3250800" cy="2095200"/>
           </a:xfrm>
           <a:prstGeom prst="rect">
@@ -2897,31 +5642,38 @@
           <a:noFill/>
           <a:ln w="19050">
             <a:solidFill>
-              <a:srgbClr val="ffffff"/>
+              <a:srgbClr val="FFFFFF"/>
             </a:solidFill>
             <a:round/>
           </a:ln>
         </p:spPr>
         <p:style>
-          <a:lnRef idx="0"/>
-          <a:fillRef idx="0"/>
-          <a:effectRef idx="0"/>
+          <a:lnRef idx="0">
+            <a:scrgbClr r="0" g="0" b="0"/>
+          </a:lnRef>
+          <a:fillRef idx="0">
+            <a:scrgbClr r="0" g="0" b="0"/>
+          </a:fillRef>
+          <a:effectRef idx="0">
+            <a:scrgbClr r="0" g="0" b="0"/>
+          </a:effectRef>
           <a:fontRef idx="minor"/>
         </p:style>
         <p:txBody>
-          <a:bodyPr wrap="none" lIns="0" rIns="0" tIns="0" bIns="0" anchor="ctr">
+          <a:bodyPr wrap="none" lIns="0" tIns="0" rIns="0" bIns="0" anchor="ctr">
             <a:normAutofit/>
           </a:bodyPr>
+          <a:lstStyle/>
           <a:p>
             <a:pPr defTabSz="914400">
               <a:lnSpc>
                 <a:spcPct val="100000"/>
               </a:lnSpc>
               <a:tabLst>
-                <a:tab algn="l" pos="0"/>
+                <a:tab pos="0" algn="l"/>
               </a:tabLst>
             </a:pPr>
-            <a:endParaRPr b="0" lang="en-US" sz="1800" strike="noStrike" u="none">
+            <a:endParaRPr lang="en-US" sz="1800" b="0" u="none" strike="noStrike">
               <a:solidFill>
                 <a:schemeClr val="dk1"/>
               </a:solidFill>
@@ -2934,7 +5686,78 @@
       </p:sp>
       <p:sp>
         <p:nvSpPr>
-          <p:cNvPr id="26" name="Text 4"/>
+          <p:cNvPr id="24" name="Text 2">
+            <a:extLst>
+              <a:ext uri="{FF2B5EF4-FFF2-40B4-BE49-F238E27FC236}">
+                <a16:creationId xmlns:a16="http://schemas.microsoft.com/office/drawing/2014/main" id="{FFD8FB64-034B-B11E-FC9D-D962A8DC0878}"/>
+              </a:ext>
+            </a:extLst>
+          </p:cNvPr>
+          <p:cNvSpPr/>
+          <p:nvPr/>
+        </p:nvSpPr>
+        <p:spPr>
+          <a:xfrm>
+            <a:off x="4203720" y="2000160"/>
+            <a:ext cx="3250800" cy="2095200"/>
+          </a:xfrm>
+          <a:prstGeom prst="rect">
+            <a:avLst/>
+          </a:prstGeom>
+          <a:noFill/>
+          <a:ln w="19050">
+            <a:solidFill>
+              <a:srgbClr val="FFFFFF"/>
+            </a:solidFill>
+            <a:round/>
+          </a:ln>
+        </p:spPr>
+        <p:style>
+          <a:lnRef idx="0">
+            <a:scrgbClr r="0" g="0" b="0"/>
+          </a:lnRef>
+          <a:fillRef idx="0">
+            <a:scrgbClr r="0" g="0" b="0"/>
+          </a:fillRef>
+          <a:effectRef idx="0">
+            <a:scrgbClr r="0" g="0" b="0"/>
+          </a:effectRef>
+          <a:fontRef idx="minor"/>
+        </p:style>
+        <p:txBody>
+          <a:bodyPr wrap="none" lIns="0" tIns="0" rIns="0" bIns="0" anchor="ctr">
+            <a:normAutofit/>
+          </a:bodyPr>
+          <a:lstStyle/>
+          <a:p>
+            <a:pPr defTabSz="914400">
+              <a:lnSpc>
+                <a:spcPct val="100000"/>
+              </a:lnSpc>
+              <a:tabLst>
+                <a:tab pos="0" algn="l"/>
+              </a:tabLst>
+            </a:pPr>
+            <a:endParaRPr lang="en-US" sz="1800" b="0" u="none" strike="noStrike">
+              <a:solidFill>
+                <a:schemeClr val="dk1"/>
+              </a:solidFill>
+              <a:effectLst/>
+              <a:uFillTx/>
+              <a:latin typeface="Calibri"/>
+            </a:endParaRPr>
+          </a:p>
+        </p:txBody>
+      </p:sp>
+      <p:sp>
+        <p:nvSpPr>
+          <p:cNvPr id="26" name="Text 4">
+            <a:extLst>
+              <a:ext uri="{FF2B5EF4-FFF2-40B4-BE49-F238E27FC236}">
+                <a16:creationId xmlns:a16="http://schemas.microsoft.com/office/drawing/2014/main" id="{04DA6DE2-557B-9511-55B9-E44C963404B8}"/>
+              </a:ext>
+            </a:extLst>
+          </p:cNvPr>
           <p:cNvSpPr/>
           <p:nvPr/>
         </p:nvSpPr>
@@ -2952,28 +5775,35 @@
           </a:ln>
         </p:spPr>
         <p:style>
-          <a:lnRef idx="0"/>
-          <a:fillRef idx="0"/>
-          <a:effectRef idx="0"/>
+          <a:lnRef idx="0">
+            <a:scrgbClr r="0" g="0" b="0"/>
+          </a:lnRef>
+          <a:fillRef idx="0">
+            <a:scrgbClr r="0" g="0" b="0"/>
+          </a:fillRef>
+          <a:effectRef idx="0">
+            <a:scrgbClr r="0" g="0" b="0"/>
+          </a:effectRef>
           <a:fontRef idx="minor"/>
         </p:style>
         <p:txBody>
-          <a:bodyPr lIns="0" rIns="0" tIns="0" bIns="0" anchor="t">
+          <a:bodyPr lIns="0" tIns="0" rIns="0" bIns="0" anchor="t">
             <a:noAutofit/>
           </a:bodyPr>
+          <a:lstStyle/>
           <a:p>
             <a:pPr algn="r" defTabSz="914400">
               <a:lnSpc>
                 <a:spcPts val="4915"/>
               </a:lnSpc>
               <a:tabLst>
-                <a:tab algn="l" pos="0"/>
+                <a:tab pos="0" algn="l"/>
               </a:tabLst>
             </a:pPr>
             <a:r>
-              <a:rPr b="1" lang="en-US" sz="5850" strike="noStrike" u="none">
-                <a:solidFill>
-                  <a:srgbClr val="ffffff"/>
+              <a:rPr lang="en-US" sz="5850" b="1" u="none" strike="noStrike">
+                <a:solidFill>
+                  <a:srgbClr val="FFFFFF"/>
                 </a:solidFill>
                 <a:effectLst/>
                 <a:uFillTx/>
@@ -2982,9 +5812,9 @@
               </a:rPr>
               <a:t>zh</a:t>
             </a:r>
-            <a:endParaRPr b="0" lang="en-GB" sz="5850" strike="noStrike" u="none">
-              <a:solidFill>
-                <a:srgbClr val="ffffff"/>
+            <a:endParaRPr lang="en-GB" sz="5850" b="0" u="none" strike="noStrike">
+              <a:solidFill>
+                <a:srgbClr val="FFFFFF"/>
               </a:solidFill>
               <a:effectLst/>
               <a:uFillTx/>
@@ -2997,13 +5827,13 @@
                 <a:spcPts val="4915"/>
               </a:lnSpc>
               <a:tabLst>
-                <a:tab algn="l" pos="0"/>
+                <a:tab pos="0" algn="l"/>
               </a:tabLst>
             </a:pPr>
             <a:r>
-              <a:rPr b="1" lang="en-US" sz="5850" strike="noStrike" u="none">
-                <a:solidFill>
-                  <a:srgbClr val="ffffff"/>
+              <a:rPr lang="en-US" sz="5850" b="1" u="none" strike="noStrike">
+                <a:solidFill>
+                  <a:srgbClr val="FFFFFF"/>
                 </a:solidFill>
                 <a:effectLst/>
                 <a:uFillTx/>
@@ -3012,9 +5842,9 @@
               </a:rPr>
               <a:t>aw</a:t>
             </a:r>
-            <a:endParaRPr b="0" lang="en-GB" sz="5850" strike="noStrike" u="none">
-              <a:solidFill>
-                <a:srgbClr val="ffffff"/>
+            <a:endParaRPr lang="en-GB" sz="5850" b="0" u="none" strike="noStrike">
+              <a:solidFill>
+                <a:srgbClr val="FFFFFF"/>
               </a:solidFill>
               <a:effectLst/>
               <a:uFillTx/>
@@ -3025,14 +5855,20 @@
       </p:sp>
       <p:sp>
         <p:nvSpPr>
-          <p:cNvPr id="27" name="Text 5"/>
+          <p:cNvPr id="27" name="Text 5">
+            <a:extLst>
+              <a:ext uri="{FF2B5EF4-FFF2-40B4-BE49-F238E27FC236}">
+                <a16:creationId xmlns:a16="http://schemas.microsoft.com/office/drawing/2014/main" id="{90A56F7E-49CB-1C1E-3080-0C02232D39E2}"/>
+              </a:ext>
+            </a:extLst>
+          </p:cNvPr>
           <p:cNvSpPr/>
           <p:nvPr/>
         </p:nvSpPr>
         <p:spPr>
           <a:xfrm>
             <a:off x="685800" y="857160"/>
-            <a:ext cx="1600200" cy="399600"/>
+            <a:ext cx="2775305" cy="425285"/>
           </a:xfrm>
           <a:prstGeom prst="rect">
             <a:avLst/>
@@ -3043,50 +5879,68 @@
           </a:ln>
         </p:spPr>
         <p:style>
-          <a:lnRef idx="0"/>
-          <a:fillRef idx="0"/>
-          <a:effectRef idx="0"/>
+          <a:lnRef idx="0">
+            <a:scrgbClr r="0" g="0" b="0"/>
+          </a:lnRef>
+          <a:fillRef idx="0">
+            <a:scrgbClr r="0" g="0" b="0"/>
+          </a:fillRef>
+          <a:effectRef idx="0">
+            <a:scrgbClr r="0" g="0" b="0"/>
+          </a:effectRef>
           <a:fontRef idx="minor"/>
         </p:style>
         <p:txBody>
-          <a:bodyPr lIns="0" rIns="0" tIns="0" bIns="0" anchor="t">
+          <a:bodyPr lIns="0" tIns="0" rIns="0" bIns="0" anchor="t">
             <a:noAutofit/>
           </a:bodyPr>
-          <a:p>
-            <a:pPr defTabSz="914400">
+          <a:lstStyle/>
+          <a:p>
+            <a:pPr>
+              <a:tabLst>
+                <a:tab pos="0" algn="l"/>
+              </a:tabLst>
+            </a:pPr>
+            <a:r>
+              <a:rPr lang="en-US" sz="2100">
+                <a:solidFill>
+                  <a:schemeClr val="bg1"/>
+                </a:solidFill>
+                <a:latin typeface="Arial"/>
+                <a:ea typeface="Calibri"/>
+                <a:cs typeface="Arial"/>
+              </a:rPr>
+              <a:t>Method Comparison</a:t>
+            </a:r>
+          </a:p>
+          <a:p>
+            <a:pPr>
               <a:lnSpc>
                 <a:spcPts val="3149"/>
               </a:lnSpc>
               <a:tabLst>
-                <a:tab algn="l" pos="0"/>
+                <a:tab pos="0" algn="l"/>
               </a:tabLst>
             </a:pPr>
-            <a:r>
-              <a:rPr b="0" lang="en-US" sz="2100" strike="noStrike" u="none">
-                <a:solidFill>
-                  <a:srgbClr val="ffffff"/>
-                </a:solidFill>
-                <a:effectLst/>
-                <a:uFillTx/>
-                <a:latin typeface="Arial"/>
-                <a:ea typeface="Arial"/>
-              </a:rPr>
-              <a:t>Results title</a:t>
-            </a:r>
-            <a:endParaRPr b="0" lang="en-GB" sz="2100" strike="noStrike" u="none">
-              <a:solidFill>
-                <a:srgbClr val="ffffff"/>
-              </a:solidFill>
-              <a:effectLst/>
-              <a:uFillTx/>
+            <a:endParaRPr lang="en-US" sz="2100">
+              <a:solidFill>
+                <a:srgbClr val="FFFFFF"/>
+              </a:solidFill>
               <a:latin typeface="Arial"/>
+              <a:cs typeface="Arial"/>
             </a:endParaRPr>
           </a:p>
         </p:txBody>
       </p:sp>
       <p:sp>
         <p:nvSpPr>
-          <p:cNvPr id="28" name="Text 6"/>
+          <p:cNvPr id="28" name="Text 6">
+            <a:extLst>
+              <a:ext uri="{FF2B5EF4-FFF2-40B4-BE49-F238E27FC236}">
+                <a16:creationId xmlns:a16="http://schemas.microsoft.com/office/drawing/2014/main" id="{A3C1D423-83BC-0823-8AE5-B64034ECFC12}"/>
+              </a:ext>
+            </a:extLst>
+          </p:cNvPr>
           <p:cNvSpPr/>
           <p:nvPr/>
         </p:nvSpPr>
@@ -3104,28 +5958,35 @@
           </a:ln>
         </p:spPr>
         <p:style>
-          <a:lnRef idx="0"/>
-          <a:fillRef idx="0"/>
-          <a:effectRef idx="0"/>
+          <a:lnRef idx="0">
+            <a:scrgbClr r="0" g="0" b="0"/>
+          </a:lnRef>
+          <a:fillRef idx="0">
+            <a:scrgbClr r="0" g="0" b="0"/>
+          </a:fillRef>
+          <a:effectRef idx="0">
+            <a:scrgbClr r="0" g="0" b="0"/>
+          </a:effectRef>
           <a:fontRef idx="minor"/>
         </p:style>
         <p:txBody>
-          <a:bodyPr lIns="0" rIns="0" tIns="0" bIns="0" anchor="t">
+          <a:bodyPr lIns="0" tIns="0" rIns="0" bIns="0" anchor="t">
             <a:noAutofit/>
           </a:bodyPr>
+          <a:lstStyle/>
           <a:p>
             <a:pPr defTabSz="914400">
               <a:lnSpc>
                 <a:spcPts val="6075"/>
               </a:lnSpc>
               <a:tabLst>
-                <a:tab algn="l" pos="0"/>
+                <a:tab pos="0" algn="l"/>
               </a:tabLst>
             </a:pPr>
             <a:r>
-              <a:rPr b="1" lang="en-US" sz="4050" strike="noStrike" u="none">
-                <a:solidFill>
-                  <a:srgbClr val="ffffff"/>
+              <a:rPr lang="en-US" sz="4050" b="1" u="none" strike="noStrike">
+                <a:solidFill>
+                  <a:srgbClr val="FFFFFF"/>
                 </a:solidFill>
                 <a:effectLst/>
                 <a:uFillTx/>
@@ -3134,9 +5995,9 @@
               </a:rPr>
               <a:t>01</a:t>
             </a:r>
-            <a:endParaRPr b="0" lang="en-GB" sz="4050" strike="noStrike" u="none">
-              <a:solidFill>
-                <a:srgbClr val="ffffff"/>
+            <a:endParaRPr lang="en-GB" sz="4050" b="0" u="none" strike="noStrike">
+              <a:solidFill>
+                <a:srgbClr val="FFFFFF"/>
               </a:solidFill>
               <a:effectLst/>
               <a:uFillTx/>
@@ -3147,7 +6008,13 @@
       </p:sp>
       <p:sp>
         <p:nvSpPr>
-          <p:cNvPr id="29" name="Text 7"/>
+          <p:cNvPr id="29" name="Text 7">
+            <a:extLst>
+              <a:ext uri="{FF2B5EF4-FFF2-40B4-BE49-F238E27FC236}">
+                <a16:creationId xmlns:a16="http://schemas.microsoft.com/office/drawing/2014/main" id="{D9A580B1-1C96-9BBE-9582-45BA46E937EF}"/>
+              </a:ext>
+            </a:extLst>
+          </p:cNvPr>
           <p:cNvSpPr/>
           <p:nvPr/>
         </p:nvSpPr>
@@ -3165,28 +6032,35 @@
           </a:ln>
         </p:spPr>
         <p:style>
-          <a:lnRef idx="0"/>
-          <a:fillRef idx="0"/>
-          <a:effectRef idx="0"/>
+          <a:lnRef idx="0">
+            <a:scrgbClr r="0" g="0" b="0"/>
+          </a:lnRef>
+          <a:fillRef idx="0">
+            <a:scrgbClr r="0" g="0" b="0"/>
+          </a:fillRef>
+          <a:effectRef idx="0">
+            <a:scrgbClr r="0" g="0" b="0"/>
+          </a:effectRef>
           <a:fontRef idx="minor"/>
         </p:style>
         <p:txBody>
-          <a:bodyPr lIns="0" rIns="0" tIns="0" bIns="0" anchor="t">
+          <a:bodyPr lIns="0" tIns="0" rIns="0" bIns="0" anchor="t">
             <a:noAutofit/>
           </a:bodyPr>
+          <a:lstStyle/>
           <a:p>
             <a:pPr defTabSz="914400">
               <a:lnSpc>
                 <a:spcPts val="2475"/>
               </a:lnSpc>
               <a:tabLst>
-                <a:tab algn="l" pos="0"/>
+                <a:tab pos="0" algn="l"/>
               </a:tabLst>
             </a:pPr>
             <a:r>
-              <a:rPr b="0" lang="en-US" sz="1650" strike="noStrike" u="none">
-                <a:solidFill>
-                  <a:srgbClr val="ffffff"/>
+              <a:rPr lang="en-US" sz="1650" b="0" u="none" strike="noStrike">
+                <a:solidFill>
+                  <a:srgbClr val="FFFFFF"/>
                 </a:solidFill>
                 <a:effectLst/>
                 <a:uFillTx/>
@@ -3195,9 +6069,9 @@
               </a:rPr>
               <a:t>Metric one</a:t>
             </a:r>
-            <a:endParaRPr b="0" lang="en-GB" sz="1650" strike="noStrike" u="none">
-              <a:solidFill>
-                <a:srgbClr val="ffffff"/>
+            <a:endParaRPr lang="en-GB" sz="1650" b="0" u="none" strike="noStrike">
+              <a:solidFill>
+                <a:srgbClr val="FFFFFF"/>
               </a:solidFill>
               <a:effectLst/>
               <a:uFillTx/>
@@ -3208,7 +6082,13 @@
       </p:sp>
       <p:sp>
         <p:nvSpPr>
-          <p:cNvPr id="30" name="Text 8"/>
+          <p:cNvPr id="30" name="Text 8">
+            <a:extLst>
+              <a:ext uri="{FF2B5EF4-FFF2-40B4-BE49-F238E27FC236}">
+                <a16:creationId xmlns:a16="http://schemas.microsoft.com/office/drawing/2014/main" id="{695BA788-89FB-A90E-E59C-C1B5999A3C4C}"/>
+              </a:ext>
+            </a:extLst>
+          </p:cNvPr>
           <p:cNvSpPr/>
           <p:nvPr/>
         </p:nvSpPr>
@@ -3226,28 +6106,35 @@
           </a:ln>
         </p:spPr>
         <p:style>
-          <a:lnRef idx="0"/>
-          <a:fillRef idx="0"/>
-          <a:effectRef idx="0"/>
+          <a:lnRef idx="0">
+            <a:scrgbClr r="0" g="0" b="0"/>
+          </a:lnRef>
+          <a:fillRef idx="0">
+            <a:scrgbClr r="0" g="0" b="0"/>
+          </a:fillRef>
+          <a:effectRef idx="0">
+            <a:scrgbClr r="0" g="0" b="0"/>
+          </a:effectRef>
           <a:fontRef idx="minor"/>
         </p:style>
         <p:txBody>
-          <a:bodyPr lIns="0" rIns="0" tIns="0" bIns="0" anchor="t">
+          <a:bodyPr lIns="0" tIns="0" rIns="0" bIns="0" anchor="t">
             <a:noAutofit/>
           </a:bodyPr>
+          <a:lstStyle/>
           <a:p>
             <a:pPr defTabSz="914400">
               <a:lnSpc>
                 <a:spcPts val="6075"/>
               </a:lnSpc>
               <a:tabLst>
-                <a:tab algn="l" pos="0"/>
+                <a:tab pos="0" algn="l"/>
               </a:tabLst>
             </a:pPr>
             <a:r>
-              <a:rPr b="1" lang="en-US" sz="4050" strike="noStrike" u="none">
-                <a:solidFill>
-                  <a:srgbClr val="ffffff"/>
+              <a:rPr lang="en-US" sz="4050" b="1" u="none" strike="noStrike">
+                <a:solidFill>
+                  <a:srgbClr val="FFFFFF"/>
                 </a:solidFill>
                 <a:effectLst/>
                 <a:uFillTx/>
@@ -3256,9 +6143,9 @@
               </a:rPr>
               <a:t>02</a:t>
             </a:r>
-            <a:endParaRPr b="0" lang="en-GB" sz="4050" strike="noStrike" u="none">
-              <a:solidFill>
-                <a:srgbClr val="ffffff"/>
+            <a:endParaRPr lang="en-GB" sz="4050" b="0" u="none" strike="noStrike">
+              <a:solidFill>
+                <a:srgbClr val="FFFFFF"/>
               </a:solidFill>
               <a:effectLst/>
               <a:uFillTx/>
@@ -3269,7 +6156,13 @@
       </p:sp>
       <p:sp>
         <p:nvSpPr>
-          <p:cNvPr id="31" name="Text 9"/>
+          <p:cNvPr id="31" name="Text 9">
+            <a:extLst>
+              <a:ext uri="{FF2B5EF4-FFF2-40B4-BE49-F238E27FC236}">
+                <a16:creationId xmlns:a16="http://schemas.microsoft.com/office/drawing/2014/main" id="{45CDA467-14D6-8A79-E595-8B8CFC7D321F}"/>
+              </a:ext>
+            </a:extLst>
+          </p:cNvPr>
           <p:cNvSpPr/>
           <p:nvPr/>
         </p:nvSpPr>
@@ -3287,28 +6180,35 @@
           </a:ln>
         </p:spPr>
         <p:style>
-          <a:lnRef idx="0"/>
-          <a:fillRef idx="0"/>
-          <a:effectRef idx="0"/>
+          <a:lnRef idx="0">
+            <a:scrgbClr r="0" g="0" b="0"/>
+          </a:lnRef>
+          <a:fillRef idx="0">
+            <a:scrgbClr r="0" g="0" b="0"/>
+          </a:fillRef>
+          <a:effectRef idx="0">
+            <a:scrgbClr r="0" g="0" b="0"/>
+          </a:effectRef>
           <a:fontRef idx="minor"/>
         </p:style>
         <p:txBody>
-          <a:bodyPr lIns="0" rIns="0" tIns="0" bIns="0" anchor="t">
+          <a:bodyPr lIns="0" tIns="0" rIns="0" bIns="0" anchor="t">
             <a:noAutofit/>
           </a:bodyPr>
+          <a:lstStyle/>
           <a:p>
             <a:pPr defTabSz="914400">
               <a:lnSpc>
                 <a:spcPts val="2475"/>
               </a:lnSpc>
               <a:tabLst>
-                <a:tab algn="l" pos="0"/>
+                <a:tab pos="0" algn="l"/>
               </a:tabLst>
             </a:pPr>
             <a:r>
-              <a:rPr b="0" lang="en-US" sz="1650" strike="noStrike" u="none">
-                <a:solidFill>
-                  <a:srgbClr val="ffffff"/>
+              <a:rPr lang="en-US" sz="1650" b="0" u="none" strike="noStrike">
+                <a:solidFill>
+                  <a:srgbClr val="FFFFFF"/>
                 </a:solidFill>
                 <a:effectLst/>
                 <a:uFillTx/>
@@ -3317,9 +6217,9 @@
               </a:rPr>
               <a:t>Metric two</a:t>
             </a:r>
-            <a:endParaRPr b="0" lang="en-GB" sz="1650" strike="noStrike" u="none">
-              <a:solidFill>
-                <a:srgbClr val="ffffff"/>
+            <a:endParaRPr lang="en-GB" sz="1650" b="0" u="none" strike="noStrike">
+              <a:solidFill>
+                <a:srgbClr val="FFFFFF"/>
               </a:solidFill>
               <a:effectLst/>
               <a:uFillTx/>
@@ -3328,16 +6228,339 @@
           </a:p>
         </p:txBody>
       </p:sp>
-      <p:sp>
-        <p:nvSpPr>
-          <p:cNvPr id="32" name="Text 10"/>
+      <p:pic>
+        <p:nvPicPr>
+          <p:cNvPr id="2" name="Grafik 1" descr="MethodComparison.png">
+            <a:extLst>
+              <a:ext uri="{FF2B5EF4-FFF2-40B4-BE49-F238E27FC236}">
+                <a16:creationId xmlns:a16="http://schemas.microsoft.com/office/drawing/2014/main" id="{5DE9307D-B3F8-5699-FA25-2F0129073858}"/>
+              </a:ext>
+            </a:extLst>
+          </p:cNvPr>
+          <p:cNvPicPr>
+            <a:picLocks noChangeAspect="1"/>
+          </p:cNvPicPr>
+          <p:nvPr/>
+        </p:nvPicPr>
+        <p:blipFill>
+          <a:blip r:embed="rId3"/>
+          <a:stretch>
+            <a:fillRect/>
+          </a:stretch>
+        </p:blipFill>
+        <p:spPr>
+          <a:xfrm>
+            <a:off x="7143" y="1742400"/>
+            <a:ext cx="9144000" cy="3123841"/>
+          </a:xfrm>
+          <a:prstGeom prst="rect">
+            <a:avLst/>
+          </a:prstGeom>
+        </p:spPr>
+      </p:pic>
+    </p:spTree>
+    <p:extLst>
+      <p:ext uri="{BB962C8B-B14F-4D97-AF65-F5344CB8AC3E}">
+        <p14:creationId xmlns:p14="http://schemas.microsoft.com/office/powerpoint/2010/main" val="3285554944"/>
+      </p:ext>
+    </p:extLst>
+  </p:cSld>
+  <p:clrMapOvr>
+    <a:masterClrMapping/>
+  </p:clrMapOvr>
+</p:sld>
+</file>
+
+<file path=ppt/slides/slide7.xml><?xml version="1.0" encoding="utf-8"?>
+<p:sld xmlns:a="http://schemas.openxmlformats.org/drawingml/2006/main" xmlns:r="http://schemas.openxmlformats.org/officeDocument/2006/relationships" xmlns:p="http://schemas.openxmlformats.org/presentationml/2006/main">
+  <p:cSld>
+    <p:bg>
+      <p:bgPr>
+        <a:solidFill>
+          <a:srgbClr val="005B96"/>
+        </a:solidFill>
+        <a:effectLst/>
+      </p:bgPr>
+    </p:bg>
+    <p:spTree>
+      <p:nvGrpSpPr>
+        <p:cNvPr id="1" name="">
+          <a:extLst>
+            <a:ext uri="{FF2B5EF4-FFF2-40B4-BE49-F238E27FC236}">
+              <a16:creationId xmlns:a16="http://schemas.microsoft.com/office/drawing/2014/main" id="{323A964E-A53D-D833-9A9C-848C7C940329}"/>
+            </a:ext>
+          </a:extLst>
+        </p:cNvPr>
+        <p:cNvGrpSpPr/>
+        <p:nvPr/>
+      </p:nvGrpSpPr>
+      <p:grpSpPr>
+        <a:xfrm>
+          <a:off x="0" y="0"/>
+          <a:ext cx="0" cy="0"/>
+          <a:chOff x="0" y="0"/>
+          <a:chExt cx="0" cy="0"/>
+        </a:xfrm>
+      </p:grpSpPr>
+      <p:sp>
+        <p:nvSpPr>
+          <p:cNvPr id="6" name="Rectangle 5">
+            <a:extLst>
+              <a:ext uri="{FF2B5EF4-FFF2-40B4-BE49-F238E27FC236}">
+                <a16:creationId xmlns:a16="http://schemas.microsoft.com/office/drawing/2014/main" id="{871ABE2B-A058-04ED-E9B9-B53A9AEC0D5B}"/>
+              </a:ext>
+            </a:extLst>
+          </p:cNvPr>
           <p:cNvSpPr/>
           <p:nvPr/>
         </p:nvSpPr>
         <p:spPr>
           <a:xfrm>
-            <a:off x="7969320" y="2247840"/>
-            <a:ext cx="2810880" cy="771120"/>
+            <a:off x="-1" y="1719891"/>
+            <a:ext cx="9146699" cy="3434393"/>
+          </a:xfrm>
+          <a:prstGeom prst="rect">
+            <a:avLst/>
+          </a:prstGeom>
+          <a:solidFill>
+            <a:schemeClr val="bg1"/>
+          </a:solidFill>
+        </p:spPr>
+        <p:style>
+          <a:lnRef idx="2">
+            <a:schemeClr val="accent1">
+              <a:shade val="15000"/>
+            </a:schemeClr>
+          </a:lnRef>
+          <a:fillRef idx="1">
+            <a:schemeClr val="accent1"/>
+          </a:fillRef>
+          <a:effectRef idx="0">
+            <a:schemeClr val="accent1"/>
+          </a:effectRef>
+          <a:fontRef idx="minor">
+            <a:schemeClr val="lt1"/>
+          </a:fontRef>
+        </p:style>
+        <p:txBody>
+          <a:bodyPr rtlCol="0" anchor="ctr"/>
+          <a:lstStyle/>
+          <a:p>
+            <a:pPr algn="ctr"/>
+            <a:endParaRPr lang="en-US"/>
+          </a:p>
+        </p:txBody>
+      </p:sp>
+      <p:sp>
+        <p:nvSpPr>
+          <p:cNvPr id="22" name="Text 0">
+            <a:extLst>
+              <a:ext uri="{FF2B5EF4-FFF2-40B4-BE49-F238E27FC236}">
+                <a16:creationId xmlns:a16="http://schemas.microsoft.com/office/drawing/2014/main" id="{6383B7FE-338B-AA64-2093-C83A594D84C9}"/>
+              </a:ext>
+            </a:extLst>
+          </p:cNvPr>
+          <p:cNvSpPr/>
+          <p:nvPr/>
+        </p:nvSpPr>
+        <p:spPr>
+          <a:xfrm>
+            <a:off x="685800" y="1333440"/>
+            <a:ext cx="6190920" cy="37800"/>
+          </a:xfrm>
+          <a:prstGeom prst="rect">
+            <a:avLst/>
+          </a:prstGeom>
+          <a:solidFill>
+            <a:srgbClr val="FFFFFF"/>
+          </a:solidFill>
+          <a:ln w="0">
+            <a:noFill/>
+          </a:ln>
+        </p:spPr>
+        <p:style>
+          <a:lnRef idx="0">
+            <a:scrgbClr r="0" g="0" b="0"/>
+          </a:lnRef>
+          <a:fillRef idx="0">
+            <a:scrgbClr r="0" g="0" b="0"/>
+          </a:fillRef>
+          <a:effectRef idx="0">
+            <a:scrgbClr r="0" g="0" b="0"/>
+          </a:effectRef>
+          <a:fontRef idx="minor"/>
+        </p:style>
+        <p:txBody>
+          <a:bodyPr wrap="none" lIns="0" tIns="0" rIns="0" bIns="0" anchor="ctr">
+            <a:normAutofit fontScale="25000" lnSpcReduction="19999"/>
+          </a:bodyPr>
+          <a:lstStyle/>
+          <a:p>
+            <a:pPr defTabSz="914400">
+              <a:lnSpc>
+                <a:spcPct val="100000"/>
+              </a:lnSpc>
+              <a:tabLst>
+                <a:tab pos="0" algn="l"/>
+              </a:tabLst>
+            </a:pPr>
+            <a:endParaRPr lang="en-US" sz="1800" b="0" u="none" strike="noStrike">
+              <a:solidFill>
+                <a:schemeClr val="dk1"/>
+              </a:solidFill>
+              <a:effectLst/>
+              <a:uFillTx/>
+              <a:latin typeface="Calibri"/>
+            </a:endParaRPr>
+          </a:p>
+        </p:txBody>
+      </p:sp>
+      <p:sp>
+        <p:nvSpPr>
+          <p:cNvPr id="23" name="Text 1">
+            <a:extLst>
+              <a:ext uri="{FF2B5EF4-FFF2-40B4-BE49-F238E27FC236}">
+                <a16:creationId xmlns:a16="http://schemas.microsoft.com/office/drawing/2014/main" id="{E88D8E92-FD44-F664-AB6D-1606E5B7008E}"/>
+              </a:ext>
+            </a:extLst>
+          </p:cNvPr>
+          <p:cNvSpPr/>
+          <p:nvPr/>
+        </p:nvSpPr>
+        <p:spPr>
+          <a:xfrm>
+            <a:off x="685800" y="2000160"/>
+            <a:ext cx="3250800" cy="2095200"/>
+          </a:xfrm>
+          <a:prstGeom prst="rect">
+            <a:avLst/>
+          </a:prstGeom>
+          <a:noFill/>
+          <a:ln w="19050">
+            <a:solidFill>
+              <a:srgbClr val="FFFFFF"/>
+            </a:solidFill>
+            <a:round/>
+          </a:ln>
+        </p:spPr>
+        <p:style>
+          <a:lnRef idx="0">
+            <a:scrgbClr r="0" g="0" b="0"/>
+          </a:lnRef>
+          <a:fillRef idx="0">
+            <a:scrgbClr r="0" g="0" b="0"/>
+          </a:fillRef>
+          <a:effectRef idx="0">
+            <a:scrgbClr r="0" g="0" b="0"/>
+          </a:effectRef>
+          <a:fontRef idx="minor"/>
+        </p:style>
+        <p:txBody>
+          <a:bodyPr wrap="none" lIns="0" tIns="0" rIns="0" bIns="0" anchor="ctr">
+            <a:normAutofit/>
+          </a:bodyPr>
+          <a:lstStyle/>
+          <a:p>
+            <a:pPr defTabSz="914400">
+              <a:lnSpc>
+                <a:spcPct val="100000"/>
+              </a:lnSpc>
+              <a:tabLst>
+                <a:tab pos="0" algn="l"/>
+              </a:tabLst>
+            </a:pPr>
+            <a:endParaRPr lang="en-US" sz="1800" b="0" u="none" strike="noStrike">
+              <a:solidFill>
+                <a:schemeClr val="dk1"/>
+              </a:solidFill>
+              <a:effectLst/>
+              <a:uFillTx/>
+              <a:latin typeface="Calibri"/>
+            </a:endParaRPr>
+          </a:p>
+        </p:txBody>
+      </p:sp>
+      <p:sp>
+        <p:nvSpPr>
+          <p:cNvPr id="24" name="Text 2">
+            <a:extLst>
+              <a:ext uri="{FF2B5EF4-FFF2-40B4-BE49-F238E27FC236}">
+                <a16:creationId xmlns:a16="http://schemas.microsoft.com/office/drawing/2014/main" id="{C214B53A-9474-D2B6-3DA8-9BE33C5C231B}"/>
+              </a:ext>
+            </a:extLst>
+          </p:cNvPr>
+          <p:cNvSpPr/>
+          <p:nvPr/>
+        </p:nvSpPr>
+        <p:spPr>
+          <a:xfrm>
+            <a:off x="4203720" y="2000160"/>
+            <a:ext cx="3250800" cy="2095200"/>
+          </a:xfrm>
+          <a:prstGeom prst="rect">
+            <a:avLst/>
+          </a:prstGeom>
+          <a:noFill/>
+          <a:ln w="19050">
+            <a:solidFill>
+              <a:srgbClr val="FFFFFF"/>
+            </a:solidFill>
+            <a:round/>
+          </a:ln>
+        </p:spPr>
+        <p:style>
+          <a:lnRef idx="0">
+            <a:scrgbClr r="0" g="0" b="0"/>
+          </a:lnRef>
+          <a:fillRef idx="0">
+            <a:scrgbClr r="0" g="0" b="0"/>
+          </a:fillRef>
+          <a:effectRef idx="0">
+            <a:scrgbClr r="0" g="0" b="0"/>
+          </a:effectRef>
+          <a:fontRef idx="minor"/>
+        </p:style>
+        <p:txBody>
+          <a:bodyPr wrap="none" lIns="0" tIns="0" rIns="0" bIns="0" anchor="ctr">
+            <a:normAutofit/>
+          </a:bodyPr>
+          <a:lstStyle/>
+          <a:p>
+            <a:pPr defTabSz="914400">
+              <a:lnSpc>
+                <a:spcPct val="100000"/>
+              </a:lnSpc>
+              <a:tabLst>
+                <a:tab pos="0" algn="l"/>
+              </a:tabLst>
+            </a:pPr>
+            <a:endParaRPr lang="en-US" sz="1800" b="0" u="none" strike="noStrike">
+              <a:solidFill>
+                <a:schemeClr val="dk1"/>
+              </a:solidFill>
+              <a:effectLst/>
+              <a:uFillTx/>
+              <a:latin typeface="Calibri"/>
+            </a:endParaRPr>
+          </a:p>
+        </p:txBody>
+      </p:sp>
+      <p:sp>
+        <p:nvSpPr>
+          <p:cNvPr id="26" name="Text 4">
+            <a:extLst>
+              <a:ext uri="{FF2B5EF4-FFF2-40B4-BE49-F238E27FC236}">
+                <a16:creationId xmlns:a16="http://schemas.microsoft.com/office/drawing/2014/main" id="{70EE4081-FE78-57F6-E5C6-3A84147DB435}"/>
+              </a:ext>
+            </a:extLst>
+          </p:cNvPr>
+          <p:cNvSpPr/>
+          <p:nvPr/>
+        </p:nvSpPr>
+        <p:spPr>
+          <a:xfrm>
+            <a:off x="7493040" y="361800"/>
+            <a:ext cx="1098360" cy="1247760"/>
           </a:xfrm>
           <a:prstGeom prst="rect">
             <a:avLst/>
@@ -3348,39 +6571,229 @@
           </a:ln>
         </p:spPr>
         <p:style>
-          <a:lnRef idx="0"/>
-          <a:fillRef idx="0"/>
-          <a:effectRef idx="0"/>
+          <a:lnRef idx="0">
+            <a:scrgbClr r="0" g="0" b="0"/>
+          </a:lnRef>
+          <a:fillRef idx="0">
+            <a:scrgbClr r="0" g="0" b="0"/>
+          </a:fillRef>
+          <a:effectRef idx="0">
+            <a:scrgbClr r="0" g="0" b="0"/>
+          </a:effectRef>
           <a:fontRef idx="minor"/>
         </p:style>
         <p:txBody>
-          <a:bodyPr lIns="0" rIns="0" tIns="0" bIns="0" anchor="t">
+          <a:bodyPr lIns="0" tIns="0" rIns="0" bIns="0" anchor="t">
             <a:noAutofit/>
           </a:bodyPr>
+          <a:lstStyle/>
+          <a:p>
+            <a:pPr algn="r" defTabSz="914400">
+              <a:lnSpc>
+                <a:spcPts val="4915"/>
+              </a:lnSpc>
+              <a:tabLst>
+                <a:tab pos="0" algn="l"/>
+              </a:tabLst>
+            </a:pPr>
+            <a:r>
+              <a:rPr lang="en-US" sz="5850" b="1" u="none" strike="noStrike">
+                <a:solidFill>
+                  <a:srgbClr val="FFFFFF"/>
+                </a:solidFill>
+                <a:effectLst/>
+                <a:uFillTx/>
+                <a:latin typeface="Arial"/>
+                <a:ea typeface="Arial"/>
+              </a:rPr>
+              <a:t>zh</a:t>
+            </a:r>
+            <a:endParaRPr lang="en-GB" sz="5850" b="0" u="none" strike="noStrike">
+              <a:solidFill>
+                <a:srgbClr val="FFFFFF"/>
+              </a:solidFill>
+              <a:effectLst/>
+              <a:uFillTx/>
+              <a:latin typeface="Arial"/>
+            </a:endParaRPr>
+          </a:p>
+          <a:p>
+            <a:pPr algn="r" defTabSz="914400">
+              <a:lnSpc>
+                <a:spcPts val="4915"/>
+              </a:lnSpc>
+              <a:tabLst>
+                <a:tab pos="0" algn="l"/>
+              </a:tabLst>
+            </a:pPr>
+            <a:r>
+              <a:rPr lang="en-US" sz="5850" b="1" u="none" strike="noStrike">
+                <a:solidFill>
+                  <a:srgbClr val="FFFFFF"/>
+                </a:solidFill>
+                <a:effectLst/>
+                <a:uFillTx/>
+                <a:latin typeface="Arial"/>
+                <a:ea typeface="Arial"/>
+              </a:rPr>
+              <a:t>aw</a:t>
+            </a:r>
+            <a:endParaRPr lang="en-GB" sz="5850" b="0" u="none" strike="noStrike">
+              <a:solidFill>
+                <a:srgbClr val="FFFFFF"/>
+              </a:solidFill>
+              <a:effectLst/>
+              <a:uFillTx/>
+              <a:latin typeface="Arial"/>
+            </a:endParaRPr>
+          </a:p>
+        </p:txBody>
+      </p:sp>
+      <p:sp>
+        <p:nvSpPr>
+          <p:cNvPr id="27" name="Text 5">
+            <a:extLst>
+              <a:ext uri="{FF2B5EF4-FFF2-40B4-BE49-F238E27FC236}">
+                <a16:creationId xmlns:a16="http://schemas.microsoft.com/office/drawing/2014/main" id="{24D8D49B-F11F-31DD-1141-9B78E8436B8E}"/>
+              </a:ext>
+            </a:extLst>
+          </p:cNvPr>
+          <p:cNvSpPr/>
+          <p:nvPr/>
+        </p:nvSpPr>
+        <p:spPr>
+          <a:xfrm>
+            <a:off x="685800" y="857160"/>
+            <a:ext cx="2775305" cy="425285"/>
+          </a:xfrm>
+          <a:prstGeom prst="rect">
+            <a:avLst/>
+          </a:prstGeom>
+          <a:noFill/>
+          <a:ln w="0">
+            <a:noFill/>
+          </a:ln>
+        </p:spPr>
+        <p:style>
+          <a:lnRef idx="0">
+            <a:scrgbClr r="0" g="0" b="0"/>
+          </a:lnRef>
+          <a:fillRef idx="0">
+            <a:scrgbClr r="0" g="0" b="0"/>
+          </a:fillRef>
+          <a:effectRef idx="0">
+            <a:scrgbClr r="0" g="0" b="0"/>
+          </a:effectRef>
+          <a:fontRef idx="minor"/>
+        </p:style>
+        <p:txBody>
+          <a:bodyPr lIns="0" tIns="0" rIns="0" bIns="0" anchor="t">
+            <a:noAutofit/>
+          </a:bodyPr>
+          <a:lstStyle/>
+          <a:p>
+            <a:pPr>
+              <a:tabLst>
+                <a:tab pos="0" algn="l"/>
+              </a:tabLst>
+            </a:pPr>
+            <a:r>
+              <a:rPr lang="en-US" sz="2100">
+                <a:solidFill>
+                  <a:schemeClr val="bg1"/>
+                </a:solidFill>
+                <a:latin typeface="Arial"/>
+                <a:ea typeface="Calibri"/>
+                <a:cs typeface="Arial"/>
+              </a:rPr>
+              <a:t>Method Comparison</a:t>
+            </a:r>
+          </a:p>
+          <a:p>
+            <a:pPr>
+              <a:lnSpc>
+                <a:spcPts val="3149"/>
+              </a:lnSpc>
+              <a:tabLst>
+                <a:tab pos="0" algn="l"/>
+              </a:tabLst>
+            </a:pPr>
+            <a:endParaRPr lang="en-US" sz="2100">
+              <a:solidFill>
+                <a:srgbClr val="FFFFFF"/>
+              </a:solidFill>
+              <a:latin typeface="Arial"/>
+              <a:cs typeface="Arial"/>
+            </a:endParaRPr>
+          </a:p>
+        </p:txBody>
+      </p:sp>
+      <p:sp>
+        <p:nvSpPr>
+          <p:cNvPr id="28" name="Text 6">
+            <a:extLst>
+              <a:ext uri="{FF2B5EF4-FFF2-40B4-BE49-F238E27FC236}">
+                <a16:creationId xmlns:a16="http://schemas.microsoft.com/office/drawing/2014/main" id="{DF3A4A6C-E440-00BD-097B-1E9ACF3C9CB4}"/>
+              </a:ext>
+            </a:extLst>
+          </p:cNvPr>
+          <p:cNvSpPr/>
+          <p:nvPr/>
+        </p:nvSpPr>
+        <p:spPr>
+          <a:xfrm>
+            <a:off x="933480" y="2247840"/>
+            <a:ext cx="2810520" cy="771120"/>
+          </a:xfrm>
+          <a:prstGeom prst="rect">
+            <a:avLst/>
+          </a:prstGeom>
+          <a:noFill/>
+          <a:ln w="0">
+            <a:noFill/>
+          </a:ln>
+        </p:spPr>
+        <p:style>
+          <a:lnRef idx="0">
+            <a:scrgbClr r="0" g="0" b="0"/>
+          </a:lnRef>
+          <a:fillRef idx="0">
+            <a:scrgbClr r="0" g="0" b="0"/>
+          </a:fillRef>
+          <a:effectRef idx="0">
+            <a:scrgbClr r="0" g="0" b="0"/>
+          </a:effectRef>
+          <a:fontRef idx="minor"/>
+        </p:style>
+        <p:txBody>
+          <a:bodyPr lIns="0" tIns="0" rIns="0" bIns="0" anchor="t">
+            <a:noAutofit/>
+          </a:bodyPr>
+          <a:lstStyle/>
           <a:p>
             <a:pPr defTabSz="914400">
               <a:lnSpc>
                 <a:spcPts val="6075"/>
               </a:lnSpc>
               <a:tabLst>
-                <a:tab algn="l" pos="0"/>
+                <a:tab pos="0" algn="l"/>
               </a:tabLst>
             </a:pPr>
             <a:r>
-              <a:rPr b="1" lang="en-US" sz="4050" strike="noStrike" u="none">
-                <a:solidFill>
-                  <a:srgbClr val="ffffff"/>
+              <a:rPr lang="en-US" sz="4050" b="1" u="none" strike="noStrike">
+                <a:solidFill>
+                  <a:srgbClr val="FFFFFF"/>
                 </a:solidFill>
                 <a:effectLst/>
                 <a:uFillTx/>
                 <a:latin typeface="Arial"/>
                 <a:ea typeface="Arial"/>
               </a:rPr>
-              <a:t>03</a:t>
-            </a:r>
-            <a:endParaRPr b="0" lang="en-GB" sz="4050" strike="noStrike" u="none">
-              <a:solidFill>
-                <a:srgbClr val="ffffff"/>
+              <a:t>01</a:t>
+            </a:r>
+            <a:endParaRPr lang="en-GB" sz="4050" b="0" u="none" strike="noStrike">
+              <a:solidFill>
+                <a:srgbClr val="FFFFFF"/>
               </a:solidFill>
               <a:effectLst/>
               <a:uFillTx/>
@@ -3391,14 +6804,20 @@
       </p:sp>
       <p:sp>
         <p:nvSpPr>
-          <p:cNvPr id="33" name="Text 11"/>
+          <p:cNvPr id="29" name="Text 7">
+            <a:extLst>
+              <a:ext uri="{FF2B5EF4-FFF2-40B4-BE49-F238E27FC236}">
+                <a16:creationId xmlns:a16="http://schemas.microsoft.com/office/drawing/2014/main" id="{C6493315-CD05-FFE9-72B9-4AC56EB34F0F}"/>
+              </a:ext>
+            </a:extLst>
+          </p:cNvPr>
           <p:cNvSpPr/>
           <p:nvPr/>
         </p:nvSpPr>
         <p:spPr>
           <a:xfrm>
-            <a:off x="7969320" y="3095640"/>
-            <a:ext cx="2810880" cy="313920"/>
+            <a:off x="933480" y="3095640"/>
+            <a:ext cx="2810520" cy="313920"/>
           </a:xfrm>
           <a:prstGeom prst="rect">
             <a:avLst/>
@@ -3409,39 +6828,46 @@
           </a:ln>
         </p:spPr>
         <p:style>
-          <a:lnRef idx="0"/>
-          <a:fillRef idx="0"/>
-          <a:effectRef idx="0"/>
+          <a:lnRef idx="0">
+            <a:scrgbClr r="0" g="0" b="0"/>
+          </a:lnRef>
+          <a:fillRef idx="0">
+            <a:scrgbClr r="0" g="0" b="0"/>
+          </a:fillRef>
+          <a:effectRef idx="0">
+            <a:scrgbClr r="0" g="0" b="0"/>
+          </a:effectRef>
           <a:fontRef idx="minor"/>
         </p:style>
         <p:txBody>
-          <a:bodyPr lIns="0" rIns="0" tIns="0" bIns="0" anchor="t">
+          <a:bodyPr lIns="0" tIns="0" rIns="0" bIns="0" anchor="t">
             <a:noAutofit/>
           </a:bodyPr>
+          <a:lstStyle/>
           <a:p>
             <a:pPr defTabSz="914400">
               <a:lnSpc>
                 <a:spcPts val="2475"/>
               </a:lnSpc>
               <a:tabLst>
-                <a:tab algn="l" pos="0"/>
+                <a:tab pos="0" algn="l"/>
               </a:tabLst>
             </a:pPr>
             <a:r>
-              <a:rPr b="0" lang="en-US" sz="1650" strike="noStrike" u="none">
-                <a:solidFill>
-                  <a:srgbClr val="ffffff"/>
+              <a:rPr lang="en-US" sz="1650" b="0" u="none" strike="noStrike">
+                <a:solidFill>
+                  <a:srgbClr val="FFFFFF"/>
                 </a:solidFill>
                 <a:effectLst/>
                 <a:uFillTx/>
                 <a:latin typeface="Arial"/>
                 <a:ea typeface="Arial"/>
               </a:rPr>
-              <a:t>Metric three</a:t>
-            </a:r>
-            <a:endParaRPr b="0" lang="en-GB" sz="1650" strike="noStrike" u="none">
-              <a:solidFill>
-                <a:srgbClr val="ffffff"/>
+              <a:t>Metric one</a:t>
+            </a:r>
+            <a:endParaRPr lang="en-GB" sz="1650" b="0" u="none" strike="noStrike">
+              <a:solidFill>
+                <a:srgbClr val="FFFFFF"/>
               </a:solidFill>
               <a:effectLst/>
               <a:uFillTx/>
@@ -3450,27 +6876,206 @@
           </a:p>
         </p:txBody>
       </p:sp>
+      <p:sp>
+        <p:nvSpPr>
+          <p:cNvPr id="30" name="Text 8">
+            <a:extLst>
+              <a:ext uri="{FF2B5EF4-FFF2-40B4-BE49-F238E27FC236}">
+                <a16:creationId xmlns:a16="http://schemas.microsoft.com/office/drawing/2014/main" id="{DD4062B2-694E-AB29-20F0-172076F3D89B}"/>
+              </a:ext>
+            </a:extLst>
+          </p:cNvPr>
+          <p:cNvSpPr/>
+          <p:nvPr/>
+        </p:nvSpPr>
+        <p:spPr>
+          <a:xfrm>
+            <a:off x="4451400" y="2247840"/>
+            <a:ext cx="2810520" cy="771120"/>
+          </a:xfrm>
+          <a:prstGeom prst="rect">
+            <a:avLst/>
+          </a:prstGeom>
+          <a:noFill/>
+          <a:ln w="0">
+            <a:noFill/>
+          </a:ln>
+        </p:spPr>
+        <p:style>
+          <a:lnRef idx="0">
+            <a:scrgbClr r="0" g="0" b="0"/>
+          </a:lnRef>
+          <a:fillRef idx="0">
+            <a:scrgbClr r="0" g="0" b="0"/>
+          </a:fillRef>
+          <a:effectRef idx="0">
+            <a:scrgbClr r="0" g="0" b="0"/>
+          </a:effectRef>
+          <a:fontRef idx="minor"/>
+        </p:style>
+        <p:txBody>
+          <a:bodyPr lIns="0" tIns="0" rIns="0" bIns="0" anchor="t">
+            <a:noAutofit/>
+          </a:bodyPr>
+          <a:lstStyle/>
+          <a:p>
+            <a:pPr defTabSz="914400">
+              <a:lnSpc>
+                <a:spcPts val="6075"/>
+              </a:lnSpc>
+              <a:tabLst>
+                <a:tab pos="0" algn="l"/>
+              </a:tabLst>
+            </a:pPr>
+            <a:r>
+              <a:rPr lang="en-US" sz="4050" b="1" u="none" strike="noStrike">
+                <a:solidFill>
+                  <a:srgbClr val="FFFFFF"/>
+                </a:solidFill>
+                <a:effectLst/>
+                <a:uFillTx/>
+                <a:latin typeface="Arial"/>
+                <a:ea typeface="Arial"/>
+              </a:rPr>
+              <a:t>02</a:t>
+            </a:r>
+            <a:endParaRPr lang="en-GB" sz="4050" b="0" u="none" strike="noStrike">
+              <a:solidFill>
+                <a:srgbClr val="FFFFFF"/>
+              </a:solidFill>
+              <a:effectLst/>
+              <a:uFillTx/>
+              <a:latin typeface="Arial"/>
+            </a:endParaRPr>
+          </a:p>
+        </p:txBody>
+      </p:sp>
+      <p:sp>
+        <p:nvSpPr>
+          <p:cNvPr id="31" name="Text 9">
+            <a:extLst>
+              <a:ext uri="{FF2B5EF4-FFF2-40B4-BE49-F238E27FC236}">
+                <a16:creationId xmlns:a16="http://schemas.microsoft.com/office/drawing/2014/main" id="{017150A5-7A28-79BF-918F-208A345A7F75}"/>
+              </a:ext>
+            </a:extLst>
+          </p:cNvPr>
+          <p:cNvSpPr/>
+          <p:nvPr/>
+        </p:nvSpPr>
+        <p:spPr>
+          <a:xfrm>
+            <a:off x="4451400" y="3095640"/>
+            <a:ext cx="2810520" cy="313920"/>
+          </a:xfrm>
+          <a:prstGeom prst="rect">
+            <a:avLst/>
+          </a:prstGeom>
+          <a:noFill/>
+          <a:ln w="0">
+            <a:noFill/>
+          </a:ln>
+        </p:spPr>
+        <p:style>
+          <a:lnRef idx="0">
+            <a:scrgbClr r="0" g="0" b="0"/>
+          </a:lnRef>
+          <a:fillRef idx="0">
+            <a:scrgbClr r="0" g="0" b="0"/>
+          </a:fillRef>
+          <a:effectRef idx="0">
+            <a:scrgbClr r="0" g="0" b="0"/>
+          </a:effectRef>
+          <a:fontRef idx="minor"/>
+        </p:style>
+        <p:txBody>
+          <a:bodyPr lIns="0" tIns="0" rIns="0" bIns="0" anchor="t">
+            <a:noAutofit/>
+          </a:bodyPr>
+          <a:lstStyle/>
+          <a:p>
+            <a:pPr defTabSz="914400">
+              <a:lnSpc>
+                <a:spcPts val="2475"/>
+              </a:lnSpc>
+              <a:tabLst>
+                <a:tab pos="0" algn="l"/>
+              </a:tabLst>
+            </a:pPr>
+            <a:r>
+              <a:rPr lang="en-US" sz="1650" b="0" u="none" strike="noStrike">
+                <a:solidFill>
+                  <a:srgbClr val="FFFFFF"/>
+                </a:solidFill>
+                <a:effectLst/>
+                <a:uFillTx/>
+                <a:latin typeface="Arial"/>
+                <a:ea typeface="Arial"/>
+              </a:rPr>
+              <a:t>Metric two</a:t>
+            </a:r>
+            <a:endParaRPr lang="en-GB" sz="1650" b="0" u="none" strike="noStrike">
+              <a:solidFill>
+                <a:srgbClr val="FFFFFF"/>
+              </a:solidFill>
+              <a:effectLst/>
+              <a:uFillTx/>
+              <a:latin typeface="Arial"/>
+            </a:endParaRPr>
+          </a:p>
+        </p:txBody>
+      </p:sp>
+      <p:pic>
+        <p:nvPicPr>
+          <p:cNvPr id="4" name="Grafik 3" descr="Ein Bild, das Text, Reihe, Screenshot, Diagramm enthält.&#10;&#10;KI-generierte Inhalte können fehlerhaft sein.">
+            <a:extLst>
+              <a:ext uri="{FF2B5EF4-FFF2-40B4-BE49-F238E27FC236}">
+                <a16:creationId xmlns:a16="http://schemas.microsoft.com/office/drawing/2014/main" id="{ED5B4BFA-B45A-80C6-B876-8E8525E482B5}"/>
+              </a:ext>
+            </a:extLst>
+          </p:cNvPr>
+          <p:cNvPicPr>
+            <a:picLocks noChangeAspect="1"/>
+          </p:cNvPicPr>
+          <p:nvPr/>
+        </p:nvPicPr>
+        <p:blipFill>
+          <a:blip r:embed="rId3"/>
+          <a:stretch>
+            <a:fillRect/>
+          </a:stretch>
+        </p:blipFill>
+        <p:spPr>
+          <a:xfrm>
+            <a:off x="7144" y="1730811"/>
+            <a:ext cx="9144000" cy="3254042"/>
+          </a:xfrm>
+          <a:prstGeom prst="rect">
+            <a:avLst/>
+          </a:prstGeom>
+        </p:spPr>
+      </p:pic>
     </p:spTree>
+    <p:extLst>
+      <p:ext uri="{BB962C8B-B14F-4D97-AF65-F5344CB8AC3E}">
+        <p14:creationId xmlns:p14="http://schemas.microsoft.com/office/powerpoint/2010/main" val="3425055799"/>
+      </p:ext>
+    </p:extLst>
   </p:cSld>
-  <mc:AlternateContent>
-    <mc:Choice Requires="p14">
-      <p:transition spd="slow" p14:dur="2000"/>
-    </mc:Choice>
-    <mc:Fallback>
-      <p:transition spd="slow"/>
-    </mc:Fallback>
-  </mc:AlternateContent>
+  <p:clrMapOvr>
+    <a:masterClrMapping/>
+  </p:clrMapOvr>
 </p:sld>
 </file>
 
-<file path=ppt/slides/slide5.xml><?xml version="1.0" encoding="utf-8"?>
-<p:sld xmlns:a="http://schemas.openxmlformats.org/drawingml/2006/main" xmlns:p="http://schemas.openxmlformats.org/presentationml/2006/main" xmlns:r="http://schemas.openxmlformats.org/officeDocument/2006/relationships" xmlns:p14="http://schemas.microsoft.com/office/powerpoint/2010/main" xmlns:p15="http://schemas.microsoft.com/office/powerpoint/2012/main" xmlns:mc="http://schemas.openxmlformats.org/markup-compatibility/2006">
+<file path=ppt/slides/slide8.xml><?xml version="1.0" encoding="utf-8"?>
+<p:sld xmlns:a="http://schemas.openxmlformats.org/drawingml/2006/main" xmlns:r="http://schemas.openxmlformats.org/officeDocument/2006/relationships" xmlns:p="http://schemas.openxmlformats.org/presentationml/2006/main">
   <p:cSld>
     <p:bg>
       <p:bgPr>
         <a:solidFill>
-          <a:srgbClr val="005b96"/>
+          <a:srgbClr val="005B96"/>
         </a:solidFill>
+        <a:effectLst/>
       </p:bgPr>
     </p:bg>
     <p:spTree>
@@ -3502,32 +7107,39 @@
             <a:avLst/>
           </a:prstGeom>
           <a:solidFill>
-            <a:srgbClr val="ffffff"/>
+            <a:srgbClr val="FFFFFF"/>
           </a:solidFill>
           <a:ln w="0">
             <a:noFill/>
           </a:ln>
         </p:spPr>
         <p:style>
-          <a:lnRef idx="0"/>
-          <a:fillRef idx="0"/>
-          <a:effectRef idx="0"/>
+          <a:lnRef idx="0">
+            <a:scrgbClr r="0" g="0" b="0"/>
+          </a:lnRef>
+          <a:fillRef idx="0">
+            <a:scrgbClr r="0" g="0" b="0"/>
+          </a:fillRef>
+          <a:effectRef idx="0">
+            <a:scrgbClr r="0" g="0" b="0"/>
+          </a:effectRef>
           <a:fontRef idx="minor"/>
         </p:style>
         <p:txBody>
-          <a:bodyPr wrap="none" lIns="0" rIns="0" tIns="0" bIns="0" anchor="ctr">
+          <a:bodyPr wrap="none" lIns="0" tIns="0" rIns="0" bIns="0" anchor="ctr">
             <a:normAutofit fontScale="25000" lnSpcReduction="19999"/>
           </a:bodyPr>
+          <a:lstStyle/>
           <a:p>
             <a:pPr defTabSz="914400">
               <a:lnSpc>
                 <a:spcPct val="100000"/>
               </a:lnSpc>
               <a:tabLst>
-                <a:tab algn="l" pos="0"/>
+                <a:tab pos="0" algn="l"/>
               </a:tabLst>
             </a:pPr>
-            <a:endParaRPr b="0" lang="en-US" sz="1800" strike="noStrike" u="none">
+            <a:endParaRPr lang="en-US" sz="1800" b="0" u="none" strike="noStrike">
               <a:solidFill>
                 <a:schemeClr val="dk1"/>
               </a:solidFill>
@@ -3558,28 +7170,35 @@
           </a:ln>
         </p:spPr>
         <p:style>
-          <a:lnRef idx="0"/>
-          <a:fillRef idx="0"/>
-          <a:effectRef idx="0"/>
+          <a:lnRef idx="0">
+            <a:scrgbClr r="0" g="0" b="0"/>
+          </a:lnRef>
+          <a:fillRef idx="0">
+            <a:scrgbClr r="0" g="0" b="0"/>
+          </a:fillRef>
+          <a:effectRef idx="0">
+            <a:scrgbClr r="0" g="0" b="0"/>
+          </a:effectRef>
           <a:fontRef idx="minor"/>
         </p:style>
         <p:txBody>
-          <a:bodyPr lIns="0" rIns="0" tIns="0" bIns="0" anchor="t">
+          <a:bodyPr lIns="0" tIns="0" rIns="0" bIns="0" anchor="t">
             <a:noAutofit/>
           </a:bodyPr>
+          <a:lstStyle/>
           <a:p>
             <a:pPr algn="r" defTabSz="914400">
               <a:lnSpc>
                 <a:spcPts val="4915"/>
               </a:lnSpc>
               <a:tabLst>
-                <a:tab algn="l" pos="0"/>
+                <a:tab pos="0" algn="l"/>
               </a:tabLst>
             </a:pPr>
             <a:r>
-              <a:rPr b="1" lang="en-US" sz="5850" strike="noStrike" u="none">
-                <a:solidFill>
-                  <a:srgbClr val="ffffff"/>
+              <a:rPr lang="en-US" sz="5850" b="1" u="none" strike="noStrike">
+                <a:solidFill>
+                  <a:srgbClr val="FFFFFF"/>
                 </a:solidFill>
                 <a:effectLst/>
                 <a:uFillTx/>
@@ -3588,9 +7207,9 @@
               </a:rPr>
               <a:t>zh</a:t>
             </a:r>
-            <a:endParaRPr b="0" lang="en-GB" sz="5850" strike="noStrike" u="none">
-              <a:solidFill>
-                <a:srgbClr val="ffffff"/>
+            <a:endParaRPr lang="en-GB" sz="5850" b="0" u="none" strike="noStrike">
+              <a:solidFill>
+                <a:srgbClr val="FFFFFF"/>
               </a:solidFill>
               <a:effectLst/>
               <a:uFillTx/>
@@ -3603,13 +7222,13 @@
                 <a:spcPts val="4915"/>
               </a:lnSpc>
               <a:tabLst>
-                <a:tab algn="l" pos="0"/>
+                <a:tab pos="0" algn="l"/>
               </a:tabLst>
             </a:pPr>
             <a:r>
-              <a:rPr b="1" lang="en-US" sz="5850" strike="noStrike" u="none">
-                <a:solidFill>
-                  <a:srgbClr val="ffffff"/>
+              <a:rPr lang="en-US" sz="5850" b="1" u="none" strike="noStrike">
+                <a:solidFill>
+                  <a:srgbClr val="FFFFFF"/>
                 </a:solidFill>
                 <a:effectLst/>
                 <a:uFillTx/>
@@ -3618,9 +7237,9 @@
               </a:rPr>
               <a:t>aw</a:t>
             </a:r>
-            <a:endParaRPr b="0" lang="en-GB" sz="5850" strike="noStrike" u="none">
-              <a:solidFill>
-                <a:srgbClr val="ffffff"/>
+            <a:endParaRPr lang="en-GB" sz="5850" b="0" u="none" strike="noStrike">
+              <a:solidFill>
+                <a:srgbClr val="FFFFFF"/>
               </a:solidFill>
               <a:effectLst/>
               <a:uFillTx/>
@@ -3649,28 +7268,35 @@
           </a:ln>
         </p:spPr>
         <p:style>
-          <a:lnRef idx="0"/>
-          <a:fillRef idx="0"/>
-          <a:effectRef idx="0"/>
+          <a:lnRef idx="0">
+            <a:scrgbClr r="0" g="0" b="0"/>
+          </a:lnRef>
+          <a:fillRef idx="0">
+            <a:scrgbClr r="0" g="0" b="0"/>
+          </a:fillRef>
+          <a:effectRef idx="0">
+            <a:scrgbClr r="0" g="0" b="0"/>
+          </a:effectRef>
           <a:fontRef idx="minor"/>
         </p:style>
         <p:txBody>
-          <a:bodyPr lIns="0" rIns="0" tIns="0" bIns="0" anchor="t">
+          <a:bodyPr lIns="0" tIns="0" rIns="0" bIns="0" anchor="t">
             <a:noAutofit/>
           </a:bodyPr>
+          <a:lstStyle/>
           <a:p>
             <a:pPr defTabSz="914400">
               <a:lnSpc>
                 <a:spcPts val="3149"/>
               </a:lnSpc>
               <a:tabLst>
-                <a:tab algn="l" pos="0"/>
+                <a:tab pos="0" algn="l"/>
               </a:tabLst>
             </a:pPr>
             <a:r>
-              <a:rPr b="0" lang="en-US" sz="2100" strike="noStrike" u="none">
-                <a:solidFill>
-                  <a:srgbClr val="ffffff"/>
+              <a:rPr lang="en-US" sz="2100" b="0" u="none" strike="noStrike">
+                <a:solidFill>
+                  <a:srgbClr val="FFFFFF"/>
                 </a:solidFill>
                 <a:effectLst/>
                 <a:uFillTx/>
@@ -3679,9 +7305,9 @@
               </a:rPr>
               <a:t>Questions</a:t>
             </a:r>
-            <a:endParaRPr b="0" lang="en-GB" sz="2100" strike="noStrike" u="none">
-              <a:solidFill>
-                <a:srgbClr val="ffffff"/>
+            <a:endParaRPr lang="en-GB" sz="2100" b="0" u="none" strike="noStrike">
+              <a:solidFill>
+                <a:srgbClr val="FFFFFF"/>
               </a:solidFill>
               <a:effectLst/>
               <a:uFillTx/>
@@ -3710,28 +7336,35 @@
           </a:ln>
         </p:spPr>
         <p:style>
-          <a:lnRef idx="0"/>
-          <a:fillRef idx="0"/>
-          <a:effectRef idx="0"/>
+          <a:lnRef idx="0">
+            <a:scrgbClr r="0" g="0" b="0"/>
+          </a:lnRef>
+          <a:fillRef idx="0">
+            <a:scrgbClr r="0" g="0" b="0"/>
+          </a:fillRef>
+          <a:effectRef idx="0">
+            <a:scrgbClr r="0" g="0" b="0"/>
+          </a:effectRef>
           <a:fontRef idx="minor"/>
         </p:style>
         <p:txBody>
-          <a:bodyPr lIns="0" rIns="0" tIns="0" bIns="0" anchor="t">
+          <a:bodyPr lIns="0" tIns="0" rIns="0" bIns="0" anchor="t">
             <a:noAutofit/>
           </a:bodyPr>
+          <a:lstStyle/>
           <a:p>
             <a:pPr defTabSz="914400">
               <a:lnSpc>
                 <a:spcPts val="2701"/>
               </a:lnSpc>
               <a:tabLst>
-                <a:tab algn="l" pos="0"/>
+                <a:tab pos="0" algn="l"/>
               </a:tabLst>
             </a:pPr>
             <a:r>
-              <a:rPr b="0" lang="en-US" sz="1800" strike="noStrike" u="none">
-                <a:solidFill>
-                  <a:srgbClr val="ffffff"/>
+              <a:rPr lang="en-US" sz="1800" b="0" u="none" strike="noStrike">
+                <a:solidFill>
+                  <a:srgbClr val="FFFFFF"/>
                 </a:solidFill>
                 <a:effectLst/>
                 <a:uFillTx/>
@@ -3740,9 +7373,9 @@
               </a:rPr>
               <a:t>Thank you</a:t>
             </a:r>
-            <a:endParaRPr b="0" lang="en-GB" sz="1800" strike="noStrike" u="none">
-              <a:solidFill>
-                <a:srgbClr val="ffffff"/>
+            <a:endParaRPr lang="en-GB" sz="1800" b="0" u="none" strike="noStrike">
+              <a:solidFill>
+                <a:srgbClr val="FFFFFF"/>
               </a:solidFill>
               <a:effectLst/>
               <a:uFillTx/>
@@ -3753,66 +7386,61 @@
       </p:sp>
     </p:spTree>
   </p:cSld>
-  <mc:AlternateContent>
-    <mc:Choice Requires="p14">
-      <p:transition spd="slow" p14:dur="2000"/>
-    </mc:Choice>
-    <mc:Fallback>
-      <p:transition spd="slow"/>
-    </mc:Fallback>
-  </mc:AlternateContent>
+  <p:clrMapOvr>
+    <a:masterClrMapping/>
+  </p:clrMapOvr>
 </p:sld>
 </file>
 
 <file path=ppt/theme/theme1.xml><?xml version="1.0" encoding="utf-8"?>
-<a:theme xmlns:a="http://schemas.openxmlformats.org/drawingml/2006/main" xmlns:r="http://schemas.openxmlformats.org/officeDocument/2006/relationships" name="Office Theme">
+<a:theme xmlns:a="http://schemas.openxmlformats.org/drawingml/2006/main" name="Office Theme">
   <a:themeElements>
     <a:clrScheme name="Office">
       <a:dk1>
         <a:srgbClr val="000000"/>
       </a:dk1>
       <a:lt1>
-        <a:srgbClr val="ffffff"/>
+        <a:srgbClr val="FFFFFF"/>
       </a:lt1>
       <a:dk2>
-        <a:srgbClr val="44546a"/>
+        <a:srgbClr val="44546A"/>
       </a:dk2>
       <a:lt2>
-        <a:srgbClr val="e7e6e6"/>
+        <a:srgbClr val="E7E6E6"/>
       </a:lt2>
       <a:accent1>
-        <a:srgbClr val="4472c4"/>
+        <a:srgbClr val="4472C4"/>
       </a:accent1>
       <a:accent2>
-        <a:srgbClr val="ed7d31"/>
+        <a:srgbClr val="ED7D31"/>
       </a:accent2>
       <a:accent3>
-        <a:srgbClr val="a5a5a5"/>
+        <a:srgbClr val="A5A5A5"/>
       </a:accent3>
       <a:accent4>
-        <a:srgbClr val="ffc000"/>
+        <a:srgbClr val="FFC000"/>
       </a:accent4>
       <a:accent5>
-        <a:srgbClr val="5b9bd5"/>
+        <a:srgbClr val="5B9BD5"/>
       </a:accent5>
       <a:accent6>
-        <a:srgbClr val="70ad47"/>
+        <a:srgbClr val="70AD47"/>
       </a:accent6>
       <a:hlink>
-        <a:srgbClr val="0563c1"/>
+        <a:srgbClr val="0563C1"/>
       </a:hlink>
       <a:folHlink>
-        <a:srgbClr val="954f72"/>
+        <a:srgbClr val="954F72"/>
       </a:folHlink>
     </a:clrScheme>
     <a:fontScheme name="Office">
       <a:majorFont>
-        <a:latin typeface="Calibri Light" panose="020F0302020204030204" pitchFamily="0" charset="1"/>
+        <a:latin typeface="Calibri Light" panose="020F0302020204030204"/>
         <a:ea typeface=""/>
         <a:cs typeface=""/>
       </a:majorFont>
       <a:minorFont>
-        <a:latin typeface="Calibri" panose="020F0502020204030204" pitchFamily="0" charset="1"/>
+        <a:latin typeface="Calibri" panose="020F0502020204030204"/>
         <a:ea typeface=""/>
         <a:cs typeface=""/>
       </a:minorFont>
@@ -3844,7 +7472,7 @@
             </a:gs>
           </a:gsLst>
           <a:lin ang="5400000" scaled="0"/>
-          <a:tileRect l="0" t="0" r="0" b="0"/>
+          <a:tileRect/>
         </a:gradFill>
         <a:gradFill>
           <a:gsLst>
@@ -3868,7 +7496,7 @@
             </a:gs>
           </a:gsLst>
           <a:lin ang="5400000" scaled="0"/>
-          <a:tileRect l="0" t="0" r="0" b="0"/>
+          <a:tileRect/>
         </a:gradFill>
       </a:fillStyleLst>
       <a:lnStyleLst>
@@ -3928,65 +7556,67 @@
             </a:gs>
           </a:gsLst>
           <a:lin ang="5400000" scaled="0"/>
-          <a:tileRect l="0" t="0" r="0" b="0"/>
+          <a:tileRect/>
         </a:gradFill>
       </a:bgFillStyleLst>
     </a:fmtScheme>
   </a:themeElements>
+  <a:objectDefaults/>
+  <a:extraClrSchemeLst/>
 </a:theme>
 </file>
 
 <file path=ppt/theme/theme2.xml><?xml version="1.0" encoding="utf-8"?>
-<a:theme xmlns:a="http://schemas.openxmlformats.org/drawingml/2006/main" xmlns:r="http://schemas.openxmlformats.org/officeDocument/2006/relationships" name="Office Theme">
+<a:theme xmlns:a="http://schemas.openxmlformats.org/drawingml/2006/main" name="Office Theme">
   <a:themeElements>
     <a:clrScheme name="LibreOffice">
       <a:dk1>
         <a:srgbClr val="000000"/>
       </a:dk1>
       <a:lt1>
-        <a:srgbClr val="ffffff"/>
+        <a:srgbClr val="FFFFFF"/>
       </a:lt1>
       <a:dk2>
         <a:srgbClr val="000000"/>
       </a:dk2>
       <a:lt2>
-        <a:srgbClr val="ffffff"/>
+        <a:srgbClr val="FFFFFF"/>
       </a:lt2>
       <a:accent1>
-        <a:srgbClr val="18a303"/>
+        <a:srgbClr val="18A303"/>
       </a:accent1>
       <a:accent2>
-        <a:srgbClr val="0369a3"/>
+        <a:srgbClr val="0369A3"/>
       </a:accent2>
       <a:accent3>
-        <a:srgbClr val="a33e03"/>
+        <a:srgbClr val="A33E03"/>
       </a:accent3>
       <a:accent4>
-        <a:srgbClr val="8e03a3"/>
+        <a:srgbClr val="8E03A3"/>
       </a:accent4>
       <a:accent5>
-        <a:srgbClr val="c99c00"/>
+        <a:srgbClr val="C99C00"/>
       </a:accent5>
       <a:accent6>
-        <a:srgbClr val="c9211e"/>
+        <a:srgbClr val="C9211E"/>
       </a:accent6>
       <a:hlink>
-        <a:srgbClr val="0000ee"/>
+        <a:srgbClr val="0000EE"/>
       </a:hlink>
       <a:folHlink>
-        <a:srgbClr val="551a8b"/>
+        <a:srgbClr val="551A8B"/>
       </a:folHlink>
     </a:clrScheme>
     <a:fontScheme name="Office">
       <a:majorFont>
-        <a:latin typeface="Arial" pitchFamily="0" charset="1"/>
-        <a:ea typeface="DejaVu Sans" pitchFamily="0" charset="1"/>
-        <a:cs typeface="DejaVu Sans" pitchFamily="0" charset="1"/>
+        <a:latin typeface="Arial"/>
+        <a:ea typeface="DejaVu Sans"/>
+        <a:cs typeface="DejaVu Sans"/>
       </a:majorFont>
       <a:minorFont>
-        <a:latin typeface="Arial" pitchFamily="0" charset="1"/>
-        <a:ea typeface="DejaVu Sans" pitchFamily="0" charset="1"/>
-        <a:cs typeface="DejaVu Sans" pitchFamily="0" charset="1"/>
+        <a:latin typeface="Arial"/>
+        <a:ea typeface="DejaVu Sans"/>
+        <a:cs typeface="DejaVu Sans"/>
       </a:minorFont>
     </a:fontScheme>
     <a:fmtScheme>
@@ -4039,5 +7669,252 @@
       </a:bgFillStyleLst>
     </a:fmtScheme>
   </a:themeElements>
+  <a:objectDefaults/>
+  <a:extraClrSchemeLst/>
 </a:theme>
+</file>
+
+<file path=customXml/item1.xml><?xml version="1.0" encoding="utf-8"?>
+<?mso-contentType ?>
+<FormTemplates xmlns="http://schemas.microsoft.com/sharepoint/v3/contenttype/forms">
+  <Display>DocumentLibraryForm</Display>
+  <Edit>DocumentLibraryForm</Edit>
+  <New>DocumentLibraryForm</New>
+</FormTemplates>
+</file>
+
+<file path=customXml/item2.xml><?xml version="1.0" encoding="utf-8"?>
+<ct:contentTypeSchema xmlns:ct="http://schemas.microsoft.com/office/2006/metadata/contentType" xmlns:ma="http://schemas.microsoft.com/office/2006/metadata/properties/metaAttributes" ct:_="" ma:_="" ma:contentTypeName="Dokument" ma:contentTypeID="0x010100B40D03D4FC8C944B961B26E5887A7530" ma:contentTypeVersion="10" ma:contentTypeDescription="Ein neues Dokument erstellen." ma:contentTypeScope="" ma:versionID="126c301135dc6938ecc350d383650e79">
+  <xsd:schema xmlns:xsd="http://www.w3.org/2001/XMLSchema" xmlns:xs="http://www.w3.org/2001/XMLSchema" xmlns:p="http://schemas.microsoft.com/office/2006/metadata/properties" xmlns:ns2="c581cf06-f342-43bb-9c27-eb679bd1fe52" xmlns:ns3="c3a86a5d-5714-4c9c-b50f-c72962407014" targetNamespace="http://schemas.microsoft.com/office/2006/metadata/properties" ma:root="true" ma:fieldsID="4ee20aa7b3b1f848be7f6aaad3eecee1" ns2:_="" ns3:_="">
+    <xsd:import namespace="c581cf06-f342-43bb-9c27-eb679bd1fe52"/>
+    <xsd:import namespace="c3a86a5d-5714-4c9c-b50f-c72962407014"/>
+    <xsd:element name="properties">
+      <xsd:complexType>
+        <xsd:sequence>
+          <xsd:element name="documentManagement">
+            <xsd:complexType>
+              <xsd:all>
+                <xsd:element ref="ns2:MediaServiceMetadata" minOccurs="0"/>
+                <xsd:element ref="ns2:MediaServiceFastMetadata" minOccurs="0"/>
+                <xsd:element ref="ns2:MediaServiceObjectDetectorVersions" minOccurs="0"/>
+                <xsd:element ref="ns2:MediaServiceDateTaken" minOccurs="0"/>
+                <xsd:element ref="ns2:MediaServiceGenerationTime" minOccurs="0"/>
+                <xsd:element ref="ns2:MediaServiceEventHashCode" minOccurs="0"/>
+                <xsd:element ref="ns2:lcf76f155ced4ddcb4097134ff3c332f" minOccurs="0"/>
+                <xsd:element ref="ns3:TaxCatchAll" minOccurs="0"/>
+                <xsd:element ref="ns2:MediaServiceSearchProperties" minOccurs="0"/>
+              </xsd:all>
+            </xsd:complexType>
+          </xsd:element>
+        </xsd:sequence>
+      </xsd:complexType>
+    </xsd:element>
+  </xsd:schema>
+  <xsd:schema xmlns:xsd="http://www.w3.org/2001/XMLSchema" xmlns:xs="http://www.w3.org/2001/XMLSchema" xmlns:dms="http://schemas.microsoft.com/office/2006/documentManagement/types" xmlns:pc="http://schemas.microsoft.com/office/infopath/2007/PartnerControls" targetNamespace="c581cf06-f342-43bb-9c27-eb679bd1fe52" elementFormDefault="qualified">
+    <xsd:import namespace="http://schemas.microsoft.com/office/2006/documentManagement/types"/>
+    <xsd:import namespace="http://schemas.microsoft.com/office/infopath/2007/PartnerControls"/>
+    <xsd:element name="MediaServiceMetadata" ma:index="8" nillable="true" ma:displayName="MediaServiceMetadata" ma:hidden="true" ma:internalName="MediaServiceMetadata" ma:readOnly="true">
+      <xsd:simpleType>
+        <xsd:restriction base="dms:Note"/>
+      </xsd:simpleType>
+    </xsd:element>
+    <xsd:element name="MediaServiceFastMetadata" ma:index="9" nillable="true" ma:displayName="MediaServiceFastMetadata" ma:hidden="true" ma:internalName="MediaServiceFastMetadata" ma:readOnly="true">
+      <xsd:simpleType>
+        <xsd:restriction base="dms:Note"/>
+      </xsd:simpleType>
+    </xsd:element>
+    <xsd:element name="MediaServiceObjectDetectorVersions" ma:index="10" nillable="true" ma:displayName="MediaServiceObjectDetectorVersions" ma:hidden="true" ma:indexed="true" ma:internalName="MediaServiceObjectDetectorVersions" ma:readOnly="true">
+      <xsd:simpleType>
+        <xsd:restriction base="dms:Text"/>
+      </xsd:simpleType>
+    </xsd:element>
+    <xsd:element name="MediaServiceDateTaken" ma:index="11" nillable="true" ma:displayName="MediaServiceDateTaken" ma:hidden="true" ma:indexed="true" ma:internalName="MediaServiceDateTaken" ma:readOnly="true">
+      <xsd:simpleType>
+        <xsd:restriction base="dms:Text"/>
+      </xsd:simpleType>
+    </xsd:element>
+    <xsd:element name="MediaServiceGenerationTime" ma:index="12" nillable="true" ma:displayName="MediaServiceGenerationTime" ma:hidden="true" ma:internalName="MediaServiceGenerationTime" ma:readOnly="true">
+      <xsd:simpleType>
+        <xsd:restriction base="dms:Text"/>
+      </xsd:simpleType>
+    </xsd:element>
+    <xsd:element name="MediaServiceEventHashCode" ma:index="13" nillable="true" ma:displayName="MediaServiceEventHashCode" ma:hidden="true" ma:internalName="MediaServiceEventHashCode" ma:readOnly="true">
+      <xsd:simpleType>
+        <xsd:restriction base="dms:Text"/>
+      </xsd:simpleType>
+    </xsd:element>
+    <xsd:element name="lcf76f155ced4ddcb4097134ff3c332f" ma:index="15" nillable="true" ma:taxonomy="true" ma:internalName="lcf76f155ced4ddcb4097134ff3c332f" ma:taxonomyFieldName="MediaServiceImageTags" ma:displayName="Bildmarkierungen" ma:readOnly="false" ma:fieldId="{5cf76f15-5ced-4ddc-b409-7134ff3c332f}" ma:taxonomyMulti="true" ma:sspId="19e3ed14-352d-4aa2-a63b-0b06d7ab5fe8" ma:termSetId="09814cd3-568e-fe90-9814-8d621ff8fb84" ma:anchorId="fba54fb3-c3e1-fe81-a776-ca4b69148c4d" ma:open="true" ma:isKeyword="false">
+      <xsd:complexType>
+        <xsd:sequence>
+          <xsd:element ref="pc:Terms" minOccurs="0" maxOccurs="1"/>
+        </xsd:sequence>
+      </xsd:complexType>
+    </xsd:element>
+    <xsd:element name="MediaServiceSearchProperties" ma:index="17" nillable="true" ma:displayName="MediaServiceSearchProperties" ma:hidden="true" ma:internalName="MediaServiceSearchProperties" ma:readOnly="true">
+      <xsd:simpleType>
+        <xsd:restriction base="dms:Note"/>
+      </xsd:simpleType>
+    </xsd:element>
+  </xsd:schema>
+  <xsd:schema xmlns:xsd="http://www.w3.org/2001/XMLSchema" xmlns:xs="http://www.w3.org/2001/XMLSchema" xmlns:dms="http://schemas.microsoft.com/office/2006/documentManagement/types" xmlns:pc="http://schemas.microsoft.com/office/infopath/2007/PartnerControls" targetNamespace="c3a86a5d-5714-4c9c-b50f-c72962407014" elementFormDefault="qualified">
+    <xsd:import namespace="http://schemas.microsoft.com/office/2006/documentManagement/types"/>
+    <xsd:import namespace="http://schemas.microsoft.com/office/infopath/2007/PartnerControls"/>
+    <xsd:element name="TaxCatchAll" ma:index="16" nillable="true" ma:displayName="Taxonomy Catch All Column" ma:hidden="true" ma:list="{68c026a6-449f-48f8-a98c-51a26df328c6}" ma:internalName="TaxCatchAll" ma:showField="CatchAllData" ma:web="c3a86a5d-5714-4c9c-b50f-c72962407014">
+      <xsd:complexType>
+        <xsd:complexContent>
+          <xsd:extension base="dms:MultiChoiceLookup">
+            <xsd:sequence>
+              <xsd:element name="Value" type="dms:Lookup" maxOccurs="unbounded" minOccurs="0" nillable="true"/>
+            </xsd:sequence>
+          </xsd:extension>
+        </xsd:complexContent>
+      </xsd:complexType>
+    </xsd:element>
+  </xsd:schema>
+  <xsd:schema xmlns="http://schemas.openxmlformats.org/package/2006/metadata/core-properties" xmlns:xsd="http://www.w3.org/2001/XMLSchema" xmlns:xsi="http://www.w3.org/2001/XMLSchema-instance" xmlns:dc="http://purl.org/dc/elements/1.1/" xmlns:dcterms="http://purl.org/dc/terms/" xmlns:odoc="http://schemas.microsoft.com/internal/obd" targetNamespace="http://schemas.openxmlformats.org/package/2006/metadata/core-properties" elementFormDefault="qualified" attributeFormDefault="unqualified" blockDefault="#all">
+    <xsd:import namespace="http://purl.org/dc/elements/1.1/" schemaLocation="http://dublincore.org/schemas/xmls/qdc/2003/04/02/dc.xsd"/>
+    <xsd:import namespace="http://purl.org/dc/terms/" schemaLocation="http://dublincore.org/schemas/xmls/qdc/2003/04/02/dcterms.xsd"/>
+    <xsd:element name="coreProperties" type="CT_coreProperties"/>
+    <xsd:complexType name="CT_coreProperties">
+      <xsd:all>
+        <xsd:element ref="dc:creator" minOccurs="0" maxOccurs="1"/>
+        <xsd:element ref="dcterms:created" minOccurs="0" maxOccurs="1"/>
+        <xsd:element ref="dc:identifier" minOccurs="0" maxOccurs="1"/>
+        <xsd:element name="contentType" minOccurs="0" maxOccurs="1" type="xsd:string" ma:index="0" ma:displayName="Inhaltstyp"/>
+        <xsd:element ref="dc:title" minOccurs="0" maxOccurs="1" ma:index="4" ma:displayName="Titel"/>
+        <xsd:element ref="dc:subject" minOccurs="0" maxOccurs="1"/>
+        <xsd:element ref="dc:description" minOccurs="0" maxOccurs="1"/>
+        <xsd:element name="keywords" minOccurs="0" maxOccurs="1" type="xsd:string"/>
+        <xsd:element ref="dc:language" minOccurs="0" maxOccurs="1"/>
+        <xsd:element name="category" minOccurs="0" maxOccurs="1" type="xsd:string"/>
+        <xsd:element name="version" minOccurs="0" maxOccurs="1" type="xsd:string"/>
+        <xsd:element name="revision" minOccurs="0" maxOccurs="1" type="xsd:string">
+          <xsd:annotation>
+            <xsd:documentation>
+                        This value indicates the number of saves or revisions. The application is responsible for updating this value after each revision.
+                    </xsd:documentation>
+          </xsd:annotation>
+        </xsd:element>
+        <xsd:element name="lastModifiedBy" minOccurs="0" maxOccurs="1" type="xsd:string"/>
+        <xsd:element ref="dcterms:modified" minOccurs="0" maxOccurs="1"/>
+        <xsd:element name="contentStatus" minOccurs="0" maxOccurs="1" type="xsd:string"/>
+      </xsd:all>
+    </xsd:complexType>
+  </xsd:schema>
+  <xs:schema xmlns:pc="http://schemas.microsoft.com/office/infopath/2007/PartnerControls" xmlns:xs="http://www.w3.org/2001/XMLSchema" targetNamespace="http://schemas.microsoft.com/office/infopath/2007/PartnerControls" elementFormDefault="qualified" attributeFormDefault="unqualified">
+    <xs:element name="Person">
+      <xs:complexType>
+        <xs:sequence>
+          <xs:element ref="pc:DisplayName" minOccurs="0"/>
+          <xs:element ref="pc:AccountId" minOccurs="0"/>
+          <xs:element ref="pc:AccountType" minOccurs="0"/>
+        </xs:sequence>
+      </xs:complexType>
+    </xs:element>
+    <xs:element name="DisplayName" type="xs:string"/>
+    <xs:element name="AccountId" type="xs:string"/>
+    <xs:element name="AccountType" type="xs:string"/>
+    <xs:element name="BDCAssociatedEntity">
+      <xs:complexType>
+        <xs:sequence>
+          <xs:element ref="pc:BDCEntity" minOccurs="0" maxOccurs="unbounded"/>
+        </xs:sequence>
+        <xs:attribute ref="pc:EntityNamespace"/>
+        <xs:attribute ref="pc:EntityName"/>
+        <xs:attribute ref="pc:SystemInstanceName"/>
+        <xs:attribute ref="pc:AssociationName"/>
+      </xs:complexType>
+    </xs:element>
+    <xs:attribute name="EntityNamespace" type="xs:string"/>
+    <xs:attribute name="EntityName" type="xs:string"/>
+    <xs:attribute name="SystemInstanceName" type="xs:string"/>
+    <xs:attribute name="AssociationName" type="xs:string"/>
+    <xs:element name="BDCEntity">
+      <xs:complexType>
+        <xs:sequence>
+          <xs:element ref="pc:EntityDisplayName" minOccurs="0"/>
+          <xs:element ref="pc:EntityInstanceReference" minOccurs="0"/>
+          <xs:element ref="pc:EntityId1" minOccurs="0"/>
+          <xs:element ref="pc:EntityId2" minOccurs="0"/>
+          <xs:element ref="pc:EntityId3" minOccurs="0"/>
+          <xs:element ref="pc:EntityId4" minOccurs="0"/>
+          <xs:element ref="pc:EntityId5" minOccurs="0"/>
+        </xs:sequence>
+      </xs:complexType>
+    </xs:element>
+    <xs:element name="EntityDisplayName" type="xs:string"/>
+    <xs:element name="EntityInstanceReference" type="xs:string"/>
+    <xs:element name="EntityId1" type="xs:string"/>
+    <xs:element name="EntityId2" type="xs:string"/>
+    <xs:element name="EntityId3" type="xs:string"/>
+    <xs:element name="EntityId4" type="xs:string"/>
+    <xs:element name="EntityId5" type="xs:string"/>
+    <xs:element name="Terms">
+      <xs:complexType>
+        <xs:sequence>
+          <xs:element ref="pc:TermInfo" minOccurs="0" maxOccurs="unbounded"/>
+        </xs:sequence>
+      </xs:complexType>
+    </xs:element>
+    <xs:element name="TermInfo">
+      <xs:complexType>
+        <xs:sequence>
+          <xs:element ref="pc:TermName" minOccurs="0"/>
+          <xs:element ref="pc:TermId" minOccurs="0"/>
+        </xs:sequence>
+      </xs:complexType>
+    </xs:element>
+    <xs:element name="TermName" type="xs:string"/>
+    <xs:element name="TermId" type="xs:string"/>
+  </xs:schema>
+</ct:contentTypeSchema>
+</file>
+
+<file path=customXml/item3.xml><?xml version="1.0" encoding="utf-8"?>
+<p:properties xmlns:p="http://schemas.microsoft.com/office/2006/metadata/properties" xmlns:xsi="http://www.w3.org/2001/XMLSchema-instance" xmlns:pc="http://schemas.microsoft.com/office/infopath/2007/PartnerControls">
+  <documentManagement>
+    <TaxCatchAll xmlns="c3a86a5d-5714-4c9c-b50f-c72962407014" xsi:nil="true"/>
+    <lcf76f155ced4ddcb4097134ff3c332f xmlns="c581cf06-f342-43bb-9c27-eb679bd1fe52">
+      <Terms xmlns="http://schemas.microsoft.com/office/infopath/2007/PartnerControls"/>
+    </lcf76f155ced4ddcb4097134ff3c332f>
+  </documentManagement>
+</p:properties>
+</file>
+
+<file path=customXml/itemProps1.xml><?xml version="1.0" encoding="utf-8"?>
+<ds:datastoreItem xmlns:ds="http://schemas.openxmlformats.org/officeDocument/2006/customXml" ds:itemID="{19219E33-B68F-48F4-B88D-D6FCBFCD0B05}">
+  <ds:schemaRefs>
+    <ds:schemaRef ds:uri="http://schemas.microsoft.com/sharepoint/v3/contenttype/forms"/>
+  </ds:schemaRefs>
+</ds:datastoreItem>
+</file>
+
+<file path=customXml/itemProps2.xml><?xml version="1.0" encoding="utf-8"?>
+<ds:datastoreItem xmlns:ds="http://schemas.openxmlformats.org/officeDocument/2006/customXml" ds:itemID="{0DEE7492-68DF-4669-833A-A8185D177400}">
+  <ds:schemaRefs>
+    <ds:schemaRef ds:uri="http://schemas.microsoft.com/office/2006/metadata/contentType"/>
+    <ds:schemaRef ds:uri="http://schemas.microsoft.com/office/2006/metadata/properties/metaAttributes"/>
+    <ds:schemaRef ds:uri="http://www.w3.org/2001/XMLSchema"/>
+    <ds:schemaRef ds:uri="http://schemas.microsoft.com/office/2006/metadata/properties"/>
+    <ds:schemaRef ds:uri="c581cf06-f342-43bb-9c27-eb679bd1fe52"/>
+    <ds:schemaRef ds:uri="c3a86a5d-5714-4c9c-b50f-c72962407014"/>
+    <ds:schemaRef ds:uri="http://schemas.microsoft.com/office/2006/documentManagement/types"/>
+    <ds:schemaRef ds:uri="http://schemas.microsoft.com/office/infopath/2007/PartnerControls"/>
+    <ds:schemaRef ds:uri="http://schemas.openxmlformats.org/package/2006/metadata/core-properties"/>
+    <ds:schemaRef ds:uri="http://purl.org/dc/elements/1.1/"/>
+    <ds:schemaRef ds:uri="http://purl.org/dc/terms/"/>
+    <ds:schemaRef ds:uri="http://schemas.microsoft.com/internal/obd"/>
+  </ds:schemaRefs>
+</ds:datastoreItem>
+</file>
+
+<file path=customXml/itemProps3.xml><?xml version="1.0" encoding="utf-8"?>
+<ds:datastoreItem xmlns:ds="http://schemas.openxmlformats.org/officeDocument/2006/customXml" ds:itemID="{60252B27-8475-41DD-94D0-7CFA7F817E6D}">
+  <ds:schemaRefs>
+    <ds:schemaRef ds:uri="http://schemas.microsoft.com/office/2006/metadata/properties"/>
+    <ds:schemaRef ds:uri="http://schemas.microsoft.com/office/infopath/2007/PartnerControls"/>
+    <ds:schemaRef ds:uri="c3a86a5d-5714-4c9c-b50f-c72962407014"/>
+    <ds:schemaRef ds:uri="c581cf06-f342-43bb-9c27-eb679bd1fe52"/>
+  </ds:schemaRefs>
+</ds:datastoreItem>
 </file>
--- a/Presentation/presentation.pptx
+++ b/Presentation/presentation.pptx
@@ -5,17 +5,19 @@
     <p:sldMasterId id="2147483648" r:id="rId4"/>
   </p:sldMasterIdLst>
   <p:notesMasterIdLst>
-    <p:notesMasterId r:id="rId13"/>
+    <p:notesMasterId r:id="rId15"/>
   </p:notesMasterIdLst>
   <p:sldIdLst>
     <p:sldId id="256" r:id="rId5"/>
     <p:sldId id="257" r:id="rId6"/>
     <p:sldId id="258" r:id="rId7"/>
     <p:sldId id="259" r:id="rId8"/>
-    <p:sldId id="261" r:id="rId9"/>
-    <p:sldId id="262" r:id="rId10"/>
-    <p:sldId id="263" r:id="rId11"/>
-    <p:sldId id="260" r:id="rId12"/>
+    <p:sldId id="264" r:id="rId9"/>
+    <p:sldId id="261" r:id="rId10"/>
+    <p:sldId id="266" r:id="rId11"/>
+    <p:sldId id="262" r:id="rId12"/>
+    <p:sldId id="265" r:id="rId13"/>
+    <p:sldId id="260" r:id="rId14"/>
   </p:sldIdLst>
   <p:sldSz cx="9144000" cy="5143500" type="screen16x9"/>
   <p:notesSz cx="5143500" cy="9144000"/>
@@ -120,7 +122,9 @@
 <file path=ppt/revisionInfo.xml><?xml version="1.0" encoding="utf-8"?>
 <p1510:revInfo xmlns:a="http://schemas.openxmlformats.org/drawingml/2006/main" xmlns:r="http://schemas.openxmlformats.org/officeDocument/2006/relationships" xmlns:p1510="http://schemas.microsoft.com/office/powerpoint/2015/10/main">
   <p1510:revLst>
-    <p1510:client id="{CAC2E89F-893E-4422-3D80-EC24371BBDEE}" v="715" dt="2026-04-01T21:00:46.362"/>
+    <p1510:client id="{3E51235F-0D18-9D4B-BDF2-AE9EDF9697A2}" v="16" dt="2026-04-02T07:51:16.745"/>
+    <p1510:client id="{CAC2E89F-893E-4422-3D80-EC24371BBDEE}" v="846" dt="2026-04-02T07:02:32.283"/>
+    <p1510:client id="{D5A897CB-B744-4218-89D4-120ED8D789EB}" v="400" dt="2026-04-02T07:57:34.753"/>
     <p1510:client id="{F1A4819E-55D9-4223-A6F2-1D6D816F0F24}" v="374" dt="2026-04-01T20:26:36.696"/>
   </p1510:revLst>
 </p1510:revInfo>
@@ -728,6 +732,171 @@
 </p:notes>
 </file>
 
+<file path=ppt/notesSlides/notesSlide10.xml><?xml version="1.0" encoding="utf-8"?>
+<p:notes xmlns:a="http://schemas.openxmlformats.org/drawingml/2006/main" xmlns:r="http://schemas.openxmlformats.org/officeDocument/2006/relationships" xmlns:p="http://schemas.openxmlformats.org/presentationml/2006/main">
+  <p:cSld>
+    <p:spTree>
+      <p:nvGrpSpPr>
+        <p:cNvPr id="1" name=""/>
+        <p:cNvGrpSpPr/>
+        <p:nvPr/>
+      </p:nvGrpSpPr>
+      <p:grpSpPr>
+        <a:xfrm>
+          <a:off x="0" y="0"/>
+          <a:ext cx="0" cy="0"/>
+          <a:chOff x="0" y="0"/>
+          <a:chExt cx="0" cy="0"/>
+        </a:xfrm>
+      </p:grpSpPr>
+      <p:sp>
+        <p:nvSpPr>
+          <p:cNvPr id="50" name="PlaceHolder 1"/>
+          <p:cNvSpPr>
+            <a:spLocks noGrp="1" noRot="1" noChangeAspect="1"/>
+          </p:cNvSpPr>
+          <p:nvPr>
+            <p:ph type="sldImg"/>
+          </p:nvPr>
+        </p:nvSpPr>
+        <p:spPr>
+          <a:xfrm>
+            <a:off x="685800" y="1143000"/>
+            <a:ext cx="5486400" cy="3086100"/>
+          </a:xfrm>
+          <a:prstGeom prst="rect">
+            <a:avLst/>
+          </a:prstGeom>
+          <a:ln w="0">
+            <a:noFill/>
+          </a:ln>
+        </p:spPr>
+      </p:sp>
+      <p:sp>
+        <p:nvSpPr>
+          <p:cNvPr id="51" name="PlaceHolder 2"/>
+          <p:cNvSpPr>
+            <a:spLocks noGrp="1"/>
+          </p:cNvSpPr>
+          <p:nvPr>
+            <p:ph type="body"/>
+          </p:nvPr>
+        </p:nvSpPr>
+        <p:spPr>
+          <a:xfrm>
+            <a:off x="685800" y="4400640"/>
+            <a:ext cx="5486040" cy="3600000"/>
+          </a:xfrm>
+          <a:prstGeom prst="rect">
+            <a:avLst/>
+          </a:prstGeom>
+          <a:noFill/>
+          <a:ln w="0">
+            <a:noFill/>
+          </a:ln>
+        </p:spPr>
+        <p:txBody>
+          <a:bodyPr lIns="91440" tIns="45720" rIns="91440" bIns="45720" anchor="t">
+            <a:noAutofit/>
+          </a:bodyPr>
+          <a:lstStyle/>
+          <a:p>
+            <a:pPr indent="0">
+              <a:buNone/>
+            </a:pPr>
+            <a:endParaRPr lang="en-GB" sz="1800" b="0" u="none" strike="noStrike">
+              <a:solidFill>
+                <a:srgbClr val="000000"/>
+              </a:solidFill>
+              <a:effectLst/>
+              <a:uFillTx/>
+              <a:latin typeface="Arial"/>
+            </a:endParaRPr>
+          </a:p>
+        </p:txBody>
+      </p:sp>
+      <p:sp>
+        <p:nvSpPr>
+          <p:cNvPr id="52" name="PlaceHolder 3"/>
+          <p:cNvSpPr>
+            <a:spLocks noGrp="1"/>
+          </p:cNvSpPr>
+          <p:nvPr>
+            <p:ph type="sldNum" idx="8"/>
+          </p:nvPr>
+        </p:nvSpPr>
+        <p:spPr>
+          <a:xfrm>
+            <a:off x="3884760" y="8685360"/>
+            <a:ext cx="2971440" cy="458280"/>
+          </a:xfrm>
+          <a:prstGeom prst="rect">
+            <a:avLst/>
+          </a:prstGeom>
+          <a:noFill/>
+          <a:ln w="0">
+            <a:noFill/>
+          </a:ln>
+        </p:spPr>
+        <p:txBody>
+          <a:bodyPr lIns="91440" tIns="45720" rIns="91440" bIns="45720" anchor="b">
+            <a:noAutofit/>
+          </a:bodyPr>
+          <a:lstStyle>
+            <a:lvl1pPr indent="0" algn="r" defTabSz="914400">
+              <a:lnSpc>
+                <a:spcPct val="100000"/>
+              </a:lnSpc>
+              <a:buNone/>
+              <a:defRPr lang="en-US" sz="1200" b="0" u="none" strike="noStrike">
+                <a:solidFill>
+                  <a:schemeClr val="dk1"/>
+                </a:solidFill>
+                <a:effectLst/>
+                <a:uFillTx/>
+                <a:latin typeface="+mn-lt"/>
+                <a:ea typeface="+mn-ea"/>
+              </a:defRPr>
+            </a:lvl1pPr>
+          </a:lstStyle>
+          <a:p>
+            <a:pPr indent="0" algn="r" defTabSz="914400">
+              <a:lnSpc>
+                <a:spcPct val="100000"/>
+              </a:lnSpc>
+              <a:buNone/>
+            </a:pPr>
+            <a:fld id="{1A5C25F5-003D-4B3C-9571-C8DFCAC02A87}" type="slidenum">
+              <a:rPr lang="en-US" sz="1200" b="0" u="none" strike="noStrike">
+                <a:solidFill>
+                  <a:schemeClr val="dk1"/>
+                </a:solidFill>
+                <a:effectLst/>
+                <a:uFillTx/>
+                <a:latin typeface="+mn-lt"/>
+                <a:ea typeface="+mn-ea"/>
+              </a:rPr>
+              <a:t>10</a:t>
+            </a:fld>
+            <a:endParaRPr lang="en-GB" sz="1200" b="0" u="none" strike="noStrike">
+              <a:solidFill>
+                <a:srgbClr val="000000"/>
+              </a:solidFill>
+              <a:effectLst/>
+              <a:uFillTx/>
+              <a:latin typeface="Times New Roman"/>
+            </a:endParaRPr>
+          </a:p>
+        </p:txBody>
+      </p:sp>
+    </p:spTree>
+  </p:cSld>
+  <p:clrMapOvr>
+    <a:masterClrMapping/>
+  </p:clrMapOvr>
+</p:notes>
+</file>
+
 <file path=ppt/notesSlides/notesSlide2.xml><?xml version="1.0" encoding="utf-8"?>
 <p:notes xmlns:a="http://schemas.openxmlformats.org/drawingml/2006/main" xmlns:r="http://schemas.openxmlformats.org/officeDocument/2006/relationships" xmlns:p="http://schemas.openxmlformats.org/presentationml/2006/main">
   <p:cSld>
@@ -1231,6 +1400,200 @@
         <p:cNvPr id="1" name="">
           <a:extLst>
             <a:ext uri="{FF2B5EF4-FFF2-40B4-BE49-F238E27FC236}">
+              <a16:creationId xmlns:a16="http://schemas.microsoft.com/office/drawing/2014/main" id="{B2C8C2CB-1CB8-7DB9-7A9D-BB68954000DB}"/>
+            </a:ext>
+          </a:extLst>
+        </p:cNvPr>
+        <p:cNvGrpSpPr/>
+        <p:nvPr/>
+      </p:nvGrpSpPr>
+      <p:grpSpPr>
+        <a:xfrm>
+          <a:off x="0" y="0"/>
+          <a:ext cx="0" cy="0"/>
+          <a:chOff x="0" y="0"/>
+          <a:chExt cx="0" cy="0"/>
+        </a:xfrm>
+      </p:grpSpPr>
+      <p:sp>
+        <p:nvSpPr>
+          <p:cNvPr id="47" name="PlaceHolder 1">
+            <a:extLst>
+              <a:ext uri="{FF2B5EF4-FFF2-40B4-BE49-F238E27FC236}">
+                <a16:creationId xmlns:a16="http://schemas.microsoft.com/office/drawing/2014/main" id="{F60980BA-31C6-68AF-CC66-C2EEFF2D43F6}"/>
+              </a:ext>
+            </a:extLst>
+          </p:cNvPr>
+          <p:cNvSpPr>
+            <a:spLocks noGrp="1" noRot="1" noChangeAspect="1"/>
+          </p:cNvSpPr>
+          <p:nvPr>
+            <p:ph type="sldImg"/>
+          </p:nvPr>
+        </p:nvSpPr>
+        <p:spPr>
+          <a:xfrm>
+            <a:off x="685800" y="1143000"/>
+            <a:ext cx="5486400" cy="3086100"/>
+          </a:xfrm>
+          <a:prstGeom prst="rect">
+            <a:avLst/>
+          </a:prstGeom>
+          <a:ln w="0">
+            <a:noFill/>
+          </a:ln>
+        </p:spPr>
+      </p:sp>
+      <p:sp>
+        <p:nvSpPr>
+          <p:cNvPr id="48" name="PlaceHolder 2">
+            <a:extLst>
+              <a:ext uri="{FF2B5EF4-FFF2-40B4-BE49-F238E27FC236}">
+                <a16:creationId xmlns:a16="http://schemas.microsoft.com/office/drawing/2014/main" id="{E7E6A32A-D403-6B18-05D6-63D4816867BC}"/>
+              </a:ext>
+            </a:extLst>
+          </p:cNvPr>
+          <p:cNvSpPr>
+            <a:spLocks noGrp="1"/>
+          </p:cNvSpPr>
+          <p:nvPr>
+            <p:ph type="body"/>
+          </p:nvPr>
+        </p:nvSpPr>
+        <p:spPr>
+          <a:xfrm>
+            <a:off x="685800" y="4400640"/>
+            <a:ext cx="5486040" cy="3600000"/>
+          </a:xfrm>
+          <a:prstGeom prst="rect">
+            <a:avLst/>
+          </a:prstGeom>
+          <a:noFill/>
+          <a:ln w="0">
+            <a:noFill/>
+          </a:ln>
+        </p:spPr>
+        <p:txBody>
+          <a:bodyPr lIns="91440" tIns="45720" rIns="91440" bIns="45720" anchor="t">
+            <a:noAutofit/>
+          </a:bodyPr>
+          <a:lstStyle/>
+          <a:p>
+            <a:pPr indent="0">
+              <a:buNone/>
+            </a:pPr>
+            <a:endParaRPr lang="en-GB" sz="1800" b="0" u="none" strike="noStrike">
+              <a:solidFill>
+                <a:srgbClr val="000000"/>
+              </a:solidFill>
+              <a:effectLst/>
+              <a:uFillTx/>
+              <a:latin typeface="Arial"/>
+            </a:endParaRPr>
+          </a:p>
+        </p:txBody>
+      </p:sp>
+      <p:sp>
+        <p:nvSpPr>
+          <p:cNvPr id="49" name="PlaceHolder 3">
+            <a:extLst>
+              <a:ext uri="{FF2B5EF4-FFF2-40B4-BE49-F238E27FC236}">
+                <a16:creationId xmlns:a16="http://schemas.microsoft.com/office/drawing/2014/main" id="{B7D41FEA-A367-07F2-E26C-3FD9418647D8}"/>
+              </a:ext>
+            </a:extLst>
+          </p:cNvPr>
+          <p:cNvSpPr>
+            <a:spLocks noGrp="1"/>
+          </p:cNvSpPr>
+          <p:nvPr>
+            <p:ph type="sldNum" idx="7"/>
+          </p:nvPr>
+        </p:nvSpPr>
+        <p:spPr>
+          <a:xfrm>
+            <a:off x="3884760" y="8685360"/>
+            <a:ext cx="2971440" cy="458280"/>
+          </a:xfrm>
+          <a:prstGeom prst="rect">
+            <a:avLst/>
+          </a:prstGeom>
+          <a:noFill/>
+          <a:ln w="0">
+            <a:noFill/>
+          </a:ln>
+        </p:spPr>
+        <p:txBody>
+          <a:bodyPr lIns="91440" tIns="45720" rIns="91440" bIns="45720" anchor="b">
+            <a:noAutofit/>
+          </a:bodyPr>
+          <a:lstStyle>
+            <a:lvl1pPr indent="0" algn="r" defTabSz="914400">
+              <a:lnSpc>
+                <a:spcPct val="100000"/>
+              </a:lnSpc>
+              <a:buNone/>
+              <a:defRPr lang="en-US" sz="1200" b="0" u="none" strike="noStrike">
+                <a:solidFill>
+                  <a:schemeClr val="dk1"/>
+                </a:solidFill>
+                <a:effectLst/>
+                <a:uFillTx/>
+                <a:latin typeface="+mn-lt"/>
+                <a:ea typeface="+mn-ea"/>
+              </a:defRPr>
+            </a:lvl1pPr>
+          </a:lstStyle>
+          <a:p>
+            <a:pPr indent="0" algn="r" defTabSz="914400">
+              <a:lnSpc>
+                <a:spcPct val="100000"/>
+              </a:lnSpc>
+              <a:buNone/>
+            </a:pPr>
+            <a:fld id="{28D0F303-DBF3-46D2-9F7D-1C4CC5CDB2CF}" type="slidenum">
+              <a:rPr lang="en-US" sz="1200" b="0" u="none" strike="noStrike">
+                <a:solidFill>
+                  <a:schemeClr val="dk1"/>
+                </a:solidFill>
+                <a:effectLst/>
+                <a:uFillTx/>
+                <a:latin typeface="+mn-lt"/>
+                <a:ea typeface="+mn-ea"/>
+              </a:rPr>
+              <a:t>5</a:t>
+            </a:fld>
+            <a:endParaRPr lang="en-GB" sz="1200" b="0" u="none" strike="noStrike">
+              <a:solidFill>
+                <a:srgbClr val="000000"/>
+              </a:solidFill>
+              <a:effectLst/>
+              <a:uFillTx/>
+              <a:latin typeface="Times New Roman"/>
+            </a:endParaRPr>
+          </a:p>
+        </p:txBody>
+      </p:sp>
+    </p:spTree>
+    <p:extLst>
+      <p:ext uri="{BB962C8B-B14F-4D97-AF65-F5344CB8AC3E}">
+        <p14:creationId xmlns:p14="http://schemas.microsoft.com/office/powerpoint/2010/main" val="680893641"/>
+      </p:ext>
+    </p:extLst>
+  </p:cSld>
+  <p:clrMapOvr>
+    <a:masterClrMapping/>
+  </p:clrMapOvr>
+</p:notes>
+</file>
+
+<file path=ppt/notesSlides/notesSlide6.xml><?xml version="1.0" encoding="utf-8"?>
+<p:notes xmlns:a="http://schemas.openxmlformats.org/drawingml/2006/main" xmlns:r="http://schemas.openxmlformats.org/officeDocument/2006/relationships" xmlns:p="http://schemas.openxmlformats.org/presentationml/2006/main">
+  <p:cSld>
+    <p:spTree>
+      <p:nvGrpSpPr>
+        <p:cNvPr id="1" name="">
+          <a:extLst>
+            <a:ext uri="{FF2B5EF4-FFF2-40B4-BE49-F238E27FC236}">
               <a16:creationId xmlns:a16="http://schemas.microsoft.com/office/drawing/2014/main" id="{01301B85-2D75-B6C4-1513-AB9641901958}"/>
             </a:ext>
           </a:extLst>
@@ -1391,7 +1754,7 @@
                 <a:latin typeface="+mn-lt"/>
                 <a:ea typeface="+mn-ea"/>
               </a:rPr>
-              <a:t>5</a:t>
+              <a:t>6</a:t>
             </a:fld>
             <a:endParaRPr lang="en-GB" sz="1200" b="0" u="none" strike="noStrike">
               <a:solidFill>
@@ -1417,7 +1780,201 @@
 </p:notes>
 </file>
 
-<file path=ppt/notesSlides/notesSlide6.xml><?xml version="1.0" encoding="utf-8"?>
+<file path=ppt/notesSlides/notesSlide7.xml><?xml version="1.0" encoding="utf-8"?>
+<p:notes xmlns:a="http://schemas.openxmlformats.org/drawingml/2006/main" xmlns:r="http://schemas.openxmlformats.org/officeDocument/2006/relationships" xmlns:p="http://schemas.openxmlformats.org/presentationml/2006/main">
+  <p:cSld>
+    <p:spTree>
+      <p:nvGrpSpPr>
+        <p:cNvPr id="1" name="">
+          <a:extLst>
+            <a:ext uri="{FF2B5EF4-FFF2-40B4-BE49-F238E27FC236}">
+              <a16:creationId xmlns:a16="http://schemas.microsoft.com/office/drawing/2014/main" id="{DC4E3083-D342-9069-B676-DA73D07E183B}"/>
+            </a:ext>
+          </a:extLst>
+        </p:cNvPr>
+        <p:cNvGrpSpPr/>
+        <p:nvPr/>
+      </p:nvGrpSpPr>
+      <p:grpSpPr>
+        <a:xfrm>
+          <a:off x="0" y="0"/>
+          <a:ext cx="0" cy="0"/>
+          <a:chOff x="0" y="0"/>
+          <a:chExt cx="0" cy="0"/>
+        </a:xfrm>
+      </p:grpSpPr>
+      <p:sp>
+        <p:nvSpPr>
+          <p:cNvPr id="47" name="PlaceHolder 1">
+            <a:extLst>
+              <a:ext uri="{FF2B5EF4-FFF2-40B4-BE49-F238E27FC236}">
+                <a16:creationId xmlns:a16="http://schemas.microsoft.com/office/drawing/2014/main" id="{4CE0ED05-9292-15F7-BEB8-65BA355C08AA}"/>
+              </a:ext>
+            </a:extLst>
+          </p:cNvPr>
+          <p:cNvSpPr>
+            <a:spLocks noGrp="1" noRot="1" noChangeAspect="1"/>
+          </p:cNvSpPr>
+          <p:nvPr>
+            <p:ph type="sldImg"/>
+          </p:nvPr>
+        </p:nvSpPr>
+        <p:spPr>
+          <a:xfrm>
+            <a:off x="685800" y="1143000"/>
+            <a:ext cx="5486400" cy="3086100"/>
+          </a:xfrm>
+          <a:prstGeom prst="rect">
+            <a:avLst/>
+          </a:prstGeom>
+          <a:ln w="0">
+            <a:noFill/>
+          </a:ln>
+        </p:spPr>
+      </p:sp>
+      <p:sp>
+        <p:nvSpPr>
+          <p:cNvPr id="48" name="PlaceHolder 2">
+            <a:extLst>
+              <a:ext uri="{FF2B5EF4-FFF2-40B4-BE49-F238E27FC236}">
+                <a16:creationId xmlns:a16="http://schemas.microsoft.com/office/drawing/2014/main" id="{33062904-8223-B571-269D-D55F2B83C6AD}"/>
+              </a:ext>
+            </a:extLst>
+          </p:cNvPr>
+          <p:cNvSpPr>
+            <a:spLocks noGrp="1"/>
+          </p:cNvSpPr>
+          <p:nvPr>
+            <p:ph type="body"/>
+          </p:nvPr>
+        </p:nvSpPr>
+        <p:spPr>
+          <a:xfrm>
+            <a:off x="685800" y="4400640"/>
+            <a:ext cx="5486040" cy="3600000"/>
+          </a:xfrm>
+          <a:prstGeom prst="rect">
+            <a:avLst/>
+          </a:prstGeom>
+          <a:noFill/>
+          <a:ln w="0">
+            <a:noFill/>
+          </a:ln>
+        </p:spPr>
+        <p:txBody>
+          <a:bodyPr lIns="91440" tIns="45720" rIns="91440" bIns="45720" anchor="t">
+            <a:noAutofit/>
+          </a:bodyPr>
+          <a:lstStyle/>
+          <a:p>
+            <a:pPr indent="0">
+              <a:buNone/>
+            </a:pPr>
+            <a:endParaRPr lang="en-GB" sz="1800" b="0" u="none" strike="noStrike">
+              <a:solidFill>
+                <a:srgbClr val="000000"/>
+              </a:solidFill>
+              <a:effectLst/>
+              <a:uFillTx/>
+              <a:latin typeface="Arial"/>
+            </a:endParaRPr>
+          </a:p>
+        </p:txBody>
+      </p:sp>
+      <p:sp>
+        <p:nvSpPr>
+          <p:cNvPr id="49" name="PlaceHolder 3">
+            <a:extLst>
+              <a:ext uri="{FF2B5EF4-FFF2-40B4-BE49-F238E27FC236}">
+                <a16:creationId xmlns:a16="http://schemas.microsoft.com/office/drawing/2014/main" id="{7C67CD51-1F40-2AF7-F642-F6853F55AFD2}"/>
+              </a:ext>
+            </a:extLst>
+          </p:cNvPr>
+          <p:cNvSpPr>
+            <a:spLocks noGrp="1"/>
+          </p:cNvSpPr>
+          <p:nvPr>
+            <p:ph type="sldNum" idx="7"/>
+          </p:nvPr>
+        </p:nvSpPr>
+        <p:spPr>
+          <a:xfrm>
+            <a:off x="3884760" y="8685360"/>
+            <a:ext cx="2971440" cy="458280"/>
+          </a:xfrm>
+          <a:prstGeom prst="rect">
+            <a:avLst/>
+          </a:prstGeom>
+          <a:noFill/>
+          <a:ln w="0">
+            <a:noFill/>
+          </a:ln>
+        </p:spPr>
+        <p:txBody>
+          <a:bodyPr lIns="91440" tIns="45720" rIns="91440" bIns="45720" anchor="b">
+            <a:noAutofit/>
+          </a:bodyPr>
+          <a:lstStyle>
+            <a:lvl1pPr indent="0" algn="r" defTabSz="914400">
+              <a:lnSpc>
+                <a:spcPct val="100000"/>
+              </a:lnSpc>
+              <a:buNone/>
+              <a:defRPr lang="en-US" sz="1200" b="0" u="none" strike="noStrike">
+                <a:solidFill>
+                  <a:schemeClr val="dk1"/>
+                </a:solidFill>
+                <a:effectLst/>
+                <a:uFillTx/>
+                <a:latin typeface="+mn-lt"/>
+                <a:ea typeface="+mn-ea"/>
+              </a:defRPr>
+            </a:lvl1pPr>
+          </a:lstStyle>
+          <a:p>
+            <a:pPr indent="0" algn="r" defTabSz="914400">
+              <a:lnSpc>
+                <a:spcPct val="100000"/>
+              </a:lnSpc>
+              <a:buNone/>
+            </a:pPr>
+            <a:fld id="{28D0F303-DBF3-46D2-9F7D-1C4CC5CDB2CF}" type="slidenum">
+              <a:rPr lang="en-US" sz="1200" b="0" u="none" strike="noStrike">
+                <a:solidFill>
+                  <a:schemeClr val="dk1"/>
+                </a:solidFill>
+                <a:effectLst/>
+                <a:uFillTx/>
+                <a:latin typeface="+mn-lt"/>
+                <a:ea typeface="+mn-ea"/>
+              </a:rPr>
+              <a:t>7</a:t>
+            </a:fld>
+            <a:endParaRPr lang="en-GB" sz="1200" b="0" u="none" strike="noStrike">
+              <a:solidFill>
+                <a:srgbClr val="000000"/>
+              </a:solidFill>
+              <a:effectLst/>
+              <a:uFillTx/>
+              <a:latin typeface="Times New Roman"/>
+            </a:endParaRPr>
+          </a:p>
+        </p:txBody>
+      </p:sp>
+    </p:spTree>
+    <p:extLst>
+      <p:ext uri="{BB962C8B-B14F-4D97-AF65-F5344CB8AC3E}">
+        <p14:creationId xmlns:p14="http://schemas.microsoft.com/office/powerpoint/2010/main" val="322506911"/>
+      </p:ext>
+    </p:extLst>
+  </p:cSld>
+  <p:clrMapOvr>
+    <a:masterClrMapping/>
+  </p:clrMapOvr>
+</p:notes>
+</file>
+
+<file path=ppt/notesSlides/notesSlide8.xml><?xml version="1.0" encoding="utf-8"?>
 <p:notes xmlns:a="http://schemas.openxmlformats.org/drawingml/2006/main" xmlns:r="http://schemas.openxmlformats.org/officeDocument/2006/relationships" xmlns:p="http://schemas.openxmlformats.org/presentationml/2006/main">
   <p:cSld>
     <p:spTree>
@@ -1585,7 +2142,7 @@
                 <a:latin typeface="+mn-lt"/>
                 <a:ea typeface="+mn-ea"/>
               </a:rPr>
-              <a:t>6</a:t>
+              <a:t>8</a:t>
             </a:fld>
             <a:endParaRPr lang="en-GB" sz="1200" b="0" u="none" strike="noStrike">
               <a:solidFill>
@@ -1611,7 +2168,7 @@
 </p:notes>
 </file>
 
-<file path=ppt/notesSlides/notesSlide7.xml><?xml version="1.0" encoding="utf-8"?>
+<file path=ppt/notesSlides/notesSlide9.xml><?xml version="1.0" encoding="utf-8"?>
 <p:notes xmlns:a="http://schemas.openxmlformats.org/drawingml/2006/main" xmlns:r="http://schemas.openxmlformats.org/officeDocument/2006/relationships" xmlns:p="http://schemas.openxmlformats.org/presentationml/2006/main">
   <p:cSld>
     <p:spTree>
@@ -1619,7 +2176,7 @@
         <p:cNvPr id="1" name="">
           <a:extLst>
             <a:ext uri="{FF2B5EF4-FFF2-40B4-BE49-F238E27FC236}">
-              <a16:creationId xmlns:a16="http://schemas.microsoft.com/office/drawing/2014/main" id="{E491A88A-41F3-6D10-4178-BF82EDC5F482}"/>
+              <a16:creationId xmlns:a16="http://schemas.microsoft.com/office/drawing/2014/main" id="{AB09CFE6-9870-4A12-2BE1-4EB41FCF4C45}"/>
             </a:ext>
           </a:extLst>
         </p:cNvPr>
@@ -1639,7 +2196,7 @@
           <p:cNvPr id="47" name="PlaceHolder 1">
             <a:extLst>
               <a:ext uri="{FF2B5EF4-FFF2-40B4-BE49-F238E27FC236}">
-                <a16:creationId xmlns:a16="http://schemas.microsoft.com/office/drawing/2014/main" id="{00EFB5BE-9528-AA2F-94DE-8873A21E1ECB}"/>
+                <a16:creationId xmlns:a16="http://schemas.microsoft.com/office/drawing/2014/main" id="{F9DB7DD6-796E-5C07-4A64-B796C526863B}"/>
               </a:ext>
             </a:extLst>
           </p:cNvPr>
@@ -1668,7 +2225,7 @@
           <p:cNvPr id="48" name="PlaceHolder 2">
             <a:extLst>
               <a:ext uri="{FF2B5EF4-FFF2-40B4-BE49-F238E27FC236}">
-                <a16:creationId xmlns:a16="http://schemas.microsoft.com/office/drawing/2014/main" id="{882F6AA0-7E9C-930F-03EA-C24FDC7C2F84}"/>
+                <a16:creationId xmlns:a16="http://schemas.microsoft.com/office/drawing/2014/main" id="{9C906189-BE6D-BF04-CBFC-B45CB9801A92}"/>
               </a:ext>
             </a:extLst>
           </p:cNvPr>
@@ -1717,7 +2274,7 @@
           <p:cNvPr id="49" name="PlaceHolder 3">
             <a:extLst>
               <a:ext uri="{FF2B5EF4-FFF2-40B4-BE49-F238E27FC236}">
-                <a16:creationId xmlns:a16="http://schemas.microsoft.com/office/drawing/2014/main" id="{2E119531-952A-9FB9-4B31-1759DFF92B8D}"/>
+                <a16:creationId xmlns:a16="http://schemas.microsoft.com/office/drawing/2014/main" id="{5C55F04C-5624-D54C-9353-22ECCC21F12B}"/>
               </a:ext>
             </a:extLst>
           </p:cNvPr>
@@ -1779,7 +2336,7 @@
                 <a:latin typeface="+mn-lt"/>
                 <a:ea typeface="+mn-ea"/>
               </a:rPr>
-              <a:t>7</a:t>
+              <a:t>9</a:t>
             </a:fld>
             <a:endParaRPr lang="en-GB" sz="1200" b="0" u="none" strike="noStrike">
               <a:solidFill>
@@ -1795,174 +2352,9 @@
     </p:spTree>
     <p:extLst>
       <p:ext uri="{BB962C8B-B14F-4D97-AF65-F5344CB8AC3E}">
-        <p14:creationId xmlns:p14="http://schemas.microsoft.com/office/powerpoint/2010/main" val="2490925917"/>
+        <p14:creationId xmlns:p14="http://schemas.microsoft.com/office/powerpoint/2010/main" val="3036312900"/>
       </p:ext>
     </p:extLst>
-  </p:cSld>
-  <p:clrMapOvr>
-    <a:masterClrMapping/>
-  </p:clrMapOvr>
-</p:notes>
-</file>
-
-<file path=ppt/notesSlides/notesSlide8.xml><?xml version="1.0" encoding="utf-8"?>
-<p:notes xmlns:a="http://schemas.openxmlformats.org/drawingml/2006/main" xmlns:r="http://schemas.openxmlformats.org/officeDocument/2006/relationships" xmlns:p="http://schemas.openxmlformats.org/presentationml/2006/main">
-  <p:cSld>
-    <p:spTree>
-      <p:nvGrpSpPr>
-        <p:cNvPr id="1" name=""/>
-        <p:cNvGrpSpPr/>
-        <p:nvPr/>
-      </p:nvGrpSpPr>
-      <p:grpSpPr>
-        <a:xfrm>
-          <a:off x="0" y="0"/>
-          <a:ext cx="0" cy="0"/>
-          <a:chOff x="0" y="0"/>
-          <a:chExt cx="0" cy="0"/>
-        </a:xfrm>
-      </p:grpSpPr>
-      <p:sp>
-        <p:nvSpPr>
-          <p:cNvPr id="50" name="PlaceHolder 1"/>
-          <p:cNvSpPr>
-            <a:spLocks noGrp="1" noRot="1" noChangeAspect="1"/>
-          </p:cNvSpPr>
-          <p:nvPr>
-            <p:ph type="sldImg"/>
-          </p:nvPr>
-        </p:nvSpPr>
-        <p:spPr>
-          <a:xfrm>
-            <a:off x="685800" y="1143000"/>
-            <a:ext cx="5486400" cy="3086100"/>
-          </a:xfrm>
-          <a:prstGeom prst="rect">
-            <a:avLst/>
-          </a:prstGeom>
-          <a:ln w="0">
-            <a:noFill/>
-          </a:ln>
-        </p:spPr>
-      </p:sp>
-      <p:sp>
-        <p:nvSpPr>
-          <p:cNvPr id="51" name="PlaceHolder 2"/>
-          <p:cNvSpPr>
-            <a:spLocks noGrp="1"/>
-          </p:cNvSpPr>
-          <p:nvPr>
-            <p:ph type="body"/>
-          </p:nvPr>
-        </p:nvSpPr>
-        <p:spPr>
-          <a:xfrm>
-            <a:off x="685800" y="4400640"/>
-            <a:ext cx="5486040" cy="3600000"/>
-          </a:xfrm>
-          <a:prstGeom prst="rect">
-            <a:avLst/>
-          </a:prstGeom>
-          <a:noFill/>
-          <a:ln w="0">
-            <a:noFill/>
-          </a:ln>
-        </p:spPr>
-        <p:txBody>
-          <a:bodyPr lIns="91440" tIns="45720" rIns="91440" bIns="45720" anchor="t">
-            <a:noAutofit/>
-          </a:bodyPr>
-          <a:lstStyle/>
-          <a:p>
-            <a:pPr indent="0">
-              <a:buNone/>
-            </a:pPr>
-            <a:endParaRPr lang="en-GB" sz="1800" b="0" u="none" strike="noStrike">
-              <a:solidFill>
-                <a:srgbClr val="000000"/>
-              </a:solidFill>
-              <a:effectLst/>
-              <a:uFillTx/>
-              <a:latin typeface="Arial"/>
-            </a:endParaRPr>
-          </a:p>
-        </p:txBody>
-      </p:sp>
-      <p:sp>
-        <p:nvSpPr>
-          <p:cNvPr id="52" name="PlaceHolder 3"/>
-          <p:cNvSpPr>
-            <a:spLocks noGrp="1"/>
-          </p:cNvSpPr>
-          <p:nvPr>
-            <p:ph type="sldNum" idx="8"/>
-          </p:nvPr>
-        </p:nvSpPr>
-        <p:spPr>
-          <a:xfrm>
-            <a:off x="3884760" y="8685360"/>
-            <a:ext cx="2971440" cy="458280"/>
-          </a:xfrm>
-          <a:prstGeom prst="rect">
-            <a:avLst/>
-          </a:prstGeom>
-          <a:noFill/>
-          <a:ln w="0">
-            <a:noFill/>
-          </a:ln>
-        </p:spPr>
-        <p:txBody>
-          <a:bodyPr lIns="91440" tIns="45720" rIns="91440" bIns="45720" anchor="b">
-            <a:noAutofit/>
-          </a:bodyPr>
-          <a:lstStyle>
-            <a:lvl1pPr indent="0" algn="r" defTabSz="914400">
-              <a:lnSpc>
-                <a:spcPct val="100000"/>
-              </a:lnSpc>
-              <a:buNone/>
-              <a:defRPr lang="en-US" sz="1200" b="0" u="none" strike="noStrike">
-                <a:solidFill>
-                  <a:schemeClr val="dk1"/>
-                </a:solidFill>
-                <a:effectLst/>
-                <a:uFillTx/>
-                <a:latin typeface="+mn-lt"/>
-                <a:ea typeface="+mn-ea"/>
-              </a:defRPr>
-            </a:lvl1pPr>
-          </a:lstStyle>
-          <a:p>
-            <a:pPr indent="0" algn="r" defTabSz="914400">
-              <a:lnSpc>
-                <a:spcPct val="100000"/>
-              </a:lnSpc>
-              <a:buNone/>
-            </a:pPr>
-            <a:fld id="{1A5C25F5-003D-4B3C-9571-C8DFCAC02A87}" type="slidenum">
-              <a:rPr lang="en-US" sz="1200" b="0" u="none" strike="noStrike">
-                <a:solidFill>
-                  <a:schemeClr val="dk1"/>
-                </a:solidFill>
-                <a:effectLst/>
-                <a:uFillTx/>
-                <a:latin typeface="+mn-lt"/>
-                <a:ea typeface="+mn-ea"/>
-              </a:rPr>
-              <a:t>5</a:t>
-            </a:fld>
-            <a:endParaRPr lang="en-GB" sz="1200" b="0" u="none" strike="noStrike">
-              <a:solidFill>
-                <a:srgbClr val="000000"/>
-              </a:solidFill>
-              <a:effectLst/>
-              <a:uFillTx/>
-              <a:latin typeface="Times New Roman"/>
-            </a:endParaRPr>
-          </a:p>
-        </p:txBody>
-      </p:sp>
-    </p:spTree>
   </p:cSld>
   <p:clrMapOvr>
     <a:masterClrMapping/>
@@ -2613,7 +3005,7 @@
         </p:style>
         <p:txBody>
           <a:bodyPr wrap="none" lIns="0" tIns="0" rIns="0" bIns="0" anchor="ctr">
-            <a:normAutofit fontScale="25000" lnSpcReduction="19999"/>
+            <a:normAutofit fontScale="25000" lnSpcReduction="20000"/>
           </a:bodyPr>
           <a:lstStyle/>
           <a:p>
@@ -2786,7 +3178,7 @@
               </a:tabLst>
             </a:pPr>
             <a:r>
-              <a:rPr lang="en-US" sz="2100" b="0" u="none" strike="noStrike" dirty="0">
+              <a:rPr lang="en-US" sz="2100" b="0" u="none" strike="noStrike">
                 <a:solidFill>
                   <a:srgbClr val="FFFFFF"/>
                 </a:solidFill>
@@ -2795,19 +3187,7 @@
                 <a:latin typeface="Arial"/>
                 <a:ea typeface="Arial"/>
               </a:rPr>
-              <a:t>Optimizing distribution of drinking water in remote </a:t>
-            </a:r>
-            <a:r>
-              <a:rPr lang="en-US" sz="2100" b="0" u="none" strike="noStrike">
-                <a:solidFill>
-                  <a:srgbClr val="FFFFFF"/>
-                </a:solidFill>
-                <a:effectLst/>
-                <a:uFillTx/>
-                <a:latin typeface="Arial"/>
-                <a:ea typeface="Arial"/>
-              </a:rPr>
-              <a:t>areas </a:t>
+              <a:t>Optimizing distribution of drinking water in remote areas </a:t>
             </a:r>
             <a:r>
               <a:rPr lang="en-US" sz="2100">
@@ -2882,7 +3262,7 @@
               </a:tabLst>
             </a:pPr>
             <a:r>
-              <a:rPr lang="en-US" sz="1400" dirty="0">
+              <a:rPr lang="en-US" sz="1400">
                 <a:solidFill>
                   <a:srgbClr val="FFFFFF"/>
                 </a:solidFill>
@@ -2891,7 +3271,7 @@
               <a:t>Biner Nicolas, Giacomelli Robin, Giora </a:t>
             </a:r>
             <a:r>
-              <a:rPr lang="en-US" sz="1400" dirty="0" err="1">
+              <a:rPr lang="en-US" sz="1400" err="1">
                 <a:solidFill>
                   <a:srgbClr val="FFFFFF"/>
                 </a:solidFill>
@@ -2900,7 +3280,7 @@
               <a:t>Triantafyllia</a:t>
             </a:r>
             <a:r>
-              <a:rPr lang="en-US" sz="1400" dirty="0">
+              <a:rPr lang="en-US" sz="1400">
                 <a:solidFill>
                   <a:srgbClr val="FFFFFF"/>
                 </a:solidFill>
@@ -2909,7 +3289,7 @@
               <a:t>, </a:t>
             </a:r>
             <a:r>
-              <a:rPr lang="en-US" sz="1400" dirty="0" err="1">
+              <a:rPr lang="en-US" sz="1400" err="1">
                 <a:solidFill>
                   <a:srgbClr val="FFFFFF"/>
                 </a:solidFill>
@@ -2918,7 +3298,7 @@
               <a:t>Margomenos</a:t>
             </a:r>
             <a:r>
-              <a:rPr lang="en-US" sz="1400" dirty="0">
+              <a:rPr lang="en-US" sz="1400">
                 <a:solidFill>
                   <a:srgbClr val="FFFFFF"/>
                 </a:solidFill>
@@ -2987,6 +3367,331 @@
               <a:t>April 2, 2026</a:t>
             </a:r>
             <a:endParaRPr lang="en-GB" sz="1400" b="0" u="none" strike="noStrike">
+              <a:solidFill>
+                <a:srgbClr val="FFFFFF"/>
+              </a:solidFill>
+              <a:effectLst/>
+              <a:uFillTx/>
+              <a:latin typeface="Arial"/>
+            </a:endParaRPr>
+          </a:p>
+        </p:txBody>
+      </p:sp>
+    </p:spTree>
+  </p:cSld>
+  <p:clrMapOvr>
+    <a:masterClrMapping/>
+  </p:clrMapOvr>
+</p:sld>
+</file>
+
+<file path=ppt/slides/slide10.xml><?xml version="1.0" encoding="utf-8"?>
+<p:sld xmlns:a="http://schemas.openxmlformats.org/drawingml/2006/main" xmlns:r="http://schemas.openxmlformats.org/officeDocument/2006/relationships" xmlns:p="http://schemas.openxmlformats.org/presentationml/2006/main">
+  <p:cSld>
+    <p:bg>
+      <p:bgPr>
+        <a:solidFill>
+          <a:srgbClr val="005B96"/>
+        </a:solidFill>
+        <a:effectLst/>
+      </p:bgPr>
+    </p:bg>
+    <p:spTree>
+      <p:nvGrpSpPr>
+        <p:cNvPr id="1" name=""/>
+        <p:cNvGrpSpPr/>
+        <p:nvPr/>
+      </p:nvGrpSpPr>
+      <p:grpSpPr>
+        <a:xfrm>
+          <a:off x="0" y="0"/>
+          <a:ext cx="0" cy="0"/>
+          <a:chOff x="0" y="0"/>
+          <a:chExt cx="0" cy="0"/>
+        </a:xfrm>
+      </p:grpSpPr>
+      <p:sp>
+        <p:nvSpPr>
+          <p:cNvPr id="34" name="Text 0"/>
+          <p:cNvSpPr/>
+          <p:nvPr/>
+        </p:nvSpPr>
+        <p:spPr>
+          <a:xfrm>
+            <a:off x="685800" y="3114720"/>
+            <a:ext cx="6190920" cy="37800"/>
+          </a:xfrm>
+          <a:prstGeom prst="rect">
+            <a:avLst/>
+          </a:prstGeom>
+          <a:solidFill>
+            <a:srgbClr val="FFFFFF"/>
+          </a:solidFill>
+          <a:ln w="0">
+            <a:noFill/>
+          </a:ln>
+        </p:spPr>
+        <p:style>
+          <a:lnRef idx="0">
+            <a:scrgbClr r="0" g="0" b="0"/>
+          </a:lnRef>
+          <a:fillRef idx="0">
+            <a:scrgbClr r="0" g="0" b="0"/>
+          </a:fillRef>
+          <a:effectRef idx="0">
+            <a:scrgbClr r="0" g="0" b="0"/>
+          </a:effectRef>
+          <a:fontRef idx="minor"/>
+        </p:style>
+        <p:txBody>
+          <a:bodyPr wrap="none" lIns="0" tIns="0" rIns="0" bIns="0" anchor="ctr">
+            <a:normAutofit fontScale="25000" lnSpcReduction="20000"/>
+          </a:bodyPr>
+          <a:lstStyle/>
+          <a:p>
+            <a:pPr defTabSz="914400">
+              <a:lnSpc>
+                <a:spcPct val="100000"/>
+              </a:lnSpc>
+              <a:tabLst>
+                <a:tab pos="0" algn="l"/>
+              </a:tabLst>
+            </a:pPr>
+            <a:endParaRPr lang="en-US" sz="1800" b="0" u="none" strike="noStrike">
+              <a:solidFill>
+                <a:schemeClr val="dk1"/>
+              </a:solidFill>
+              <a:effectLst/>
+              <a:uFillTx/>
+              <a:latin typeface="Calibri"/>
+            </a:endParaRPr>
+          </a:p>
+        </p:txBody>
+      </p:sp>
+      <p:sp>
+        <p:nvSpPr>
+          <p:cNvPr id="35" name="Text 1"/>
+          <p:cNvSpPr/>
+          <p:nvPr/>
+        </p:nvSpPr>
+        <p:spPr>
+          <a:xfrm>
+            <a:off x="7493040" y="361800"/>
+            <a:ext cx="1098360" cy="1247760"/>
+          </a:xfrm>
+          <a:prstGeom prst="rect">
+            <a:avLst/>
+          </a:prstGeom>
+          <a:noFill/>
+          <a:ln w="0">
+            <a:noFill/>
+          </a:ln>
+        </p:spPr>
+        <p:style>
+          <a:lnRef idx="0">
+            <a:scrgbClr r="0" g="0" b="0"/>
+          </a:lnRef>
+          <a:fillRef idx="0">
+            <a:scrgbClr r="0" g="0" b="0"/>
+          </a:fillRef>
+          <a:effectRef idx="0">
+            <a:scrgbClr r="0" g="0" b="0"/>
+          </a:effectRef>
+          <a:fontRef idx="minor"/>
+        </p:style>
+        <p:txBody>
+          <a:bodyPr lIns="0" tIns="0" rIns="0" bIns="0" anchor="t">
+            <a:noAutofit/>
+          </a:bodyPr>
+          <a:lstStyle/>
+          <a:p>
+            <a:pPr algn="r" defTabSz="914400">
+              <a:lnSpc>
+                <a:spcPts val="4915"/>
+              </a:lnSpc>
+              <a:tabLst>
+                <a:tab pos="0" algn="l"/>
+              </a:tabLst>
+            </a:pPr>
+            <a:r>
+              <a:rPr lang="en-US" sz="5850" b="1" u="none" strike="noStrike">
+                <a:solidFill>
+                  <a:srgbClr val="FFFFFF"/>
+                </a:solidFill>
+                <a:effectLst/>
+                <a:uFillTx/>
+                <a:latin typeface="Arial"/>
+                <a:ea typeface="Arial"/>
+              </a:rPr>
+              <a:t>zh</a:t>
+            </a:r>
+            <a:endParaRPr lang="en-GB" sz="5850" b="0" u="none" strike="noStrike">
+              <a:solidFill>
+                <a:srgbClr val="FFFFFF"/>
+              </a:solidFill>
+              <a:effectLst/>
+              <a:uFillTx/>
+              <a:latin typeface="Arial"/>
+            </a:endParaRPr>
+          </a:p>
+          <a:p>
+            <a:pPr algn="r" defTabSz="914400">
+              <a:lnSpc>
+                <a:spcPts val="4915"/>
+              </a:lnSpc>
+              <a:tabLst>
+                <a:tab pos="0" algn="l"/>
+              </a:tabLst>
+            </a:pPr>
+            <a:r>
+              <a:rPr lang="en-US" sz="5850" b="1" u="none" strike="noStrike">
+                <a:solidFill>
+                  <a:srgbClr val="FFFFFF"/>
+                </a:solidFill>
+                <a:effectLst/>
+                <a:uFillTx/>
+                <a:latin typeface="Arial"/>
+                <a:ea typeface="Arial"/>
+              </a:rPr>
+              <a:t>aw</a:t>
+            </a:r>
+            <a:endParaRPr lang="en-GB" sz="5850" b="0" u="none" strike="noStrike">
+              <a:solidFill>
+                <a:srgbClr val="FFFFFF"/>
+              </a:solidFill>
+              <a:effectLst/>
+              <a:uFillTx/>
+              <a:latin typeface="Arial"/>
+            </a:endParaRPr>
+          </a:p>
+        </p:txBody>
+      </p:sp>
+      <p:sp>
+        <p:nvSpPr>
+          <p:cNvPr id="36" name="Text 2"/>
+          <p:cNvSpPr/>
+          <p:nvPr/>
+        </p:nvSpPr>
+        <p:spPr>
+          <a:xfrm>
+            <a:off x="685800" y="2476440"/>
+            <a:ext cx="1358280" cy="399600"/>
+          </a:xfrm>
+          <a:prstGeom prst="rect">
+            <a:avLst/>
+          </a:prstGeom>
+          <a:noFill/>
+          <a:ln w="0">
+            <a:noFill/>
+          </a:ln>
+        </p:spPr>
+        <p:style>
+          <a:lnRef idx="0">
+            <a:scrgbClr r="0" g="0" b="0"/>
+          </a:lnRef>
+          <a:fillRef idx="0">
+            <a:scrgbClr r="0" g="0" b="0"/>
+          </a:fillRef>
+          <a:effectRef idx="0">
+            <a:scrgbClr r="0" g="0" b="0"/>
+          </a:effectRef>
+          <a:fontRef idx="minor"/>
+        </p:style>
+        <p:txBody>
+          <a:bodyPr lIns="0" tIns="0" rIns="0" bIns="0" anchor="t">
+            <a:noAutofit/>
+          </a:bodyPr>
+          <a:lstStyle/>
+          <a:p>
+            <a:pPr defTabSz="914400">
+              <a:lnSpc>
+                <a:spcPts val="3149"/>
+              </a:lnSpc>
+              <a:tabLst>
+                <a:tab pos="0" algn="l"/>
+              </a:tabLst>
+            </a:pPr>
+            <a:r>
+              <a:rPr lang="en-US" sz="2100" b="0" u="none" strike="noStrike">
+                <a:solidFill>
+                  <a:srgbClr val="FFFFFF"/>
+                </a:solidFill>
+                <a:effectLst/>
+                <a:uFillTx/>
+                <a:latin typeface="Arial"/>
+                <a:ea typeface="Arial"/>
+              </a:rPr>
+              <a:t>Questions</a:t>
+            </a:r>
+            <a:endParaRPr lang="en-GB" sz="2100" b="0" u="none" strike="noStrike">
+              <a:solidFill>
+                <a:srgbClr val="FFFFFF"/>
+              </a:solidFill>
+              <a:effectLst/>
+              <a:uFillTx/>
+              <a:latin typeface="Arial"/>
+            </a:endParaRPr>
+          </a:p>
+        </p:txBody>
+      </p:sp>
+      <p:sp>
+        <p:nvSpPr>
+          <p:cNvPr id="37" name="Text 3"/>
+          <p:cNvSpPr/>
+          <p:nvPr/>
+        </p:nvSpPr>
+        <p:spPr>
+          <a:xfrm>
+            <a:off x="685800" y="3267000"/>
+            <a:ext cx="1218240" cy="342720"/>
+          </a:xfrm>
+          <a:prstGeom prst="rect">
+            <a:avLst/>
+          </a:prstGeom>
+          <a:noFill/>
+          <a:ln w="0">
+            <a:noFill/>
+          </a:ln>
+        </p:spPr>
+        <p:style>
+          <a:lnRef idx="0">
+            <a:scrgbClr r="0" g="0" b="0"/>
+          </a:lnRef>
+          <a:fillRef idx="0">
+            <a:scrgbClr r="0" g="0" b="0"/>
+          </a:fillRef>
+          <a:effectRef idx="0">
+            <a:scrgbClr r="0" g="0" b="0"/>
+          </a:effectRef>
+          <a:fontRef idx="minor"/>
+        </p:style>
+        <p:txBody>
+          <a:bodyPr lIns="0" tIns="0" rIns="0" bIns="0" anchor="t">
+            <a:noAutofit/>
+          </a:bodyPr>
+          <a:lstStyle/>
+          <a:p>
+            <a:pPr defTabSz="914400">
+              <a:lnSpc>
+                <a:spcPts val="2701"/>
+              </a:lnSpc>
+              <a:tabLst>
+                <a:tab pos="0" algn="l"/>
+              </a:tabLst>
+            </a:pPr>
+            <a:r>
+              <a:rPr lang="en-US" sz="1800" b="0" u="none" strike="noStrike">
+                <a:solidFill>
+                  <a:srgbClr val="FFFFFF"/>
+                </a:solidFill>
+                <a:effectLst/>
+                <a:uFillTx/>
+                <a:latin typeface="Arial"/>
+                <a:ea typeface="Arial"/>
+              </a:rPr>
+              <a:t>Thank you</a:t>
+            </a:r>
+            <a:endParaRPr lang="en-GB" sz="1800" b="0" u="none" strike="noStrike">
               <a:solidFill>
                 <a:srgbClr val="FFFFFF"/>
               </a:solidFill>
@@ -3065,7 +3770,7 @@
         </p:style>
         <p:txBody>
           <a:bodyPr wrap="none" lIns="0" tIns="0" rIns="0" bIns="0" anchor="ctr">
-            <a:normAutofit fontScale="25000" lnSpcReduction="19999"/>
+            <a:normAutofit fontScale="25000" lnSpcReduction="20000"/>
           </a:bodyPr>
           <a:lstStyle/>
           <a:p>
@@ -3619,7 +4324,7 @@
         </p:style>
         <p:txBody>
           <a:bodyPr wrap="none" lIns="0" tIns="0" rIns="0" bIns="0" anchor="ctr">
-            <a:normAutofit fontScale="25000" lnSpcReduction="19999"/>
+            <a:normAutofit fontScale="25000" lnSpcReduction="20000"/>
           </a:bodyPr>
           <a:lstStyle/>
           <a:p>
@@ -3688,34 +4393,14 @@
               </a:tabLst>
             </a:pPr>
             <a:r>
-              <a:rPr lang="en-US" sz="1500" dirty="0">
+              <a:rPr lang="en-US" sz="1500">
                 <a:solidFill>
                   <a:schemeClr val="accent1"/>
                 </a:solidFill>
                 <a:latin typeface="Arial"/>
                 <a:cs typeface="Arial"/>
               </a:rPr>
-              <a:t>Goal: Distribute </a:t>
-            </a:r>
-            <a:r>
-              <a:rPr lang="en-US" sz="1500">
-                <a:solidFill>
-                  <a:schemeClr val="accent1"/>
-                </a:solidFill>
-                <a:latin typeface="Arial"/>
-                <a:cs typeface="Arial"/>
-              </a:rPr>
-              <a:t>drinking</a:t>
-            </a:r>
-            <a:r>
-              <a:rPr lang="en-US" sz="1500" dirty="0">
-                <a:solidFill>
-                  <a:schemeClr val="accent1"/>
-                </a:solidFill>
-                <a:latin typeface="Arial"/>
-                <a:cs typeface="Arial"/>
-              </a:rPr>
-              <a:t> water supply in remote areas of Nepal</a:t>
+              <a:t>Goal: Distribute drinking water supply in remote areas of Nepal</a:t>
             </a:r>
           </a:p>
           <a:p>
@@ -3724,7 +4409,7 @@
                 <a:tab pos="0" algn="l"/>
               </a:tabLst>
             </a:pPr>
-            <a:endParaRPr lang="en-US" sz="1500" dirty="0">
+            <a:endParaRPr lang="en-US" sz="1500">
               <a:solidFill>
                 <a:schemeClr val="accent1"/>
               </a:solidFill>
@@ -3739,7 +4424,7 @@
               </a:tabLst>
             </a:pPr>
             <a:r>
-              <a:rPr lang="en-US" sz="1500" dirty="0">
+              <a:rPr lang="en-US" sz="1500">
                 <a:solidFill>
                   <a:schemeClr val="accent1"/>
                 </a:solidFill>
@@ -3786,7 +4471,35 @@
               </a:rPr>
               <a:t>Water amount must be proportional to their needs</a:t>
             </a:r>
-            <a:endParaRPr lang="en-US" sz="1500" dirty="0">
+          </a:p>
+          <a:p>
+            <a:pPr marL="1200150" lvl="2" indent="-285750">
+              <a:buFont typeface="Wingdings"/>
+              <a:buChar char="§"/>
+              <a:tabLst>
+                <a:tab pos="0" algn="l"/>
+              </a:tabLst>
+            </a:pPr>
+            <a:r>
+              <a:rPr lang="en-US" sz="1500">
+                <a:solidFill>
+                  <a:schemeClr val="accent1"/>
+                </a:solidFill>
+                <a:latin typeface="Arial"/>
+                <a:cs typeface="Arial"/>
+              </a:rPr>
+              <a:t>There are losses due to the terrain/pipe quality</a:t>
+            </a:r>
+          </a:p>
+          <a:p>
+            <a:pPr marL="1200150" lvl="2" indent="-285750">
+              <a:buFont typeface="Wingdings"/>
+              <a:buChar char="§"/>
+              <a:tabLst>
+                <a:tab pos="0" algn="l"/>
+              </a:tabLst>
+            </a:pPr>
+            <a:endParaRPr lang="en-US" sz="1500">
               <a:solidFill>
                 <a:schemeClr val="accent1"/>
               </a:solidFill>
@@ -3795,6 +4508,23 @@
             </a:endParaRPr>
           </a:p>
           <a:p>
+            <a:pPr>
+              <a:tabLst>
+                <a:tab pos="0" algn="l"/>
+              </a:tabLst>
+            </a:pPr>
+            <a:r>
+              <a:rPr lang="en-US" sz="1500">
+                <a:solidFill>
+                  <a:schemeClr val="accent1"/>
+                </a:solidFill>
+                <a:latin typeface="Arial"/>
+                <a:cs typeface="Arial"/>
+              </a:rPr>
+              <a:t>Methods used:</a:t>
+            </a:r>
+          </a:p>
+          <a:p>
             <a:pPr marL="1200150" lvl="2" indent="-285750">
               <a:buFont typeface="Wingdings"/>
               <a:buChar char="§"/>
@@ -3810,7 +4540,7 @@
                 <a:latin typeface="Arial"/>
                 <a:cs typeface="Arial"/>
               </a:rPr>
-              <a:t>There are losses due to the terrain/pipe quality</a:t>
+              <a:t>Lagrange Method</a:t>
             </a:r>
           </a:p>
           <a:p>
@@ -3821,7 +4551,26 @@
                 <a:tab pos="0" algn="l"/>
               </a:tabLst>
             </a:pPr>
-            <a:endParaRPr lang="en-US" sz="1500" dirty="0">
+            <a:r>
+              <a:rPr lang="en-US" sz="1500">
+                <a:solidFill>
+                  <a:schemeClr val="accent1"/>
+                </a:solidFill>
+                <a:latin typeface="Arial"/>
+                <a:cs typeface="Arial"/>
+              </a:rPr>
+              <a:t>Simulated Annealing</a:t>
+            </a:r>
+          </a:p>
+          <a:p>
+            <a:pPr marL="1200150" lvl="2" indent="-285750">
+              <a:buFont typeface="Wingdings"/>
+              <a:buChar char="§"/>
+              <a:tabLst>
+                <a:tab pos="0" algn="l"/>
+              </a:tabLst>
+            </a:pPr>
+            <a:endParaRPr lang="en-US" sz="1500">
               <a:solidFill>
                 <a:schemeClr val="accent1"/>
               </a:solidFill>
@@ -3835,17 +4584,7 @@
                 <a:tab pos="0" algn="l"/>
               </a:tabLst>
             </a:pPr>
-            <a:r>
-              <a:rPr lang="en-US" sz="1500">
-                <a:solidFill>
-                  <a:schemeClr val="accent1"/>
-                </a:solidFill>
-                <a:latin typeface="Arial"/>
-                <a:cs typeface="Arial"/>
-              </a:rPr>
-              <a:t>Methods used:</a:t>
-            </a:r>
-            <a:endParaRPr lang="en-US" sz="1500" dirty="0">
+            <a:endParaRPr lang="en-US" sz="1500">
               <a:solidFill>
                 <a:schemeClr val="accent1"/>
               </a:solidFill>
@@ -3854,53 +4593,12 @@
             </a:endParaRPr>
           </a:p>
           <a:p>
-            <a:pPr marL="1200150" lvl="2" indent="-285750">
-              <a:buFont typeface="Wingdings"/>
-              <a:buChar char="§"/>
+            <a:pPr>
               <a:tabLst>
                 <a:tab pos="0" algn="l"/>
               </a:tabLst>
             </a:pPr>
-            <a:r>
-              <a:rPr lang="en-US" sz="1500">
-                <a:solidFill>
-                  <a:schemeClr val="accent1"/>
-                </a:solidFill>
-                <a:latin typeface="Arial"/>
-                <a:cs typeface="Arial"/>
-              </a:rPr>
-              <a:t>Lagrange</a:t>
-            </a:r>
-            <a:r>
-              <a:rPr lang="en-US" sz="1500" dirty="0">
-                <a:solidFill>
-                  <a:schemeClr val="accent1"/>
-                </a:solidFill>
-                <a:latin typeface="Arial"/>
-                <a:cs typeface="Arial"/>
-              </a:rPr>
-              <a:t> Method</a:t>
-            </a:r>
-          </a:p>
-          <a:p>
-            <a:pPr marL="1200150" lvl="2" indent="-285750">
-              <a:buFont typeface="Wingdings"/>
-              <a:buChar char="§"/>
-              <a:tabLst>
-                <a:tab pos="0" algn="l"/>
-              </a:tabLst>
-            </a:pPr>
-            <a:r>
-              <a:rPr lang="en-US" sz="1500">
-                <a:solidFill>
-                  <a:schemeClr val="accent1"/>
-                </a:solidFill>
-                <a:latin typeface="Arial"/>
-                <a:cs typeface="Arial"/>
-              </a:rPr>
-              <a:t>Simulated Annealing</a:t>
-            </a:r>
-            <a:endParaRPr lang="en-US" sz="1500" dirty="0">
+            <a:endParaRPr lang="en-US" sz="1500">
               <a:solidFill>
                 <a:schemeClr val="accent1"/>
               </a:solidFill>
@@ -3909,36 +4607,6 @@
             </a:endParaRPr>
           </a:p>
           <a:p>
-            <a:pPr marL="1200150" lvl="2" indent="-285750">
-              <a:buFont typeface="Wingdings"/>
-              <a:buChar char="§"/>
-              <a:tabLst>
-                <a:tab pos="0" algn="l"/>
-              </a:tabLst>
-            </a:pPr>
-            <a:endParaRPr lang="en-US" sz="1500" dirty="0">
-              <a:solidFill>
-                <a:schemeClr val="accent1"/>
-              </a:solidFill>
-              <a:latin typeface="Arial"/>
-              <a:cs typeface="Arial"/>
-            </a:endParaRPr>
-          </a:p>
-          <a:p>
-            <a:pPr>
-              <a:tabLst>
-                <a:tab pos="0" algn="l"/>
-              </a:tabLst>
-            </a:pPr>
-            <a:endParaRPr lang="en-US" sz="1500" dirty="0">
-              <a:solidFill>
-                <a:schemeClr val="accent1"/>
-              </a:solidFill>
-              <a:latin typeface="Arial"/>
-              <a:cs typeface="Arial"/>
-            </a:endParaRPr>
-          </a:p>
-          <a:p>
             <a:pPr marL="285750" indent="-285750">
               <a:buFont typeface="Arial"/>
               <a:buChar char="•"/>
@@ -3946,7 +4614,7 @@
                 <a:tab pos="0" algn="l"/>
               </a:tabLst>
             </a:pPr>
-            <a:endParaRPr lang="en-US" sz="1500" dirty="0">
+            <a:endParaRPr lang="en-US" sz="1500">
               <a:solidFill>
                 <a:schemeClr val="accent1"/>
               </a:solidFill>
@@ -4229,7 +4897,7 @@
         </p:style>
         <p:txBody>
           <a:bodyPr wrap="none" lIns="0" tIns="0" rIns="0" bIns="0" anchor="ctr">
-            <a:normAutofit fontScale="25000" lnSpcReduction="19999"/>
+            <a:normAutofit fontScale="25000" lnSpcReduction="20000"/>
           </a:bodyPr>
           <a:lstStyle/>
           <a:p>
@@ -4359,7 +5027,7 @@
         <p:spPr>
           <a:xfrm>
             <a:off x="685800" y="857160"/>
-            <a:ext cx="2094643" cy="425285"/>
+            <a:ext cx="2749711" cy="427980"/>
           </a:xfrm>
           <a:prstGeom prst="rect">
             <a:avLst/>
@@ -4402,15 +5070,26 @@
                 </a:solidFill>
                 <a:latin typeface="Arial"/>
               </a:rPr>
-              <a:t>Lagrange Method</a:t>
-            </a:r>
-            <a:endParaRPr lang="en-GB" sz="2100" b="0" u="none" strike="noStrike">
+              <a:t>Problem Formulation</a:t>
+            </a:r>
+          </a:p>
+          <a:p>
+            <a:pPr>
+              <a:lnSpc>
+                <a:spcPts val="3149"/>
+              </a:lnSpc>
+              <a:tabLst>
+                <a:tab pos="0" algn="l"/>
+              </a:tabLst>
+            </a:pPr>
+            <a:endParaRPr lang="en-US" sz="2100" b="0" u="none" strike="noStrike">
               <a:solidFill>
                 <a:srgbClr val="FFFFFF"/>
               </a:solidFill>
               <a:effectLst/>
               <a:uFillTx/>
               <a:latin typeface="Arial"/>
+              <a:cs typeface="Arial"/>
             </a:endParaRPr>
           </a:p>
         </p:txBody>
@@ -4459,7 +5138,7 @@
           <a:lstStyle/>
           <a:p>
             <a:r>
-              <a:rPr lang="en-US" sz="1650" b="1" i="1" dirty="0">
+              <a:rPr lang="en-US" sz="1650" b="1" i="1">
                 <a:solidFill>
                   <a:schemeClr val="accent1"/>
                 </a:solidFill>
@@ -4469,7 +5148,7 @@
               <a:t>a</a:t>
             </a:r>
             <a:r>
-              <a:rPr lang="en-US" sz="1650" i="1" dirty="0">
+              <a:rPr lang="en-US" sz="1650" i="1">
                 <a:solidFill>
                   <a:schemeClr val="accent1"/>
                 </a:solidFill>
@@ -4488,13 +5167,6 @@
               </a:rPr>
               <a:t>: delivery-loss factor</a:t>
             </a:r>
-            <a:endParaRPr lang="en-US" sz="1650" dirty="0">
-              <a:solidFill>
-                <a:schemeClr val="accent1"/>
-              </a:solidFill>
-              <a:ea typeface="Calibri" panose="020F0502020204030204"/>
-              <a:cs typeface="Calibri" panose="020F0502020204030204"/>
-            </a:endParaRPr>
           </a:p>
           <a:p>
             <a:r>
@@ -4568,7 +5240,31 @@
               </a:rPr>
               <a:t> : house priority/vulnerability factor</a:t>
             </a:r>
-            <a:endParaRPr lang="en-US" sz="1650" dirty="0">
+          </a:p>
+          <a:p>
+            <a:r>
+              <a:rPr lang="en-US" sz="1650" b="1" i="1">
+                <a:solidFill>
+                  <a:schemeClr val="accent1"/>
+                </a:solidFill>
+                <a:ea typeface="Calibri" panose="020F0502020204030204"/>
+                <a:cs typeface="Calibri" panose="020F0502020204030204"/>
+              </a:rPr>
+              <a:t>S</a:t>
+            </a:r>
+            <a:r>
+              <a:rPr lang="en-US" sz="1650">
+                <a:solidFill>
+                  <a:schemeClr val="accent1"/>
+                </a:solidFill>
+                <a:ea typeface="Calibri" panose="020F0502020204030204"/>
+                <a:cs typeface="Calibri" panose="020F0502020204030204"/>
+              </a:rPr>
+              <a:t>  : total available water supply</a:t>
+            </a:r>
+          </a:p>
+          <a:p>
+            <a:endParaRPr lang="en-US" sz="1650">
               <a:solidFill>
                 <a:schemeClr val="accent1"/>
               </a:solidFill>
@@ -4578,26 +5274,22 @@
           </a:p>
           <a:p>
             <a:r>
-              <a:rPr lang="en-US" sz="1650" b="1" i="1">
+              <a:rPr lang="en-US" sz="1650" b="1">
                 <a:solidFill>
                   <a:schemeClr val="accent1"/>
                 </a:solidFill>
                 <a:ea typeface="Calibri" panose="020F0502020204030204"/>
                 <a:cs typeface="Calibri" panose="020F0502020204030204"/>
               </a:rPr>
-              <a:t>S</a:t>
-            </a:r>
-            <a:r>
-              <a:rPr lang="en-US" sz="1650">
-                <a:solidFill>
-                  <a:schemeClr val="accent1"/>
-                </a:solidFill>
-                <a:ea typeface="Calibri" panose="020F0502020204030204"/>
-                <a:cs typeface="Calibri" panose="020F0502020204030204"/>
-              </a:rPr>
-              <a:t>  : total available water supply</a:t>
-            </a:r>
-            <a:endParaRPr lang="en-US" sz="1650" dirty="0">
+              <a:t>Continuous variables, smooth objective function, constrained</a:t>
+            </a:r>
+          </a:p>
+          <a:p>
+            <a:pPr marL="285750" indent="-285750">
+              <a:buFont typeface="Arial"/>
+              <a:buChar char="•"/>
+            </a:pPr>
+            <a:endParaRPr lang="en-US" sz="1650">
               <a:solidFill>
                 <a:schemeClr val="accent1"/>
               </a:solidFill>
@@ -4606,11 +5298,7 @@
             </a:endParaRPr>
           </a:p>
           <a:p>
-            <a:pPr marL="285750" indent="-285750">
-              <a:buFont typeface="Arial"/>
-              <a:buChar char="•"/>
-            </a:pPr>
-            <a:endParaRPr lang="en-US" sz="1650" dirty="0">
+            <a:endParaRPr lang="en-US" sz="1650">
               <a:solidFill>
                 <a:schemeClr val="accent1"/>
               </a:solidFill>
@@ -4618,18 +5306,379 @@
               <a:cs typeface="Calibri" panose="020F0502020204030204"/>
             </a:endParaRPr>
           </a:p>
-          <a:p>
-            <a:r>
-              <a:rPr lang="en-US" sz="1650" dirty="0">
-                <a:solidFill>
-                  <a:schemeClr val="accent1"/>
-                </a:solidFill>
-                <a:ea typeface="Calibri" panose="020F0502020204030204"/>
-                <a:cs typeface="Calibri" panose="020F0502020204030204"/>
-              </a:rPr>
-              <a:t>Objective function:</a:t>
-            </a:r>
-            <a:endParaRPr lang="en-US" sz="1650" baseline="30000" dirty="0">
+        </p:txBody>
+      </p:sp>
+    </p:spTree>
+  </p:cSld>
+  <p:clrMapOvr>
+    <a:masterClrMapping/>
+  </p:clrMapOvr>
+</p:sld>
+</file>
+
+<file path=ppt/slides/slide5.xml><?xml version="1.0" encoding="utf-8"?>
+<p:sld xmlns:a="http://schemas.openxmlformats.org/drawingml/2006/main" xmlns:r="http://schemas.openxmlformats.org/officeDocument/2006/relationships" xmlns:p="http://schemas.openxmlformats.org/presentationml/2006/main">
+  <p:cSld>
+    <p:bg>
+      <p:bgPr>
+        <a:solidFill>
+          <a:srgbClr val="005B96"/>
+        </a:solidFill>
+        <a:effectLst/>
+      </p:bgPr>
+    </p:bg>
+    <p:spTree>
+      <p:nvGrpSpPr>
+        <p:cNvPr id="1" name="">
+          <a:extLst>
+            <a:ext uri="{FF2B5EF4-FFF2-40B4-BE49-F238E27FC236}">
+              <a16:creationId xmlns:a16="http://schemas.microsoft.com/office/drawing/2014/main" id="{2F8BE980-4121-4497-8843-265242E815DF}"/>
+            </a:ext>
+          </a:extLst>
+        </p:cNvPr>
+        <p:cNvGrpSpPr/>
+        <p:nvPr/>
+      </p:nvGrpSpPr>
+      <p:grpSpPr>
+        <a:xfrm>
+          <a:off x="0" y="0"/>
+          <a:ext cx="0" cy="0"/>
+          <a:chOff x="0" y="0"/>
+          <a:chExt cx="0" cy="0"/>
+        </a:xfrm>
+      </p:grpSpPr>
+      <p:sp>
+        <p:nvSpPr>
+          <p:cNvPr id="3" name="Rectangle 2">
+            <a:extLst>
+              <a:ext uri="{FF2B5EF4-FFF2-40B4-BE49-F238E27FC236}">
+                <a16:creationId xmlns:a16="http://schemas.microsoft.com/office/drawing/2014/main" id="{1A87CF19-2185-6B3B-387D-F8034C6FE824}"/>
+              </a:ext>
+            </a:extLst>
+          </p:cNvPr>
+          <p:cNvSpPr/>
+          <p:nvPr/>
+        </p:nvSpPr>
+        <p:spPr>
+          <a:xfrm>
+            <a:off x="-1" y="1719891"/>
+            <a:ext cx="9146699" cy="3434393"/>
+          </a:xfrm>
+          <a:prstGeom prst="rect">
+            <a:avLst/>
+          </a:prstGeom>
+          <a:solidFill>
+            <a:schemeClr val="bg1"/>
+          </a:solidFill>
+        </p:spPr>
+        <p:style>
+          <a:lnRef idx="2">
+            <a:schemeClr val="accent1">
+              <a:shade val="15000"/>
+            </a:schemeClr>
+          </a:lnRef>
+          <a:fillRef idx="1">
+            <a:schemeClr val="accent1"/>
+          </a:fillRef>
+          <a:effectRef idx="0">
+            <a:schemeClr val="accent1"/>
+          </a:effectRef>
+          <a:fontRef idx="minor">
+            <a:schemeClr val="lt1"/>
+          </a:fontRef>
+        </p:style>
+        <p:txBody>
+          <a:bodyPr rtlCol="0" anchor="ctr"/>
+          <a:lstStyle/>
+          <a:p>
+            <a:pPr algn="ctr"/>
+            <a:endParaRPr lang="en-US"/>
+          </a:p>
+        </p:txBody>
+      </p:sp>
+      <p:sp>
+        <p:nvSpPr>
+          <p:cNvPr id="22" name="Text 0">
+            <a:extLst>
+              <a:ext uri="{FF2B5EF4-FFF2-40B4-BE49-F238E27FC236}">
+                <a16:creationId xmlns:a16="http://schemas.microsoft.com/office/drawing/2014/main" id="{622BB3F0-CFFD-11C5-8B83-52AEFFB9C9B0}"/>
+              </a:ext>
+            </a:extLst>
+          </p:cNvPr>
+          <p:cNvSpPr/>
+          <p:nvPr/>
+        </p:nvSpPr>
+        <p:spPr>
+          <a:xfrm>
+            <a:off x="685800" y="1333440"/>
+            <a:ext cx="6190920" cy="37800"/>
+          </a:xfrm>
+          <a:prstGeom prst="rect">
+            <a:avLst/>
+          </a:prstGeom>
+          <a:solidFill>
+            <a:srgbClr val="FFFFFF"/>
+          </a:solidFill>
+          <a:ln w="0">
+            <a:noFill/>
+          </a:ln>
+        </p:spPr>
+        <p:style>
+          <a:lnRef idx="0">
+            <a:scrgbClr r="0" g="0" b="0"/>
+          </a:lnRef>
+          <a:fillRef idx="0">
+            <a:scrgbClr r="0" g="0" b="0"/>
+          </a:fillRef>
+          <a:effectRef idx="0">
+            <a:scrgbClr r="0" g="0" b="0"/>
+          </a:effectRef>
+          <a:fontRef idx="minor"/>
+        </p:style>
+        <p:txBody>
+          <a:bodyPr wrap="none" lIns="0" tIns="0" rIns="0" bIns="0" anchor="ctr">
+            <a:normAutofit fontScale="25000" lnSpcReduction="20000"/>
+          </a:bodyPr>
+          <a:lstStyle/>
+          <a:p>
+            <a:pPr defTabSz="914400">
+              <a:lnSpc>
+                <a:spcPct val="100000"/>
+              </a:lnSpc>
+              <a:tabLst>
+                <a:tab pos="0" algn="l"/>
+              </a:tabLst>
+            </a:pPr>
+            <a:endParaRPr lang="en-US" sz="1800" b="0" u="none" strike="noStrike">
+              <a:solidFill>
+                <a:schemeClr val="dk1"/>
+              </a:solidFill>
+              <a:effectLst/>
+              <a:uFillTx/>
+              <a:latin typeface="Calibri"/>
+            </a:endParaRPr>
+          </a:p>
+        </p:txBody>
+      </p:sp>
+      <p:sp>
+        <p:nvSpPr>
+          <p:cNvPr id="26" name="Text 4">
+            <a:extLst>
+              <a:ext uri="{FF2B5EF4-FFF2-40B4-BE49-F238E27FC236}">
+                <a16:creationId xmlns:a16="http://schemas.microsoft.com/office/drawing/2014/main" id="{65B0C490-5FDB-F551-1067-050163CE48DC}"/>
+              </a:ext>
+            </a:extLst>
+          </p:cNvPr>
+          <p:cNvSpPr/>
+          <p:nvPr/>
+        </p:nvSpPr>
+        <p:spPr>
+          <a:xfrm>
+            <a:off x="7493040" y="361800"/>
+            <a:ext cx="1098360" cy="1247760"/>
+          </a:xfrm>
+          <a:prstGeom prst="rect">
+            <a:avLst/>
+          </a:prstGeom>
+          <a:noFill/>
+          <a:ln w="0">
+            <a:noFill/>
+          </a:ln>
+        </p:spPr>
+        <p:style>
+          <a:lnRef idx="0">
+            <a:scrgbClr r="0" g="0" b="0"/>
+          </a:lnRef>
+          <a:fillRef idx="0">
+            <a:scrgbClr r="0" g="0" b="0"/>
+          </a:fillRef>
+          <a:effectRef idx="0">
+            <a:scrgbClr r="0" g="0" b="0"/>
+          </a:effectRef>
+          <a:fontRef idx="minor"/>
+        </p:style>
+        <p:txBody>
+          <a:bodyPr lIns="0" tIns="0" rIns="0" bIns="0" anchor="t">
+            <a:noAutofit/>
+          </a:bodyPr>
+          <a:lstStyle/>
+          <a:p>
+            <a:pPr algn="r" defTabSz="914400">
+              <a:lnSpc>
+                <a:spcPts val="4915"/>
+              </a:lnSpc>
+              <a:tabLst>
+                <a:tab pos="0" algn="l"/>
+              </a:tabLst>
+            </a:pPr>
+            <a:r>
+              <a:rPr lang="en-US" sz="5850" b="1" u="none" strike="noStrike">
+                <a:solidFill>
+                  <a:srgbClr val="FFFFFF"/>
+                </a:solidFill>
+                <a:effectLst/>
+                <a:uFillTx/>
+                <a:latin typeface="Arial"/>
+                <a:ea typeface="Arial"/>
+              </a:rPr>
+              <a:t>zh</a:t>
+            </a:r>
+            <a:endParaRPr lang="en-GB" sz="5850" b="0" u="none" strike="noStrike">
+              <a:solidFill>
+                <a:srgbClr val="FFFFFF"/>
+              </a:solidFill>
+              <a:effectLst/>
+              <a:uFillTx/>
+              <a:latin typeface="Arial"/>
+            </a:endParaRPr>
+          </a:p>
+          <a:p>
+            <a:pPr algn="r" defTabSz="914400">
+              <a:lnSpc>
+                <a:spcPts val="4915"/>
+              </a:lnSpc>
+              <a:tabLst>
+                <a:tab pos="0" algn="l"/>
+              </a:tabLst>
+            </a:pPr>
+            <a:r>
+              <a:rPr lang="en-US" sz="5850" b="1" u="none" strike="noStrike">
+                <a:solidFill>
+                  <a:srgbClr val="FFFFFF"/>
+                </a:solidFill>
+                <a:effectLst/>
+                <a:uFillTx/>
+                <a:latin typeface="Arial"/>
+                <a:ea typeface="Arial"/>
+              </a:rPr>
+              <a:t>aw</a:t>
+            </a:r>
+            <a:endParaRPr lang="en-GB" sz="5850" b="0" u="none" strike="noStrike">
+              <a:solidFill>
+                <a:srgbClr val="FFFFFF"/>
+              </a:solidFill>
+              <a:effectLst/>
+              <a:uFillTx/>
+              <a:latin typeface="Arial"/>
+            </a:endParaRPr>
+          </a:p>
+        </p:txBody>
+      </p:sp>
+      <p:sp>
+        <p:nvSpPr>
+          <p:cNvPr id="27" name="Text 5">
+            <a:extLst>
+              <a:ext uri="{FF2B5EF4-FFF2-40B4-BE49-F238E27FC236}">
+                <a16:creationId xmlns:a16="http://schemas.microsoft.com/office/drawing/2014/main" id="{AA79E5E1-EA65-6764-6D1D-426DB69BFAEF}"/>
+              </a:ext>
+            </a:extLst>
+          </p:cNvPr>
+          <p:cNvSpPr/>
+          <p:nvPr/>
+        </p:nvSpPr>
+        <p:spPr>
+          <a:xfrm>
+            <a:off x="685800" y="857160"/>
+            <a:ext cx="2094643" cy="425285"/>
+          </a:xfrm>
+          <a:prstGeom prst="rect">
+            <a:avLst/>
+          </a:prstGeom>
+          <a:noFill/>
+          <a:ln w="0">
+            <a:noFill/>
+          </a:ln>
+        </p:spPr>
+        <p:style>
+          <a:lnRef idx="0">
+            <a:scrgbClr r="0" g="0" b="0"/>
+          </a:lnRef>
+          <a:fillRef idx="0">
+            <a:scrgbClr r="0" g="0" b="0"/>
+          </a:fillRef>
+          <a:effectRef idx="0">
+            <a:scrgbClr r="0" g="0" b="0"/>
+          </a:effectRef>
+          <a:fontRef idx="minor"/>
+        </p:style>
+        <p:txBody>
+          <a:bodyPr lIns="0" tIns="0" rIns="0" bIns="0" anchor="t">
+            <a:noAutofit/>
+          </a:bodyPr>
+          <a:lstStyle/>
+          <a:p>
+            <a:pPr>
+              <a:lnSpc>
+                <a:spcPts val="3149"/>
+              </a:lnSpc>
+              <a:tabLst>
+                <a:tab pos="0" algn="l"/>
+              </a:tabLst>
+            </a:pPr>
+            <a:r>
+              <a:rPr lang="en-US" sz="2100">
+                <a:solidFill>
+                  <a:srgbClr val="FFFFFF"/>
+                </a:solidFill>
+                <a:latin typeface="Arial"/>
+              </a:rPr>
+              <a:t>Lagrange Method</a:t>
+            </a:r>
+            <a:endParaRPr lang="en-GB" sz="2100" b="0" u="none" strike="noStrike">
+              <a:solidFill>
+                <a:srgbClr val="FFFFFF"/>
+              </a:solidFill>
+              <a:effectLst/>
+              <a:uFillTx/>
+              <a:latin typeface="Arial"/>
+            </a:endParaRPr>
+          </a:p>
+        </p:txBody>
+      </p:sp>
+      <p:sp>
+        <p:nvSpPr>
+          <p:cNvPr id="5" name="Text 3">
+            <a:extLst>
+              <a:ext uri="{FF2B5EF4-FFF2-40B4-BE49-F238E27FC236}">
+                <a16:creationId xmlns:a16="http://schemas.microsoft.com/office/drawing/2014/main" id="{460D5F65-248B-5062-F25B-0367D1F2090B}"/>
+              </a:ext>
+            </a:extLst>
+          </p:cNvPr>
+          <p:cNvSpPr/>
+          <p:nvPr/>
+        </p:nvSpPr>
+        <p:spPr>
+          <a:xfrm>
+            <a:off x="685800" y="2157427"/>
+            <a:ext cx="6266312" cy="2897869"/>
+          </a:xfrm>
+          <a:prstGeom prst="rect">
+            <a:avLst/>
+          </a:prstGeom>
+          <a:noFill/>
+          <a:ln w="0">
+            <a:noFill/>
+          </a:ln>
+        </p:spPr>
+        <p:style>
+          <a:lnRef idx="0">
+            <a:scrgbClr r="0" g="0" b="0"/>
+          </a:lnRef>
+          <a:fillRef idx="0">
+            <a:scrgbClr r="0" g="0" b="0"/>
+          </a:fillRef>
+          <a:effectRef idx="0">
+            <a:scrgbClr r="0" g="0" b="0"/>
+          </a:effectRef>
+          <a:fontRef idx="minor"/>
+        </p:style>
+        <p:txBody>
+          <a:bodyPr lIns="0" tIns="0" rIns="0" bIns="0" anchor="t">
+            <a:noAutofit/>
+          </a:bodyPr>
+          <a:lstStyle/>
+          <a:p>
+            <a:endParaRPr lang="en-US" sz="1650">
               <a:solidFill>
                 <a:schemeClr val="accent1"/>
               </a:solidFill>
@@ -4637,44 +5686,14 @@
               <a:cs typeface="Calibri" panose="020F0502020204030204"/>
             </a:endParaRPr>
           </a:p>
-          <a:p>
-            <a:r>
-              <a:rPr lang="en-US" sz="1650">
-                <a:solidFill>
-                  <a:schemeClr val="accent1"/>
-                </a:solidFill>
-                <a:ea typeface="Calibri" panose="020F0502020204030204"/>
-                <a:cs typeface="Calibri" panose="020F0502020204030204"/>
-              </a:rPr>
-              <a:t>Restrictions:    </a:t>
-            </a:r>
-          </a:p>
-          <a:p>
-            <a:endParaRPr lang="en-US" sz="1650" dirty="0">
-              <a:solidFill>
-                <a:schemeClr val="accent1"/>
-              </a:solidFill>
-              <a:ea typeface="Calibri" panose="020F0502020204030204"/>
-              <a:cs typeface="Calibri" panose="020F0502020204030204"/>
-            </a:endParaRPr>
-          </a:p>
-          <a:p>
-            <a:endParaRPr lang="en-US" sz="1650" dirty="0">
-              <a:solidFill>
-                <a:schemeClr val="accent1"/>
-              </a:solidFill>
-              <a:ea typeface="Calibri" panose="020F0502020204030204"/>
-              <a:cs typeface="Calibri" panose="020F0502020204030204"/>
-            </a:endParaRPr>
-          </a:p>
         </p:txBody>
       </p:sp>
       <p:pic>
         <p:nvPicPr>
-          <p:cNvPr id="4" name="Picture 3">
+          <p:cNvPr id="2" name="Picture 1" descr="A math equations on a white background&#10;&#10;AI-generated content may be incorrect.">
             <a:extLst>
               <a:ext uri="{FF2B5EF4-FFF2-40B4-BE49-F238E27FC236}">
-                <a16:creationId xmlns:a16="http://schemas.microsoft.com/office/drawing/2014/main" id="{A6740574-6A66-5193-A369-96DC719CD2F4}"/>
+                <a16:creationId xmlns:a16="http://schemas.microsoft.com/office/drawing/2014/main" id="{B099AB76-2D99-3ED3-D17A-8822795623FC}"/>
               </a:ext>
             </a:extLst>
           </p:cNvPr>
@@ -4691,8 +5710,8 @@
         </p:blipFill>
         <p:spPr>
           <a:xfrm>
-            <a:off x="2385383" y="3675302"/>
-            <a:ext cx="1504950" cy="219075"/>
+            <a:off x="614452" y="2068722"/>
+            <a:ext cx="4750280" cy="1167801"/>
           </a:xfrm>
           <a:prstGeom prst="rect">
             <a:avLst/>
@@ -4701,10 +5720,10 @@
       </p:pic>
       <p:pic>
         <p:nvPicPr>
-          <p:cNvPr id="7" name="Picture 6">
+          <p:cNvPr id="6" name="Picture 5">
             <a:extLst>
               <a:ext uri="{FF2B5EF4-FFF2-40B4-BE49-F238E27FC236}">
-                <a16:creationId xmlns:a16="http://schemas.microsoft.com/office/drawing/2014/main" id="{D3846FEB-415C-AC74-9F12-4743E327520D}"/>
+                <a16:creationId xmlns:a16="http://schemas.microsoft.com/office/drawing/2014/main" id="{CE276615-D3B8-AE0B-CB96-E61889885FA4}"/>
               </a:ext>
             </a:extLst>
           </p:cNvPr>
@@ -4721,188 +5740,8 @@
         </p:blipFill>
         <p:spPr>
           <a:xfrm>
-            <a:off x="3162121" y="3969320"/>
-            <a:ext cx="285750" cy="180975"/>
-          </a:xfrm>
-          <a:prstGeom prst="rect">
-            <a:avLst/>
-          </a:prstGeom>
-        </p:spPr>
-      </p:pic>
-      <p:pic>
-        <p:nvPicPr>
-          <p:cNvPr id="8" name="Picture 7">
-            <a:extLst>
-              <a:ext uri="{FF2B5EF4-FFF2-40B4-BE49-F238E27FC236}">
-                <a16:creationId xmlns:a16="http://schemas.microsoft.com/office/drawing/2014/main" id="{AA9DE424-2D24-FC14-C80E-E0CC9B05A275}"/>
-              </a:ext>
-            </a:extLst>
-          </p:cNvPr>
-          <p:cNvPicPr>
-            <a:picLocks noChangeAspect="1"/>
-          </p:cNvPicPr>
-          <p:nvPr/>
-        </p:nvPicPr>
-        <p:blipFill>
-          <a:blip r:embed="rId5"/>
-          <a:stretch>
-            <a:fillRect/>
-          </a:stretch>
-        </p:blipFill>
-        <p:spPr>
-          <a:xfrm>
-            <a:off x="2385832" y="3969320"/>
-            <a:ext cx="695325" cy="180975"/>
-          </a:xfrm>
-          <a:prstGeom prst="rect">
-            <a:avLst/>
-          </a:prstGeom>
-        </p:spPr>
-      </p:pic>
-      <p:pic>
-        <p:nvPicPr>
-          <p:cNvPr id="9" name="Picture 8">
-            <a:extLst>
-              <a:ext uri="{FF2B5EF4-FFF2-40B4-BE49-F238E27FC236}">
-                <a16:creationId xmlns:a16="http://schemas.microsoft.com/office/drawing/2014/main" id="{D1F55A27-09FF-AE1C-F847-5C9F5F7528D2}"/>
-              </a:ext>
-            </a:extLst>
-          </p:cNvPr>
-          <p:cNvPicPr>
-            <a:picLocks noChangeAspect="1"/>
-          </p:cNvPicPr>
-          <p:nvPr/>
-        </p:nvPicPr>
-        <p:blipFill>
-          <a:blip r:embed="rId6"/>
-          <a:stretch>
-            <a:fillRect/>
-          </a:stretch>
-        </p:blipFill>
-        <p:spPr>
-          <a:xfrm>
-            <a:off x="3533326" y="3969319"/>
-            <a:ext cx="314325" cy="180975"/>
-          </a:xfrm>
-          <a:prstGeom prst="rect">
-            <a:avLst/>
-          </a:prstGeom>
-        </p:spPr>
-      </p:pic>
-      <p:pic>
-        <p:nvPicPr>
-          <p:cNvPr id="10" name="Picture 9">
-            <a:extLst>
-              <a:ext uri="{FF2B5EF4-FFF2-40B4-BE49-F238E27FC236}">
-                <a16:creationId xmlns:a16="http://schemas.microsoft.com/office/drawing/2014/main" id="{977D6457-FDF9-602B-8A13-AA8A3F1AE7AD}"/>
-              </a:ext>
-            </a:extLst>
-          </p:cNvPr>
-          <p:cNvPicPr>
-            <a:picLocks noChangeAspect="1"/>
-          </p:cNvPicPr>
-          <p:nvPr/>
-        </p:nvPicPr>
-        <p:blipFill>
-          <a:blip r:embed="rId7"/>
-          <a:stretch>
-            <a:fillRect/>
-          </a:stretch>
-        </p:blipFill>
-        <p:spPr>
-          <a:xfrm>
-            <a:off x="3927714" y="3969320"/>
-            <a:ext cx="285750" cy="180975"/>
-          </a:xfrm>
-          <a:prstGeom prst="rect">
-            <a:avLst/>
-          </a:prstGeom>
-        </p:spPr>
-      </p:pic>
-      <p:pic>
-        <p:nvPicPr>
-          <p:cNvPr id="11" name="Picture 10">
-            <a:extLst>
-              <a:ext uri="{FF2B5EF4-FFF2-40B4-BE49-F238E27FC236}">
-                <a16:creationId xmlns:a16="http://schemas.microsoft.com/office/drawing/2014/main" id="{92748FFA-81B5-E93F-8FAB-2BAD17DFE228}"/>
-              </a:ext>
-            </a:extLst>
-          </p:cNvPr>
-          <p:cNvPicPr>
-            <a:picLocks noChangeAspect="1"/>
-          </p:cNvPicPr>
-          <p:nvPr/>
-        </p:nvPicPr>
-        <p:blipFill>
-          <a:blip r:embed="rId8"/>
-          <a:stretch>
-            <a:fillRect/>
-          </a:stretch>
-        </p:blipFill>
-        <p:spPr>
-          <a:xfrm>
-            <a:off x="3081696" y="3969320"/>
-            <a:ext cx="47625" cy="180975"/>
-          </a:xfrm>
-          <a:prstGeom prst="rect">
-            <a:avLst/>
-          </a:prstGeom>
-        </p:spPr>
-      </p:pic>
-      <p:pic>
-        <p:nvPicPr>
-          <p:cNvPr id="12" name="Picture 11">
-            <a:extLst>
-              <a:ext uri="{FF2B5EF4-FFF2-40B4-BE49-F238E27FC236}">
-                <a16:creationId xmlns:a16="http://schemas.microsoft.com/office/drawing/2014/main" id="{B2AABF8C-D88D-C081-964B-2440E4E5BDB0}"/>
-              </a:ext>
-            </a:extLst>
-          </p:cNvPr>
-          <p:cNvPicPr>
-            <a:picLocks noChangeAspect="1"/>
-          </p:cNvPicPr>
-          <p:nvPr/>
-        </p:nvPicPr>
-        <p:blipFill>
-          <a:blip r:embed="rId8"/>
-          <a:stretch>
-            <a:fillRect/>
-          </a:stretch>
-        </p:blipFill>
-        <p:spPr>
-          <a:xfrm>
-            <a:off x="3448319" y="3969320"/>
-            <a:ext cx="47625" cy="180975"/>
-          </a:xfrm>
-          <a:prstGeom prst="rect">
-            <a:avLst/>
-          </a:prstGeom>
-        </p:spPr>
-      </p:pic>
-      <p:pic>
-        <p:nvPicPr>
-          <p:cNvPr id="13" name="Picture 12">
-            <a:extLst>
-              <a:ext uri="{FF2B5EF4-FFF2-40B4-BE49-F238E27FC236}">
-                <a16:creationId xmlns:a16="http://schemas.microsoft.com/office/drawing/2014/main" id="{049BF23F-3C0F-5706-4DCA-AF0F7D25D232}"/>
-              </a:ext>
-            </a:extLst>
-          </p:cNvPr>
-          <p:cNvPicPr>
-            <a:picLocks noChangeAspect="1"/>
-          </p:cNvPicPr>
-          <p:nvPr/>
-        </p:nvPicPr>
-        <p:blipFill>
-          <a:blip r:embed="rId8"/>
-          <a:stretch>
-            <a:fillRect/>
-          </a:stretch>
-        </p:blipFill>
-        <p:spPr>
-          <a:xfrm>
-            <a:off x="3847290" y="3969320"/>
-            <a:ext cx="47625" cy="180975"/>
+            <a:off x="2382328" y="3237422"/>
+            <a:ext cx="3505919" cy="240282"/>
           </a:xfrm>
           <a:prstGeom prst="rect">
             <a:avLst/>
@@ -4910,6 +5749,11 @@
         </p:spPr>
       </p:pic>
     </p:spTree>
+    <p:extLst>
+      <p:ext uri="{BB962C8B-B14F-4D97-AF65-F5344CB8AC3E}">
+        <p14:creationId xmlns:p14="http://schemas.microsoft.com/office/powerpoint/2010/main" val="364497861"/>
+      </p:ext>
+    </p:extLst>
   </p:cSld>
   <p:clrMapOvr>
     <a:masterClrMapping/>
@@ -4917,7 +5761,7 @@
 </p:sld>
 </file>
 
-<file path=ppt/slides/slide5.xml><?xml version="1.0" encoding="utf-8"?>
+<file path=ppt/slides/slide6.xml><?xml version="1.0" encoding="utf-8"?>
 <p:sld xmlns:a="http://schemas.openxmlformats.org/drawingml/2006/main" xmlns:r="http://schemas.openxmlformats.org/officeDocument/2006/relationships" xmlns:p="http://schemas.openxmlformats.org/presentationml/2006/main">
   <p:cSld>
     <p:bg>
@@ -4989,7 +5833,7 @@
         </p:style>
         <p:txBody>
           <a:bodyPr wrap="none" lIns="0" tIns="0" rIns="0" bIns="0" anchor="ctr">
-            <a:normAutofit fontScale="25000" lnSpcReduction="19999"/>
+            <a:normAutofit fontScale="25000" lnSpcReduction="20000"/>
           </a:bodyPr>
           <a:lstStyle/>
           <a:p>
@@ -5229,239 +6073,582 @@
           </a:p>
         </p:txBody>
       </p:sp>
-      <p:sp>
-        <p:nvSpPr>
-          <p:cNvPr id="9" name="Text 3">
-            <a:extLst>
-              <a:ext uri="{FF2B5EF4-FFF2-40B4-BE49-F238E27FC236}">
-                <a16:creationId xmlns:a16="http://schemas.microsoft.com/office/drawing/2014/main" id="{9893A168-C920-C510-5438-CB82C0A97D8D}"/>
-              </a:ext>
-            </a:extLst>
-          </p:cNvPr>
-          <p:cNvSpPr/>
-          <p:nvPr/>
-        </p:nvSpPr>
-        <p:spPr>
-          <a:xfrm>
-            <a:off x="685800" y="2157427"/>
-            <a:ext cx="6266312" cy="1215720"/>
-          </a:xfrm>
-          <a:prstGeom prst="rect">
-            <a:avLst/>
-          </a:prstGeom>
-          <a:noFill/>
-          <a:ln w="0">
-            <a:noFill/>
-          </a:ln>
-        </p:spPr>
-        <p:style>
-          <a:lnRef idx="0">
-            <a:scrgbClr r="0" g="0" b="0"/>
-          </a:lnRef>
-          <a:fillRef idx="0">
-            <a:scrgbClr r="0" g="0" b="0"/>
-          </a:fillRef>
-          <a:effectRef idx="0">
-            <a:scrgbClr r="0" g="0" b="0"/>
-          </a:effectRef>
-          <a:fontRef idx="minor"/>
-        </p:style>
-        <p:txBody>
-          <a:bodyPr lIns="0" tIns="0" rIns="0" bIns="0" anchor="t">
-            <a:noAutofit/>
-          </a:bodyPr>
-          <a:lstStyle/>
-          <a:p>
-            <a:pPr marL="285750" indent="-285750">
-              <a:buFont typeface="Arial"/>
-              <a:buChar char="•"/>
-            </a:pPr>
-            <a:r>
-              <a:rPr lang="en-US" sz="1650">
-                <a:solidFill>
-                  <a:schemeClr val="accent1"/>
-                </a:solidFill>
-                <a:ea typeface="+mn-lt"/>
-                <a:cs typeface="+mn-lt"/>
-              </a:rPr>
-              <a:t>"Mimics the physical process of annealing metal"</a:t>
-            </a:r>
-            <a:endParaRPr lang="en-US" sz="1650">
-              <a:solidFill>
-                <a:schemeClr val="accent1"/>
-              </a:solidFill>
-              <a:ea typeface="Calibri" panose="020F0502020204030204"/>
-              <a:cs typeface="Calibri" panose="020F0502020204030204"/>
-            </a:endParaRPr>
-          </a:p>
-          <a:p>
-            <a:pPr marL="285750" indent="-285750">
-              <a:buFont typeface="Arial"/>
-              <a:buChar char="•"/>
-            </a:pPr>
-            <a:endParaRPr lang="en-US" sz="1650">
-              <a:solidFill>
-                <a:schemeClr val="accent1"/>
-              </a:solidFill>
-              <a:ea typeface="Calibri" panose="020F0502020204030204"/>
-              <a:cs typeface="Calibri" panose="020F0502020204030204"/>
-            </a:endParaRPr>
-          </a:p>
-          <a:p>
-            <a:pPr marL="285750" indent="-285750">
-              <a:buFont typeface="Arial"/>
-              <a:buChar char="•"/>
-            </a:pPr>
-            <a:r>
-              <a:rPr lang="en-US" sz="1650">
-                <a:solidFill>
-                  <a:schemeClr val="accent1"/>
-                </a:solidFill>
-                <a:ea typeface="Calibri" panose="020F0502020204030204"/>
-                <a:cs typeface="Calibri" panose="020F0502020204030204"/>
-              </a:rPr>
-              <a:t>Tk = T0 * (1 – k /k max) (with 50'000 Iterations or 20 L per day)</a:t>
-            </a:r>
-          </a:p>
-          <a:p>
-            <a:pPr marL="742950" lvl="1" indent="-285750">
-              <a:buFont typeface="Courier New,monospace"/>
-              <a:buChar char="o"/>
-            </a:pPr>
-            <a:r>
-              <a:rPr lang="en-US" sz="1700">
-                <a:solidFill>
-                  <a:schemeClr val="accent1"/>
-                </a:solidFill>
-                <a:ea typeface="Calibri" panose="020F0502020204030204"/>
-                <a:cs typeface="Calibri" panose="020F0502020204030204"/>
-              </a:rPr>
-              <a:t>Different Distributions</a:t>
-            </a:r>
-            <a:endParaRPr lang="en-US" sz="1700">
-              <a:solidFill>
-                <a:srgbClr val="000000"/>
-              </a:solidFill>
-              <a:ea typeface="Calibri" panose="020F0502020204030204"/>
-              <a:cs typeface="Calibri" panose="020F0502020204030204"/>
-            </a:endParaRPr>
-          </a:p>
-          <a:p>
-            <a:pPr marL="742950" lvl="1" indent="-285750">
-              <a:buFont typeface="Courier New,monospace"/>
-              <a:buChar char="o"/>
-            </a:pPr>
-            <a:r>
-              <a:rPr lang="en-US" sz="1700">
-                <a:solidFill>
-                  <a:schemeClr val="accent1"/>
-                </a:solidFill>
-                <a:ea typeface="Calibri" panose="020F0502020204030204"/>
-                <a:cs typeface="Calibri" panose="020F0502020204030204"/>
-              </a:rPr>
-              <a:t>Prioritizing higher vulnerability</a:t>
-            </a:r>
-            <a:endParaRPr lang="en-US"/>
-          </a:p>
-          <a:p>
-            <a:pPr marL="742950" lvl="1" indent="-285750">
-              <a:buFont typeface="Courier New,monospace"/>
-              <a:buChar char="o"/>
-            </a:pPr>
-            <a:endParaRPr lang="en-US" sz="1700">
-              <a:solidFill>
-                <a:schemeClr val="accent1"/>
-              </a:solidFill>
-              <a:ea typeface="Calibri" panose="020F0502020204030204"/>
-              <a:cs typeface="Calibri" panose="020F0502020204030204"/>
-            </a:endParaRPr>
-          </a:p>
-          <a:p>
-            <a:pPr marL="285750" indent="-285750">
-              <a:buFont typeface="Arial"/>
-              <a:buChar char="•"/>
-            </a:pPr>
-            <a:r>
-              <a:rPr lang="en-US" sz="1650" dirty="0" err="1">
-                <a:solidFill>
-                  <a:schemeClr val="accent1"/>
-                </a:solidFill>
-                <a:ea typeface="Calibri" panose="020F0502020204030204"/>
-                <a:cs typeface="Calibri" panose="020F0502020204030204"/>
-              </a:rPr>
-              <a:t>ai_xi</a:t>
-            </a:r>
-            <a:r>
-              <a:rPr lang="en-US" sz="1650" dirty="0">
-                <a:solidFill>
-                  <a:schemeClr val="accent1"/>
-                </a:solidFill>
-                <a:ea typeface="Calibri" panose="020F0502020204030204"/>
-                <a:cs typeface="Calibri" panose="020F0502020204030204"/>
-              </a:rPr>
-              <a:t> = S -&gt; remaining satisfied</a:t>
-            </a:r>
-          </a:p>
-          <a:p>
-            <a:pPr marL="285750" indent="-285750">
-              <a:buFont typeface="Arial"/>
-              <a:buChar char="•"/>
-            </a:pPr>
-            <a:endParaRPr lang="en-US" sz="1650">
-              <a:solidFill>
-                <a:schemeClr val="accent1"/>
-              </a:solidFill>
-              <a:ea typeface="Calibri" panose="020F0502020204030204"/>
-              <a:cs typeface="Calibri" panose="020F0502020204030204"/>
-            </a:endParaRPr>
-          </a:p>
-          <a:p>
-            <a:pPr marL="285750" indent="-285750">
-              <a:buFont typeface="Arial"/>
-              <a:buChar char="•"/>
-            </a:pPr>
-            <a:r>
-              <a:rPr lang="en-US" sz="1650">
-                <a:solidFill>
-                  <a:schemeClr val="accent1"/>
-                </a:solidFill>
-                <a:ea typeface="Calibri" panose="020F0502020204030204"/>
-                <a:cs typeface="Calibri" panose="020F0502020204030204"/>
-              </a:rPr>
-              <a:t>Exploration High T / low T</a:t>
-            </a:r>
-          </a:p>
-          <a:p>
-            <a:pPr marL="285750" indent="-285750">
-              <a:buFont typeface="Arial"/>
-              <a:buChar char="•"/>
-            </a:pPr>
-            <a:endParaRPr lang="en-US" sz="1650">
-              <a:solidFill>
-                <a:schemeClr val="accent1"/>
-              </a:solidFill>
-              <a:ea typeface="Calibri" panose="020F0502020204030204"/>
-              <a:cs typeface="Calibri" panose="020F0502020204030204"/>
-            </a:endParaRPr>
-          </a:p>
-          <a:p>
-            <a:pPr marL="285750" indent="-285750">
-              <a:lnSpc>
-                <a:spcPts val="2392"/>
-              </a:lnSpc>
-              <a:buFont typeface="Arial"/>
-              <a:buChar char="•"/>
-            </a:pPr>
-            <a:endParaRPr lang="en-US" sz="1650">
-              <a:solidFill>
-                <a:schemeClr val="accent1"/>
-              </a:solidFill>
-              <a:ea typeface="Calibri" panose="020F0502020204030204"/>
-              <a:cs typeface="Calibri" panose="020F0502020204030204"/>
-            </a:endParaRPr>
-          </a:p>
-        </p:txBody>
-      </p:sp>
+      <mc:AlternateContent xmlns:mc="http://schemas.openxmlformats.org/markup-compatibility/2006" xmlns:a14="http://schemas.microsoft.com/office/drawing/2010/main">
+        <mc:Choice Requires="a14">
+          <p:sp>
+            <p:nvSpPr>
+              <p:cNvPr id="9" name="Text 3">
+                <a:extLst>
+                  <a:ext uri="{FF2B5EF4-FFF2-40B4-BE49-F238E27FC236}">
+                    <a16:creationId xmlns:a16="http://schemas.microsoft.com/office/drawing/2014/main" id="{9893A168-C920-C510-5438-CB82C0A97D8D}"/>
+                  </a:ext>
+                </a:extLst>
+              </p:cNvPr>
+              <p:cNvSpPr/>
+              <p:nvPr/>
+            </p:nvSpPr>
+            <p:spPr>
+              <a:xfrm>
+                <a:off x="685800" y="2157427"/>
+                <a:ext cx="6266312" cy="1215720"/>
+              </a:xfrm>
+              <a:prstGeom prst="rect">
+                <a:avLst/>
+              </a:prstGeom>
+              <a:noFill/>
+              <a:ln w="0">
+                <a:noFill/>
+              </a:ln>
+            </p:spPr>
+            <p:style>
+              <a:lnRef idx="0">
+                <a:scrgbClr r="0" g="0" b="0"/>
+              </a:lnRef>
+              <a:fillRef idx="0">
+                <a:scrgbClr r="0" g="0" b="0"/>
+              </a:fillRef>
+              <a:effectRef idx="0">
+                <a:scrgbClr r="0" g="0" b="0"/>
+              </a:effectRef>
+              <a:fontRef idx="minor"/>
+            </p:style>
+            <p:txBody>
+              <a:bodyPr lIns="0" tIns="0" rIns="0" bIns="0" anchor="t">
+                <a:noAutofit/>
+              </a:bodyPr>
+              <a:lstStyle/>
+              <a:p>
+                <a:endParaRPr lang="en-US" sz="1650">
+                  <a:solidFill>
+                    <a:schemeClr val="accent1"/>
+                  </a:solidFill>
+                  <a:ea typeface="Calibri" panose="020F0502020204030204"/>
+                  <a:cs typeface="Calibri" panose="020F0502020204030204"/>
+                </a:endParaRPr>
+              </a:p>
+              <a:p>
+                <a:pPr marL="285750" indent="-285750">
+                  <a:buFont typeface="Arial"/>
+                  <a:buChar char="•"/>
+                </a:pPr>
+                <a14:m>
+                  <m:oMath xmlns:m="http://schemas.openxmlformats.org/officeDocument/2006/math">
+                    <m:sSub>
+                      <m:sSubPr>
+                        <m:ctrlPr>
+                          <a:rPr lang="de-CH" sz="1650" b="0" i="1" smtClean="0">
+                            <a:solidFill>
+                              <a:schemeClr val="accent1"/>
+                            </a:solidFill>
+                            <a:latin typeface="Cambria Math" panose="02040503050406030204" pitchFamily="18" charset="0"/>
+                            <a:ea typeface="Calibri" panose="020F0502020204030204"/>
+                            <a:cs typeface="Calibri" panose="020F0502020204030204"/>
+                          </a:rPr>
+                        </m:ctrlPr>
+                      </m:sSubPr>
+                      <m:e>
+                        <m:r>
+                          <m:rPr>
+                            <m:sty m:val="p"/>
+                          </m:rPr>
+                          <a:rPr lang="de-CH" sz="1650" b="0" i="0" smtClean="0">
+                            <a:solidFill>
+                              <a:schemeClr val="accent1"/>
+                            </a:solidFill>
+                            <a:latin typeface="Cambria Math" panose="02040503050406030204" pitchFamily="18" charset="0"/>
+                            <a:ea typeface="Calibri" panose="020F0502020204030204"/>
+                            <a:cs typeface="Calibri" panose="020F0502020204030204"/>
+                          </a:rPr>
+                          <m:t>T</m:t>
+                        </m:r>
+                      </m:e>
+                      <m:sub>
+                        <m:r>
+                          <m:rPr>
+                            <m:sty m:val="p"/>
+                          </m:rPr>
+                          <a:rPr lang="de-CH" sz="1650" b="0" i="0" smtClean="0">
+                            <a:solidFill>
+                              <a:schemeClr val="accent1"/>
+                            </a:solidFill>
+                            <a:latin typeface="Cambria Math" panose="02040503050406030204" pitchFamily="18" charset="0"/>
+                            <a:ea typeface="Calibri" panose="020F0502020204030204"/>
+                            <a:cs typeface="Calibri" panose="020F0502020204030204"/>
+                          </a:rPr>
+                          <m:t>k</m:t>
+                        </m:r>
+                      </m:sub>
+                    </m:sSub>
+                    <m:r>
+                      <a:rPr lang="en-US" sz="1650" i="1" smtClean="0">
+                        <a:solidFill>
+                          <a:schemeClr val="accent1"/>
+                        </a:solidFill>
+                        <a:latin typeface="Cambria Math" panose="02040503050406030204" pitchFamily="18" charset="0"/>
+                        <a:ea typeface="Calibri" panose="020F0502020204030204"/>
+                        <a:cs typeface="Calibri" panose="020F0502020204030204"/>
+                      </a:rPr>
+                      <m:t>=</m:t>
+                    </m:r>
+                    <m:sSub>
+                      <m:sSubPr>
+                        <m:ctrlPr>
+                          <a:rPr lang="de-CH" sz="1650" b="0" i="1" smtClean="0">
+                            <a:solidFill>
+                              <a:schemeClr val="accent1"/>
+                            </a:solidFill>
+                            <a:latin typeface="Cambria Math" panose="02040503050406030204" pitchFamily="18" charset="0"/>
+                            <a:ea typeface="Calibri" panose="020F0502020204030204"/>
+                            <a:cs typeface="Calibri" panose="020F0502020204030204"/>
+                          </a:rPr>
+                        </m:ctrlPr>
+                      </m:sSubPr>
+                      <m:e>
+                        <m:r>
+                          <a:rPr lang="de-CH" sz="1650" b="0" i="1" smtClean="0">
+                            <a:solidFill>
+                              <a:schemeClr val="accent1"/>
+                            </a:solidFill>
+                            <a:latin typeface="Cambria Math" panose="02040503050406030204" pitchFamily="18" charset="0"/>
+                            <a:ea typeface="Calibri" panose="020F0502020204030204"/>
+                            <a:cs typeface="Calibri" panose="020F0502020204030204"/>
+                          </a:rPr>
+                          <m:t>𝑇</m:t>
+                        </m:r>
+                      </m:e>
+                      <m:sub>
+                        <m:r>
+                          <a:rPr lang="de-CH" sz="1650" b="0" i="1" smtClean="0">
+                            <a:solidFill>
+                              <a:schemeClr val="accent1"/>
+                            </a:solidFill>
+                            <a:latin typeface="Cambria Math" panose="02040503050406030204" pitchFamily="18" charset="0"/>
+                            <a:ea typeface="Calibri" panose="020F0502020204030204"/>
+                            <a:cs typeface="Calibri" panose="020F0502020204030204"/>
+                          </a:rPr>
+                          <m:t>0</m:t>
+                        </m:r>
+                      </m:sub>
+                    </m:sSub>
+                    <m:r>
+                      <a:rPr lang="de-CH" sz="1650" b="0" i="1" smtClean="0">
+                        <a:solidFill>
+                          <a:schemeClr val="accent1"/>
+                        </a:solidFill>
+                        <a:latin typeface="Cambria Math" panose="02040503050406030204" pitchFamily="18" charset="0"/>
+                        <a:ea typeface="Calibri" panose="020F0502020204030204"/>
+                        <a:cs typeface="Calibri" panose="020F0502020204030204"/>
+                      </a:rPr>
+                      <m:t> ∗</m:t>
+                    </m:r>
+                    <m:d>
+                      <m:dPr>
+                        <m:ctrlPr>
+                          <a:rPr lang="de-CH" sz="1650" b="0" i="1" smtClean="0">
+                            <a:solidFill>
+                              <a:schemeClr val="accent1"/>
+                            </a:solidFill>
+                            <a:latin typeface="Cambria Math" panose="02040503050406030204" pitchFamily="18" charset="0"/>
+                            <a:ea typeface="Calibri" panose="020F0502020204030204"/>
+                            <a:cs typeface="Calibri" panose="020F0502020204030204"/>
+                          </a:rPr>
+                        </m:ctrlPr>
+                      </m:dPr>
+                      <m:e>
+                        <m:f>
+                          <m:fPr>
+                            <m:ctrlPr>
+                              <a:rPr lang="de-CH" sz="1650" b="0" i="1" smtClean="0">
+                                <a:solidFill>
+                                  <a:schemeClr val="accent1"/>
+                                </a:solidFill>
+                                <a:latin typeface="Cambria Math" panose="02040503050406030204" pitchFamily="18" charset="0"/>
+                                <a:ea typeface="Calibri" panose="020F0502020204030204"/>
+                                <a:cs typeface="Calibri" panose="020F0502020204030204"/>
+                              </a:rPr>
+                            </m:ctrlPr>
+                          </m:fPr>
+                          <m:num>
+                            <m:r>
+                              <a:rPr lang="de-CH" sz="1650" i="1">
+                                <a:solidFill>
+                                  <a:schemeClr val="accent1"/>
+                                </a:solidFill>
+                                <a:latin typeface="Cambria Math" panose="02040503050406030204" pitchFamily="18" charset="0"/>
+                                <a:ea typeface="Calibri" panose="020F0502020204030204"/>
+                                <a:cs typeface="Calibri" panose="020F0502020204030204"/>
+                              </a:rPr>
+                              <m:t>1−</m:t>
+                            </m:r>
+                            <m:r>
+                              <a:rPr lang="de-CH" sz="1650" i="1">
+                                <a:solidFill>
+                                  <a:schemeClr val="accent1"/>
+                                </a:solidFill>
+                                <a:latin typeface="Cambria Math" panose="02040503050406030204" pitchFamily="18" charset="0"/>
+                                <a:ea typeface="Calibri" panose="020F0502020204030204"/>
+                                <a:cs typeface="Calibri" panose="020F0502020204030204"/>
+                              </a:rPr>
+                              <m:t>𝑘</m:t>
+                            </m:r>
+                          </m:num>
+                          <m:den>
+                            <m:r>
+                              <a:rPr lang="de-CH" sz="1650" b="0" i="1" smtClean="0">
+                                <a:solidFill>
+                                  <a:schemeClr val="accent1"/>
+                                </a:solidFill>
+                                <a:latin typeface="Cambria Math" panose="02040503050406030204" pitchFamily="18" charset="0"/>
+                                <a:ea typeface="Calibri" panose="020F0502020204030204"/>
+                                <a:cs typeface="Calibri" panose="020F0502020204030204"/>
+                              </a:rPr>
+                              <m:t>𝑘</m:t>
+                            </m:r>
+                            <m:r>
+                              <a:rPr lang="de-CH" sz="1650" b="0" i="1" smtClean="0">
+                                <a:solidFill>
+                                  <a:schemeClr val="accent1"/>
+                                </a:solidFill>
+                                <a:latin typeface="Cambria Math" panose="02040503050406030204" pitchFamily="18" charset="0"/>
+                                <a:ea typeface="Calibri" panose="020F0502020204030204"/>
+                                <a:cs typeface="Calibri" panose="020F0502020204030204"/>
+                              </a:rPr>
+                              <m:t>_</m:t>
+                            </m:r>
+                            <m:r>
+                              <a:rPr lang="de-CH" sz="1650" b="0" i="1" smtClean="0">
+                                <a:solidFill>
+                                  <a:schemeClr val="accent1"/>
+                                </a:solidFill>
+                                <a:latin typeface="Cambria Math" panose="02040503050406030204" pitchFamily="18" charset="0"/>
+                                <a:ea typeface="Calibri" panose="020F0502020204030204"/>
+                                <a:cs typeface="Calibri" panose="020F0502020204030204"/>
+                              </a:rPr>
+                              <m:t>𝑚𝑎𝑥</m:t>
+                            </m:r>
+                          </m:den>
+                        </m:f>
+                      </m:e>
+                    </m:d>
+                  </m:oMath>
+                </a14:m>
+                <a:r>
+                  <a:rPr lang="en-US" sz="1650">
+                    <a:solidFill>
+                      <a:schemeClr val="accent1"/>
+                    </a:solidFill>
+                    <a:ea typeface="Calibri" panose="020F0502020204030204"/>
+                    <a:cs typeface="Calibri" panose="020F0502020204030204"/>
+                  </a:rPr>
+                  <a:t> (with 50'000 Iterations )</a:t>
+                </a:r>
+              </a:p>
+              <a:p>
+                <a:pPr marL="742950" lvl="1" indent="-285750">
+                  <a:buFont typeface="Courier New,monospace"/>
+                  <a:buChar char="o"/>
+                </a:pPr>
+                <a:r>
+                  <a:rPr lang="en-US" sz="1700">
+                    <a:solidFill>
+                      <a:schemeClr val="accent1"/>
+                    </a:solidFill>
+                    <a:ea typeface="Calibri" panose="020F0502020204030204"/>
+                    <a:cs typeface="Calibri" panose="020F0502020204030204"/>
+                  </a:rPr>
+                  <a:t>Different Distributions</a:t>
+                </a:r>
+                <a:endParaRPr lang="en-US" sz="1700">
+                  <a:solidFill>
+                    <a:srgbClr val="000000"/>
+                  </a:solidFill>
+                  <a:ea typeface="Calibri" panose="020F0502020204030204"/>
+                  <a:cs typeface="Calibri" panose="020F0502020204030204"/>
+                </a:endParaRPr>
+              </a:p>
+              <a:p>
+                <a:pPr marL="742950" lvl="1" indent="-285750">
+                  <a:buFont typeface="Courier New,monospace"/>
+                  <a:buChar char="o"/>
+                </a:pPr>
+                <a:r>
+                  <a:rPr lang="en-US" sz="1700">
+                    <a:solidFill>
+                      <a:schemeClr val="accent1"/>
+                    </a:solidFill>
+                    <a:ea typeface="Calibri" panose="020F0502020204030204"/>
+                    <a:cs typeface="Calibri" panose="020F0502020204030204"/>
+                  </a:rPr>
+                  <a:t>Prioritizing higher vulnerability</a:t>
+                </a:r>
+                <a:endParaRPr lang="en-US"/>
+              </a:p>
+              <a:p>
+                <a:pPr marL="742950" lvl="1" indent="-285750">
+                  <a:buFont typeface="Courier New,monospace"/>
+                  <a:buChar char="o"/>
+                </a:pPr>
+                <a:endParaRPr lang="en-US" sz="1700">
+                  <a:solidFill>
+                    <a:schemeClr val="accent1"/>
+                  </a:solidFill>
+                  <a:ea typeface="Calibri" panose="020F0502020204030204"/>
+                  <a:cs typeface="Calibri" panose="020F0502020204030204"/>
+                </a:endParaRPr>
+              </a:p>
+              <a:p>
+                <a:pPr marL="285750" indent="-285750">
+                  <a:buFont typeface="Arial"/>
+                  <a:buChar char="•"/>
+                </a:pPr>
+                <a14:m>
+                  <m:oMath xmlns:m="http://schemas.openxmlformats.org/officeDocument/2006/math">
+                    <m:sSub>
+                      <m:sSubPr>
+                        <m:ctrlPr>
+                          <a:rPr lang="de-CH" sz="1650" b="0" i="1" smtClean="0">
+                            <a:solidFill>
+                              <a:schemeClr val="accent1"/>
+                            </a:solidFill>
+                            <a:latin typeface="Cambria Math" panose="02040503050406030204" pitchFamily="18" charset="0"/>
+                            <a:ea typeface="Calibri" panose="020F0502020204030204"/>
+                            <a:cs typeface="Calibri" panose="020F0502020204030204"/>
+                          </a:rPr>
+                        </m:ctrlPr>
+                      </m:sSubPr>
+                      <m:e>
+                        <m:r>
+                          <a:rPr lang="de-CH" sz="1650" b="0" i="1" smtClean="0">
+                            <a:solidFill>
+                              <a:schemeClr val="accent1"/>
+                            </a:solidFill>
+                            <a:latin typeface="Cambria Math" panose="02040503050406030204" pitchFamily="18" charset="0"/>
+                            <a:ea typeface="Calibri" panose="020F0502020204030204"/>
+                            <a:cs typeface="Calibri" panose="020F0502020204030204"/>
+                          </a:rPr>
+                          <m:t>𝑎</m:t>
+                        </m:r>
+                      </m:e>
+                      <m:sub>
+                        <m:r>
+                          <a:rPr lang="de-CH" sz="1650" b="0" i="1" smtClean="0">
+                            <a:solidFill>
+                              <a:schemeClr val="accent1"/>
+                            </a:solidFill>
+                            <a:latin typeface="Cambria Math" panose="02040503050406030204" pitchFamily="18" charset="0"/>
+                            <a:ea typeface="Calibri" panose="020F0502020204030204"/>
+                            <a:cs typeface="Calibri" panose="020F0502020204030204"/>
+                          </a:rPr>
+                          <m:t>𝑖</m:t>
+                        </m:r>
+                      </m:sub>
+                    </m:sSub>
+                    <m:r>
+                      <a:rPr lang="de-CH" sz="1650" b="0" i="1" smtClean="0">
+                        <a:solidFill>
+                          <a:schemeClr val="accent1"/>
+                        </a:solidFill>
+                        <a:latin typeface="Cambria Math" panose="02040503050406030204" pitchFamily="18" charset="0"/>
+                        <a:ea typeface="Calibri" panose="020F0502020204030204"/>
+                        <a:cs typeface="Calibri" panose="020F0502020204030204"/>
+                      </a:rPr>
+                      <m:t>∗</m:t>
+                    </m:r>
+                    <m:sSub>
+                      <m:sSubPr>
+                        <m:ctrlPr>
+                          <a:rPr lang="de-CH" sz="1650" b="0" i="1" smtClean="0">
+                            <a:solidFill>
+                              <a:schemeClr val="accent1"/>
+                            </a:solidFill>
+                            <a:latin typeface="Cambria Math" panose="02040503050406030204" pitchFamily="18" charset="0"/>
+                            <a:ea typeface="Calibri" panose="020F0502020204030204"/>
+                            <a:cs typeface="Calibri" panose="020F0502020204030204"/>
+                          </a:rPr>
+                        </m:ctrlPr>
+                      </m:sSubPr>
+                      <m:e>
+                        <m:r>
+                          <a:rPr lang="de-CH" sz="1650" b="0" i="1" smtClean="0">
+                            <a:solidFill>
+                              <a:schemeClr val="accent1"/>
+                            </a:solidFill>
+                            <a:latin typeface="Cambria Math" panose="02040503050406030204" pitchFamily="18" charset="0"/>
+                            <a:ea typeface="Calibri" panose="020F0502020204030204"/>
+                            <a:cs typeface="Calibri" panose="020F0502020204030204"/>
+                          </a:rPr>
+                          <m:t>𝑥</m:t>
+                        </m:r>
+                      </m:e>
+                      <m:sub>
+                        <m:r>
+                          <a:rPr lang="de-CH" sz="1650" b="0" i="1" smtClean="0">
+                            <a:solidFill>
+                              <a:schemeClr val="accent1"/>
+                            </a:solidFill>
+                            <a:latin typeface="Cambria Math" panose="02040503050406030204" pitchFamily="18" charset="0"/>
+                            <a:ea typeface="Calibri" panose="020F0502020204030204"/>
+                            <a:cs typeface="Calibri" panose="020F0502020204030204"/>
+                          </a:rPr>
+                          <m:t>𝑖</m:t>
+                        </m:r>
+                      </m:sub>
+                    </m:sSub>
+                    <m:r>
+                      <a:rPr lang="en-US" sz="1650" i="1" smtClean="0">
+                        <a:solidFill>
+                          <a:schemeClr val="accent1"/>
+                        </a:solidFill>
+                        <a:latin typeface="Cambria Math" panose="02040503050406030204" pitchFamily="18" charset="0"/>
+                        <a:ea typeface="Calibri" panose="020F0502020204030204"/>
+                        <a:cs typeface="Calibri" panose="020F0502020204030204"/>
+                      </a:rPr>
+                      <m:t>=</m:t>
+                    </m:r>
+                    <m:r>
+                      <a:rPr lang="de-CH" sz="1650" b="0" i="1" smtClean="0">
+                        <a:solidFill>
+                          <a:schemeClr val="accent1"/>
+                        </a:solidFill>
+                        <a:latin typeface="Cambria Math" panose="02040503050406030204" pitchFamily="18" charset="0"/>
+                        <a:ea typeface="Calibri" panose="020F0502020204030204"/>
+                        <a:cs typeface="Calibri" panose="020F0502020204030204"/>
+                      </a:rPr>
+                      <m:t>𝑆</m:t>
+                    </m:r>
+                    <m:r>
+                      <a:rPr lang="de-CH" sz="1650" b="0" i="1" smtClean="0">
+                        <a:solidFill>
+                          <a:schemeClr val="accent1"/>
+                        </a:solidFill>
+                        <a:latin typeface="Cambria Math" panose="02040503050406030204" pitchFamily="18" charset="0"/>
+                        <a:ea typeface="Calibri" panose="020F0502020204030204"/>
+                        <a:cs typeface="Calibri" panose="020F0502020204030204"/>
+                      </a:rPr>
+                      <m:t> </m:t>
+                    </m:r>
+                  </m:oMath>
+                </a14:m>
+                <a:r>
+                  <a:rPr lang="en-US" sz="1650">
+                    <a:solidFill>
+                      <a:schemeClr val="accent1"/>
+                    </a:solidFill>
+                    <a:ea typeface="Calibri" panose="020F0502020204030204"/>
+                    <a:cs typeface="Calibri" panose="020F0502020204030204"/>
+                  </a:rPr>
+                  <a:t>-&gt; remaining satisfied</a:t>
+                </a:r>
+              </a:p>
+              <a:p>
+                <a:pPr marL="285750" indent="-285750">
+                  <a:buFont typeface="Arial"/>
+                  <a:buChar char="•"/>
+                </a:pPr>
+                <a:endParaRPr lang="en-US" sz="1650">
+                  <a:solidFill>
+                    <a:schemeClr val="accent1"/>
+                  </a:solidFill>
+                  <a:ea typeface="Calibri" panose="020F0502020204030204"/>
+                  <a:cs typeface="Calibri" panose="020F0502020204030204"/>
+                </a:endParaRPr>
+              </a:p>
+              <a:p>
+                <a:pPr marL="285750" indent="-285750">
+                  <a:buFont typeface="Arial"/>
+                  <a:buChar char="•"/>
+                </a:pPr>
+                <a:r>
+                  <a:rPr lang="en-US" sz="1650">
+                    <a:solidFill>
+                      <a:schemeClr val="accent1"/>
+                    </a:solidFill>
+                    <a:ea typeface="Calibri" panose="020F0502020204030204"/>
+                    <a:cs typeface="Calibri" panose="020F0502020204030204"/>
+                  </a:rPr>
+                  <a:t>Exploration High T / low T</a:t>
+                </a:r>
+              </a:p>
+              <a:p>
+                <a:pPr marL="285750" indent="-285750">
+                  <a:buFont typeface="Arial"/>
+                  <a:buChar char="•"/>
+                </a:pPr>
+                <a:endParaRPr lang="en-US" sz="1650">
+                  <a:solidFill>
+                    <a:schemeClr val="accent1"/>
+                  </a:solidFill>
+                  <a:ea typeface="Calibri" panose="020F0502020204030204"/>
+                  <a:cs typeface="Calibri" panose="020F0502020204030204"/>
+                </a:endParaRPr>
+              </a:p>
+              <a:p>
+                <a:pPr marL="285750" indent="-285750">
+                  <a:lnSpc>
+                    <a:spcPts val="2392"/>
+                  </a:lnSpc>
+                  <a:buFont typeface="Arial"/>
+                  <a:buChar char="•"/>
+                </a:pPr>
+                <a:endParaRPr lang="en-US" sz="1650">
+                  <a:solidFill>
+                    <a:schemeClr val="accent1"/>
+                  </a:solidFill>
+                  <a:ea typeface="Calibri" panose="020F0502020204030204"/>
+                  <a:cs typeface="Calibri" panose="020F0502020204030204"/>
+                </a:endParaRPr>
+              </a:p>
+            </p:txBody>
+          </p:sp>
+        </mc:Choice>
+        <mc:Fallback xmlns="">
+          <p:sp>
+            <p:nvSpPr>
+              <p:cNvPr id="9" name="Text 3">
+                <a:extLst>
+                  <a:ext uri="{FF2B5EF4-FFF2-40B4-BE49-F238E27FC236}">
+                    <a16:creationId xmlns:a16="http://schemas.microsoft.com/office/drawing/2014/main" id="{9893A168-C920-C510-5438-CB82C0A97D8D}"/>
+                  </a:ext>
+                </a:extLst>
+              </p:cNvPr>
+              <p:cNvSpPr>
+                <a:spLocks noRot="1" noChangeAspect="1" noMove="1" noResize="1" noEditPoints="1" noAdjustHandles="1" noChangeArrowheads="1" noChangeShapeType="1" noTextEdit="1"/>
+              </p:cNvSpPr>
+              <p:nvPr/>
+            </p:nvSpPr>
+            <p:spPr>
+              <a:xfrm>
+                <a:off x="685800" y="2157427"/>
+                <a:ext cx="6266312" cy="1215720"/>
+              </a:xfrm>
+              <a:prstGeom prst="rect">
+                <a:avLst/>
+              </a:prstGeom>
+              <a:blipFill>
+                <a:blip r:embed="rId3"/>
+                <a:stretch>
+                  <a:fillRect l="-1947" b="-89447"/>
+                </a:stretch>
+              </a:blipFill>
+              <a:ln w="0">
+                <a:noFill/>
+              </a:ln>
+            </p:spPr>
+            <p:txBody>
+              <a:bodyPr/>
+              <a:lstStyle/>
+              <a:p>
+                <a:r>
+                  <a:rPr lang="en-US">
+                    <a:noFill/>
+                  </a:rPr>
+                  <a:t> </a:t>
+                </a:r>
+              </a:p>
+            </p:txBody>
+          </p:sp>
+        </mc:Fallback>
+      </mc:AlternateContent>
     </p:spTree>
     <p:extLst>
       <p:ext uri="{BB962C8B-B14F-4D97-AF65-F5344CB8AC3E}">
@@ -5475,7 +6662,874 @@
 </p:sld>
 </file>
 
-<file path=ppt/slides/slide6.xml><?xml version="1.0" encoding="utf-8"?>
+<file path=ppt/slides/slide7.xml><?xml version="1.0" encoding="utf-8"?>
+<p:sld xmlns:a="http://schemas.openxmlformats.org/drawingml/2006/main" xmlns:r="http://schemas.openxmlformats.org/officeDocument/2006/relationships" xmlns:p="http://schemas.openxmlformats.org/presentationml/2006/main">
+  <p:cSld>
+    <p:bg>
+      <p:bgPr>
+        <a:solidFill>
+          <a:srgbClr val="005B96"/>
+        </a:solidFill>
+        <a:effectLst/>
+      </p:bgPr>
+    </p:bg>
+    <p:spTree>
+      <p:nvGrpSpPr>
+        <p:cNvPr id="1" name="">
+          <a:extLst>
+            <a:ext uri="{FF2B5EF4-FFF2-40B4-BE49-F238E27FC236}">
+              <a16:creationId xmlns:a16="http://schemas.microsoft.com/office/drawing/2014/main" id="{D60CB87A-DF60-B0EA-F60C-EEBC5304F91D}"/>
+            </a:ext>
+          </a:extLst>
+        </p:cNvPr>
+        <p:cNvGrpSpPr/>
+        <p:nvPr/>
+      </p:nvGrpSpPr>
+      <p:grpSpPr>
+        <a:xfrm>
+          <a:off x="0" y="0"/>
+          <a:ext cx="0" cy="0"/>
+          <a:chOff x="0" y="0"/>
+          <a:chExt cx="0" cy="0"/>
+        </a:xfrm>
+      </p:grpSpPr>
+      <p:sp>
+        <p:nvSpPr>
+          <p:cNvPr id="4" name="Rectangle 3">
+            <a:extLst>
+              <a:ext uri="{FF2B5EF4-FFF2-40B4-BE49-F238E27FC236}">
+                <a16:creationId xmlns:a16="http://schemas.microsoft.com/office/drawing/2014/main" id="{7F2BE14E-1F0F-0190-4E42-7FED4CFA89DC}"/>
+              </a:ext>
+            </a:extLst>
+          </p:cNvPr>
+          <p:cNvSpPr/>
+          <p:nvPr/>
+        </p:nvSpPr>
+        <p:spPr>
+          <a:xfrm>
+            <a:off x="-1" y="1719891"/>
+            <a:ext cx="9146699" cy="3434393"/>
+          </a:xfrm>
+          <a:prstGeom prst="rect">
+            <a:avLst/>
+          </a:prstGeom>
+          <a:solidFill>
+            <a:schemeClr val="bg1"/>
+          </a:solidFill>
+        </p:spPr>
+        <p:style>
+          <a:lnRef idx="2">
+            <a:schemeClr val="accent1">
+              <a:shade val="15000"/>
+            </a:schemeClr>
+          </a:lnRef>
+          <a:fillRef idx="1">
+            <a:schemeClr val="accent1"/>
+          </a:fillRef>
+          <a:effectRef idx="0">
+            <a:schemeClr val="accent1"/>
+          </a:effectRef>
+          <a:fontRef idx="minor">
+            <a:schemeClr val="lt1"/>
+          </a:fontRef>
+        </p:style>
+        <p:txBody>
+          <a:bodyPr rtlCol="0" anchor="ctr"/>
+          <a:lstStyle/>
+          <a:p>
+            <a:pPr algn="ctr"/>
+            <a:endParaRPr lang="en-US"/>
+          </a:p>
+        </p:txBody>
+      </p:sp>
+      <p:sp>
+        <p:nvSpPr>
+          <p:cNvPr id="22" name="Text 0">
+            <a:extLst>
+              <a:ext uri="{FF2B5EF4-FFF2-40B4-BE49-F238E27FC236}">
+                <a16:creationId xmlns:a16="http://schemas.microsoft.com/office/drawing/2014/main" id="{A06D25DE-EF9A-5B0A-E48C-DD6D07C939B1}"/>
+              </a:ext>
+            </a:extLst>
+          </p:cNvPr>
+          <p:cNvSpPr/>
+          <p:nvPr/>
+        </p:nvSpPr>
+        <p:spPr>
+          <a:xfrm>
+            <a:off x="685800" y="1333440"/>
+            <a:ext cx="6190920" cy="37800"/>
+          </a:xfrm>
+          <a:prstGeom prst="rect">
+            <a:avLst/>
+          </a:prstGeom>
+          <a:solidFill>
+            <a:srgbClr val="FFFFFF"/>
+          </a:solidFill>
+          <a:ln w="0">
+            <a:noFill/>
+          </a:ln>
+        </p:spPr>
+        <p:style>
+          <a:lnRef idx="0">
+            <a:scrgbClr r="0" g="0" b="0"/>
+          </a:lnRef>
+          <a:fillRef idx="0">
+            <a:scrgbClr r="0" g="0" b="0"/>
+          </a:fillRef>
+          <a:effectRef idx="0">
+            <a:scrgbClr r="0" g="0" b="0"/>
+          </a:effectRef>
+          <a:fontRef idx="minor"/>
+        </p:style>
+        <p:txBody>
+          <a:bodyPr wrap="none" lIns="0" tIns="0" rIns="0" bIns="0" anchor="ctr">
+            <a:normAutofit fontScale="25000" lnSpcReduction="20000"/>
+          </a:bodyPr>
+          <a:lstStyle/>
+          <a:p>
+            <a:pPr defTabSz="914400">
+              <a:lnSpc>
+                <a:spcPct val="100000"/>
+              </a:lnSpc>
+              <a:tabLst>
+                <a:tab pos="0" algn="l"/>
+              </a:tabLst>
+            </a:pPr>
+            <a:endParaRPr lang="en-US" sz="1800" b="0" u="none" strike="noStrike">
+              <a:solidFill>
+                <a:schemeClr val="dk1"/>
+              </a:solidFill>
+              <a:effectLst/>
+              <a:uFillTx/>
+              <a:latin typeface="Calibri"/>
+            </a:endParaRPr>
+          </a:p>
+        </p:txBody>
+      </p:sp>
+      <p:sp>
+        <p:nvSpPr>
+          <p:cNvPr id="23" name="Text 1">
+            <a:extLst>
+              <a:ext uri="{FF2B5EF4-FFF2-40B4-BE49-F238E27FC236}">
+                <a16:creationId xmlns:a16="http://schemas.microsoft.com/office/drawing/2014/main" id="{5D982C72-4735-7E9C-7273-BE24E7D22E83}"/>
+              </a:ext>
+            </a:extLst>
+          </p:cNvPr>
+          <p:cNvSpPr/>
+          <p:nvPr/>
+        </p:nvSpPr>
+        <p:spPr>
+          <a:xfrm>
+            <a:off x="685800" y="2000160"/>
+            <a:ext cx="3250800" cy="2095200"/>
+          </a:xfrm>
+          <a:prstGeom prst="rect">
+            <a:avLst/>
+          </a:prstGeom>
+          <a:noFill/>
+          <a:ln w="19050">
+            <a:solidFill>
+              <a:srgbClr val="FFFFFF"/>
+            </a:solidFill>
+            <a:round/>
+          </a:ln>
+        </p:spPr>
+        <p:style>
+          <a:lnRef idx="0">
+            <a:scrgbClr r="0" g="0" b="0"/>
+          </a:lnRef>
+          <a:fillRef idx="0">
+            <a:scrgbClr r="0" g="0" b="0"/>
+          </a:fillRef>
+          <a:effectRef idx="0">
+            <a:scrgbClr r="0" g="0" b="0"/>
+          </a:effectRef>
+          <a:fontRef idx="minor"/>
+        </p:style>
+        <p:txBody>
+          <a:bodyPr wrap="none" lIns="0" tIns="0" rIns="0" bIns="0" anchor="ctr">
+            <a:normAutofit/>
+          </a:bodyPr>
+          <a:lstStyle/>
+          <a:p>
+            <a:pPr defTabSz="914400">
+              <a:lnSpc>
+                <a:spcPct val="100000"/>
+              </a:lnSpc>
+              <a:tabLst>
+                <a:tab pos="0" algn="l"/>
+              </a:tabLst>
+            </a:pPr>
+            <a:endParaRPr lang="en-US" sz="1800" b="0" u="none" strike="noStrike">
+              <a:solidFill>
+                <a:schemeClr val="dk1"/>
+              </a:solidFill>
+              <a:effectLst/>
+              <a:uFillTx/>
+              <a:latin typeface="Calibri"/>
+            </a:endParaRPr>
+          </a:p>
+        </p:txBody>
+      </p:sp>
+      <p:sp>
+        <p:nvSpPr>
+          <p:cNvPr id="24" name="Text 2">
+            <a:extLst>
+              <a:ext uri="{FF2B5EF4-FFF2-40B4-BE49-F238E27FC236}">
+                <a16:creationId xmlns:a16="http://schemas.microsoft.com/office/drawing/2014/main" id="{22E12BC2-3CC2-59B3-EA33-FDB0C4F1B2C8}"/>
+              </a:ext>
+            </a:extLst>
+          </p:cNvPr>
+          <p:cNvSpPr/>
+          <p:nvPr/>
+        </p:nvSpPr>
+        <p:spPr>
+          <a:xfrm>
+            <a:off x="4203720" y="2000160"/>
+            <a:ext cx="3250800" cy="2095200"/>
+          </a:xfrm>
+          <a:prstGeom prst="rect">
+            <a:avLst/>
+          </a:prstGeom>
+          <a:noFill/>
+          <a:ln w="19050">
+            <a:solidFill>
+              <a:srgbClr val="FFFFFF"/>
+            </a:solidFill>
+            <a:round/>
+          </a:ln>
+        </p:spPr>
+        <p:style>
+          <a:lnRef idx="0">
+            <a:scrgbClr r="0" g="0" b="0"/>
+          </a:lnRef>
+          <a:fillRef idx="0">
+            <a:scrgbClr r="0" g="0" b="0"/>
+          </a:fillRef>
+          <a:effectRef idx="0">
+            <a:scrgbClr r="0" g="0" b="0"/>
+          </a:effectRef>
+          <a:fontRef idx="minor"/>
+        </p:style>
+        <p:txBody>
+          <a:bodyPr wrap="none" lIns="0" tIns="0" rIns="0" bIns="0" anchor="ctr">
+            <a:normAutofit/>
+          </a:bodyPr>
+          <a:lstStyle/>
+          <a:p>
+            <a:pPr defTabSz="914400">
+              <a:lnSpc>
+                <a:spcPct val="100000"/>
+              </a:lnSpc>
+              <a:tabLst>
+                <a:tab pos="0" algn="l"/>
+              </a:tabLst>
+            </a:pPr>
+            <a:endParaRPr lang="en-US" sz="1800" b="0" u="none" strike="noStrike">
+              <a:solidFill>
+                <a:schemeClr val="dk1"/>
+              </a:solidFill>
+              <a:effectLst/>
+              <a:uFillTx/>
+              <a:latin typeface="Calibri"/>
+            </a:endParaRPr>
+          </a:p>
+        </p:txBody>
+      </p:sp>
+      <p:sp>
+        <p:nvSpPr>
+          <p:cNvPr id="26" name="Text 4">
+            <a:extLst>
+              <a:ext uri="{FF2B5EF4-FFF2-40B4-BE49-F238E27FC236}">
+                <a16:creationId xmlns:a16="http://schemas.microsoft.com/office/drawing/2014/main" id="{07C8D96C-DDF1-F6DE-D113-DD32ED17E49E}"/>
+              </a:ext>
+            </a:extLst>
+          </p:cNvPr>
+          <p:cNvSpPr/>
+          <p:nvPr/>
+        </p:nvSpPr>
+        <p:spPr>
+          <a:xfrm>
+            <a:off x="7493040" y="361800"/>
+            <a:ext cx="1098360" cy="1247760"/>
+          </a:xfrm>
+          <a:prstGeom prst="rect">
+            <a:avLst/>
+          </a:prstGeom>
+          <a:noFill/>
+          <a:ln w="0">
+            <a:noFill/>
+          </a:ln>
+        </p:spPr>
+        <p:style>
+          <a:lnRef idx="0">
+            <a:scrgbClr r="0" g="0" b="0"/>
+          </a:lnRef>
+          <a:fillRef idx="0">
+            <a:scrgbClr r="0" g="0" b="0"/>
+          </a:fillRef>
+          <a:effectRef idx="0">
+            <a:scrgbClr r="0" g="0" b="0"/>
+          </a:effectRef>
+          <a:fontRef idx="minor"/>
+        </p:style>
+        <p:txBody>
+          <a:bodyPr lIns="0" tIns="0" rIns="0" bIns="0" anchor="t">
+            <a:noAutofit/>
+          </a:bodyPr>
+          <a:lstStyle/>
+          <a:p>
+            <a:pPr algn="r" defTabSz="914400">
+              <a:lnSpc>
+                <a:spcPts val="4915"/>
+              </a:lnSpc>
+              <a:tabLst>
+                <a:tab pos="0" algn="l"/>
+              </a:tabLst>
+            </a:pPr>
+            <a:r>
+              <a:rPr lang="en-US" sz="5850" b="1" u="none" strike="noStrike">
+                <a:solidFill>
+                  <a:srgbClr val="FFFFFF"/>
+                </a:solidFill>
+                <a:effectLst/>
+                <a:uFillTx/>
+                <a:latin typeface="Arial"/>
+                <a:ea typeface="Arial"/>
+              </a:rPr>
+              <a:t>zh</a:t>
+            </a:r>
+            <a:endParaRPr lang="en-GB" sz="5850" b="0" u="none" strike="noStrike">
+              <a:solidFill>
+                <a:srgbClr val="FFFFFF"/>
+              </a:solidFill>
+              <a:effectLst/>
+              <a:uFillTx/>
+              <a:latin typeface="Arial"/>
+            </a:endParaRPr>
+          </a:p>
+          <a:p>
+            <a:pPr algn="r" defTabSz="914400">
+              <a:lnSpc>
+                <a:spcPts val="4915"/>
+              </a:lnSpc>
+              <a:tabLst>
+                <a:tab pos="0" algn="l"/>
+              </a:tabLst>
+            </a:pPr>
+            <a:r>
+              <a:rPr lang="en-US" sz="5850" b="1" u="none" strike="noStrike">
+                <a:solidFill>
+                  <a:srgbClr val="FFFFFF"/>
+                </a:solidFill>
+                <a:effectLst/>
+                <a:uFillTx/>
+                <a:latin typeface="Arial"/>
+                <a:ea typeface="Arial"/>
+              </a:rPr>
+              <a:t>aw</a:t>
+            </a:r>
+            <a:endParaRPr lang="en-GB" sz="5850" b="0" u="none" strike="noStrike">
+              <a:solidFill>
+                <a:srgbClr val="FFFFFF"/>
+              </a:solidFill>
+              <a:effectLst/>
+              <a:uFillTx/>
+              <a:latin typeface="Arial"/>
+            </a:endParaRPr>
+          </a:p>
+        </p:txBody>
+      </p:sp>
+      <p:sp>
+        <p:nvSpPr>
+          <p:cNvPr id="27" name="Text 5">
+            <a:extLst>
+              <a:ext uri="{FF2B5EF4-FFF2-40B4-BE49-F238E27FC236}">
+                <a16:creationId xmlns:a16="http://schemas.microsoft.com/office/drawing/2014/main" id="{1F54B743-ADDF-B505-72A2-E040004DBBB5}"/>
+              </a:ext>
+            </a:extLst>
+          </p:cNvPr>
+          <p:cNvSpPr/>
+          <p:nvPr/>
+        </p:nvSpPr>
+        <p:spPr>
+          <a:xfrm>
+            <a:off x="685800" y="857160"/>
+            <a:ext cx="2775305" cy="425285"/>
+          </a:xfrm>
+          <a:prstGeom prst="rect">
+            <a:avLst/>
+          </a:prstGeom>
+          <a:noFill/>
+          <a:ln w="0">
+            <a:noFill/>
+          </a:ln>
+        </p:spPr>
+        <p:style>
+          <a:lnRef idx="0">
+            <a:scrgbClr r="0" g="0" b="0"/>
+          </a:lnRef>
+          <a:fillRef idx="0">
+            <a:scrgbClr r="0" g="0" b="0"/>
+          </a:fillRef>
+          <a:effectRef idx="0">
+            <a:scrgbClr r="0" g="0" b="0"/>
+          </a:effectRef>
+          <a:fontRef idx="minor"/>
+        </p:style>
+        <p:txBody>
+          <a:bodyPr lIns="0" tIns="0" rIns="0" bIns="0" anchor="t">
+            <a:noAutofit/>
+          </a:bodyPr>
+          <a:lstStyle/>
+          <a:p>
+            <a:pPr>
+              <a:tabLst>
+                <a:tab pos="0" algn="l"/>
+              </a:tabLst>
+            </a:pPr>
+            <a:r>
+              <a:rPr lang="en-US" sz="2100">
+                <a:solidFill>
+                  <a:schemeClr val="bg1"/>
+                </a:solidFill>
+                <a:latin typeface="Arial"/>
+                <a:ea typeface="Calibri"/>
+                <a:cs typeface="Arial"/>
+              </a:rPr>
+              <a:t>Method Comparison</a:t>
+            </a:r>
+          </a:p>
+          <a:p>
+            <a:pPr>
+              <a:lnSpc>
+                <a:spcPts val="3149"/>
+              </a:lnSpc>
+              <a:tabLst>
+                <a:tab pos="0" algn="l"/>
+              </a:tabLst>
+            </a:pPr>
+            <a:endParaRPr lang="en-US" sz="2100">
+              <a:solidFill>
+                <a:srgbClr val="FFFFFF"/>
+              </a:solidFill>
+              <a:latin typeface="Arial"/>
+              <a:cs typeface="Arial"/>
+            </a:endParaRPr>
+          </a:p>
+        </p:txBody>
+      </p:sp>
+      <p:sp>
+        <p:nvSpPr>
+          <p:cNvPr id="28" name="Text 6">
+            <a:extLst>
+              <a:ext uri="{FF2B5EF4-FFF2-40B4-BE49-F238E27FC236}">
+                <a16:creationId xmlns:a16="http://schemas.microsoft.com/office/drawing/2014/main" id="{0FA8E0FE-2214-29D4-ED0B-E740C7E019A0}"/>
+              </a:ext>
+            </a:extLst>
+          </p:cNvPr>
+          <p:cNvSpPr/>
+          <p:nvPr/>
+        </p:nvSpPr>
+        <p:spPr>
+          <a:xfrm>
+            <a:off x="933480" y="2247840"/>
+            <a:ext cx="2810520" cy="771120"/>
+          </a:xfrm>
+          <a:prstGeom prst="rect">
+            <a:avLst/>
+          </a:prstGeom>
+          <a:noFill/>
+          <a:ln w="0">
+            <a:noFill/>
+          </a:ln>
+        </p:spPr>
+        <p:style>
+          <a:lnRef idx="0">
+            <a:scrgbClr r="0" g="0" b="0"/>
+          </a:lnRef>
+          <a:fillRef idx="0">
+            <a:scrgbClr r="0" g="0" b="0"/>
+          </a:fillRef>
+          <a:effectRef idx="0">
+            <a:scrgbClr r="0" g="0" b="0"/>
+          </a:effectRef>
+          <a:fontRef idx="minor"/>
+        </p:style>
+        <p:txBody>
+          <a:bodyPr lIns="0" tIns="0" rIns="0" bIns="0" anchor="t">
+            <a:noAutofit/>
+          </a:bodyPr>
+          <a:lstStyle/>
+          <a:p>
+            <a:pPr defTabSz="914400">
+              <a:lnSpc>
+                <a:spcPts val="6075"/>
+              </a:lnSpc>
+              <a:tabLst>
+                <a:tab pos="0" algn="l"/>
+              </a:tabLst>
+            </a:pPr>
+            <a:r>
+              <a:rPr lang="en-US" sz="4050" b="1" u="none" strike="noStrike">
+                <a:solidFill>
+                  <a:srgbClr val="FFFFFF"/>
+                </a:solidFill>
+                <a:effectLst/>
+                <a:uFillTx/>
+                <a:latin typeface="Arial"/>
+                <a:ea typeface="Arial"/>
+              </a:rPr>
+              <a:t>01</a:t>
+            </a:r>
+            <a:endParaRPr lang="en-GB" sz="4050" b="0" u="none" strike="noStrike">
+              <a:solidFill>
+                <a:srgbClr val="FFFFFF"/>
+              </a:solidFill>
+              <a:effectLst/>
+              <a:uFillTx/>
+              <a:latin typeface="Arial"/>
+            </a:endParaRPr>
+          </a:p>
+        </p:txBody>
+      </p:sp>
+      <p:sp>
+        <p:nvSpPr>
+          <p:cNvPr id="29" name="Text 7">
+            <a:extLst>
+              <a:ext uri="{FF2B5EF4-FFF2-40B4-BE49-F238E27FC236}">
+                <a16:creationId xmlns:a16="http://schemas.microsoft.com/office/drawing/2014/main" id="{08095D2D-9C05-F87E-86C0-A0F123DAC48F}"/>
+              </a:ext>
+            </a:extLst>
+          </p:cNvPr>
+          <p:cNvSpPr/>
+          <p:nvPr/>
+        </p:nvSpPr>
+        <p:spPr>
+          <a:xfrm>
+            <a:off x="933480" y="3095640"/>
+            <a:ext cx="2810520" cy="313920"/>
+          </a:xfrm>
+          <a:prstGeom prst="rect">
+            <a:avLst/>
+          </a:prstGeom>
+          <a:noFill/>
+          <a:ln w="0">
+            <a:noFill/>
+          </a:ln>
+        </p:spPr>
+        <p:style>
+          <a:lnRef idx="0">
+            <a:scrgbClr r="0" g="0" b="0"/>
+          </a:lnRef>
+          <a:fillRef idx="0">
+            <a:scrgbClr r="0" g="0" b="0"/>
+          </a:fillRef>
+          <a:effectRef idx="0">
+            <a:scrgbClr r="0" g="0" b="0"/>
+          </a:effectRef>
+          <a:fontRef idx="minor"/>
+        </p:style>
+        <p:txBody>
+          <a:bodyPr lIns="0" tIns="0" rIns="0" bIns="0" anchor="t">
+            <a:noAutofit/>
+          </a:bodyPr>
+          <a:lstStyle/>
+          <a:p>
+            <a:pPr defTabSz="914400">
+              <a:lnSpc>
+                <a:spcPts val="2475"/>
+              </a:lnSpc>
+              <a:tabLst>
+                <a:tab pos="0" algn="l"/>
+              </a:tabLst>
+            </a:pPr>
+            <a:r>
+              <a:rPr lang="en-US" sz="1650" b="0" u="none" strike="noStrike">
+                <a:solidFill>
+                  <a:srgbClr val="FFFFFF"/>
+                </a:solidFill>
+                <a:effectLst/>
+                <a:uFillTx/>
+                <a:latin typeface="Arial"/>
+                <a:ea typeface="Arial"/>
+              </a:rPr>
+              <a:t>Metric one</a:t>
+            </a:r>
+            <a:endParaRPr lang="en-GB" sz="1650" b="0" u="none" strike="noStrike">
+              <a:solidFill>
+                <a:srgbClr val="FFFFFF"/>
+              </a:solidFill>
+              <a:effectLst/>
+              <a:uFillTx/>
+              <a:latin typeface="Arial"/>
+            </a:endParaRPr>
+          </a:p>
+        </p:txBody>
+      </p:sp>
+      <p:sp>
+        <p:nvSpPr>
+          <p:cNvPr id="30" name="Text 8">
+            <a:extLst>
+              <a:ext uri="{FF2B5EF4-FFF2-40B4-BE49-F238E27FC236}">
+                <a16:creationId xmlns:a16="http://schemas.microsoft.com/office/drawing/2014/main" id="{056FD1C0-385E-6C32-B3DD-5F130ECBDBFB}"/>
+              </a:ext>
+            </a:extLst>
+          </p:cNvPr>
+          <p:cNvSpPr/>
+          <p:nvPr/>
+        </p:nvSpPr>
+        <p:spPr>
+          <a:xfrm>
+            <a:off x="4451400" y="2247840"/>
+            <a:ext cx="2810520" cy="771120"/>
+          </a:xfrm>
+          <a:prstGeom prst="rect">
+            <a:avLst/>
+          </a:prstGeom>
+          <a:noFill/>
+          <a:ln w="0">
+            <a:noFill/>
+          </a:ln>
+        </p:spPr>
+        <p:style>
+          <a:lnRef idx="0">
+            <a:scrgbClr r="0" g="0" b="0"/>
+          </a:lnRef>
+          <a:fillRef idx="0">
+            <a:scrgbClr r="0" g="0" b="0"/>
+          </a:fillRef>
+          <a:effectRef idx="0">
+            <a:scrgbClr r="0" g="0" b="0"/>
+          </a:effectRef>
+          <a:fontRef idx="minor"/>
+        </p:style>
+        <p:txBody>
+          <a:bodyPr lIns="0" tIns="0" rIns="0" bIns="0" anchor="t">
+            <a:noAutofit/>
+          </a:bodyPr>
+          <a:lstStyle/>
+          <a:p>
+            <a:pPr defTabSz="914400">
+              <a:lnSpc>
+                <a:spcPts val="6075"/>
+              </a:lnSpc>
+              <a:tabLst>
+                <a:tab pos="0" algn="l"/>
+              </a:tabLst>
+            </a:pPr>
+            <a:r>
+              <a:rPr lang="en-US" sz="4050" b="1" u="none" strike="noStrike">
+                <a:solidFill>
+                  <a:srgbClr val="FFFFFF"/>
+                </a:solidFill>
+                <a:effectLst/>
+                <a:uFillTx/>
+                <a:latin typeface="Arial"/>
+                <a:ea typeface="Arial"/>
+              </a:rPr>
+              <a:t>02</a:t>
+            </a:r>
+            <a:endParaRPr lang="en-GB" sz="4050" b="0" u="none" strike="noStrike">
+              <a:solidFill>
+                <a:srgbClr val="FFFFFF"/>
+              </a:solidFill>
+              <a:effectLst/>
+              <a:uFillTx/>
+              <a:latin typeface="Arial"/>
+            </a:endParaRPr>
+          </a:p>
+        </p:txBody>
+      </p:sp>
+      <p:sp>
+        <p:nvSpPr>
+          <p:cNvPr id="31" name="Text 9">
+            <a:extLst>
+              <a:ext uri="{FF2B5EF4-FFF2-40B4-BE49-F238E27FC236}">
+                <a16:creationId xmlns:a16="http://schemas.microsoft.com/office/drawing/2014/main" id="{AE7CB2C5-3FBE-43B7-2BA3-FC83C14C9512}"/>
+              </a:ext>
+            </a:extLst>
+          </p:cNvPr>
+          <p:cNvSpPr/>
+          <p:nvPr/>
+        </p:nvSpPr>
+        <p:spPr>
+          <a:xfrm>
+            <a:off x="4451400" y="3095640"/>
+            <a:ext cx="2810520" cy="313920"/>
+          </a:xfrm>
+          <a:prstGeom prst="rect">
+            <a:avLst/>
+          </a:prstGeom>
+          <a:noFill/>
+          <a:ln w="0">
+            <a:noFill/>
+          </a:ln>
+        </p:spPr>
+        <p:style>
+          <a:lnRef idx="0">
+            <a:scrgbClr r="0" g="0" b="0"/>
+          </a:lnRef>
+          <a:fillRef idx="0">
+            <a:scrgbClr r="0" g="0" b="0"/>
+          </a:fillRef>
+          <a:effectRef idx="0">
+            <a:scrgbClr r="0" g="0" b="0"/>
+          </a:effectRef>
+          <a:fontRef idx="minor"/>
+        </p:style>
+        <p:txBody>
+          <a:bodyPr lIns="0" tIns="0" rIns="0" bIns="0" anchor="t">
+            <a:noAutofit/>
+          </a:bodyPr>
+          <a:lstStyle/>
+          <a:p>
+            <a:pPr defTabSz="914400">
+              <a:lnSpc>
+                <a:spcPts val="2475"/>
+              </a:lnSpc>
+              <a:tabLst>
+                <a:tab pos="0" algn="l"/>
+              </a:tabLst>
+            </a:pPr>
+            <a:r>
+              <a:rPr lang="en-US" sz="1650" b="0" u="none" strike="noStrike">
+                <a:solidFill>
+                  <a:srgbClr val="FFFFFF"/>
+                </a:solidFill>
+                <a:effectLst/>
+                <a:uFillTx/>
+                <a:latin typeface="Arial"/>
+                <a:ea typeface="Arial"/>
+              </a:rPr>
+              <a:t>Metric two</a:t>
+            </a:r>
+            <a:endParaRPr lang="en-GB" sz="1650" b="0" u="none" strike="noStrike">
+              <a:solidFill>
+                <a:srgbClr val="FFFFFF"/>
+              </a:solidFill>
+              <a:effectLst/>
+              <a:uFillTx/>
+              <a:latin typeface="Arial"/>
+            </a:endParaRPr>
+          </a:p>
+        </p:txBody>
+      </p:sp>
+      <p:sp>
+        <p:nvSpPr>
+          <p:cNvPr id="5" name="Textfeld 4">
+            <a:extLst>
+              <a:ext uri="{FF2B5EF4-FFF2-40B4-BE49-F238E27FC236}">
+                <a16:creationId xmlns:a16="http://schemas.microsoft.com/office/drawing/2014/main" id="{0861610A-AA12-F186-D87C-9B11E66E5E03}"/>
+              </a:ext>
+            </a:extLst>
+          </p:cNvPr>
+          <p:cNvSpPr txBox="1"/>
+          <p:nvPr/>
+        </p:nvSpPr>
+        <p:spPr>
+          <a:xfrm>
+            <a:off x="1307985" y="1767794"/>
+            <a:ext cx="6185055" cy="369332"/>
+          </a:xfrm>
+          <a:prstGeom prst="rect">
+            <a:avLst/>
+          </a:prstGeom>
+          <a:noFill/>
+        </p:spPr>
+        <p:txBody>
+          <a:bodyPr wrap="square" rtlCol="0">
+            <a:spAutoFit/>
+          </a:bodyPr>
+          <a:lstStyle/>
+          <a:p>
+            <a:r>
+              <a:rPr lang="de-CH"/>
+              <a:t>Method </a:t>
+            </a:r>
+            <a:r>
+              <a:rPr lang="de-CH" err="1"/>
+              <a:t>Comparison</a:t>
+            </a:r>
+            <a:r>
+              <a:rPr lang="de-CH"/>
+              <a:t>: Lagrange-Newton </a:t>
+            </a:r>
+            <a:r>
+              <a:rPr lang="de-CH" err="1"/>
+              <a:t>vs</a:t>
+            </a:r>
+            <a:r>
+              <a:rPr lang="de-CH"/>
+              <a:t> </a:t>
+            </a:r>
+            <a:r>
+              <a:rPr lang="de-CH" err="1"/>
+              <a:t>Simulated</a:t>
+            </a:r>
+            <a:r>
+              <a:rPr lang="de-CH"/>
+              <a:t> </a:t>
+            </a:r>
+            <a:r>
+              <a:rPr lang="de-CH" err="1"/>
+              <a:t>Annealing</a:t>
+            </a:r>
+            <a:endParaRPr lang="de-DE"/>
+          </a:p>
+        </p:txBody>
+      </p:sp>
+      <p:pic>
+        <p:nvPicPr>
+          <p:cNvPr id="8" name="Grafik 7">
+            <a:extLst>
+              <a:ext uri="{FF2B5EF4-FFF2-40B4-BE49-F238E27FC236}">
+                <a16:creationId xmlns:a16="http://schemas.microsoft.com/office/drawing/2014/main" id="{1B4D4B92-0AD4-521F-8378-56C6734D3124}"/>
+              </a:ext>
+            </a:extLst>
+          </p:cNvPr>
+          <p:cNvPicPr>
+            <a:picLocks noChangeAspect="1"/>
+          </p:cNvPicPr>
+          <p:nvPr/>
+        </p:nvPicPr>
+        <p:blipFill>
+          <a:blip r:embed="rId3">
+            <a:extLst>
+              <a:ext uri="{28A0092B-C50C-407E-A947-70E740481C1C}">
+                <a14:useLocalDpi xmlns:a14="http://schemas.microsoft.com/office/drawing/2010/main" val="0"/>
+              </a:ext>
+            </a:extLst>
+          </a:blip>
+          <a:srcRect l="-1" r="49913"/>
+          <a:stretch>
+            <a:fillRect/>
+          </a:stretch>
+        </p:blipFill>
+        <p:spPr>
+          <a:xfrm>
+            <a:off x="2625478" y="2228963"/>
+            <a:ext cx="3893044" cy="2735884"/>
+          </a:xfrm>
+          <a:prstGeom prst="rect">
+            <a:avLst/>
+          </a:prstGeom>
+        </p:spPr>
+      </p:pic>
+    </p:spTree>
+    <p:extLst>
+      <p:ext uri="{BB962C8B-B14F-4D97-AF65-F5344CB8AC3E}">
+        <p14:creationId xmlns:p14="http://schemas.microsoft.com/office/powerpoint/2010/main" val="2743224069"/>
+      </p:ext>
+    </p:extLst>
+  </p:cSld>
+  <p:clrMapOvr>
+    <a:masterClrMapping/>
+  </p:clrMapOvr>
+</p:sld>
+</file>
+
+<file path=ppt/slides/slide8.xml><?xml version="1.0" encoding="utf-8"?>
 <p:sld xmlns:a="http://schemas.openxmlformats.org/drawingml/2006/main" xmlns:r="http://schemas.openxmlformats.org/officeDocument/2006/relationships" xmlns:p="http://schemas.openxmlformats.org/presentationml/2006/main">
   <p:cSld>
     <p:bg>
@@ -5596,7 +7650,7 @@
         </p:style>
         <p:txBody>
           <a:bodyPr wrap="none" lIns="0" tIns="0" rIns="0" bIns="0" anchor="ctr">
-            <a:normAutofit fontScale="25000" lnSpcReduction="19999"/>
+            <a:normAutofit fontScale="25000" lnSpcReduction="20000"/>
           </a:bodyPr>
           <a:lstStyle/>
           <a:p>
@@ -6244,20 +8298,85 @@
         </p:nvPicPr>
         <p:blipFill>
           <a:blip r:embed="rId3"/>
+          <a:srcRect l="1" t="10401" r="33899"/>
           <a:stretch>
             <a:fillRect/>
           </a:stretch>
         </p:blipFill>
         <p:spPr>
           <a:xfrm>
-            <a:off x="7143" y="1742400"/>
-            <a:ext cx="9144000" cy="3123841"/>
+            <a:off x="1092529" y="2133600"/>
+            <a:ext cx="6044251" cy="2798927"/>
           </a:xfrm>
           <a:prstGeom prst="rect">
             <a:avLst/>
           </a:prstGeom>
         </p:spPr>
       </p:pic>
+      <p:sp>
+        <p:nvSpPr>
+          <p:cNvPr id="5" name="Textfeld 4">
+            <a:extLst>
+              <a:ext uri="{FF2B5EF4-FFF2-40B4-BE49-F238E27FC236}">
+                <a16:creationId xmlns:a16="http://schemas.microsoft.com/office/drawing/2014/main" id="{DD063A28-98C9-5725-438B-1428E6703B39}"/>
+              </a:ext>
+            </a:extLst>
+          </p:cNvPr>
+          <p:cNvSpPr txBox="1"/>
+          <p:nvPr/>
+        </p:nvSpPr>
+        <p:spPr>
+          <a:xfrm>
+            <a:off x="1307985" y="1767794"/>
+            <a:ext cx="6185055" cy="369332"/>
+          </a:xfrm>
+          <a:prstGeom prst="rect">
+            <a:avLst/>
+          </a:prstGeom>
+          <a:noFill/>
+        </p:spPr>
+        <p:txBody>
+          <a:bodyPr wrap="square" rtlCol="0">
+            <a:spAutoFit/>
+          </a:bodyPr>
+          <a:lstStyle/>
+          <a:p>
+            <a:r>
+              <a:rPr lang="de-CH"/>
+              <a:t>Method </a:t>
+            </a:r>
+            <a:r>
+              <a:rPr lang="de-CH" err="1"/>
+              <a:t>Comparison</a:t>
+            </a:r>
+            <a:r>
+              <a:rPr lang="de-CH"/>
+              <a:t>: Lagrange-Newton </a:t>
+            </a:r>
+            <a:r>
+              <a:rPr lang="de-CH" err="1"/>
+              <a:t>vs</a:t>
+            </a:r>
+            <a:r>
+              <a:rPr lang="de-CH"/>
+              <a:t> </a:t>
+            </a:r>
+            <a:r>
+              <a:rPr lang="de-CH" err="1"/>
+              <a:t>Simulated</a:t>
+            </a:r>
+            <a:r>
+              <a:rPr lang="de-CH"/>
+              <a:t> </a:t>
+            </a:r>
+            <a:r>
+              <a:rPr lang="de-CH" err="1"/>
+              <a:t>Annealing</a:t>
+            </a:r>
+            <a:endParaRPr lang="de-DE"/>
+          </a:p>
+        </p:txBody>
+      </p:sp>
     </p:spTree>
     <p:extLst>
       <p:ext uri="{BB962C8B-B14F-4D97-AF65-F5344CB8AC3E}">
@@ -6271,7 +8390,7 @@
 </p:sld>
 </file>
 
-<file path=ppt/slides/slide7.xml><?xml version="1.0" encoding="utf-8"?>
+<file path=ppt/slides/slide9.xml><?xml version="1.0" encoding="utf-8"?>
 <p:sld xmlns:a="http://schemas.openxmlformats.org/drawingml/2006/main" xmlns:r="http://schemas.openxmlformats.org/officeDocument/2006/relationships" xmlns:p="http://schemas.openxmlformats.org/presentationml/2006/main">
   <p:cSld>
     <p:bg>
@@ -6287,7 +8406,7 @@
         <p:cNvPr id="1" name="">
           <a:extLst>
             <a:ext uri="{FF2B5EF4-FFF2-40B4-BE49-F238E27FC236}">
-              <a16:creationId xmlns:a16="http://schemas.microsoft.com/office/drawing/2014/main" id="{323A964E-A53D-D833-9A9C-848C7C940329}"/>
+              <a16:creationId xmlns:a16="http://schemas.microsoft.com/office/drawing/2014/main" id="{2A1567AF-E884-6F9F-07A5-8F548A378857}"/>
             </a:ext>
           </a:extLst>
         </p:cNvPr>
@@ -6304,10 +8423,10 @@
       </p:grpSpPr>
       <p:sp>
         <p:nvSpPr>
-          <p:cNvPr id="6" name="Rectangle 5">
+          <p:cNvPr id="4" name="Rectangle 3">
             <a:extLst>
               <a:ext uri="{FF2B5EF4-FFF2-40B4-BE49-F238E27FC236}">
-                <a16:creationId xmlns:a16="http://schemas.microsoft.com/office/drawing/2014/main" id="{871ABE2B-A058-04ED-E9B9-B53A9AEC0D5B}"/>
+                <a16:creationId xmlns:a16="http://schemas.microsoft.com/office/drawing/2014/main" id="{B20A7530-0698-FE66-BF27-66B4EFD42044}"/>
               </a:ext>
             </a:extLst>
           </p:cNvPr>
@@ -6356,7 +8475,7 @@
           <p:cNvPr id="22" name="Text 0">
             <a:extLst>
               <a:ext uri="{FF2B5EF4-FFF2-40B4-BE49-F238E27FC236}">
-                <a16:creationId xmlns:a16="http://schemas.microsoft.com/office/drawing/2014/main" id="{6383B7FE-338B-AA64-2093-C83A594D84C9}"/>
+                <a16:creationId xmlns:a16="http://schemas.microsoft.com/office/drawing/2014/main" id="{6D4736AD-AF3B-D0F6-E39E-BBB3536B9D14}"/>
               </a:ext>
             </a:extLst>
           </p:cNvPr>
@@ -6392,7 +8511,7 @@
         </p:style>
         <p:txBody>
           <a:bodyPr wrap="none" lIns="0" tIns="0" rIns="0" bIns="0" anchor="ctr">
-            <a:normAutofit fontScale="25000" lnSpcReduction="19999"/>
+            <a:normAutofit fontScale="25000" lnSpcReduction="20000"/>
           </a:bodyPr>
           <a:lstStyle/>
           <a:p>
@@ -6420,7 +8539,7 @@
           <p:cNvPr id="23" name="Text 1">
             <a:extLst>
               <a:ext uri="{FF2B5EF4-FFF2-40B4-BE49-F238E27FC236}">
-                <a16:creationId xmlns:a16="http://schemas.microsoft.com/office/drawing/2014/main" id="{E88D8E92-FD44-F664-AB6D-1606E5B7008E}"/>
+                <a16:creationId xmlns:a16="http://schemas.microsoft.com/office/drawing/2014/main" id="{2686E58B-DE8C-0BCE-2988-CBD71A848E1F}"/>
               </a:ext>
             </a:extLst>
           </p:cNvPr>
@@ -6485,7 +8604,7 @@
           <p:cNvPr id="24" name="Text 2">
             <a:extLst>
               <a:ext uri="{FF2B5EF4-FFF2-40B4-BE49-F238E27FC236}">
-                <a16:creationId xmlns:a16="http://schemas.microsoft.com/office/drawing/2014/main" id="{C214B53A-9474-D2B6-3DA8-9BE33C5C231B}"/>
+                <a16:creationId xmlns:a16="http://schemas.microsoft.com/office/drawing/2014/main" id="{9CE33F18-822F-84C7-B416-FE7BA5B2CCBA}"/>
               </a:ext>
             </a:extLst>
           </p:cNvPr>
@@ -6550,7 +8669,7 @@
           <p:cNvPr id="26" name="Text 4">
             <a:extLst>
               <a:ext uri="{FF2B5EF4-FFF2-40B4-BE49-F238E27FC236}">
-                <a16:creationId xmlns:a16="http://schemas.microsoft.com/office/drawing/2014/main" id="{70EE4081-FE78-57F6-E5C6-3A84147DB435}"/>
+                <a16:creationId xmlns:a16="http://schemas.microsoft.com/office/drawing/2014/main" id="{B2434EB2-DBAC-E157-609A-4AC974A79598}"/>
               </a:ext>
             </a:extLst>
           </p:cNvPr>
@@ -6654,7 +8773,7 @@
           <p:cNvPr id="27" name="Text 5">
             <a:extLst>
               <a:ext uri="{FF2B5EF4-FFF2-40B4-BE49-F238E27FC236}">
-                <a16:creationId xmlns:a16="http://schemas.microsoft.com/office/drawing/2014/main" id="{24D8D49B-F11F-31DD-1141-9B78E8436B8E}"/>
+                <a16:creationId xmlns:a16="http://schemas.microsoft.com/office/drawing/2014/main" id="{5EEE1528-BC76-FDAE-D443-F6C4766DDFDD}"/>
               </a:ext>
             </a:extLst>
           </p:cNvPr>
@@ -6733,7 +8852,7 @@
           <p:cNvPr id="28" name="Text 6">
             <a:extLst>
               <a:ext uri="{FF2B5EF4-FFF2-40B4-BE49-F238E27FC236}">
-                <a16:creationId xmlns:a16="http://schemas.microsoft.com/office/drawing/2014/main" id="{DF3A4A6C-E440-00BD-097B-1E9ACF3C9CB4}"/>
+                <a16:creationId xmlns:a16="http://schemas.microsoft.com/office/drawing/2014/main" id="{0824FC2C-CCB6-A4F8-7F39-07DB9CA42412}"/>
               </a:ext>
             </a:extLst>
           </p:cNvPr>
@@ -6807,7 +8926,7 @@
           <p:cNvPr id="29" name="Text 7">
             <a:extLst>
               <a:ext uri="{FF2B5EF4-FFF2-40B4-BE49-F238E27FC236}">
-                <a16:creationId xmlns:a16="http://schemas.microsoft.com/office/drawing/2014/main" id="{C6493315-CD05-FFE9-72B9-4AC56EB34F0F}"/>
+                <a16:creationId xmlns:a16="http://schemas.microsoft.com/office/drawing/2014/main" id="{C0668599-3584-5742-7439-66E894FD0362}"/>
               </a:ext>
             </a:extLst>
           </p:cNvPr>
@@ -6881,7 +9000,7 @@
           <p:cNvPr id="30" name="Text 8">
             <a:extLst>
               <a:ext uri="{FF2B5EF4-FFF2-40B4-BE49-F238E27FC236}">
-                <a16:creationId xmlns:a16="http://schemas.microsoft.com/office/drawing/2014/main" id="{DD4062B2-694E-AB29-20F0-172076F3D89B}"/>
+                <a16:creationId xmlns:a16="http://schemas.microsoft.com/office/drawing/2014/main" id="{591E2DC7-BC24-03EA-7CA7-62E1AD52729F}"/>
               </a:ext>
             </a:extLst>
           </p:cNvPr>
@@ -6955,7 +9074,7 @@
           <p:cNvPr id="31" name="Text 9">
             <a:extLst>
               <a:ext uri="{FF2B5EF4-FFF2-40B4-BE49-F238E27FC236}">
-                <a16:creationId xmlns:a16="http://schemas.microsoft.com/office/drawing/2014/main" id="{017150A5-7A28-79BF-918F-208A345A7F75}"/>
+                <a16:creationId xmlns:a16="http://schemas.microsoft.com/office/drawing/2014/main" id="{67923FDD-91CA-B86B-DC8C-600FE4E3AE7E}"/>
               </a:ext>
             </a:extLst>
           </p:cNvPr>
@@ -7024,12 +9143,76 @@
           </a:p>
         </p:txBody>
       </p:sp>
+      <p:sp>
+        <p:nvSpPr>
+          <p:cNvPr id="5" name="Textfeld 4">
+            <a:extLst>
+              <a:ext uri="{FF2B5EF4-FFF2-40B4-BE49-F238E27FC236}">
+                <a16:creationId xmlns:a16="http://schemas.microsoft.com/office/drawing/2014/main" id="{A8C578C7-5F32-AE26-07E8-934148E90222}"/>
+              </a:ext>
+            </a:extLst>
+          </p:cNvPr>
+          <p:cNvSpPr txBox="1"/>
+          <p:nvPr/>
+        </p:nvSpPr>
+        <p:spPr>
+          <a:xfrm>
+            <a:off x="1307985" y="1767794"/>
+            <a:ext cx="6185055" cy="369332"/>
+          </a:xfrm>
+          <a:prstGeom prst="rect">
+            <a:avLst/>
+          </a:prstGeom>
+          <a:noFill/>
+        </p:spPr>
+        <p:txBody>
+          <a:bodyPr wrap="square" rtlCol="0">
+            <a:spAutoFit/>
+          </a:bodyPr>
+          <a:lstStyle/>
+          <a:p>
+            <a:r>
+              <a:rPr lang="de-CH"/>
+              <a:t>Method </a:t>
+            </a:r>
+            <a:r>
+              <a:rPr lang="de-CH" err="1"/>
+              <a:t>Comparison</a:t>
+            </a:r>
+            <a:r>
+              <a:rPr lang="de-CH"/>
+              <a:t>: Lagrange-Newton </a:t>
+            </a:r>
+            <a:r>
+              <a:rPr lang="de-CH" err="1"/>
+              <a:t>vs</a:t>
+            </a:r>
+            <a:r>
+              <a:rPr lang="de-CH"/>
+              <a:t> </a:t>
+            </a:r>
+            <a:r>
+              <a:rPr lang="de-CH" err="1"/>
+              <a:t>Simulated</a:t>
+            </a:r>
+            <a:r>
+              <a:rPr lang="de-CH"/>
+              <a:t> </a:t>
+            </a:r>
+            <a:r>
+              <a:rPr lang="de-CH" err="1"/>
+              <a:t>Annealing</a:t>
+            </a:r>
+            <a:endParaRPr lang="de-DE"/>
+          </a:p>
+        </p:txBody>
+      </p:sp>
       <p:pic>
         <p:nvPicPr>
-          <p:cNvPr id="4" name="Grafik 3" descr="Ein Bild, das Text, Reihe, Screenshot, Diagramm enthält.&#10;&#10;KI-generierte Inhalte können fehlerhaft sein.">
+          <p:cNvPr id="6" name="Grafik 5">
             <a:extLst>
               <a:ext uri="{FF2B5EF4-FFF2-40B4-BE49-F238E27FC236}">
-                <a16:creationId xmlns:a16="http://schemas.microsoft.com/office/drawing/2014/main" id="{ED5B4BFA-B45A-80C6-B876-8E8525E482B5}"/>
+                <a16:creationId xmlns:a16="http://schemas.microsoft.com/office/drawing/2014/main" id="{AB6D80C8-0455-BD8E-96DA-62AC731C6E1B}"/>
               </a:ext>
             </a:extLst>
           </p:cNvPr>
@@ -7039,15 +9222,21 @@
           <p:nvPr/>
         </p:nvPicPr>
         <p:blipFill>
-          <a:blip r:embed="rId3"/>
+          <a:blip r:embed="rId3">
+            <a:extLst>
+              <a:ext uri="{28A0092B-C50C-407E-A947-70E740481C1C}">
+                <a14:useLocalDpi xmlns:a14="http://schemas.microsoft.com/office/drawing/2010/main" val="0"/>
+              </a:ext>
+            </a:extLst>
+          </a:blip>
           <a:stretch>
             <a:fillRect/>
           </a:stretch>
         </p:blipFill>
         <p:spPr>
           <a:xfrm>
-            <a:off x="7144" y="1730811"/>
-            <a:ext cx="9144000" cy="3254042"/>
+            <a:off x="565200" y="2247457"/>
+            <a:ext cx="7772400" cy="2735884"/>
           </a:xfrm>
           <a:prstGeom prst="rect">
             <a:avLst/>
@@ -7057,334 +9246,9 @@
     </p:spTree>
     <p:extLst>
       <p:ext uri="{BB962C8B-B14F-4D97-AF65-F5344CB8AC3E}">
-        <p14:creationId xmlns:p14="http://schemas.microsoft.com/office/powerpoint/2010/main" val="3425055799"/>
+        <p14:creationId xmlns:p14="http://schemas.microsoft.com/office/powerpoint/2010/main" val="1006075515"/>
       </p:ext>
     </p:extLst>
-  </p:cSld>
-  <p:clrMapOvr>
-    <a:masterClrMapping/>
-  </p:clrMapOvr>
-</p:sld>
-</file>
-
-<file path=ppt/slides/slide8.xml><?xml version="1.0" encoding="utf-8"?>
-<p:sld xmlns:a="http://schemas.openxmlformats.org/drawingml/2006/main" xmlns:r="http://schemas.openxmlformats.org/officeDocument/2006/relationships" xmlns:p="http://schemas.openxmlformats.org/presentationml/2006/main">
-  <p:cSld>
-    <p:bg>
-      <p:bgPr>
-        <a:solidFill>
-          <a:srgbClr val="005B96"/>
-        </a:solidFill>
-        <a:effectLst/>
-      </p:bgPr>
-    </p:bg>
-    <p:spTree>
-      <p:nvGrpSpPr>
-        <p:cNvPr id="1" name=""/>
-        <p:cNvGrpSpPr/>
-        <p:nvPr/>
-      </p:nvGrpSpPr>
-      <p:grpSpPr>
-        <a:xfrm>
-          <a:off x="0" y="0"/>
-          <a:ext cx="0" cy="0"/>
-          <a:chOff x="0" y="0"/>
-          <a:chExt cx="0" cy="0"/>
-        </a:xfrm>
-      </p:grpSpPr>
-      <p:sp>
-        <p:nvSpPr>
-          <p:cNvPr id="34" name="Text 0"/>
-          <p:cNvSpPr/>
-          <p:nvPr/>
-        </p:nvSpPr>
-        <p:spPr>
-          <a:xfrm>
-            <a:off x="685800" y="3114720"/>
-            <a:ext cx="6190920" cy="37800"/>
-          </a:xfrm>
-          <a:prstGeom prst="rect">
-            <a:avLst/>
-          </a:prstGeom>
-          <a:solidFill>
-            <a:srgbClr val="FFFFFF"/>
-          </a:solidFill>
-          <a:ln w="0">
-            <a:noFill/>
-          </a:ln>
-        </p:spPr>
-        <p:style>
-          <a:lnRef idx="0">
-            <a:scrgbClr r="0" g="0" b="0"/>
-          </a:lnRef>
-          <a:fillRef idx="0">
-            <a:scrgbClr r="0" g="0" b="0"/>
-          </a:fillRef>
-          <a:effectRef idx="0">
-            <a:scrgbClr r="0" g="0" b="0"/>
-          </a:effectRef>
-          <a:fontRef idx="minor"/>
-        </p:style>
-        <p:txBody>
-          <a:bodyPr wrap="none" lIns="0" tIns="0" rIns="0" bIns="0" anchor="ctr">
-            <a:normAutofit fontScale="25000" lnSpcReduction="19999"/>
-          </a:bodyPr>
-          <a:lstStyle/>
-          <a:p>
-            <a:pPr defTabSz="914400">
-              <a:lnSpc>
-                <a:spcPct val="100000"/>
-              </a:lnSpc>
-              <a:tabLst>
-                <a:tab pos="0" algn="l"/>
-              </a:tabLst>
-            </a:pPr>
-            <a:endParaRPr lang="en-US" sz="1800" b="0" u="none" strike="noStrike">
-              <a:solidFill>
-                <a:schemeClr val="dk1"/>
-              </a:solidFill>
-              <a:effectLst/>
-              <a:uFillTx/>
-              <a:latin typeface="Calibri"/>
-            </a:endParaRPr>
-          </a:p>
-        </p:txBody>
-      </p:sp>
-      <p:sp>
-        <p:nvSpPr>
-          <p:cNvPr id="35" name="Text 1"/>
-          <p:cNvSpPr/>
-          <p:nvPr/>
-        </p:nvSpPr>
-        <p:spPr>
-          <a:xfrm>
-            <a:off x="7493040" y="361800"/>
-            <a:ext cx="1098360" cy="1247760"/>
-          </a:xfrm>
-          <a:prstGeom prst="rect">
-            <a:avLst/>
-          </a:prstGeom>
-          <a:noFill/>
-          <a:ln w="0">
-            <a:noFill/>
-          </a:ln>
-        </p:spPr>
-        <p:style>
-          <a:lnRef idx="0">
-            <a:scrgbClr r="0" g="0" b="0"/>
-          </a:lnRef>
-          <a:fillRef idx="0">
-            <a:scrgbClr r="0" g="0" b="0"/>
-          </a:fillRef>
-          <a:effectRef idx="0">
-            <a:scrgbClr r="0" g="0" b="0"/>
-          </a:effectRef>
-          <a:fontRef idx="minor"/>
-        </p:style>
-        <p:txBody>
-          <a:bodyPr lIns="0" tIns="0" rIns="0" bIns="0" anchor="t">
-            <a:noAutofit/>
-          </a:bodyPr>
-          <a:lstStyle/>
-          <a:p>
-            <a:pPr algn="r" defTabSz="914400">
-              <a:lnSpc>
-                <a:spcPts val="4915"/>
-              </a:lnSpc>
-              <a:tabLst>
-                <a:tab pos="0" algn="l"/>
-              </a:tabLst>
-            </a:pPr>
-            <a:r>
-              <a:rPr lang="en-US" sz="5850" b="1" u="none" strike="noStrike">
-                <a:solidFill>
-                  <a:srgbClr val="FFFFFF"/>
-                </a:solidFill>
-                <a:effectLst/>
-                <a:uFillTx/>
-                <a:latin typeface="Arial"/>
-                <a:ea typeface="Arial"/>
-              </a:rPr>
-              <a:t>zh</a:t>
-            </a:r>
-            <a:endParaRPr lang="en-GB" sz="5850" b="0" u="none" strike="noStrike">
-              <a:solidFill>
-                <a:srgbClr val="FFFFFF"/>
-              </a:solidFill>
-              <a:effectLst/>
-              <a:uFillTx/>
-              <a:latin typeface="Arial"/>
-            </a:endParaRPr>
-          </a:p>
-          <a:p>
-            <a:pPr algn="r" defTabSz="914400">
-              <a:lnSpc>
-                <a:spcPts val="4915"/>
-              </a:lnSpc>
-              <a:tabLst>
-                <a:tab pos="0" algn="l"/>
-              </a:tabLst>
-            </a:pPr>
-            <a:r>
-              <a:rPr lang="en-US" sz="5850" b="1" u="none" strike="noStrike">
-                <a:solidFill>
-                  <a:srgbClr val="FFFFFF"/>
-                </a:solidFill>
-                <a:effectLst/>
-                <a:uFillTx/>
-                <a:latin typeface="Arial"/>
-                <a:ea typeface="Arial"/>
-              </a:rPr>
-              <a:t>aw</a:t>
-            </a:r>
-            <a:endParaRPr lang="en-GB" sz="5850" b="0" u="none" strike="noStrike">
-              <a:solidFill>
-                <a:srgbClr val="FFFFFF"/>
-              </a:solidFill>
-              <a:effectLst/>
-              <a:uFillTx/>
-              <a:latin typeface="Arial"/>
-            </a:endParaRPr>
-          </a:p>
-        </p:txBody>
-      </p:sp>
-      <p:sp>
-        <p:nvSpPr>
-          <p:cNvPr id="36" name="Text 2"/>
-          <p:cNvSpPr/>
-          <p:nvPr/>
-        </p:nvSpPr>
-        <p:spPr>
-          <a:xfrm>
-            <a:off x="685800" y="2476440"/>
-            <a:ext cx="1358280" cy="399600"/>
-          </a:xfrm>
-          <a:prstGeom prst="rect">
-            <a:avLst/>
-          </a:prstGeom>
-          <a:noFill/>
-          <a:ln w="0">
-            <a:noFill/>
-          </a:ln>
-        </p:spPr>
-        <p:style>
-          <a:lnRef idx="0">
-            <a:scrgbClr r="0" g="0" b="0"/>
-          </a:lnRef>
-          <a:fillRef idx="0">
-            <a:scrgbClr r="0" g="0" b="0"/>
-          </a:fillRef>
-          <a:effectRef idx="0">
-            <a:scrgbClr r="0" g="0" b="0"/>
-          </a:effectRef>
-          <a:fontRef idx="minor"/>
-        </p:style>
-        <p:txBody>
-          <a:bodyPr lIns="0" tIns="0" rIns="0" bIns="0" anchor="t">
-            <a:noAutofit/>
-          </a:bodyPr>
-          <a:lstStyle/>
-          <a:p>
-            <a:pPr defTabSz="914400">
-              <a:lnSpc>
-                <a:spcPts val="3149"/>
-              </a:lnSpc>
-              <a:tabLst>
-                <a:tab pos="0" algn="l"/>
-              </a:tabLst>
-            </a:pPr>
-            <a:r>
-              <a:rPr lang="en-US" sz="2100" b="0" u="none" strike="noStrike">
-                <a:solidFill>
-                  <a:srgbClr val="FFFFFF"/>
-                </a:solidFill>
-                <a:effectLst/>
-                <a:uFillTx/>
-                <a:latin typeface="Arial"/>
-                <a:ea typeface="Arial"/>
-              </a:rPr>
-              <a:t>Questions</a:t>
-            </a:r>
-            <a:endParaRPr lang="en-GB" sz="2100" b="0" u="none" strike="noStrike">
-              <a:solidFill>
-                <a:srgbClr val="FFFFFF"/>
-              </a:solidFill>
-              <a:effectLst/>
-              <a:uFillTx/>
-              <a:latin typeface="Arial"/>
-            </a:endParaRPr>
-          </a:p>
-        </p:txBody>
-      </p:sp>
-      <p:sp>
-        <p:nvSpPr>
-          <p:cNvPr id="37" name="Text 3"/>
-          <p:cNvSpPr/>
-          <p:nvPr/>
-        </p:nvSpPr>
-        <p:spPr>
-          <a:xfrm>
-            <a:off x="685800" y="3267000"/>
-            <a:ext cx="1218240" cy="342720"/>
-          </a:xfrm>
-          <a:prstGeom prst="rect">
-            <a:avLst/>
-          </a:prstGeom>
-          <a:noFill/>
-          <a:ln w="0">
-            <a:noFill/>
-          </a:ln>
-        </p:spPr>
-        <p:style>
-          <a:lnRef idx="0">
-            <a:scrgbClr r="0" g="0" b="0"/>
-          </a:lnRef>
-          <a:fillRef idx="0">
-            <a:scrgbClr r="0" g="0" b="0"/>
-          </a:fillRef>
-          <a:effectRef idx="0">
-            <a:scrgbClr r="0" g="0" b="0"/>
-          </a:effectRef>
-          <a:fontRef idx="minor"/>
-        </p:style>
-        <p:txBody>
-          <a:bodyPr lIns="0" tIns="0" rIns="0" bIns="0" anchor="t">
-            <a:noAutofit/>
-          </a:bodyPr>
-          <a:lstStyle/>
-          <a:p>
-            <a:pPr defTabSz="914400">
-              <a:lnSpc>
-                <a:spcPts val="2701"/>
-              </a:lnSpc>
-              <a:tabLst>
-                <a:tab pos="0" algn="l"/>
-              </a:tabLst>
-            </a:pPr>
-            <a:r>
-              <a:rPr lang="en-US" sz="1800" b="0" u="none" strike="noStrike">
-                <a:solidFill>
-                  <a:srgbClr val="FFFFFF"/>
-                </a:solidFill>
-                <a:effectLst/>
-                <a:uFillTx/>
-                <a:latin typeface="Arial"/>
-                <a:ea typeface="Arial"/>
-              </a:rPr>
-              <a:t>Thank you</a:t>
-            </a:r>
-            <a:endParaRPr lang="en-GB" sz="1800" b="0" u="none" strike="noStrike">
-              <a:solidFill>
-                <a:srgbClr val="FFFFFF"/>
-              </a:solidFill>
-              <a:effectLst/>
-              <a:uFillTx/>
-              <a:latin typeface="Arial"/>
-            </a:endParaRPr>
-          </a:p>
-        </p:txBody>
-      </p:sp>
-    </p:spTree>
   </p:cSld>
   <p:clrMapOvr>
     <a:masterClrMapping/>
@@ -7684,6 +9548,17 @@
 </file>
 
 <file path=customXml/item2.xml><?xml version="1.0" encoding="utf-8"?>
+<p:properties xmlns:p="http://schemas.microsoft.com/office/2006/metadata/properties" xmlns:xsi="http://www.w3.org/2001/XMLSchema-instance" xmlns:pc="http://schemas.microsoft.com/office/infopath/2007/PartnerControls">
+  <documentManagement>
+    <TaxCatchAll xmlns="c3a86a5d-5714-4c9c-b50f-c72962407014" xsi:nil="true"/>
+    <lcf76f155ced4ddcb4097134ff3c332f xmlns="c581cf06-f342-43bb-9c27-eb679bd1fe52">
+      <Terms xmlns="http://schemas.microsoft.com/office/infopath/2007/PartnerControls"/>
+    </lcf76f155ced4ddcb4097134ff3c332f>
+  </documentManagement>
+</p:properties>
+</file>
+
+<file path=customXml/item3.xml><?xml version="1.0" encoding="utf-8"?>
 <ct:contentTypeSchema xmlns:ct="http://schemas.microsoft.com/office/2006/metadata/contentType" xmlns:ma="http://schemas.microsoft.com/office/2006/metadata/properties/metaAttributes" ct:_="" ma:_="" ma:contentTypeName="Dokument" ma:contentTypeID="0x010100B40D03D4FC8C944B961B26E5887A7530" ma:contentTypeVersion="10" ma:contentTypeDescription="Ein neues Dokument erstellen." ma:contentTypeScope="" ma:versionID="126c301135dc6938ecc350d383650e79">
   <xsd:schema xmlns:xsd="http://www.w3.org/2001/XMLSchema" xmlns:xs="http://www.w3.org/2001/XMLSchema" xmlns:p="http://schemas.microsoft.com/office/2006/metadata/properties" xmlns:ns2="c581cf06-f342-43bb-9c27-eb679bd1fe52" xmlns:ns3="c3a86a5d-5714-4c9c-b50f-c72962407014" targetNamespace="http://schemas.microsoft.com/office/2006/metadata/properties" ma:root="true" ma:fieldsID="4ee20aa7b3b1f848be7f6aaad3eecee1" ns2:_="" ns3:_="">
     <xsd:import namespace="c581cf06-f342-43bb-9c27-eb679bd1fe52"/>
@@ -7870,17 +9745,6 @@
 </ct:contentTypeSchema>
 </file>
 
-<file path=customXml/item3.xml><?xml version="1.0" encoding="utf-8"?>
-<p:properties xmlns:p="http://schemas.microsoft.com/office/2006/metadata/properties" xmlns:xsi="http://www.w3.org/2001/XMLSchema-instance" xmlns:pc="http://schemas.microsoft.com/office/infopath/2007/PartnerControls">
-  <documentManagement>
-    <TaxCatchAll xmlns="c3a86a5d-5714-4c9c-b50f-c72962407014" xsi:nil="true"/>
-    <lcf76f155ced4ddcb4097134ff3c332f xmlns="c581cf06-f342-43bb-9c27-eb679bd1fe52">
-      <Terms xmlns="http://schemas.microsoft.com/office/infopath/2007/PartnerControls"/>
-    </lcf76f155ced4ddcb4097134ff3c332f>
-  </documentManagement>
-</p:properties>
-</file>
-
 <file path=customXml/itemProps1.xml><?xml version="1.0" encoding="utf-8"?>
 <ds:datastoreItem xmlns:ds="http://schemas.openxmlformats.org/officeDocument/2006/customXml" ds:itemID="{19219E33-B68F-48F4-B88D-D6FCBFCD0B05}">
   <ds:schemaRefs>
@@ -7890,31 +9754,37 @@
 </file>
 
 <file path=customXml/itemProps2.xml><?xml version="1.0" encoding="utf-8"?>
-<ds:datastoreItem xmlns:ds="http://schemas.openxmlformats.org/officeDocument/2006/customXml" ds:itemID="{0DEE7492-68DF-4669-833A-A8185D177400}">
+<ds:datastoreItem xmlns:ds="http://schemas.openxmlformats.org/officeDocument/2006/customXml" ds:itemID="{60252B27-8475-41DD-94D0-7CFA7F817E6D}">
   <ds:schemaRefs>
-    <ds:schemaRef ds:uri="http://schemas.microsoft.com/office/2006/metadata/contentType"/>
-    <ds:schemaRef ds:uri="http://schemas.microsoft.com/office/2006/metadata/properties/metaAttributes"/>
-    <ds:schemaRef ds:uri="http://www.w3.org/2001/XMLSchema"/>
+    <ds:schemaRef ds:uri="c3a86a5d-5714-4c9c-b50f-c72962407014"/>
+    <ds:schemaRef ds:uri="c581cf06-f342-43bb-9c27-eb679bd1fe52"/>
+    <ds:schemaRef ds:uri="http://purl.org/dc/dcmitype/"/>
+    <ds:schemaRef ds:uri="http://purl.org/dc/elements/1.1/"/>
+    <ds:schemaRef ds:uri="http://purl.org/dc/terms/"/>
+    <ds:schemaRef ds:uri="http://schemas.microsoft.com/office/2006/documentManagement/types"/>
     <ds:schemaRef ds:uri="http://schemas.microsoft.com/office/2006/metadata/properties"/>
-    <ds:schemaRef ds:uri="c581cf06-f342-43bb-9c27-eb679bd1fe52"/>
-    <ds:schemaRef ds:uri="c3a86a5d-5714-4c9c-b50f-c72962407014"/>
-    <ds:schemaRef ds:uri="http://schemas.microsoft.com/office/2006/documentManagement/types"/>
     <ds:schemaRef ds:uri="http://schemas.microsoft.com/office/infopath/2007/PartnerControls"/>
     <ds:schemaRef ds:uri="http://schemas.openxmlformats.org/package/2006/metadata/core-properties"/>
-    <ds:schemaRef ds:uri="http://purl.org/dc/elements/1.1/"/>
-    <ds:schemaRef ds:uri="http://purl.org/dc/terms/"/>
-    <ds:schemaRef ds:uri="http://schemas.microsoft.com/internal/obd"/>
+    <ds:schemaRef ds:uri="http://www.w3.org/XML/1998/namespace"/>
   </ds:schemaRefs>
 </ds:datastoreItem>
 </file>
 
 <file path=customXml/itemProps3.xml><?xml version="1.0" encoding="utf-8"?>
-<ds:datastoreItem xmlns:ds="http://schemas.openxmlformats.org/officeDocument/2006/customXml" ds:itemID="{60252B27-8475-41DD-94D0-7CFA7F817E6D}">
+<ds:datastoreItem xmlns:ds="http://schemas.openxmlformats.org/officeDocument/2006/customXml" ds:itemID="{0DEE7492-68DF-4669-833A-A8185D177400}">
   <ds:schemaRefs>
-    <ds:schemaRef ds:uri="http://schemas.microsoft.com/office/2006/metadata/properties"/>
-    <ds:schemaRef ds:uri="http://schemas.microsoft.com/office/infopath/2007/PartnerControls"/>
     <ds:schemaRef ds:uri="c3a86a5d-5714-4c9c-b50f-c72962407014"/>
     <ds:schemaRef ds:uri="c581cf06-f342-43bb-9c27-eb679bd1fe52"/>
+    <ds:schemaRef ds:uri="http://purl.org/dc/elements/1.1/"/>
+    <ds:schemaRef ds:uri="http://purl.org/dc/terms/"/>
+    <ds:schemaRef ds:uri="http://schemas.microsoft.com/internal/obd"/>
+    <ds:schemaRef ds:uri="http://schemas.microsoft.com/office/2006/documentManagement/types"/>
+    <ds:schemaRef ds:uri="http://schemas.microsoft.com/office/2006/metadata/contentType"/>
+    <ds:schemaRef ds:uri="http://schemas.microsoft.com/office/2006/metadata/properties"/>
+    <ds:schemaRef ds:uri="http://schemas.microsoft.com/office/2006/metadata/properties/metaAttributes"/>
+    <ds:schemaRef ds:uri="http://schemas.microsoft.com/office/infopath/2007/PartnerControls"/>
+    <ds:schemaRef ds:uri="http://schemas.openxmlformats.org/package/2006/metadata/core-properties"/>
+    <ds:schemaRef ds:uri="http://www.w3.org/2001/XMLSchema"/>
   </ds:schemaRefs>
 </ds:datastoreItem>
 </file>